--- a/assets/QueryForge-Pitch.pptx
+++ b/assets/QueryForge-Pitch.pptx
@@ -13,6 +13,7 @@
     <p:sldId id="261" r:id="rId12"/>
     <p:sldId id="262" r:id="rId13"/>
     <p:sldId id="263" r:id="rId14"/>
+    <p:sldId id="264" r:id="rId15"/>
   </p:sldIdLst>
   <p:sldSz cx="12191695" cy="6858000" type="screen4x3"/>
   <p:notesSz cx="6858000" cy="9144000"/>
@@ -3091,7 +3092,7 @@
     <p:bg>
       <p:bgPr>
         <a:solidFill>
-          <a:srgbClr val="1A1F2E"/>
+          <a:srgbClr val="1B2A4A"/>
         </a:solidFill>
         <a:effectLst/>
       </p:bgPr>
@@ -3111,28 +3112,70 @@
         </p:nvSpPr>
         <p:spPr>
           <a:xfrm>
-            <a:off x="914400" y="2286000"/>
-            <a:ext cx="9144000" cy="914400"/>
-          </a:xfrm>
-          <a:prstGeom prst="rect">
-            <a:avLst/>
-          </a:prstGeom>
-          <a:noFill/>
-        </p:spPr>
-        <p:txBody>
-          <a:bodyPr wrap="square">
-            <a:spAutoFit/>
-          </a:bodyPr>
-          <a:lstStyle/>
-          <a:p>
-            <a:pPr algn="l"/>
-            <a:r>
-              <a:rPr sz="4800" b="1">
-                <a:solidFill>
-                  <a:srgbClr val="F0EEE8"/>
-                </a:solidFill>
-                <a:latin typeface="Arial"/>
-                <a:ea typeface="Microsoft YaHei"/>
+            <a:off x="658368" y="749808"/>
+            <a:ext cx="2011680" cy="219456"/>
+          </a:xfrm>
+          <a:prstGeom prst="rect">
+            <a:avLst/>
+          </a:prstGeom>
+          <a:noFill/>
+        </p:spPr>
+        <p:txBody>
+          <a:bodyPr wrap="square" lIns="0" rIns="0" tIns="0" bIns="0" anchor="t">
+            <a:spAutoFit/>
+          </a:bodyPr>
+          <a:lstStyle/>
+          <a:p>
+            <a:pPr algn="l">
+              <a:lnSpc>
+                <a:spcPct val="108000"/>
+              </a:lnSpc>
+            </a:pPr>
+            <a:r>
+              <a:rPr sz="1000" b="1">
+                <a:solidFill>
+                  <a:srgbClr val="FFB300"/>
+                </a:solidFill>
+                <a:latin typeface="Aptos"/>
+              </a:rPr>
+              <a:t>PITCH DECK</a:t>
+            </a:r>
+          </a:p>
+        </p:txBody>
+      </p:sp>
+      <p:sp>
+        <p:nvSpPr>
+          <p:cNvPr id="3" name="TextBox 2"/>
+          <p:cNvSpPr txBox="1"/>
+          <p:nvPr/>
+        </p:nvSpPr>
+        <p:spPr>
+          <a:xfrm>
+            <a:off x="658368" y="1207008"/>
+            <a:ext cx="6949440" cy="777240"/>
+          </a:xfrm>
+          <a:prstGeom prst="rect">
+            <a:avLst/>
+          </a:prstGeom>
+          <a:noFill/>
+        </p:spPr>
+        <p:txBody>
+          <a:bodyPr wrap="square" lIns="0" rIns="0" tIns="0" bIns="0" anchor="t">
+            <a:spAutoFit/>
+          </a:bodyPr>
+          <a:lstStyle/>
+          <a:p>
+            <a:pPr algn="l">
+              <a:lnSpc>
+                <a:spcPct val="108000"/>
+              </a:lnSpc>
+            </a:pPr>
+            <a:r>
+              <a:rPr sz="5800" b="1">
+                <a:solidFill>
+                  <a:srgbClr val="FFB300"/>
+                </a:solidFill>
+                <a:latin typeface="Aptos Display"/>
               </a:rPr>
               <a:t>QueryForge</a:t>
             </a:r>
@@ -3141,72 +3184,497 @@
       </p:sp>
       <p:sp>
         <p:nvSpPr>
-          <p:cNvPr id="3" name="TextBox 2"/>
-          <p:cNvSpPr txBox="1"/>
-          <p:nvPr/>
-        </p:nvSpPr>
-        <p:spPr>
-          <a:xfrm>
-            <a:off x="914400" y="3200400"/>
-            <a:ext cx="9144000" cy="457200"/>
-          </a:xfrm>
-          <a:prstGeom prst="rect">
-            <a:avLst/>
-          </a:prstGeom>
-          <a:noFill/>
-        </p:spPr>
-        <p:txBody>
-          <a:bodyPr wrap="square">
-            <a:spAutoFit/>
-          </a:bodyPr>
-          <a:lstStyle/>
-          <a:p>
-            <a:pPr algn="l"/>
-            <a:r>
-              <a:rPr sz="2000" b="0">
-                <a:solidFill>
-                  <a:srgbClr val="9A9A9A"/>
-                </a:solidFill>
-                <a:latin typeface="Arial"/>
-                <a:ea typeface="Microsoft YaHei"/>
-              </a:rPr>
-              <a:t>让业务团队自助取数，解放数据分析师</a:t>
-            </a:r>
-          </a:p>
-        </p:txBody>
-      </p:sp>
-      <p:sp>
-        <p:nvSpPr>
-          <p:cNvPr id="4" name="TextBox 3"/>
-          <p:cNvSpPr txBox="1"/>
-          <p:nvPr/>
-        </p:nvSpPr>
-        <p:spPr>
-          <a:xfrm>
-            <a:off x="914400" y="5943600"/>
-            <a:ext cx="9144000" cy="365760"/>
-          </a:xfrm>
-          <a:prstGeom prst="rect">
-            <a:avLst/>
-          </a:prstGeom>
-          <a:noFill/>
-        </p:spPr>
-        <p:txBody>
-          <a:bodyPr wrap="square">
-            <a:spAutoFit/>
-          </a:bodyPr>
-          <a:lstStyle/>
-          <a:p>
-            <a:pPr algn="l"/>
-            <a:r>
-              <a:rPr sz="1200" b="0">
-                <a:solidFill>
-                  <a:srgbClr val="9A9A9A"/>
-                </a:solidFill>
-                <a:latin typeface="Arial"/>
-                <a:ea typeface="Microsoft YaHei"/>
-              </a:rPr>
-              <a:t>ClawHunt Builder Camp 2026 · 72 小时构建</a:t>
+          <p:cNvPr id="4" name="Rectangle 3"/>
+          <p:cNvSpPr/>
+          <p:nvPr/>
+        </p:nvSpPr>
+        <p:spPr>
+          <a:xfrm>
+            <a:off x="658368" y="2148840"/>
+            <a:ext cx="2331720" cy="50800"/>
+          </a:xfrm>
+          <a:prstGeom prst="rect">
+            <a:avLst/>
+          </a:prstGeom>
+          <a:solidFill>
+            <a:srgbClr val="FFB300"/>
+          </a:solidFill>
+          <a:ln>
+            <a:noFill/>
+          </a:ln>
+        </p:spPr>
+        <p:style>
+          <a:lnRef idx="1">
+            <a:schemeClr val="accent1"/>
+          </a:lnRef>
+          <a:fillRef idx="3">
+            <a:schemeClr val="accent1"/>
+          </a:fillRef>
+          <a:effectRef idx="2">
+            <a:schemeClr val="accent1"/>
+          </a:effectRef>
+          <a:fontRef idx="minor">
+            <a:schemeClr val="lt1"/>
+          </a:fontRef>
+        </p:style>
+        <p:txBody>
+          <a:bodyPr rtlCol="0" anchor="ctr"/>
+          <a:lstStyle/>
+          <a:p>
+            <a:pPr algn="ctr"/>
+          </a:p>
+        </p:txBody>
+      </p:sp>
+      <p:sp>
+        <p:nvSpPr>
+          <p:cNvPr id="5" name="TextBox 4"/>
+          <p:cNvSpPr txBox="1"/>
+          <p:nvPr/>
+        </p:nvSpPr>
+        <p:spPr>
+          <a:xfrm>
+            <a:off x="658368" y="2523744"/>
+            <a:ext cx="7132320" cy="749808"/>
+          </a:xfrm>
+          <a:prstGeom prst="rect">
+            <a:avLst/>
+          </a:prstGeom>
+          <a:noFill/>
+        </p:spPr>
+        <p:txBody>
+          <a:bodyPr wrap="square" lIns="0" rIns="0" tIns="0" bIns="0" anchor="t">
+            <a:spAutoFit/>
+          </a:bodyPr>
+          <a:lstStyle/>
+          <a:p>
+            <a:pPr algn="l">
+              <a:lnSpc>
+                <a:spcPct val="108000"/>
+              </a:lnSpc>
+            </a:pPr>
+            <a:r>
+              <a:rPr sz="2500" b="1">
+                <a:solidFill>
+                  <a:srgbClr val="FFFFFF"/>
+                </a:solidFill>
+                <a:latin typeface="Aptos"/>
+              </a:rPr>
+              <a:t>Natural-language business data queries with charts on demand.</a:t>
+            </a:r>
+          </a:p>
+        </p:txBody>
+      </p:sp>
+      <p:sp>
+        <p:nvSpPr>
+          <p:cNvPr id="6" name="TextBox 5"/>
+          <p:cNvSpPr txBox="1"/>
+          <p:nvPr/>
+        </p:nvSpPr>
+        <p:spPr>
+          <a:xfrm>
+            <a:off x="658368" y="3456432"/>
+            <a:ext cx="6583680" cy="658368"/>
+          </a:xfrm>
+          <a:prstGeom prst="rect">
+            <a:avLst/>
+          </a:prstGeom>
+          <a:noFill/>
+        </p:spPr>
+        <p:txBody>
+          <a:bodyPr wrap="square" lIns="0" rIns="0" tIns="0" bIns="0" anchor="t">
+            <a:spAutoFit/>
+          </a:bodyPr>
+          <a:lstStyle/>
+          <a:p>
+            <a:pPr algn="l">
+              <a:lnSpc>
+                <a:spcPct val="108000"/>
+              </a:lnSpc>
+            </a:pPr>
+            <a:r>
+              <a:rPr sz="1500" b="0">
+                <a:solidFill>
+                  <a:srgbClr val="B0BEC5"/>
+                </a:solidFill>
+                <a:latin typeface="Aptos"/>
+              </a:rPr>
+              <a:t>Business users ask a question, QueryForge fetches the data, and the answer appears as KPI cards, charts, or reusable dashboard views.</a:t>
+            </a:r>
+          </a:p>
+        </p:txBody>
+      </p:sp>
+      <p:sp>
+        <p:nvSpPr>
+          <p:cNvPr id="7" name="Rectangle 6"/>
+          <p:cNvSpPr/>
+          <p:nvPr/>
+        </p:nvSpPr>
+        <p:spPr>
+          <a:xfrm>
+            <a:off x="8183879" y="1005840"/>
+            <a:ext cx="3154680" cy="3474720"/>
+          </a:xfrm>
+          <a:prstGeom prst="rect">
+            <a:avLst/>
+          </a:prstGeom>
+          <a:solidFill>
+            <a:srgbClr val="1F3056"/>
+          </a:solidFill>
+          <a:ln w="12700">
+            <a:solidFill>
+              <a:srgbClr val="2D426D"/>
+            </a:solidFill>
+          </a:ln>
+        </p:spPr>
+        <p:style>
+          <a:lnRef idx="1">
+            <a:schemeClr val="accent1"/>
+          </a:lnRef>
+          <a:fillRef idx="3">
+            <a:schemeClr val="accent1"/>
+          </a:fillRef>
+          <a:effectRef idx="2">
+            <a:schemeClr val="accent1"/>
+          </a:effectRef>
+          <a:fontRef idx="minor">
+            <a:schemeClr val="lt1"/>
+          </a:fontRef>
+        </p:style>
+        <p:txBody>
+          <a:bodyPr rtlCol="0" anchor="ctr"/>
+          <a:lstStyle/>
+          <a:p>
+            <a:pPr algn="ctr"/>
+          </a:p>
+        </p:txBody>
+      </p:sp>
+      <p:sp>
+        <p:nvSpPr>
+          <p:cNvPr id="8" name="TextBox 7"/>
+          <p:cNvSpPr txBox="1"/>
+          <p:nvPr/>
+        </p:nvSpPr>
+        <p:spPr>
+          <a:xfrm>
+            <a:off x="8467344" y="1298448"/>
+            <a:ext cx="2286000" cy="228600"/>
+          </a:xfrm>
+          <a:prstGeom prst="rect">
+            <a:avLst/>
+          </a:prstGeom>
+          <a:noFill/>
+        </p:spPr>
+        <p:txBody>
+          <a:bodyPr wrap="square" lIns="0" rIns="0" tIns="0" bIns="0" anchor="t">
+            <a:spAutoFit/>
+          </a:bodyPr>
+          <a:lstStyle/>
+          <a:p>
+            <a:pPr algn="l">
+              <a:lnSpc>
+                <a:spcPct val="108000"/>
+              </a:lnSpc>
+            </a:pPr>
+            <a:r>
+              <a:rPr sz="1000" b="1">
+                <a:solidFill>
+                  <a:srgbClr val="FFB300"/>
+                </a:solidFill>
+                <a:latin typeface="Aptos"/>
+              </a:rPr>
+              <a:t>LIVE CONTEXT</a:t>
+            </a:r>
+          </a:p>
+        </p:txBody>
+      </p:sp>
+      <p:sp>
+        <p:nvSpPr>
+          <p:cNvPr id="9" name="TextBox 8"/>
+          <p:cNvSpPr txBox="1"/>
+          <p:nvPr/>
+        </p:nvSpPr>
+        <p:spPr>
+          <a:xfrm>
+            <a:off x="8467344" y="1664208"/>
+            <a:ext cx="2542032" cy="2487168"/>
+          </a:xfrm>
+          <a:prstGeom prst="rect">
+            <a:avLst/>
+          </a:prstGeom>
+          <a:noFill/>
+        </p:spPr>
+        <p:txBody>
+          <a:bodyPr wrap="square" lIns="0" rIns="0" tIns="0" bIns="0">
+            <a:spAutoFit/>
+          </a:bodyPr>
+          <a:lstStyle/>
+          <a:p>
+            <a:pPr algn="l">
+              <a:lnSpc>
+                <a:spcPct val="112000"/>
+              </a:lnSpc>
+              <a:spcAft>
+                <a:spcPts val="300"/>
+              </a:spcAft>
+            </a:pPr>
+            <a:r>
+              <a:rPr sz="1700" b="1">
+                <a:solidFill>
+                  <a:srgbClr val="FFFFFF"/>
+                </a:solidFill>
+                <a:latin typeface="Aptos"/>
+              </a:rPr>
+              <a:t>Built in 72 hours</a:t>
+            </a:r>
+          </a:p>
+          <a:p>
+            <a:pPr algn="l">
+              <a:lnSpc>
+                <a:spcPct val="112000"/>
+              </a:lnSpc>
+              <a:spcAft>
+                <a:spcPts val="300"/>
+              </a:spcAft>
+            </a:pPr>
+            <a:r>
+              <a:rPr sz="1250" b="0">
+                <a:solidFill>
+                  <a:srgbClr val="B0BEC5"/>
+                </a:solidFill>
+                <a:latin typeface="Aptos"/>
+              </a:rPr>
+              <a:t>ClawHunt Builder Camp 2026 hackathon</a:t>
+            </a:r>
+          </a:p>
+          <a:p>
+            <a:pPr algn="l">
+              <a:lnSpc>
+                <a:spcPct val="112000"/>
+              </a:lnSpc>
+              <a:spcAft>
+                <a:spcPts val="300"/>
+              </a:spcAft>
+            </a:pPr>
+            <a:r>
+              <a:rPr sz="500" b="0">
+                <a:solidFill>
+                  <a:srgbClr val="B0BEC5"/>
+                </a:solidFill>
+                <a:latin typeface="Aptos"/>
+              </a:rPr>
+              <a:t/>
+            </a:r>
+          </a:p>
+          <a:p>
+            <a:pPr algn="l">
+              <a:lnSpc>
+                <a:spcPct val="112000"/>
+              </a:lnSpc>
+              <a:spcAft>
+                <a:spcPts val="300"/>
+              </a:spcAft>
+            </a:pPr>
+            <a:r>
+              <a:rPr sz="1700" b="1">
+                <a:solidFill>
+                  <a:srgbClr val="FFFFFF"/>
+                </a:solidFill>
+                <a:latin typeface="Aptos"/>
+              </a:rPr>
+              <a:t>Powered by MiMo v2.5 Pro</a:t>
+            </a:r>
+          </a:p>
+          <a:p>
+            <a:pPr algn="l">
+              <a:lnSpc>
+                <a:spcPct val="112000"/>
+              </a:lnSpc>
+              <a:spcAft>
+                <a:spcPts val="300"/>
+              </a:spcAft>
+            </a:pPr>
+            <a:r>
+              <a:rPr sz="1250" b="0">
+                <a:solidFill>
+                  <a:srgbClr val="B0BEC5"/>
+                </a:solidFill>
+                <a:latin typeface="Aptos"/>
+              </a:rPr>
+              <a:t>Model used in the live demo</a:t>
+            </a:r>
+          </a:p>
+          <a:p>
+            <a:pPr algn="l">
+              <a:lnSpc>
+                <a:spcPct val="112000"/>
+              </a:lnSpc>
+              <a:spcAft>
+                <a:spcPts val="300"/>
+              </a:spcAft>
+            </a:pPr>
+            <a:r>
+              <a:rPr sz="500" b="0">
+                <a:solidFill>
+                  <a:srgbClr val="B0BEC5"/>
+                </a:solidFill>
+                <a:latin typeface="Aptos"/>
+              </a:rPr>
+              <a:t/>
+            </a:r>
+          </a:p>
+          <a:p>
+            <a:pPr algn="l">
+              <a:lnSpc>
+                <a:spcPct val="112000"/>
+              </a:lnSpc>
+              <a:spcAft>
+                <a:spcPts val="300"/>
+              </a:spcAft>
+            </a:pPr>
+            <a:r>
+              <a:rPr sz="1700" b="1">
+                <a:solidFill>
+                  <a:srgbClr val="FFFFFF"/>
+                </a:solidFill>
+                <a:latin typeface="Aptos"/>
+              </a:rPr>
+              <a:t>Demo data</a:t>
+            </a:r>
+          </a:p>
+          <a:p>
+            <a:pPr algn="l">
+              <a:lnSpc>
+                <a:spcPct val="112000"/>
+              </a:lnSpc>
+              <a:spcAft>
+                <a:spcPts val="300"/>
+              </a:spcAft>
+            </a:pPr>
+            <a:r>
+              <a:rPr sz="1250" b="0">
+                <a:solidFill>
+                  <a:srgbClr val="B0BEC5"/>
+                </a:solidFill>
+                <a:latin typeface="Aptos"/>
+              </a:rPr>
+              <a:t>10K orders | 500 products | 1,000 users | 8 regions | 20 categories</a:t>
+            </a:r>
+          </a:p>
+        </p:txBody>
+      </p:sp>
+      <p:sp>
+        <p:nvSpPr>
+          <p:cNvPr id="10" name="TextBox 9"/>
+          <p:cNvSpPr txBox="1"/>
+          <p:nvPr/>
+        </p:nvSpPr>
+        <p:spPr>
+          <a:xfrm>
+            <a:off x="658368" y="5888736"/>
+            <a:ext cx="6858000" cy="219456"/>
+          </a:xfrm>
+          <a:prstGeom prst="rect">
+            <a:avLst/>
+          </a:prstGeom>
+          <a:noFill/>
+        </p:spPr>
+        <p:txBody>
+          <a:bodyPr wrap="square" lIns="0" rIns="0" tIns="0" bIns="0" anchor="t">
+            <a:spAutoFit/>
+          </a:bodyPr>
+          <a:lstStyle/>
+          <a:p>
+            <a:pPr algn="l">
+              <a:lnSpc>
+                <a:spcPct val="108000"/>
+              </a:lnSpc>
+            </a:pPr>
+            <a:r>
+              <a:rPr sz="1250" b="1">
+                <a:solidFill>
+                  <a:srgbClr val="58A6FF"/>
+                </a:solidFill>
+                <a:latin typeface="Aptos"/>
+              </a:rPr>
+              <a:t>queryforge-production-8d6f.up.railway.app</a:t>
+            </a:r>
+          </a:p>
+        </p:txBody>
+      </p:sp>
+      <p:sp>
+        <p:nvSpPr>
+          <p:cNvPr id="11" name="TextBox 10"/>
+          <p:cNvSpPr txBox="1"/>
+          <p:nvPr/>
+        </p:nvSpPr>
+        <p:spPr>
+          <a:xfrm>
+            <a:off x="658368" y="6510528"/>
+            <a:ext cx="5029200" cy="164592"/>
+          </a:xfrm>
+          <a:prstGeom prst="rect">
+            <a:avLst/>
+          </a:prstGeom>
+          <a:noFill/>
+        </p:spPr>
+        <p:txBody>
+          <a:bodyPr wrap="square" lIns="0" rIns="0" tIns="0" bIns="0" anchor="t">
+            <a:spAutoFit/>
+          </a:bodyPr>
+          <a:lstStyle/>
+          <a:p>
+            <a:pPr algn="l">
+              <a:lnSpc>
+                <a:spcPct val="108000"/>
+              </a:lnSpc>
+            </a:pPr>
+            <a:r>
+              <a:rPr sz="850" b="0">
+                <a:solidFill>
+                  <a:srgbClr val="7F90A8"/>
+                </a:solidFill>
+                <a:latin typeface="Aptos"/>
+              </a:rPr>
+              <a:t>QueryForge | ClawHunt Builder Camp 2026</a:t>
+            </a:r>
+          </a:p>
+        </p:txBody>
+      </p:sp>
+      <p:sp>
+        <p:nvSpPr>
+          <p:cNvPr id="12" name="TextBox 11"/>
+          <p:cNvSpPr txBox="1"/>
+          <p:nvPr/>
+        </p:nvSpPr>
+        <p:spPr>
+          <a:xfrm>
+            <a:off x="10972800" y="6510528"/>
+            <a:ext cx="594360" cy="164592"/>
+          </a:xfrm>
+          <a:prstGeom prst="rect">
+            <a:avLst/>
+          </a:prstGeom>
+          <a:noFill/>
+        </p:spPr>
+        <p:txBody>
+          <a:bodyPr wrap="square" lIns="0" rIns="0" tIns="0" bIns="0" anchor="t">
+            <a:spAutoFit/>
+          </a:bodyPr>
+          <a:lstStyle/>
+          <a:p>
+            <a:pPr algn="r">
+              <a:lnSpc>
+                <a:spcPct val="108000"/>
+              </a:lnSpc>
+            </a:pPr>
+            <a:r>
+              <a:rPr sz="850" b="0">
+                <a:solidFill>
+                  <a:srgbClr val="7F90A8"/>
+                </a:solidFill>
+                <a:latin typeface="Aptos"/>
+              </a:rPr>
+              <a:t>1/9</a:t>
             </a:r>
           </a:p>
         </p:txBody>
@@ -3225,7 +3693,7 @@
     <p:bg>
       <p:bgPr>
         <a:solidFill>
-          <a:srgbClr val="1A1F2E"/>
+          <a:srgbClr val="1B2A4A"/>
         </a:solidFill>
         <a:effectLst/>
       </p:bgPr>
@@ -3245,30 +3713,33 @@
         </p:nvSpPr>
         <p:spPr>
           <a:xfrm>
-            <a:off x="914400" y="914400"/>
-            <a:ext cx="9144000" cy="548640"/>
-          </a:xfrm>
-          <a:prstGeom prst="rect">
-            <a:avLst/>
-          </a:prstGeom>
-          <a:noFill/>
-        </p:spPr>
-        <p:txBody>
-          <a:bodyPr wrap="square">
-            <a:spAutoFit/>
-          </a:bodyPr>
-          <a:lstStyle/>
-          <a:p>
-            <a:pPr algn="l"/>
-            <a:r>
-              <a:rPr sz="3000" b="1">
-                <a:solidFill>
-                  <a:srgbClr val="F0EEE8"/>
-                </a:solidFill>
-                <a:latin typeface="Arial"/>
-                <a:ea typeface="Microsoft YaHei"/>
-              </a:rPr>
-              <a:t>业务要数据，总要等</a:t>
+            <a:off x="658368" y="384048"/>
+            <a:ext cx="3474720" cy="237744"/>
+          </a:xfrm>
+          <a:prstGeom prst="rect">
+            <a:avLst/>
+          </a:prstGeom>
+          <a:noFill/>
+        </p:spPr>
+        <p:txBody>
+          <a:bodyPr wrap="square" lIns="0" rIns="0" tIns="0" bIns="0" anchor="t">
+            <a:spAutoFit/>
+          </a:bodyPr>
+          <a:lstStyle/>
+          <a:p>
+            <a:pPr algn="l">
+              <a:lnSpc>
+                <a:spcPct val="108000"/>
+              </a:lnSpc>
+            </a:pPr>
+            <a:r>
+              <a:rPr sz="1000" b="1">
+                <a:solidFill>
+                  <a:srgbClr val="FFB300"/>
+                </a:solidFill>
+                <a:latin typeface="Aptos"/>
+              </a:rPr>
+              <a:t>PAIN POINT</a:t>
             </a:r>
           </a:p>
         </p:txBody>
@@ -3281,104 +3752,646 @@
         </p:nvSpPr>
         <p:spPr>
           <a:xfrm>
-            <a:off x="914400" y="1828800"/>
-            <a:ext cx="9144000" cy="1371600"/>
-          </a:xfrm>
-          <a:prstGeom prst="rect">
-            <a:avLst/>
-          </a:prstGeom>
-          <a:noFill/>
-        </p:spPr>
-        <p:txBody>
-          <a:bodyPr wrap="square">
-            <a:spAutoFit/>
-          </a:bodyPr>
-          <a:lstStyle/>
-          <a:p>
-            <a:pPr algn="l">
+            <a:off x="658368" y="658368"/>
+            <a:ext cx="8778240" cy="658368"/>
+          </a:xfrm>
+          <a:prstGeom prst="rect">
+            <a:avLst/>
+          </a:prstGeom>
+          <a:noFill/>
+        </p:spPr>
+        <p:txBody>
+          <a:bodyPr wrap="square" lIns="0" rIns="0" tIns="0" bIns="0" anchor="t">
+            <a:spAutoFit/>
+          </a:bodyPr>
+          <a:lstStyle/>
+          <a:p>
+            <a:pPr algn="l">
+              <a:lnSpc>
+                <a:spcPct val="108000"/>
+              </a:lnSpc>
+            </a:pPr>
+            <a:r>
+              <a:rPr sz="3200" b="1">
+                <a:solidFill>
+                  <a:srgbClr val="FFFFFF"/>
+                </a:solidFill>
+                <a:latin typeface="Aptos Display"/>
+              </a:rPr>
+              <a:t>The bottleneck is request handling, not analysis.</a:t>
+            </a:r>
+          </a:p>
+        </p:txBody>
+      </p:sp>
+      <p:sp>
+        <p:nvSpPr>
+          <p:cNvPr id="4" name="Rectangle 3"/>
+          <p:cNvSpPr/>
+          <p:nvPr/>
+        </p:nvSpPr>
+        <p:spPr>
+          <a:xfrm>
+            <a:off x="658368" y="1325880"/>
+            <a:ext cx="1965960" cy="38100"/>
+          </a:xfrm>
+          <a:prstGeom prst="rect">
+            <a:avLst/>
+          </a:prstGeom>
+          <a:solidFill>
+            <a:srgbClr val="FFB300"/>
+          </a:solidFill>
+          <a:ln>
+            <a:noFill/>
+          </a:ln>
+        </p:spPr>
+        <p:style>
+          <a:lnRef idx="1">
+            <a:schemeClr val="accent1"/>
+          </a:lnRef>
+          <a:fillRef idx="3">
+            <a:schemeClr val="accent1"/>
+          </a:fillRef>
+          <a:effectRef idx="2">
+            <a:schemeClr val="accent1"/>
+          </a:effectRef>
+          <a:fontRef idx="minor">
+            <a:schemeClr val="lt1"/>
+          </a:fontRef>
+        </p:style>
+        <p:txBody>
+          <a:bodyPr rtlCol="0" anchor="ctr"/>
+          <a:lstStyle/>
+          <a:p>
+            <a:pPr algn="ctr"/>
+          </a:p>
+        </p:txBody>
+      </p:sp>
+      <p:sp>
+        <p:nvSpPr>
+          <p:cNvPr id="5" name="TextBox 4"/>
+          <p:cNvSpPr txBox="1"/>
+          <p:nvPr/>
+        </p:nvSpPr>
+        <p:spPr>
+          <a:xfrm>
+            <a:off x="658368" y="1481328"/>
+            <a:ext cx="9692640" cy="347472"/>
+          </a:xfrm>
+          <a:prstGeom prst="rect">
+            <a:avLst/>
+          </a:prstGeom>
+          <a:noFill/>
+        </p:spPr>
+        <p:txBody>
+          <a:bodyPr wrap="square" lIns="0" rIns="0" tIns="0" bIns="0" anchor="t">
+            <a:spAutoFit/>
+          </a:bodyPr>
+          <a:lstStyle/>
+          <a:p>
+            <a:pPr algn="l">
+              <a:lnSpc>
+                <a:spcPct val="108000"/>
+              </a:lnSpc>
+            </a:pPr>
+            <a:r>
+              <a:rPr sz="1300" b="0">
+                <a:solidFill>
+                  <a:srgbClr val="B0BEC5"/>
+                </a:solidFill>
+                <a:latin typeface="Aptos"/>
+              </a:rPr>
+              <a:t>When business teams need answers, every clarification becomes another handoff.</a:t>
+            </a:r>
+          </a:p>
+        </p:txBody>
+      </p:sp>
+      <p:sp>
+        <p:nvSpPr>
+          <p:cNvPr id="6" name="Rectangle 5"/>
+          <p:cNvSpPr/>
+          <p:nvPr/>
+        </p:nvSpPr>
+        <p:spPr>
+          <a:xfrm>
+            <a:off x="658368" y="2048256"/>
+            <a:ext cx="5257800" cy="3584448"/>
+          </a:xfrm>
+          <a:prstGeom prst="rect">
+            <a:avLst/>
+          </a:prstGeom>
+          <a:solidFill>
+            <a:srgbClr val="1F3056"/>
+          </a:solidFill>
+          <a:ln w="12700">
+            <a:solidFill>
+              <a:srgbClr val="2D426D"/>
+            </a:solidFill>
+          </a:ln>
+        </p:spPr>
+        <p:style>
+          <a:lnRef idx="1">
+            <a:schemeClr val="accent1"/>
+          </a:lnRef>
+          <a:fillRef idx="3">
+            <a:schemeClr val="accent1"/>
+          </a:fillRef>
+          <a:effectRef idx="2">
+            <a:schemeClr val="accent1"/>
+          </a:effectRef>
+          <a:fontRef idx="minor">
+            <a:schemeClr val="lt1"/>
+          </a:fontRef>
+        </p:style>
+        <p:txBody>
+          <a:bodyPr rtlCol="0" anchor="ctr"/>
+          <a:lstStyle/>
+          <a:p>
+            <a:pPr algn="ctr"/>
+          </a:p>
+        </p:txBody>
+      </p:sp>
+      <p:sp>
+        <p:nvSpPr>
+          <p:cNvPr id="7" name="Rectangle 6"/>
+          <p:cNvSpPr/>
+          <p:nvPr/>
+        </p:nvSpPr>
+        <p:spPr>
+          <a:xfrm>
+            <a:off x="658368" y="2048256"/>
+            <a:ext cx="50800" cy="3584448"/>
+          </a:xfrm>
+          <a:prstGeom prst="rect">
+            <a:avLst/>
+          </a:prstGeom>
+          <a:solidFill>
+            <a:srgbClr val="FF6B6B"/>
+          </a:solidFill>
+          <a:ln>
+            <a:noFill/>
+          </a:ln>
+        </p:spPr>
+        <p:style>
+          <a:lnRef idx="1">
+            <a:schemeClr val="accent1"/>
+          </a:lnRef>
+          <a:fillRef idx="3">
+            <a:schemeClr val="accent1"/>
+          </a:fillRef>
+          <a:effectRef idx="2">
+            <a:schemeClr val="accent1"/>
+          </a:effectRef>
+          <a:fontRef idx="minor">
+            <a:schemeClr val="lt1"/>
+          </a:fontRef>
+        </p:style>
+        <p:txBody>
+          <a:bodyPr rtlCol="0" anchor="ctr"/>
+          <a:lstStyle/>
+          <a:p>
+            <a:pPr algn="ctr"/>
+          </a:p>
+        </p:txBody>
+      </p:sp>
+      <p:sp>
+        <p:nvSpPr>
+          <p:cNvPr id="8" name="TextBox 7"/>
+          <p:cNvSpPr txBox="1"/>
+          <p:nvPr/>
+        </p:nvSpPr>
+        <p:spPr>
+          <a:xfrm>
+            <a:off x="859536" y="2231136"/>
+            <a:ext cx="4855464" cy="256032"/>
+          </a:xfrm>
+          <a:prstGeom prst="rect">
+            <a:avLst/>
+          </a:prstGeom>
+          <a:noFill/>
+        </p:spPr>
+        <p:txBody>
+          <a:bodyPr wrap="square" lIns="0" rIns="0" tIns="0" bIns="0" anchor="t">
+            <a:spAutoFit/>
+          </a:bodyPr>
+          <a:lstStyle/>
+          <a:p>
+            <a:pPr algn="l">
+              <a:lnSpc>
+                <a:spcPct val="108000"/>
+              </a:lnSpc>
+            </a:pPr>
+            <a:r>
+              <a:rPr sz="1800" b="1">
+                <a:solidFill>
+                  <a:srgbClr val="FFFFFF"/>
+                </a:solidFill>
+                <a:latin typeface="Aptos"/>
+              </a:rPr>
+              <a:t>Analyst queue</a:t>
+            </a:r>
+          </a:p>
+        </p:txBody>
+      </p:sp>
+      <p:sp>
+        <p:nvSpPr>
+          <p:cNvPr id="9" name="TextBox 8"/>
+          <p:cNvSpPr txBox="1"/>
+          <p:nvPr/>
+        </p:nvSpPr>
+        <p:spPr>
+          <a:xfrm>
+            <a:off x="859536" y="2624328"/>
+            <a:ext cx="4855464" cy="2871216"/>
+          </a:xfrm>
+          <a:prstGeom prst="rect">
+            <a:avLst/>
+          </a:prstGeom>
+          <a:noFill/>
+        </p:spPr>
+        <p:txBody>
+          <a:bodyPr wrap="square" lIns="0" rIns="0" tIns="0" bIns="0">
+            <a:spAutoFit/>
+          </a:bodyPr>
+          <a:lstStyle/>
+          <a:p>
+            <a:pPr algn="l">
+              <a:lnSpc>
+                <a:spcPct val="112000"/>
+              </a:lnSpc>
               <a:spcAft>
-                <a:spcPts val="1200"/>
+                <a:spcPts val="500"/>
               </a:spcAft>
             </a:pPr>
             <a:r>
-              <a:rPr sz="1500">
-                <a:solidFill>
-                  <a:srgbClr val="F0EEE8"/>
-                </a:solidFill>
-                <a:latin typeface="Arial"/>
-                <a:ea typeface="Microsoft YaHei"/>
-              </a:rPr>
-              <a:t>  —  运营问"华东上个月卖了多少" → 找分析师</a:t>
-            </a:r>
-          </a:p>
-          <a:p>
-            <a:pPr algn="l">
+              <a:rPr sz="1320" b="0">
+                <a:solidFill>
+                  <a:srgbClr val="B0BEC5"/>
+                </a:solidFill>
+                <a:latin typeface="Aptos"/>
+              </a:rPr>
+              <a:t>Same metric is requested by multiple teams in slightly different words.</a:t>
+            </a:r>
+          </a:p>
+          <a:p>
+            <a:pPr algn="l">
+              <a:lnSpc>
+                <a:spcPct val="112000"/>
+              </a:lnSpc>
               <a:spcAft>
-                <a:spcPts val="1200"/>
+                <a:spcPts val="500"/>
               </a:spcAft>
             </a:pPr>
             <a:r>
-              <a:rPr sz="1500">
-                <a:solidFill>
-                  <a:srgbClr val="F0EEE8"/>
-                </a:solidFill>
-                <a:latin typeface="Arial"/>
-                <a:ea typeface="Microsoft YaHei"/>
-              </a:rPr>
-              <a:t>  —  市场问"哪个品类增长最快" → 排期等报表</a:t>
-            </a:r>
-          </a:p>
-          <a:p>
-            <a:pPr algn="l">
+              <a:rPr sz="1320" b="0">
+                <a:solidFill>
+                  <a:srgbClr val="B0BEC5"/>
+                </a:solidFill>
+                <a:latin typeface="Aptos"/>
+              </a:rPr>
+              <a:t>Questions arrive as ad hoc requests, follow-ups, and revised definitions.</a:t>
+            </a:r>
+          </a:p>
+          <a:p>
+            <a:pPr algn="l">
+              <a:lnSpc>
+                <a:spcPct val="112000"/>
+              </a:lnSpc>
               <a:spcAft>
-                <a:spcPts val="1200"/>
+                <a:spcPts val="500"/>
               </a:spcAft>
             </a:pPr>
             <a:r>
-              <a:rPr sz="1500">
-                <a:solidFill>
-                  <a:srgbClr val="F0EEE8"/>
-                </a:solidFill>
-                <a:latin typeface="Arial"/>
-                <a:ea typeface="Microsoft YaHei"/>
-              </a:rPr>
-              <a:t>  —  老板问"为什么这个月下滑" → 加急再加急</a:t>
-            </a:r>
-          </a:p>
-        </p:txBody>
-      </p:sp>
-      <p:sp>
-        <p:nvSpPr>
-          <p:cNvPr id="4" name="TextBox 3"/>
-          <p:cNvSpPr txBox="1"/>
-          <p:nvPr/>
-        </p:nvSpPr>
-        <p:spPr>
-          <a:xfrm>
-            <a:off x="914400" y="5943600"/>
-            <a:ext cx="9144000" cy="365760"/>
-          </a:xfrm>
-          <a:prstGeom prst="rect">
-            <a:avLst/>
-          </a:prstGeom>
-          <a:noFill/>
-        </p:spPr>
-        <p:txBody>
-          <a:bodyPr wrap="square">
-            <a:spAutoFit/>
-          </a:bodyPr>
-          <a:lstStyle/>
-          <a:p>
-            <a:pPr algn="l"/>
-            <a:r>
-              <a:rPr sz="1200" b="0">
-                <a:solidFill>
-                  <a:srgbClr val="9A9A9A"/>
-                </a:solidFill>
-                <a:latin typeface="Arial"/>
-                <a:ea typeface="Microsoft YaHei"/>
-              </a:rPr>
-              <a:t>数据分析师每周 60% 时间在重复拉数</a:t>
+              <a:rPr sz="1320" b="0">
+                <a:solidFill>
+                  <a:srgbClr val="B0BEC5"/>
+                </a:solidFill>
+                <a:latin typeface="Aptos"/>
+              </a:rPr>
+              <a:t>Analysts spend attention on recreating views instead of interpreting the business.</a:t>
+            </a:r>
+          </a:p>
+        </p:txBody>
+      </p:sp>
+      <p:sp>
+        <p:nvSpPr>
+          <p:cNvPr id="10" name="Rectangle 9"/>
+          <p:cNvSpPr/>
+          <p:nvPr/>
+        </p:nvSpPr>
+        <p:spPr>
+          <a:xfrm>
+            <a:off x="6272784" y="2048256"/>
+            <a:ext cx="5257800" cy="3584448"/>
+          </a:xfrm>
+          <a:prstGeom prst="rect">
+            <a:avLst/>
+          </a:prstGeom>
+          <a:solidFill>
+            <a:srgbClr val="1F3056"/>
+          </a:solidFill>
+          <a:ln w="12700">
+            <a:solidFill>
+              <a:srgbClr val="2D426D"/>
+            </a:solidFill>
+          </a:ln>
+        </p:spPr>
+        <p:style>
+          <a:lnRef idx="1">
+            <a:schemeClr val="accent1"/>
+          </a:lnRef>
+          <a:fillRef idx="3">
+            <a:schemeClr val="accent1"/>
+          </a:fillRef>
+          <a:effectRef idx="2">
+            <a:schemeClr val="accent1"/>
+          </a:effectRef>
+          <a:fontRef idx="minor">
+            <a:schemeClr val="lt1"/>
+          </a:fontRef>
+        </p:style>
+        <p:txBody>
+          <a:bodyPr rtlCol="0" anchor="ctr"/>
+          <a:lstStyle/>
+          <a:p>
+            <a:pPr algn="ctr"/>
+          </a:p>
+        </p:txBody>
+      </p:sp>
+      <p:sp>
+        <p:nvSpPr>
+          <p:cNvPr id="11" name="Rectangle 10"/>
+          <p:cNvSpPr/>
+          <p:nvPr/>
+        </p:nvSpPr>
+        <p:spPr>
+          <a:xfrm>
+            <a:off x="6272784" y="2048256"/>
+            <a:ext cx="50800" cy="3584448"/>
+          </a:xfrm>
+          <a:prstGeom prst="rect">
+            <a:avLst/>
+          </a:prstGeom>
+          <a:solidFill>
+            <a:srgbClr val="58A6FF"/>
+          </a:solidFill>
+          <a:ln>
+            <a:noFill/>
+          </a:ln>
+        </p:spPr>
+        <p:style>
+          <a:lnRef idx="1">
+            <a:schemeClr val="accent1"/>
+          </a:lnRef>
+          <a:fillRef idx="3">
+            <a:schemeClr val="accent1"/>
+          </a:fillRef>
+          <a:effectRef idx="2">
+            <a:schemeClr val="accent1"/>
+          </a:effectRef>
+          <a:fontRef idx="minor">
+            <a:schemeClr val="lt1"/>
+          </a:fontRef>
+        </p:style>
+        <p:txBody>
+          <a:bodyPr rtlCol="0" anchor="ctr"/>
+          <a:lstStyle/>
+          <a:p>
+            <a:pPr algn="ctr"/>
+          </a:p>
+        </p:txBody>
+      </p:sp>
+      <p:sp>
+        <p:nvSpPr>
+          <p:cNvPr id="12" name="TextBox 11"/>
+          <p:cNvSpPr txBox="1"/>
+          <p:nvPr/>
+        </p:nvSpPr>
+        <p:spPr>
+          <a:xfrm>
+            <a:off x="6473952" y="2231136"/>
+            <a:ext cx="4855464" cy="256032"/>
+          </a:xfrm>
+          <a:prstGeom prst="rect">
+            <a:avLst/>
+          </a:prstGeom>
+          <a:noFill/>
+        </p:spPr>
+        <p:txBody>
+          <a:bodyPr wrap="square" lIns="0" rIns="0" tIns="0" bIns="0" anchor="t">
+            <a:spAutoFit/>
+          </a:bodyPr>
+          <a:lstStyle/>
+          <a:p>
+            <a:pPr algn="l">
+              <a:lnSpc>
+                <a:spcPct val="108000"/>
+              </a:lnSpc>
+            </a:pPr>
+            <a:r>
+              <a:rPr sz="1800" b="1">
+                <a:solidFill>
+                  <a:srgbClr val="FFFFFF"/>
+                </a:solidFill>
+                <a:latin typeface="Aptos"/>
+              </a:rPr>
+              <a:t>Business waiting loop</a:t>
+            </a:r>
+          </a:p>
+        </p:txBody>
+      </p:sp>
+      <p:sp>
+        <p:nvSpPr>
+          <p:cNvPr id="13" name="TextBox 12"/>
+          <p:cNvSpPr txBox="1"/>
+          <p:nvPr/>
+        </p:nvSpPr>
+        <p:spPr>
+          <a:xfrm>
+            <a:off x="6473952" y="2624328"/>
+            <a:ext cx="4855464" cy="2871216"/>
+          </a:xfrm>
+          <a:prstGeom prst="rect">
+            <a:avLst/>
+          </a:prstGeom>
+          <a:noFill/>
+        </p:spPr>
+        <p:txBody>
+          <a:bodyPr wrap="square" lIns="0" rIns="0" tIns="0" bIns="0">
+            <a:spAutoFit/>
+          </a:bodyPr>
+          <a:lstStyle/>
+          <a:p>
+            <a:pPr algn="l">
+              <a:lnSpc>
+                <a:spcPct val="112000"/>
+              </a:lnSpc>
+              <a:spcAft>
+                <a:spcPts val="500"/>
+              </a:spcAft>
+            </a:pPr>
+            <a:r>
+              <a:rPr sz="1320" b="0">
+                <a:solidFill>
+                  <a:srgbClr val="B0BEC5"/>
+                </a:solidFill>
+                <a:latin typeface="Aptos"/>
+              </a:rPr>
+              <a:t>Revenue, category, channel, and customer questions come up during operating reviews.</a:t>
+            </a:r>
+          </a:p>
+          <a:p>
+            <a:pPr algn="l">
+              <a:lnSpc>
+                <a:spcPct val="112000"/>
+              </a:lnSpc>
+              <a:spcAft>
+                <a:spcPts val="500"/>
+              </a:spcAft>
+            </a:pPr>
+            <a:r>
+              <a:rPr sz="1320" b="0">
+                <a:solidFill>
+                  <a:srgbClr val="B0BEC5"/>
+                </a:solidFill>
+                <a:latin typeface="Aptos"/>
+              </a:rPr>
+              <a:t>Teams need a chart they can inspect immediately, not another request thread.</a:t>
+            </a:r>
+          </a:p>
+          <a:p>
+            <a:pPr algn="l">
+              <a:lnSpc>
+                <a:spcPct val="112000"/>
+              </a:lnSpc>
+              <a:spcAft>
+                <a:spcPts val="500"/>
+              </a:spcAft>
+            </a:pPr>
+            <a:r>
+              <a:rPr sz="1320" b="0">
+                <a:solidFill>
+                  <a:srgbClr val="B0BEC5"/>
+                </a:solidFill>
+                <a:latin typeface="Aptos"/>
+              </a:rPr>
+              <a:t>Metric definitions have to stay consistent as more people reuse the answer.</a:t>
+            </a:r>
+          </a:p>
+        </p:txBody>
+      </p:sp>
+      <p:sp>
+        <p:nvSpPr>
+          <p:cNvPr id="14" name="TextBox 13"/>
+          <p:cNvSpPr txBox="1"/>
+          <p:nvPr/>
+        </p:nvSpPr>
+        <p:spPr>
+          <a:xfrm>
+            <a:off x="658368" y="5989320"/>
+            <a:ext cx="9966960" cy="256032"/>
+          </a:xfrm>
+          <a:prstGeom prst="rect">
+            <a:avLst/>
+          </a:prstGeom>
+          <a:noFill/>
+        </p:spPr>
+        <p:txBody>
+          <a:bodyPr wrap="square" lIns="0" rIns="0" tIns="0" bIns="0" anchor="t">
+            <a:spAutoFit/>
+          </a:bodyPr>
+          <a:lstStyle/>
+          <a:p>
+            <a:pPr algn="l">
+              <a:lnSpc>
+                <a:spcPct val="108000"/>
+              </a:lnSpc>
+            </a:pPr>
+            <a:r>
+              <a:rPr sz="1400" b="1">
+                <a:solidFill>
+                  <a:srgbClr val="FFFFFF"/>
+                </a:solidFill>
+                <a:latin typeface="Aptos"/>
+              </a:rPr>
+              <a:t>The product opportunity: make common business questions self-service while keeping analyst-defined metrics reusable.</a:t>
+            </a:r>
+          </a:p>
+        </p:txBody>
+      </p:sp>
+      <p:sp>
+        <p:nvSpPr>
+          <p:cNvPr id="15" name="TextBox 14"/>
+          <p:cNvSpPr txBox="1"/>
+          <p:nvPr/>
+        </p:nvSpPr>
+        <p:spPr>
+          <a:xfrm>
+            <a:off x="658368" y="6510528"/>
+            <a:ext cx="5029200" cy="164592"/>
+          </a:xfrm>
+          <a:prstGeom prst="rect">
+            <a:avLst/>
+          </a:prstGeom>
+          <a:noFill/>
+        </p:spPr>
+        <p:txBody>
+          <a:bodyPr wrap="square" lIns="0" rIns="0" tIns="0" bIns="0" anchor="t">
+            <a:spAutoFit/>
+          </a:bodyPr>
+          <a:lstStyle/>
+          <a:p>
+            <a:pPr algn="l">
+              <a:lnSpc>
+                <a:spcPct val="108000"/>
+              </a:lnSpc>
+            </a:pPr>
+            <a:r>
+              <a:rPr sz="850" b="0">
+                <a:solidFill>
+                  <a:srgbClr val="7F90A8"/>
+                </a:solidFill>
+                <a:latin typeface="Aptos"/>
+              </a:rPr>
+              <a:t>QueryForge | ClawHunt Builder Camp 2026</a:t>
+            </a:r>
+          </a:p>
+        </p:txBody>
+      </p:sp>
+      <p:sp>
+        <p:nvSpPr>
+          <p:cNvPr id="16" name="TextBox 15"/>
+          <p:cNvSpPr txBox="1"/>
+          <p:nvPr/>
+        </p:nvSpPr>
+        <p:spPr>
+          <a:xfrm>
+            <a:off x="10972800" y="6510528"/>
+            <a:ext cx="594360" cy="164592"/>
+          </a:xfrm>
+          <a:prstGeom prst="rect">
+            <a:avLst/>
+          </a:prstGeom>
+          <a:noFill/>
+        </p:spPr>
+        <p:txBody>
+          <a:bodyPr wrap="square" lIns="0" rIns="0" tIns="0" bIns="0" anchor="t">
+            <a:spAutoFit/>
+          </a:bodyPr>
+          <a:lstStyle/>
+          <a:p>
+            <a:pPr algn="r">
+              <a:lnSpc>
+                <a:spcPct val="108000"/>
+              </a:lnSpc>
+            </a:pPr>
+            <a:r>
+              <a:rPr sz="850" b="0">
+                <a:solidFill>
+                  <a:srgbClr val="7F90A8"/>
+                </a:solidFill>
+                <a:latin typeface="Aptos"/>
+              </a:rPr>
+              <a:t>2/9</a:t>
             </a:r>
           </a:p>
         </p:txBody>
@@ -3397,7 +4410,7 @@
     <p:bg>
       <p:bgPr>
         <a:solidFill>
-          <a:srgbClr val="1A1F2E"/>
+          <a:srgbClr val="1B2A4A"/>
         </a:solidFill>
         <a:effectLst/>
       </p:bgPr>
@@ -3417,30 +4430,33 @@
         </p:nvSpPr>
         <p:spPr>
           <a:xfrm>
-            <a:off x="914400" y="914400"/>
-            <a:ext cx="9144000" cy="548640"/>
-          </a:xfrm>
-          <a:prstGeom prst="rect">
-            <a:avLst/>
-          </a:prstGeom>
-          <a:noFill/>
-        </p:spPr>
-        <p:txBody>
-          <a:bodyPr wrap="square">
-            <a:spAutoFit/>
-          </a:bodyPr>
-          <a:lstStyle/>
-          <a:p>
-            <a:pPr algn="l"/>
-            <a:r>
-              <a:rPr sz="3000" b="1">
-                <a:solidFill>
-                  <a:srgbClr val="F0EEE8"/>
-                </a:solidFill>
-                <a:latin typeface="Arial"/>
-                <a:ea typeface="Microsoft YaHei"/>
-              </a:rPr>
-              <a:t>分析师定义一次，业务自助使用</a:t>
+            <a:off x="658368" y="384048"/>
+            <a:ext cx="3474720" cy="237744"/>
+          </a:xfrm>
+          <a:prstGeom prst="rect">
+            <a:avLst/>
+          </a:prstGeom>
+          <a:noFill/>
+        </p:spPr>
+        <p:txBody>
+          <a:bodyPr wrap="square" lIns="0" rIns="0" tIns="0" bIns="0" anchor="t">
+            <a:spAutoFit/>
+          </a:bodyPr>
+          <a:lstStyle/>
+          <a:p>
+            <a:pPr algn="l">
+              <a:lnSpc>
+                <a:spcPct val="108000"/>
+              </a:lnSpc>
+            </a:pPr>
+            <a:r>
+              <a:rPr sz="1000" b="1">
+                <a:solidFill>
+                  <a:srgbClr val="FFB300"/>
+                </a:solidFill>
+                <a:latin typeface="Aptos"/>
+              </a:rPr>
+              <a:t>SOLUTION</a:t>
             </a:r>
           </a:p>
         </p:txBody>
@@ -3453,104 +4469,796 @@
         </p:nvSpPr>
         <p:spPr>
           <a:xfrm>
-            <a:off x="914400" y="1828800"/>
-            <a:ext cx="9144000" cy="1371600"/>
-          </a:xfrm>
-          <a:prstGeom prst="rect">
-            <a:avLst/>
-          </a:prstGeom>
-          <a:noFill/>
-        </p:spPr>
-        <p:txBody>
-          <a:bodyPr wrap="square">
-            <a:spAutoFit/>
-          </a:bodyPr>
-          <a:lstStyle/>
-          <a:p>
-            <a:pPr algn="l">
-              <a:spcAft>
-                <a:spcPts val="1200"/>
-              </a:spcAft>
-            </a:pPr>
-            <a:r>
-              <a:rPr sz="1500">
-                <a:solidFill>
-                  <a:srgbClr val="F0EEE8"/>
-                </a:solidFill>
-                <a:latin typeface="Arial"/>
-                <a:ea typeface="Microsoft YaHei"/>
-              </a:rPr>
-              <a:t>  —  分析师定义数据口径和指标</a:t>
-            </a:r>
-          </a:p>
-          <a:p>
-            <a:pPr algn="l">
-              <a:spcAft>
-                <a:spcPts val="1200"/>
-              </a:spcAft>
-            </a:pPr>
-            <a:r>
-              <a:rPr sz="1500">
-                <a:solidFill>
-                  <a:srgbClr val="F0EEE8"/>
-                </a:solidFill>
-                <a:latin typeface="Arial"/>
-                <a:ea typeface="Microsoft YaHei"/>
-              </a:rPr>
-              <a:t>  —  业务用自然语言提问</a:t>
-            </a:r>
-          </a:p>
-          <a:p>
-            <a:pPr algn="l">
-              <a:spcAft>
-                <a:spcPts val="1200"/>
-              </a:spcAft>
-            </a:pPr>
-            <a:r>
-              <a:rPr sz="1500">
-                <a:solidFill>
-                  <a:srgbClr val="F0EEE8"/>
-                </a:solidFill>
-                <a:latin typeface="Arial"/>
-                <a:ea typeface="Microsoft YaHei"/>
-              </a:rPr>
-              <a:t>  —  系统返回数据、图表、洞察</a:t>
-            </a:r>
-          </a:p>
-        </p:txBody>
-      </p:sp>
-      <p:sp>
-        <p:nvSpPr>
-          <p:cNvPr id="4" name="TextBox 3"/>
-          <p:cNvSpPr txBox="1"/>
-          <p:nvPr/>
-        </p:nvSpPr>
-        <p:spPr>
-          <a:xfrm>
-            <a:off x="914400" y="5943600"/>
-            <a:ext cx="9144000" cy="365760"/>
-          </a:xfrm>
-          <a:prstGeom prst="rect">
-            <a:avLst/>
-          </a:prstGeom>
-          <a:noFill/>
-        </p:spPr>
-        <p:txBody>
-          <a:bodyPr wrap="square">
-            <a:spAutoFit/>
-          </a:bodyPr>
-          <a:lstStyle/>
-          <a:p>
-            <a:pPr algn="l"/>
-            <a:r>
-              <a:rPr sz="1200" b="0">
-                <a:solidFill>
-                  <a:srgbClr val="9A9A9A"/>
-                </a:solidFill>
-                <a:latin typeface="Arial"/>
-                <a:ea typeface="Microsoft YaHei"/>
-              </a:rPr>
-              <a:t>从"提需求等三天"到"自己问自己看"</a:t>
+            <a:off x="658368" y="658368"/>
+            <a:ext cx="8778240" cy="658368"/>
+          </a:xfrm>
+          <a:prstGeom prst="rect">
+            <a:avLst/>
+          </a:prstGeom>
+          <a:noFill/>
+        </p:spPr>
+        <p:txBody>
+          <a:bodyPr wrap="square" lIns="0" rIns="0" tIns="0" bIns="0" anchor="t">
+            <a:spAutoFit/>
+          </a:bodyPr>
+          <a:lstStyle/>
+          <a:p>
+            <a:pPr algn="l">
+              <a:lnSpc>
+                <a:spcPct val="108000"/>
+              </a:lnSpc>
+            </a:pPr>
+            <a:r>
+              <a:rPr sz="3200" b="1">
+                <a:solidFill>
+                  <a:srgbClr val="FFFFFF"/>
+                </a:solidFill>
+                <a:latin typeface="Aptos Display"/>
+              </a:rPr>
+              <a:t>Analysts define the metric library once; business users self-serve.</a:t>
+            </a:r>
+          </a:p>
+        </p:txBody>
+      </p:sp>
+      <p:sp>
+        <p:nvSpPr>
+          <p:cNvPr id="4" name="Rectangle 3"/>
+          <p:cNvSpPr/>
+          <p:nvPr/>
+        </p:nvSpPr>
+        <p:spPr>
+          <a:xfrm>
+            <a:off x="658368" y="1325880"/>
+            <a:ext cx="1965960" cy="38100"/>
+          </a:xfrm>
+          <a:prstGeom prst="rect">
+            <a:avLst/>
+          </a:prstGeom>
+          <a:solidFill>
+            <a:srgbClr val="FFB300"/>
+          </a:solidFill>
+          <a:ln>
+            <a:noFill/>
+          </a:ln>
+        </p:spPr>
+        <p:style>
+          <a:lnRef idx="1">
+            <a:schemeClr val="accent1"/>
+          </a:lnRef>
+          <a:fillRef idx="3">
+            <a:schemeClr val="accent1"/>
+          </a:fillRef>
+          <a:effectRef idx="2">
+            <a:schemeClr val="accent1"/>
+          </a:effectRef>
+          <a:fontRef idx="minor">
+            <a:schemeClr val="lt1"/>
+          </a:fontRef>
+        </p:style>
+        <p:txBody>
+          <a:bodyPr rtlCol="0" anchor="ctr"/>
+          <a:lstStyle/>
+          <a:p>
+            <a:pPr algn="ctr"/>
+          </a:p>
+        </p:txBody>
+      </p:sp>
+      <p:sp>
+        <p:nvSpPr>
+          <p:cNvPr id="5" name="TextBox 4"/>
+          <p:cNvSpPr txBox="1"/>
+          <p:nvPr/>
+        </p:nvSpPr>
+        <p:spPr>
+          <a:xfrm>
+            <a:off x="658368" y="1481328"/>
+            <a:ext cx="9692640" cy="347472"/>
+          </a:xfrm>
+          <a:prstGeom prst="rect">
+            <a:avLst/>
+          </a:prstGeom>
+          <a:noFill/>
+        </p:spPr>
+        <p:txBody>
+          <a:bodyPr wrap="square" lIns="0" rIns="0" tIns="0" bIns="0" anchor="t">
+            <a:spAutoFit/>
+          </a:bodyPr>
+          <a:lstStyle/>
+          <a:p>
+            <a:pPr algn="l">
+              <a:lnSpc>
+                <a:spcPct val="108000"/>
+              </a:lnSpc>
+            </a:pPr>
+            <a:r>
+              <a:rPr sz="1300" b="0">
+                <a:solidFill>
+                  <a:srgbClr val="B0BEC5"/>
+                </a:solidFill>
+                <a:latin typeface="Aptos"/>
+              </a:rPr>
+              <a:t>QueryForge turns the analyst role from repeated report builder into metric owner.</a:t>
+            </a:r>
+          </a:p>
+        </p:txBody>
+      </p:sp>
+      <p:sp>
+        <p:nvSpPr>
+          <p:cNvPr id="6" name="Rectangle 5"/>
+          <p:cNvSpPr/>
+          <p:nvPr/>
+        </p:nvSpPr>
+        <p:spPr>
+          <a:xfrm>
+            <a:off x="658368" y="2011680"/>
+            <a:ext cx="3364992" cy="3383280"/>
+          </a:xfrm>
+          <a:prstGeom prst="rect">
+            <a:avLst/>
+          </a:prstGeom>
+          <a:solidFill>
+            <a:srgbClr val="1F3056"/>
+          </a:solidFill>
+          <a:ln w="12700">
+            <a:solidFill>
+              <a:srgbClr val="2D426D"/>
+            </a:solidFill>
+          </a:ln>
+        </p:spPr>
+        <p:style>
+          <a:lnRef idx="1">
+            <a:schemeClr val="accent1"/>
+          </a:lnRef>
+          <a:fillRef idx="3">
+            <a:schemeClr val="accent1"/>
+          </a:fillRef>
+          <a:effectRef idx="2">
+            <a:schemeClr val="accent1"/>
+          </a:effectRef>
+          <a:fontRef idx="minor">
+            <a:schemeClr val="lt1"/>
+          </a:fontRef>
+        </p:style>
+        <p:txBody>
+          <a:bodyPr rtlCol="0" anchor="ctr"/>
+          <a:lstStyle/>
+          <a:p>
+            <a:pPr algn="ctr"/>
+          </a:p>
+        </p:txBody>
+      </p:sp>
+      <p:sp>
+        <p:nvSpPr>
+          <p:cNvPr id="7" name="TextBox 6"/>
+          <p:cNvSpPr txBox="1"/>
+          <p:nvPr/>
+        </p:nvSpPr>
+        <p:spPr>
+          <a:xfrm>
+            <a:off x="822960" y="2139696"/>
+            <a:ext cx="548640" cy="256032"/>
+          </a:xfrm>
+          <a:prstGeom prst="rect">
+            <a:avLst/>
+          </a:prstGeom>
+          <a:noFill/>
+        </p:spPr>
+        <p:txBody>
+          <a:bodyPr wrap="square" lIns="0" rIns="0" tIns="0" bIns="0" anchor="t">
+            <a:spAutoFit/>
+          </a:bodyPr>
+          <a:lstStyle/>
+          <a:p>
+            <a:pPr algn="l">
+              <a:lnSpc>
+                <a:spcPct val="108000"/>
+              </a:lnSpc>
+            </a:pPr>
+            <a:r>
+              <a:rPr sz="1100" b="1">
+                <a:solidFill>
+                  <a:srgbClr val="FFB300"/>
+                </a:solidFill>
+                <a:latin typeface="Aptos"/>
+              </a:rPr>
+              <a:t>01</a:t>
+            </a:r>
+          </a:p>
+        </p:txBody>
+      </p:sp>
+      <p:sp>
+        <p:nvSpPr>
+          <p:cNvPr id="8" name="TextBox 7"/>
+          <p:cNvSpPr txBox="1"/>
+          <p:nvPr/>
+        </p:nvSpPr>
+        <p:spPr>
+          <a:xfrm>
+            <a:off x="822960" y="2468880"/>
+            <a:ext cx="3035808" cy="274320"/>
+          </a:xfrm>
+          <a:prstGeom prst="rect">
+            <a:avLst/>
+          </a:prstGeom>
+          <a:noFill/>
+        </p:spPr>
+        <p:txBody>
+          <a:bodyPr wrap="square" lIns="0" rIns="0" tIns="0" bIns="0" anchor="t">
+            <a:spAutoFit/>
+          </a:bodyPr>
+          <a:lstStyle/>
+          <a:p>
+            <a:pPr algn="l">
+              <a:lnSpc>
+                <a:spcPct val="108000"/>
+              </a:lnSpc>
+            </a:pPr>
+            <a:r>
+              <a:rPr sz="1550" b="1">
+                <a:solidFill>
+                  <a:srgbClr val="FFFFFF"/>
+                </a:solidFill>
+                <a:latin typeface="Aptos"/>
+              </a:rPr>
+              <a:t>Analyst setup</a:t>
+            </a:r>
+          </a:p>
+        </p:txBody>
+      </p:sp>
+      <p:sp>
+        <p:nvSpPr>
+          <p:cNvPr id="9" name="TextBox 8"/>
+          <p:cNvSpPr txBox="1"/>
+          <p:nvPr/>
+        </p:nvSpPr>
+        <p:spPr>
+          <a:xfrm>
+            <a:off x="822960" y="2852928"/>
+            <a:ext cx="3035808" cy="2423160"/>
+          </a:xfrm>
+          <a:prstGeom prst="rect">
+            <a:avLst/>
+          </a:prstGeom>
+          <a:noFill/>
+        </p:spPr>
+        <p:txBody>
+          <a:bodyPr wrap="square" lIns="0" rIns="0" tIns="0" bIns="0" anchor="t">
+            <a:spAutoFit/>
+          </a:bodyPr>
+          <a:lstStyle/>
+          <a:p>
+            <a:pPr algn="l">
+              <a:lnSpc>
+                <a:spcPct val="108000"/>
+              </a:lnSpc>
+            </a:pPr>
+            <a:r>
+              <a:rPr sz="1150" b="0">
+                <a:solidFill>
+                  <a:srgbClr val="B0BEC5"/>
+                </a:solidFill>
+                <a:latin typeface="Aptos"/>
+              </a:rPr>
+              <a:t>Define preset metrics once: revenue trend, category margin, top products, channel orders, and repeat buyer views.</a:t>
+            </a:r>
+          </a:p>
+        </p:txBody>
+      </p:sp>
+      <p:sp>
+        <p:nvSpPr>
+          <p:cNvPr id="10" name="TextBox 9"/>
+          <p:cNvSpPr txBox="1"/>
+          <p:nvPr/>
+        </p:nvSpPr>
+        <p:spPr>
+          <a:xfrm>
+            <a:off x="4041648" y="3639312"/>
+            <a:ext cx="310896" cy="164592"/>
+          </a:xfrm>
+          <a:prstGeom prst="rect">
+            <a:avLst/>
+          </a:prstGeom>
+          <a:noFill/>
+        </p:spPr>
+        <p:txBody>
+          <a:bodyPr wrap="square" lIns="0" rIns="0" tIns="0" bIns="0" anchor="t">
+            <a:spAutoFit/>
+          </a:bodyPr>
+          <a:lstStyle/>
+          <a:p>
+            <a:pPr algn="ctr">
+              <a:lnSpc>
+                <a:spcPct val="108000"/>
+              </a:lnSpc>
+            </a:pPr>
+            <a:r>
+              <a:rPr sz="1400" b="1">
+                <a:solidFill>
+                  <a:srgbClr val="FFB300"/>
+                </a:solidFill>
+                <a:latin typeface="Aptos"/>
+              </a:rPr>
+              <a:t>-&gt;</a:t>
+            </a:r>
+          </a:p>
+        </p:txBody>
+      </p:sp>
+      <p:sp>
+        <p:nvSpPr>
+          <p:cNvPr id="11" name="Rectangle 10"/>
+          <p:cNvSpPr/>
+          <p:nvPr/>
+        </p:nvSpPr>
+        <p:spPr>
+          <a:xfrm>
+            <a:off x="4325112" y="2011680"/>
+            <a:ext cx="3364992" cy="3383280"/>
+          </a:xfrm>
+          <a:prstGeom prst="rect">
+            <a:avLst/>
+          </a:prstGeom>
+          <a:solidFill>
+            <a:srgbClr val="1F3056"/>
+          </a:solidFill>
+          <a:ln w="12700">
+            <a:solidFill>
+              <a:srgbClr val="2D426D"/>
+            </a:solidFill>
+          </a:ln>
+        </p:spPr>
+        <p:style>
+          <a:lnRef idx="1">
+            <a:schemeClr val="accent1"/>
+          </a:lnRef>
+          <a:fillRef idx="3">
+            <a:schemeClr val="accent1"/>
+          </a:fillRef>
+          <a:effectRef idx="2">
+            <a:schemeClr val="accent1"/>
+          </a:effectRef>
+          <a:fontRef idx="minor">
+            <a:schemeClr val="lt1"/>
+          </a:fontRef>
+        </p:style>
+        <p:txBody>
+          <a:bodyPr rtlCol="0" anchor="ctr"/>
+          <a:lstStyle/>
+          <a:p>
+            <a:pPr algn="ctr"/>
+          </a:p>
+        </p:txBody>
+      </p:sp>
+      <p:sp>
+        <p:nvSpPr>
+          <p:cNvPr id="12" name="TextBox 11"/>
+          <p:cNvSpPr txBox="1"/>
+          <p:nvPr/>
+        </p:nvSpPr>
+        <p:spPr>
+          <a:xfrm>
+            <a:off x="4489704" y="2139696"/>
+            <a:ext cx="548640" cy="256032"/>
+          </a:xfrm>
+          <a:prstGeom prst="rect">
+            <a:avLst/>
+          </a:prstGeom>
+          <a:noFill/>
+        </p:spPr>
+        <p:txBody>
+          <a:bodyPr wrap="square" lIns="0" rIns="0" tIns="0" bIns="0" anchor="t">
+            <a:spAutoFit/>
+          </a:bodyPr>
+          <a:lstStyle/>
+          <a:p>
+            <a:pPr algn="l">
+              <a:lnSpc>
+                <a:spcPct val="108000"/>
+              </a:lnSpc>
+            </a:pPr>
+            <a:r>
+              <a:rPr sz="1100" b="1">
+                <a:solidFill>
+                  <a:srgbClr val="58A6FF"/>
+                </a:solidFill>
+                <a:latin typeface="Aptos"/>
+              </a:rPr>
+              <a:t>02</a:t>
+            </a:r>
+          </a:p>
+        </p:txBody>
+      </p:sp>
+      <p:sp>
+        <p:nvSpPr>
+          <p:cNvPr id="13" name="TextBox 12"/>
+          <p:cNvSpPr txBox="1"/>
+          <p:nvPr/>
+        </p:nvSpPr>
+        <p:spPr>
+          <a:xfrm>
+            <a:off x="4489704" y="2468880"/>
+            <a:ext cx="3035808" cy="274320"/>
+          </a:xfrm>
+          <a:prstGeom prst="rect">
+            <a:avLst/>
+          </a:prstGeom>
+          <a:noFill/>
+        </p:spPr>
+        <p:txBody>
+          <a:bodyPr wrap="square" lIns="0" rIns="0" tIns="0" bIns="0" anchor="t">
+            <a:spAutoFit/>
+          </a:bodyPr>
+          <a:lstStyle/>
+          <a:p>
+            <a:pPr algn="l">
+              <a:lnSpc>
+                <a:spcPct val="108000"/>
+              </a:lnSpc>
+            </a:pPr>
+            <a:r>
+              <a:rPr sz="1550" b="1">
+                <a:solidFill>
+                  <a:srgbClr val="FFFFFF"/>
+                </a:solidFill>
+                <a:latin typeface="Aptos"/>
+              </a:rPr>
+              <a:t>Business questions</a:t>
+            </a:r>
+          </a:p>
+        </p:txBody>
+      </p:sp>
+      <p:sp>
+        <p:nvSpPr>
+          <p:cNvPr id="14" name="TextBox 13"/>
+          <p:cNvSpPr txBox="1"/>
+          <p:nvPr/>
+        </p:nvSpPr>
+        <p:spPr>
+          <a:xfrm>
+            <a:off x="4489704" y="2852928"/>
+            <a:ext cx="3035808" cy="2423160"/>
+          </a:xfrm>
+          <a:prstGeom prst="rect">
+            <a:avLst/>
+          </a:prstGeom>
+          <a:noFill/>
+        </p:spPr>
+        <p:txBody>
+          <a:bodyPr wrap="square" lIns="0" rIns="0" tIns="0" bIns="0" anchor="t">
+            <a:spAutoFit/>
+          </a:bodyPr>
+          <a:lstStyle/>
+          <a:p>
+            <a:pPr algn="l">
+              <a:lnSpc>
+                <a:spcPct val="108000"/>
+              </a:lnSpc>
+            </a:pPr>
+            <a:r>
+              <a:rPr sz="1150" b="0">
+                <a:solidFill>
+                  <a:srgbClr val="B0BEC5"/>
+                </a:solidFill>
+                <a:latin typeface="Aptos"/>
+              </a:rPr>
+              <a:t>Users type a natural-language question or rerun a saved metric from the library.</a:t>
+            </a:r>
+          </a:p>
+        </p:txBody>
+      </p:sp>
+      <p:sp>
+        <p:nvSpPr>
+          <p:cNvPr id="15" name="TextBox 14"/>
+          <p:cNvSpPr txBox="1"/>
+          <p:nvPr/>
+        </p:nvSpPr>
+        <p:spPr>
+          <a:xfrm>
+            <a:off x="7735824" y="3639312"/>
+            <a:ext cx="310896" cy="164592"/>
+          </a:xfrm>
+          <a:prstGeom prst="rect">
+            <a:avLst/>
+          </a:prstGeom>
+          <a:noFill/>
+        </p:spPr>
+        <p:txBody>
+          <a:bodyPr wrap="square" lIns="0" rIns="0" tIns="0" bIns="0" anchor="t">
+            <a:spAutoFit/>
+          </a:bodyPr>
+          <a:lstStyle/>
+          <a:p>
+            <a:pPr algn="ctr">
+              <a:lnSpc>
+                <a:spcPct val="108000"/>
+              </a:lnSpc>
+            </a:pPr>
+            <a:r>
+              <a:rPr sz="1400" b="1">
+                <a:solidFill>
+                  <a:srgbClr val="FFB300"/>
+                </a:solidFill>
+                <a:latin typeface="Aptos"/>
+              </a:rPr>
+              <a:t>-&gt;</a:t>
+            </a:r>
+          </a:p>
+        </p:txBody>
+      </p:sp>
+      <p:sp>
+        <p:nvSpPr>
+          <p:cNvPr id="16" name="Rectangle 15"/>
+          <p:cNvSpPr/>
+          <p:nvPr/>
+        </p:nvSpPr>
+        <p:spPr>
+          <a:xfrm>
+            <a:off x="7991856" y="2011680"/>
+            <a:ext cx="3364992" cy="3383280"/>
+          </a:xfrm>
+          <a:prstGeom prst="rect">
+            <a:avLst/>
+          </a:prstGeom>
+          <a:solidFill>
+            <a:srgbClr val="1F3056"/>
+          </a:solidFill>
+          <a:ln w="12700">
+            <a:solidFill>
+              <a:srgbClr val="2D426D"/>
+            </a:solidFill>
+          </a:ln>
+        </p:spPr>
+        <p:style>
+          <a:lnRef idx="1">
+            <a:schemeClr val="accent1"/>
+          </a:lnRef>
+          <a:fillRef idx="3">
+            <a:schemeClr val="accent1"/>
+          </a:fillRef>
+          <a:effectRef idx="2">
+            <a:schemeClr val="accent1"/>
+          </a:effectRef>
+          <a:fontRef idx="minor">
+            <a:schemeClr val="lt1"/>
+          </a:fontRef>
+        </p:style>
+        <p:txBody>
+          <a:bodyPr rtlCol="0" anchor="ctr"/>
+          <a:lstStyle/>
+          <a:p>
+            <a:pPr algn="ctr"/>
+          </a:p>
+        </p:txBody>
+      </p:sp>
+      <p:sp>
+        <p:nvSpPr>
+          <p:cNvPr id="17" name="TextBox 16"/>
+          <p:cNvSpPr txBox="1"/>
+          <p:nvPr/>
+        </p:nvSpPr>
+        <p:spPr>
+          <a:xfrm>
+            <a:off x="8156448" y="2139696"/>
+            <a:ext cx="548640" cy="256032"/>
+          </a:xfrm>
+          <a:prstGeom prst="rect">
+            <a:avLst/>
+          </a:prstGeom>
+          <a:noFill/>
+        </p:spPr>
+        <p:txBody>
+          <a:bodyPr wrap="square" lIns="0" rIns="0" tIns="0" bIns="0" anchor="t">
+            <a:spAutoFit/>
+          </a:bodyPr>
+          <a:lstStyle/>
+          <a:p>
+            <a:pPr algn="l">
+              <a:lnSpc>
+                <a:spcPct val="108000"/>
+              </a:lnSpc>
+            </a:pPr>
+            <a:r>
+              <a:rPr sz="1100" b="1">
+                <a:solidFill>
+                  <a:srgbClr val="4CAF50"/>
+                </a:solidFill>
+                <a:latin typeface="Aptos"/>
+              </a:rPr>
+              <a:t>03</a:t>
+            </a:r>
+          </a:p>
+        </p:txBody>
+      </p:sp>
+      <p:sp>
+        <p:nvSpPr>
+          <p:cNvPr id="18" name="TextBox 17"/>
+          <p:cNvSpPr txBox="1"/>
+          <p:nvPr/>
+        </p:nvSpPr>
+        <p:spPr>
+          <a:xfrm>
+            <a:off x="8156448" y="2468880"/>
+            <a:ext cx="3035808" cy="274320"/>
+          </a:xfrm>
+          <a:prstGeom prst="rect">
+            <a:avLst/>
+          </a:prstGeom>
+          <a:noFill/>
+        </p:spPr>
+        <p:txBody>
+          <a:bodyPr wrap="square" lIns="0" rIns="0" tIns="0" bIns="0" anchor="t">
+            <a:spAutoFit/>
+          </a:bodyPr>
+          <a:lstStyle/>
+          <a:p>
+            <a:pPr algn="l">
+              <a:lnSpc>
+                <a:spcPct val="108000"/>
+              </a:lnSpc>
+            </a:pPr>
+            <a:r>
+              <a:rPr sz="1550" b="1">
+                <a:solidFill>
+                  <a:srgbClr val="FFFFFF"/>
+                </a:solidFill>
+                <a:latin typeface="Aptos"/>
+              </a:rPr>
+              <a:t>Reusable answers</a:t>
+            </a:r>
+          </a:p>
+        </p:txBody>
+      </p:sp>
+      <p:sp>
+        <p:nvSpPr>
+          <p:cNvPr id="19" name="TextBox 18"/>
+          <p:cNvSpPr txBox="1"/>
+          <p:nvPr/>
+        </p:nvSpPr>
+        <p:spPr>
+          <a:xfrm>
+            <a:off x="8156448" y="2852928"/>
+            <a:ext cx="3035808" cy="2423160"/>
+          </a:xfrm>
+          <a:prstGeom prst="rect">
+            <a:avLst/>
+          </a:prstGeom>
+          <a:noFill/>
+        </p:spPr>
+        <p:txBody>
+          <a:bodyPr wrap="square" lIns="0" rIns="0" tIns="0" bIns="0" anchor="t">
+            <a:spAutoFit/>
+          </a:bodyPr>
+          <a:lstStyle/>
+          <a:p>
+            <a:pPr algn="l">
+              <a:lnSpc>
+                <a:spcPct val="108000"/>
+              </a:lnSpc>
+            </a:pPr>
+            <a:r>
+              <a:rPr sz="1150" b="0">
+                <a:solidFill>
+                  <a:srgbClr val="B0BEC5"/>
+                </a:solidFill>
+                <a:latin typeface="Aptos"/>
+              </a:rPr>
+              <a:t>Charts, KPI cards, progress streaming, and self-correction keep the answer usable in front of the business.</a:t>
+            </a:r>
+          </a:p>
+        </p:txBody>
+      </p:sp>
+      <p:sp>
+        <p:nvSpPr>
+          <p:cNvPr id="20" name="TextBox 19"/>
+          <p:cNvSpPr txBox="1"/>
+          <p:nvPr/>
+        </p:nvSpPr>
+        <p:spPr>
+          <a:xfrm>
+            <a:off x="658368" y="5742432"/>
+            <a:ext cx="10332720" cy="274320"/>
+          </a:xfrm>
+          <a:prstGeom prst="rect">
+            <a:avLst/>
+          </a:prstGeom>
+          <a:noFill/>
+        </p:spPr>
+        <p:txBody>
+          <a:bodyPr wrap="square" lIns="0" rIns="0" tIns="0" bIns="0" anchor="t">
+            <a:spAutoFit/>
+          </a:bodyPr>
+          <a:lstStyle/>
+          <a:p>
+            <a:pPr algn="l">
+              <a:lnSpc>
+                <a:spcPct val="108000"/>
+              </a:lnSpc>
+            </a:pPr>
+            <a:r>
+              <a:rPr sz="1400" b="1">
+                <a:solidFill>
+                  <a:srgbClr val="FFFFFF"/>
+                </a:solidFill>
+                <a:latin typeface="Aptos"/>
+              </a:rPr>
+              <a:t>Core capability: plain-language data access that preserves analyst-defined business meaning.</a:t>
+            </a:r>
+          </a:p>
+        </p:txBody>
+      </p:sp>
+      <p:sp>
+        <p:nvSpPr>
+          <p:cNvPr id="21" name="TextBox 20"/>
+          <p:cNvSpPr txBox="1"/>
+          <p:nvPr/>
+        </p:nvSpPr>
+        <p:spPr>
+          <a:xfrm>
+            <a:off x="658368" y="6510528"/>
+            <a:ext cx="5029200" cy="164592"/>
+          </a:xfrm>
+          <a:prstGeom prst="rect">
+            <a:avLst/>
+          </a:prstGeom>
+          <a:noFill/>
+        </p:spPr>
+        <p:txBody>
+          <a:bodyPr wrap="square" lIns="0" rIns="0" tIns="0" bIns="0" anchor="t">
+            <a:spAutoFit/>
+          </a:bodyPr>
+          <a:lstStyle/>
+          <a:p>
+            <a:pPr algn="l">
+              <a:lnSpc>
+                <a:spcPct val="108000"/>
+              </a:lnSpc>
+            </a:pPr>
+            <a:r>
+              <a:rPr sz="850" b="0">
+                <a:solidFill>
+                  <a:srgbClr val="7F90A8"/>
+                </a:solidFill>
+                <a:latin typeface="Aptos"/>
+              </a:rPr>
+              <a:t>QueryForge | ClawHunt Builder Camp 2026</a:t>
+            </a:r>
+          </a:p>
+        </p:txBody>
+      </p:sp>
+      <p:sp>
+        <p:nvSpPr>
+          <p:cNvPr id="22" name="TextBox 21"/>
+          <p:cNvSpPr txBox="1"/>
+          <p:nvPr/>
+        </p:nvSpPr>
+        <p:spPr>
+          <a:xfrm>
+            <a:off x="10972800" y="6510528"/>
+            <a:ext cx="594360" cy="164592"/>
+          </a:xfrm>
+          <a:prstGeom prst="rect">
+            <a:avLst/>
+          </a:prstGeom>
+          <a:noFill/>
+        </p:spPr>
+        <p:txBody>
+          <a:bodyPr wrap="square" lIns="0" rIns="0" tIns="0" bIns="0" anchor="t">
+            <a:spAutoFit/>
+          </a:bodyPr>
+          <a:lstStyle/>
+          <a:p>
+            <a:pPr algn="r">
+              <a:lnSpc>
+                <a:spcPct val="108000"/>
+              </a:lnSpc>
+            </a:pPr>
+            <a:r>
+              <a:rPr sz="850" b="0">
+                <a:solidFill>
+                  <a:srgbClr val="7F90A8"/>
+                </a:solidFill>
+                <a:latin typeface="Aptos"/>
+              </a:rPr>
+              <a:t>3/9</a:t>
             </a:r>
           </a:p>
         </p:txBody>
@@ -3569,7 +5277,7 @@
     <p:bg>
       <p:bgPr>
         <a:solidFill>
-          <a:srgbClr val="1A1F2E"/>
+          <a:srgbClr val="1B2A4A"/>
         </a:solidFill>
         <a:effectLst/>
       </p:bgPr>
@@ -3589,30 +5297,33 @@
         </p:nvSpPr>
         <p:spPr>
           <a:xfrm>
-            <a:off x="914400" y="914400"/>
-            <a:ext cx="9144000" cy="548640"/>
-          </a:xfrm>
-          <a:prstGeom prst="rect">
-            <a:avLst/>
-          </a:prstGeom>
-          <a:noFill/>
-        </p:spPr>
-        <p:txBody>
-          <a:bodyPr wrap="square">
-            <a:spAutoFit/>
-          </a:bodyPr>
-          <a:lstStyle/>
-          <a:p>
-            <a:pPr algn="l"/>
-            <a:r>
-              <a:rPr sz="3000" b="1">
-                <a:solidFill>
-                  <a:srgbClr val="F0EEE8"/>
-                </a:solidFill>
-                <a:latin typeface="Arial"/>
-                <a:ea typeface="Microsoft YaHei"/>
-              </a:rPr>
-              <a:t>从提问到决策，一个流程走完</a:t>
+            <a:off x="658368" y="384048"/>
+            <a:ext cx="3474720" cy="237744"/>
+          </a:xfrm>
+          <a:prstGeom prst="rect">
+            <a:avLst/>
+          </a:prstGeom>
+          <a:noFill/>
+        </p:spPr>
+        <p:txBody>
+          <a:bodyPr wrap="square" lIns="0" rIns="0" tIns="0" bIns="0" anchor="t">
+            <a:spAutoFit/>
+          </a:bodyPr>
+          <a:lstStyle/>
+          <a:p>
+            <a:pPr algn="l">
+              <a:lnSpc>
+                <a:spcPct val="108000"/>
+              </a:lnSpc>
+            </a:pPr>
+            <a:r>
+              <a:rPr sz="1000" b="1">
+                <a:solidFill>
+                  <a:srgbClr val="FFB300"/>
+                </a:solidFill>
+                <a:latin typeface="Aptos"/>
+              </a:rPr>
+              <a:t>PRODUCT DEMO</a:t>
             </a:r>
           </a:p>
         </p:txBody>
@@ -3625,85 +5336,779 @@
         </p:nvSpPr>
         <p:spPr>
           <a:xfrm>
-            <a:off x="914400" y="1828800"/>
-            <a:ext cx="9144000" cy="1828800"/>
-          </a:xfrm>
-          <a:prstGeom prst="rect">
-            <a:avLst/>
-          </a:prstGeom>
-          <a:noFill/>
-        </p:spPr>
-        <p:txBody>
-          <a:bodyPr wrap="square">
-            <a:spAutoFit/>
-          </a:bodyPr>
-          <a:lstStyle/>
-          <a:p>
-            <a:pPr algn="l">
+            <a:off x="658368" y="658368"/>
+            <a:ext cx="8778240" cy="658368"/>
+          </a:xfrm>
+          <a:prstGeom prst="rect">
+            <a:avLst/>
+          </a:prstGeom>
+          <a:noFill/>
+        </p:spPr>
+        <p:txBody>
+          <a:bodyPr wrap="square" lIns="0" rIns="0" tIns="0" bIns="0" anchor="t">
+            <a:spAutoFit/>
+          </a:bodyPr>
+          <a:lstStyle/>
+          <a:p>
+            <a:pPr algn="l">
+              <a:lnSpc>
+                <a:spcPct val="108000"/>
+              </a:lnSpc>
+            </a:pPr>
+            <a:r>
+              <a:rPr sz="3200" b="1">
+                <a:solidFill>
+                  <a:srgbClr val="FFFFFF"/>
+                </a:solidFill>
+                <a:latin typeface="Aptos Display"/>
+              </a:rPr>
+              <a:t>The live product already combines questions, KPI cards, and dashboard panels.</a:t>
+            </a:r>
+          </a:p>
+        </p:txBody>
+      </p:sp>
+      <p:sp>
+        <p:nvSpPr>
+          <p:cNvPr id="4" name="Rectangle 3"/>
+          <p:cNvSpPr/>
+          <p:nvPr/>
+        </p:nvSpPr>
+        <p:spPr>
+          <a:xfrm>
+            <a:off x="658368" y="1325880"/>
+            <a:ext cx="1965960" cy="38100"/>
+          </a:xfrm>
+          <a:prstGeom prst="rect">
+            <a:avLst/>
+          </a:prstGeom>
+          <a:solidFill>
+            <a:srgbClr val="FFB300"/>
+          </a:solidFill>
+          <a:ln>
+            <a:noFill/>
+          </a:ln>
+        </p:spPr>
+        <p:style>
+          <a:lnRef idx="1">
+            <a:schemeClr val="accent1"/>
+          </a:lnRef>
+          <a:fillRef idx="3">
+            <a:schemeClr val="accent1"/>
+          </a:fillRef>
+          <a:effectRef idx="2">
+            <a:schemeClr val="accent1"/>
+          </a:effectRef>
+          <a:fontRef idx="minor">
+            <a:schemeClr val="lt1"/>
+          </a:fontRef>
+        </p:style>
+        <p:txBody>
+          <a:bodyPr rtlCol="0" anchor="ctr"/>
+          <a:lstStyle/>
+          <a:p>
+            <a:pPr algn="ctr"/>
+          </a:p>
+        </p:txBody>
+      </p:sp>
+      <p:sp>
+        <p:nvSpPr>
+          <p:cNvPr id="5" name="TextBox 4"/>
+          <p:cNvSpPr txBox="1"/>
+          <p:nvPr/>
+        </p:nvSpPr>
+        <p:spPr>
+          <a:xfrm>
+            <a:off x="658368" y="1481328"/>
+            <a:ext cx="9692640" cy="347472"/>
+          </a:xfrm>
+          <a:prstGeom prst="rect">
+            <a:avLst/>
+          </a:prstGeom>
+          <a:noFill/>
+        </p:spPr>
+        <p:txBody>
+          <a:bodyPr wrap="square" lIns="0" rIns="0" tIns="0" bIns="0" anchor="t">
+            <a:spAutoFit/>
+          </a:bodyPr>
+          <a:lstStyle/>
+          <a:p>
+            <a:pPr algn="l">
+              <a:lnSpc>
+                <a:spcPct val="108000"/>
+              </a:lnSpc>
+            </a:pPr>
+            <a:r>
+              <a:rPr sz="1300" b="0">
+                <a:solidFill>
+                  <a:srgbClr val="B0BEC5"/>
+                </a:solidFill>
+                <a:latin typeface="Aptos"/>
+              </a:rPr>
+              <a:t>Screenshots are from the deployed QueryForge demo with actual demo data.</a:t>
+            </a:r>
+          </a:p>
+        </p:txBody>
+      </p:sp>
+      <p:sp>
+        <p:nvSpPr>
+          <p:cNvPr id="6" name="TextBox 5"/>
+          <p:cNvSpPr txBox="1"/>
+          <p:nvPr/>
+        </p:nvSpPr>
+        <p:spPr>
+          <a:xfrm>
+            <a:off x="658368" y="1901952"/>
+            <a:ext cx="3246120" cy="4206240"/>
+          </a:xfrm>
+          <a:prstGeom prst="rect">
+            <a:avLst/>
+          </a:prstGeom>
+          <a:noFill/>
+        </p:spPr>
+        <p:txBody>
+          <a:bodyPr wrap="square" lIns="0" rIns="0" tIns="0" bIns="0">
+            <a:spAutoFit/>
+          </a:bodyPr>
+          <a:lstStyle/>
+          <a:p>
+            <a:pPr algn="l">
+              <a:lnSpc>
+                <a:spcPct val="112000"/>
+              </a:lnSpc>
               <a:spcAft>
-                <a:spcPts val="1200"/>
+                <a:spcPts val="300"/>
               </a:spcAft>
             </a:pPr>
             <a:r>
-              <a:rPr sz="1500">
-                <a:solidFill>
-                  <a:srgbClr val="F0EEE8"/>
-                </a:solidFill>
-                <a:latin typeface="Arial"/>
-                <a:ea typeface="Microsoft YaHei"/>
-              </a:rPr>
-              <a:t>  —  取数 — "各地区本月销售额是多少"</a:t>
-            </a:r>
-          </a:p>
-          <a:p>
-            <a:pPr algn="l">
+              <a:rPr sz="1500" b="1">
+                <a:solidFill>
+                  <a:srgbClr val="FFFFFF"/>
+                </a:solidFill>
+                <a:latin typeface="Aptos"/>
+              </a:rPr>
+              <a:t>Natural-language entry</a:t>
+            </a:r>
+          </a:p>
+          <a:p>
+            <a:pPr algn="l">
+              <a:lnSpc>
+                <a:spcPct val="112000"/>
+              </a:lnSpc>
               <a:spcAft>
-                <a:spcPts val="1200"/>
+                <a:spcPts val="300"/>
               </a:spcAft>
             </a:pPr>
             <a:r>
-              <a:rPr sz="1500">
-                <a:solidFill>
-                  <a:srgbClr val="F0EEE8"/>
-                </a:solidFill>
-                <a:latin typeface="Arial"/>
-                <a:ea typeface="Microsoft YaHei"/>
-              </a:rPr>
-              <a:t>  —  可视化 — 自动生成图表，一键切换维度</a:t>
-            </a:r>
-          </a:p>
-          <a:p>
-            <a:pPr algn="l">
+              <a:rPr sz="1220" b="0">
+                <a:solidFill>
+                  <a:srgbClr val="B0BEC5"/>
+                </a:solidFill>
+                <a:latin typeface="Aptos"/>
+              </a:rPr>
+              <a:t>A user types a business question and gets a charted answer.</a:t>
+            </a:r>
+          </a:p>
+          <a:p>
+            <a:pPr algn="l">
+              <a:lnSpc>
+                <a:spcPct val="112000"/>
+              </a:lnSpc>
               <a:spcAft>
-                <a:spcPts val="1200"/>
+                <a:spcPts val="300"/>
               </a:spcAft>
             </a:pPr>
             <a:r>
-              <a:rPr sz="1500">
-                <a:solidFill>
-                  <a:srgbClr val="F0EEE8"/>
-                </a:solidFill>
-                <a:latin typeface="Arial"/>
-                <a:ea typeface="Microsoft YaHei"/>
-              </a:rPr>
-              <a:t>  —  归因 — "为什么东区下降了" → 自动找原因</a:t>
-            </a:r>
-          </a:p>
-          <a:p>
-            <a:pPr algn="l">
+              <a:rPr sz="400" b="0">
+                <a:solidFill>
+                  <a:srgbClr val="B0BEC5"/>
+                </a:solidFill>
+                <a:latin typeface="Aptos"/>
+              </a:rPr>
+              <a:t/>
+            </a:r>
+          </a:p>
+          <a:p>
+            <a:pPr algn="l">
+              <a:lnSpc>
+                <a:spcPct val="112000"/>
+              </a:lnSpc>
               <a:spcAft>
-                <a:spcPts val="1200"/>
+                <a:spcPts val="300"/>
               </a:spcAft>
             </a:pPr>
             <a:r>
-              <a:rPr sz="1500">
-                <a:solidFill>
-                  <a:srgbClr val="F0EEE8"/>
-                </a:solidFill>
-                <a:latin typeface="Arial"/>
-                <a:ea typeface="Microsoft YaHei"/>
-              </a:rPr>
-              <a:t>  —  建议 — 基于数据给出下一步行动</a:t>
+              <a:rPr sz="1500" b="1">
+                <a:solidFill>
+                  <a:srgbClr val="FFFFFF"/>
+                </a:solidFill>
+                <a:latin typeface="Aptos"/>
+              </a:rPr>
+              <a:t>8 KPI cards</a:t>
+            </a:r>
+          </a:p>
+          <a:p>
+            <a:pPr algn="l">
+              <a:lnSpc>
+                <a:spcPct val="112000"/>
+              </a:lnSpc>
+              <a:spcAft>
+                <a:spcPts val="300"/>
+              </a:spcAft>
+            </a:pPr>
+            <a:r>
+              <a:rPr sz="1220" b="0">
+                <a:solidFill>
+                  <a:srgbClr val="B0BEC5"/>
+                </a:solidFill>
+                <a:latin typeface="Aptos"/>
+              </a:rPr>
+              <a:t>Revenue, AOV, margin, repeat rate, completion, refund, basket, active buyers.</a:t>
+            </a:r>
+          </a:p>
+          <a:p>
+            <a:pPr algn="l">
+              <a:lnSpc>
+                <a:spcPct val="112000"/>
+              </a:lnSpc>
+              <a:spcAft>
+                <a:spcPts val="300"/>
+              </a:spcAft>
+            </a:pPr>
+            <a:r>
+              <a:rPr sz="400" b="0">
+                <a:solidFill>
+                  <a:srgbClr val="B0BEC5"/>
+                </a:solidFill>
+                <a:latin typeface="Aptos"/>
+              </a:rPr>
+              <a:t/>
+            </a:r>
+          </a:p>
+          <a:p>
+            <a:pPr algn="l">
+              <a:lnSpc>
+                <a:spcPct val="112000"/>
+              </a:lnSpc>
+              <a:spcAft>
+                <a:spcPts val="300"/>
+              </a:spcAft>
+            </a:pPr>
+            <a:r>
+              <a:rPr sz="1500" b="1">
+                <a:solidFill>
+                  <a:srgbClr val="FFFFFF"/>
+                </a:solidFill>
+                <a:latin typeface="Aptos"/>
+              </a:rPr>
+              <a:t>6 dashboard panels</a:t>
+            </a:r>
+          </a:p>
+          <a:p>
+            <a:pPr algn="l">
+              <a:lnSpc>
+                <a:spcPct val="112000"/>
+              </a:lnSpc>
+              <a:spcAft>
+                <a:spcPts val="300"/>
+              </a:spcAft>
+            </a:pPr>
+            <a:r>
+              <a:rPr sz="1220" b="0">
+                <a:solidFill>
+                  <a:srgbClr val="B0BEC5"/>
+                </a:solidFill>
+                <a:latin typeface="Aptos"/>
+              </a:rPr>
+              <a:t>Region bar, category pie, monthly trend, channel bar, top products, user segments.</a:t>
+            </a:r>
+          </a:p>
+          <a:p>
+            <a:pPr algn="l">
+              <a:lnSpc>
+                <a:spcPct val="112000"/>
+              </a:lnSpc>
+              <a:spcAft>
+                <a:spcPts val="300"/>
+              </a:spcAft>
+            </a:pPr>
+            <a:r>
+              <a:rPr sz="400" b="0">
+                <a:solidFill>
+                  <a:srgbClr val="B0BEC5"/>
+                </a:solidFill>
+                <a:latin typeface="Aptos"/>
+              </a:rPr>
+              <a:t/>
+            </a:r>
+          </a:p>
+          <a:p>
+            <a:pPr algn="l">
+              <a:lnSpc>
+                <a:spcPct val="112000"/>
+              </a:lnSpc>
+              <a:spcAft>
+                <a:spcPts val="300"/>
+              </a:spcAft>
+            </a:pPr>
+            <a:r>
+              <a:rPr sz="1500" b="1">
+                <a:solidFill>
+                  <a:srgbClr val="FFFFFF"/>
+                </a:solidFill>
+                <a:latin typeface="Aptos"/>
+              </a:rPr>
+              <a:t>Preset metric library</a:t>
+            </a:r>
+          </a:p>
+          <a:p>
+            <a:pPr algn="l">
+              <a:lnSpc>
+                <a:spcPct val="112000"/>
+              </a:lnSpc>
+              <a:spcAft>
+                <a:spcPts val="300"/>
+              </a:spcAft>
+            </a:pPr>
+            <a:r>
+              <a:rPr sz="1220" b="0">
+                <a:solidFill>
+                  <a:srgbClr val="B0BEC5"/>
+                </a:solidFill>
+                <a:latin typeface="Aptos"/>
+              </a:rPr>
+              <a:t>Analysts create reusable metrics that business users can rerun.</a:t>
+            </a:r>
+          </a:p>
+        </p:txBody>
+      </p:sp>
+      <p:sp>
+        <p:nvSpPr>
+          <p:cNvPr id="7" name="Rectangle 6"/>
+          <p:cNvSpPr/>
+          <p:nvPr/>
+        </p:nvSpPr>
+        <p:spPr>
+          <a:xfrm>
+            <a:off x="4272280" y="1730248"/>
+            <a:ext cx="7228840" cy="581152"/>
+          </a:xfrm>
+          <a:prstGeom prst="rect">
+            <a:avLst/>
+          </a:prstGeom>
+          <a:solidFill>
+            <a:srgbClr val="F7FAFC"/>
+          </a:solidFill>
+          <a:ln w="12700">
+            <a:solidFill>
+              <a:srgbClr val="2D426D"/>
+            </a:solidFill>
+          </a:ln>
+        </p:spPr>
+        <p:style>
+          <a:lnRef idx="1">
+            <a:schemeClr val="accent1"/>
+          </a:lnRef>
+          <a:fillRef idx="3">
+            <a:schemeClr val="accent1"/>
+          </a:fillRef>
+          <a:effectRef idx="2">
+            <a:schemeClr val="accent1"/>
+          </a:effectRef>
+          <a:fontRef idx="minor">
+            <a:schemeClr val="lt1"/>
+          </a:fontRef>
+        </p:style>
+        <p:txBody>
+          <a:bodyPr rtlCol="0" anchor="ctr"/>
+          <a:lstStyle/>
+          <a:p>
+            <a:pPr algn="ctr"/>
+          </a:p>
+        </p:txBody>
+      </p:sp>
+      <p:pic>
+        <p:nvPicPr>
+          <p:cNvPr id="8" name="Picture 7" descr="crop-kpis.png"/>
+          <p:cNvPicPr>
+            <a:picLocks noChangeAspect="1"/>
+          </p:cNvPicPr>
+          <p:nvPr/>
+        </p:nvPicPr>
+        <p:blipFill>
+          <a:blip r:embed="rId2"/>
+          <a:stretch>
+            <a:fillRect/>
+          </a:stretch>
+        </p:blipFill>
+        <p:spPr>
+          <a:xfrm>
+            <a:off x="4297680" y="1755648"/>
+            <a:ext cx="7178040" cy="530352"/>
+          </a:xfrm>
+          <a:prstGeom prst="rect">
+            <a:avLst/>
+          </a:prstGeom>
+        </p:spPr>
+      </p:pic>
+      <p:sp>
+        <p:nvSpPr>
+          <p:cNvPr id="9" name="Rectangle 8"/>
+          <p:cNvSpPr/>
+          <p:nvPr/>
+        </p:nvSpPr>
+        <p:spPr>
+          <a:xfrm>
+            <a:off x="4272280" y="2516632"/>
+            <a:ext cx="4275328" cy="334264"/>
+          </a:xfrm>
+          <a:prstGeom prst="rect">
+            <a:avLst/>
+          </a:prstGeom>
+          <a:solidFill>
+            <a:srgbClr val="F7FAFC"/>
+          </a:solidFill>
+          <a:ln w="12700">
+            <a:solidFill>
+              <a:srgbClr val="2D426D"/>
+            </a:solidFill>
+          </a:ln>
+        </p:spPr>
+        <p:style>
+          <a:lnRef idx="1">
+            <a:schemeClr val="accent1"/>
+          </a:lnRef>
+          <a:fillRef idx="3">
+            <a:schemeClr val="accent1"/>
+          </a:fillRef>
+          <a:effectRef idx="2">
+            <a:schemeClr val="accent1"/>
+          </a:effectRef>
+          <a:fontRef idx="minor">
+            <a:schemeClr val="lt1"/>
+          </a:fontRef>
+        </p:style>
+        <p:txBody>
+          <a:bodyPr rtlCol="0" anchor="ctr"/>
+          <a:lstStyle/>
+          <a:p>
+            <a:pPr algn="ctr"/>
+          </a:p>
+        </p:txBody>
+      </p:sp>
+      <p:pic>
+        <p:nvPicPr>
+          <p:cNvPr id="10" name="Picture 9" descr="crop-input.png"/>
+          <p:cNvPicPr>
+            <a:picLocks noChangeAspect="1"/>
+          </p:cNvPicPr>
+          <p:nvPr/>
+        </p:nvPicPr>
+        <p:blipFill>
+          <a:blip r:embed="rId3"/>
+          <a:stretch>
+            <a:fillRect/>
+          </a:stretch>
+        </p:blipFill>
+        <p:spPr>
+          <a:xfrm>
+            <a:off x="4297680" y="2542032"/>
+            <a:ext cx="4224528" cy="283464"/>
+          </a:xfrm>
+          <a:prstGeom prst="rect">
+            <a:avLst/>
+          </a:prstGeom>
+        </p:spPr>
+      </p:pic>
+      <p:sp>
+        <p:nvSpPr>
+          <p:cNvPr id="11" name="Rectangle 10"/>
+          <p:cNvSpPr/>
+          <p:nvPr/>
+        </p:nvSpPr>
+        <p:spPr>
+          <a:xfrm>
+            <a:off x="8771128" y="2516632"/>
+            <a:ext cx="2729992" cy="1074928"/>
+          </a:xfrm>
+          <a:prstGeom prst="rect">
+            <a:avLst/>
+          </a:prstGeom>
+          <a:solidFill>
+            <a:srgbClr val="F7FAFC"/>
+          </a:solidFill>
+          <a:ln w="12700">
+            <a:solidFill>
+              <a:srgbClr val="2D426D"/>
+            </a:solidFill>
+          </a:ln>
+        </p:spPr>
+        <p:style>
+          <a:lnRef idx="1">
+            <a:schemeClr val="accent1"/>
+          </a:lnRef>
+          <a:fillRef idx="3">
+            <a:schemeClr val="accent1"/>
+          </a:fillRef>
+          <a:effectRef idx="2">
+            <a:schemeClr val="accent1"/>
+          </a:effectRef>
+          <a:fontRef idx="minor">
+            <a:schemeClr val="lt1"/>
+          </a:fontRef>
+        </p:style>
+        <p:txBody>
+          <a:bodyPr rtlCol="0" anchor="ctr"/>
+          <a:lstStyle/>
+          <a:p>
+            <a:pPr algn="ctr"/>
+          </a:p>
+        </p:txBody>
+      </p:sp>
+      <p:pic>
+        <p:nvPicPr>
+          <p:cNvPr id="12" name="Picture 11" descr="crop-library.png"/>
+          <p:cNvPicPr>
+            <a:picLocks noChangeAspect="1"/>
+          </p:cNvPicPr>
+          <p:nvPr/>
+        </p:nvPicPr>
+        <p:blipFill>
+          <a:blip r:embed="rId4"/>
+          <a:stretch>
+            <a:fillRect/>
+          </a:stretch>
+        </p:blipFill>
+        <p:spPr>
+          <a:xfrm>
+            <a:off x="8796528" y="2542032"/>
+            <a:ext cx="2679192" cy="1024128"/>
+          </a:xfrm>
+          <a:prstGeom prst="rect">
+            <a:avLst/>
+          </a:prstGeom>
+        </p:spPr>
+      </p:pic>
+      <p:sp>
+        <p:nvSpPr>
+          <p:cNvPr id="13" name="Rectangle 12"/>
+          <p:cNvSpPr/>
+          <p:nvPr/>
+        </p:nvSpPr>
+        <p:spPr>
+          <a:xfrm>
+            <a:off x="4272280" y="3028696"/>
+            <a:ext cx="3872991" cy="3123184"/>
+          </a:xfrm>
+          <a:prstGeom prst="rect">
+            <a:avLst/>
+          </a:prstGeom>
+          <a:solidFill>
+            <a:srgbClr val="F7FAFC"/>
+          </a:solidFill>
+          <a:ln w="12700">
+            <a:solidFill>
+              <a:srgbClr val="2D426D"/>
+            </a:solidFill>
+          </a:ln>
+        </p:spPr>
+        <p:style>
+          <a:lnRef idx="1">
+            <a:schemeClr val="accent1"/>
+          </a:lnRef>
+          <a:fillRef idx="3">
+            <a:schemeClr val="accent1"/>
+          </a:fillRef>
+          <a:effectRef idx="2">
+            <a:schemeClr val="accent1"/>
+          </a:effectRef>
+          <a:fontRef idx="minor">
+            <a:schemeClr val="lt1"/>
+          </a:fontRef>
+        </p:style>
+        <p:txBody>
+          <a:bodyPr rtlCol="0" anchor="ctr"/>
+          <a:lstStyle/>
+          <a:p>
+            <a:pPr algn="ctr"/>
+          </a:p>
+        </p:txBody>
+      </p:sp>
+      <p:pic>
+        <p:nvPicPr>
+          <p:cNvPr id="14" name="Picture 13" descr="crop-dashboard.png"/>
+          <p:cNvPicPr>
+            <a:picLocks noChangeAspect="1"/>
+          </p:cNvPicPr>
+          <p:nvPr/>
+        </p:nvPicPr>
+        <p:blipFill>
+          <a:blip r:embed="rId5"/>
+          <a:stretch>
+            <a:fillRect/>
+          </a:stretch>
+        </p:blipFill>
+        <p:spPr>
+          <a:xfrm>
+            <a:off x="4297680" y="3054096"/>
+            <a:ext cx="3822191" cy="3072384"/>
+          </a:xfrm>
+          <a:prstGeom prst="rect">
+            <a:avLst/>
+          </a:prstGeom>
+        </p:spPr>
+      </p:pic>
+      <p:sp>
+        <p:nvSpPr>
+          <p:cNvPr id="15" name="TextBox 14"/>
+          <p:cNvSpPr txBox="1"/>
+          <p:nvPr/>
+        </p:nvSpPr>
+        <p:spPr>
+          <a:xfrm>
+            <a:off x="8339327" y="3822191"/>
+            <a:ext cx="2834640" cy="365760"/>
+          </a:xfrm>
+          <a:prstGeom prst="rect">
+            <a:avLst/>
+          </a:prstGeom>
+          <a:noFill/>
+        </p:spPr>
+        <p:txBody>
+          <a:bodyPr wrap="square" lIns="0" rIns="0" tIns="0" bIns="0" anchor="t">
+            <a:spAutoFit/>
+          </a:bodyPr>
+          <a:lstStyle/>
+          <a:p>
+            <a:pPr algn="l">
+              <a:lnSpc>
+                <a:spcPct val="108000"/>
+              </a:lnSpc>
+            </a:pPr>
+            <a:r>
+              <a:rPr sz="1300" b="1">
+                <a:solidFill>
+                  <a:srgbClr val="FFFFFF"/>
+                </a:solidFill>
+                <a:latin typeface="Aptos"/>
+              </a:rPr>
+              <a:t>Dashboard remains visible while the user asks or reruns questions.</a:t>
+            </a:r>
+          </a:p>
+        </p:txBody>
+      </p:sp>
+      <p:sp>
+        <p:nvSpPr>
+          <p:cNvPr id="16" name="TextBox 15"/>
+          <p:cNvSpPr txBox="1"/>
+          <p:nvPr/>
+        </p:nvSpPr>
+        <p:spPr>
+          <a:xfrm>
+            <a:off x="8339327" y="4389120"/>
+            <a:ext cx="2834640" cy="822960"/>
+          </a:xfrm>
+          <a:prstGeom prst="rect">
+            <a:avLst/>
+          </a:prstGeom>
+          <a:noFill/>
+        </p:spPr>
+        <p:txBody>
+          <a:bodyPr wrap="square" lIns="0" rIns="0" tIns="0" bIns="0" anchor="t">
+            <a:spAutoFit/>
+          </a:bodyPr>
+          <a:lstStyle/>
+          <a:p>
+            <a:pPr algn="l">
+              <a:lnSpc>
+                <a:spcPct val="108000"/>
+              </a:lnSpc>
+            </a:pPr>
+            <a:r>
+              <a:rPr sz="1230" b="0">
+                <a:solidFill>
+                  <a:srgbClr val="B0BEC5"/>
+                </a:solidFill>
+                <a:latin typeface="Aptos"/>
+              </a:rPr>
+              <a:t>The product view is built around business application: operating health, regional performance, channel mix, product focus, and user segmentation.</a:t>
+            </a:r>
+          </a:p>
+        </p:txBody>
+      </p:sp>
+      <p:sp>
+        <p:nvSpPr>
+          <p:cNvPr id="17" name="TextBox 16"/>
+          <p:cNvSpPr txBox="1"/>
+          <p:nvPr/>
+        </p:nvSpPr>
+        <p:spPr>
+          <a:xfrm>
+            <a:off x="658368" y="6510528"/>
+            <a:ext cx="5029200" cy="164592"/>
+          </a:xfrm>
+          <a:prstGeom prst="rect">
+            <a:avLst/>
+          </a:prstGeom>
+          <a:noFill/>
+        </p:spPr>
+        <p:txBody>
+          <a:bodyPr wrap="square" lIns="0" rIns="0" tIns="0" bIns="0" anchor="t">
+            <a:spAutoFit/>
+          </a:bodyPr>
+          <a:lstStyle/>
+          <a:p>
+            <a:pPr algn="l">
+              <a:lnSpc>
+                <a:spcPct val="108000"/>
+              </a:lnSpc>
+            </a:pPr>
+            <a:r>
+              <a:rPr sz="850" b="0">
+                <a:solidFill>
+                  <a:srgbClr val="7F90A8"/>
+                </a:solidFill>
+                <a:latin typeface="Aptos"/>
+              </a:rPr>
+              <a:t>QueryForge | ClawHunt Builder Camp 2026</a:t>
+            </a:r>
+          </a:p>
+        </p:txBody>
+      </p:sp>
+      <p:sp>
+        <p:nvSpPr>
+          <p:cNvPr id="18" name="TextBox 17"/>
+          <p:cNvSpPr txBox="1"/>
+          <p:nvPr/>
+        </p:nvSpPr>
+        <p:spPr>
+          <a:xfrm>
+            <a:off x="10972800" y="6510528"/>
+            <a:ext cx="594360" cy="164592"/>
+          </a:xfrm>
+          <a:prstGeom prst="rect">
+            <a:avLst/>
+          </a:prstGeom>
+          <a:noFill/>
+        </p:spPr>
+        <p:txBody>
+          <a:bodyPr wrap="square" lIns="0" rIns="0" tIns="0" bIns="0" anchor="t">
+            <a:spAutoFit/>
+          </a:bodyPr>
+          <a:lstStyle/>
+          <a:p>
+            <a:pPr algn="r">
+              <a:lnSpc>
+                <a:spcPct val="108000"/>
+              </a:lnSpc>
+            </a:pPr>
+            <a:r>
+              <a:rPr sz="850" b="0">
+                <a:solidFill>
+                  <a:srgbClr val="7F90A8"/>
+                </a:solidFill>
+                <a:latin typeface="Aptos"/>
+              </a:rPr>
+              <a:t>4/9</a:t>
             </a:r>
           </a:p>
         </p:txBody>
@@ -3722,7 +6127,7 @@
     <p:bg>
       <p:bgPr>
         <a:solidFill>
-          <a:srgbClr val="1A1F2E"/>
+          <a:srgbClr val="1B2A4A"/>
         </a:solidFill>
         <a:effectLst/>
       </p:bgPr>
@@ -3742,30 +6147,33 @@
         </p:nvSpPr>
         <p:spPr>
           <a:xfrm>
-            <a:off x="914400" y="914400"/>
-            <a:ext cx="9144000" cy="548640"/>
-          </a:xfrm>
-          <a:prstGeom prst="rect">
-            <a:avLst/>
-          </a:prstGeom>
-          <a:noFill/>
-        </p:spPr>
-        <p:txBody>
-          <a:bodyPr wrap="square">
-            <a:spAutoFit/>
-          </a:bodyPr>
-          <a:lstStyle/>
-          <a:p>
-            <a:pPr algn="l"/>
-            <a:r>
-              <a:rPr sz="3000" b="1">
-                <a:solidFill>
-                  <a:srgbClr val="F0EEE8"/>
-                </a:solidFill>
-                <a:latin typeface="Arial"/>
-                <a:ea typeface="Microsoft YaHei"/>
-              </a:rPr>
-              <a:t>在真实数据上验证</a:t>
+            <a:off x="658368" y="384048"/>
+            <a:ext cx="3474720" cy="237744"/>
+          </a:xfrm>
+          <a:prstGeom prst="rect">
+            <a:avLst/>
+          </a:prstGeom>
+          <a:noFill/>
+        </p:spPr>
+        <p:txBody>
+          <a:bodyPr wrap="square" lIns="0" rIns="0" tIns="0" bIns="0" anchor="t">
+            <a:spAutoFit/>
+          </a:bodyPr>
+          <a:lstStyle/>
+          <a:p>
+            <a:pPr algn="l">
+              <a:lnSpc>
+                <a:spcPct val="108000"/>
+              </a:lnSpc>
+            </a:pPr>
+            <a:r>
+              <a:rPr sz="1000" b="1">
+                <a:solidFill>
+                  <a:srgbClr val="FFB300"/>
+                </a:solidFill>
+                <a:latin typeface="Aptos"/>
+              </a:rPr>
+              <a:t>DATA PROOF</a:t>
             </a:r>
           </a:p>
         </p:txBody>
@@ -3778,67 +6186,77 @@
         </p:nvSpPr>
         <p:spPr>
           <a:xfrm>
-            <a:off x="914400" y="1828800"/>
-            <a:ext cx="2743200" cy="731520"/>
-          </a:xfrm>
-          <a:prstGeom prst="rect">
-            <a:avLst/>
-          </a:prstGeom>
-          <a:noFill/>
-        </p:spPr>
-        <p:txBody>
-          <a:bodyPr wrap="square">
-            <a:spAutoFit/>
-          </a:bodyPr>
-          <a:lstStyle/>
-          <a:p>
-            <a:pPr algn="l"/>
-            <a:r>
-              <a:rPr sz="4800" b="1">
-                <a:solidFill>
-                  <a:srgbClr val="D4A853"/>
-                </a:solidFill>
-                <a:latin typeface="Arial"/>
-                <a:ea typeface="Microsoft YaHei"/>
-              </a:rPr>
-              <a:t>10,000</a:t>
-            </a:r>
-          </a:p>
-        </p:txBody>
-      </p:sp>
-      <p:sp>
-        <p:nvSpPr>
-          <p:cNvPr id="4" name="TextBox 3"/>
-          <p:cNvSpPr txBox="1"/>
-          <p:nvPr/>
-        </p:nvSpPr>
-        <p:spPr>
-          <a:xfrm>
-            <a:off x="914400" y="2651760"/>
-            <a:ext cx="2743200" cy="365760"/>
-          </a:xfrm>
-          <a:prstGeom prst="rect">
-            <a:avLst/>
-          </a:prstGeom>
-          <a:noFill/>
-        </p:spPr>
-        <p:txBody>
-          <a:bodyPr wrap="square">
-            <a:spAutoFit/>
-          </a:bodyPr>
-          <a:lstStyle/>
-          <a:p>
-            <a:pPr algn="l"/>
-            <a:r>
-              <a:rPr sz="1500" b="0">
-                <a:solidFill>
-                  <a:srgbClr val="9A9A9A"/>
-                </a:solidFill>
-                <a:latin typeface="Arial"/>
-                <a:ea typeface="Microsoft YaHei"/>
-              </a:rPr>
-              <a:t>订单</a:t>
-            </a:r>
+            <a:off x="658368" y="658368"/>
+            <a:ext cx="8778240" cy="658368"/>
+          </a:xfrm>
+          <a:prstGeom prst="rect">
+            <a:avLst/>
+          </a:prstGeom>
+          <a:noFill/>
+        </p:spPr>
+        <p:txBody>
+          <a:bodyPr wrap="square" lIns="0" rIns="0" tIns="0" bIns="0" anchor="t">
+            <a:spAutoFit/>
+          </a:bodyPr>
+          <a:lstStyle/>
+          <a:p>
+            <a:pPr algn="l">
+              <a:lnSpc>
+                <a:spcPct val="108000"/>
+              </a:lnSpc>
+            </a:pPr>
+            <a:r>
+              <a:rPr sz="3200" b="1">
+                <a:solidFill>
+                  <a:srgbClr val="FFFFFF"/>
+                </a:solidFill>
+                <a:latin typeface="Aptos Display"/>
+              </a:rPr>
+              <a:t>Eight KPI cards are backed by the demo dataset.</a:t>
+            </a:r>
+          </a:p>
+        </p:txBody>
+      </p:sp>
+      <p:sp>
+        <p:nvSpPr>
+          <p:cNvPr id="4" name="Rectangle 3"/>
+          <p:cNvSpPr/>
+          <p:nvPr/>
+        </p:nvSpPr>
+        <p:spPr>
+          <a:xfrm>
+            <a:off x="658368" y="1325880"/>
+            <a:ext cx="1965960" cy="38100"/>
+          </a:xfrm>
+          <a:prstGeom prst="rect">
+            <a:avLst/>
+          </a:prstGeom>
+          <a:solidFill>
+            <a:srgbClr val="FFB300"/>
+          </a:solidFill>
+          <a:ln>
+            <a:noFill/>
+          </a:ln>
+        </p:spPr>
+        <p:style>
+          <a:lnRef idx="1">
+            <a:schemeClr val="accent1"/>
+          </a:lnRef>
+          <a:fillRef idx="3">
+            <a:schemeClr val="accent1"/>
+          </a:fillRef>
+          <a:effectRef idx="2">
+            <a:schemeClr val="accent1"/>
+          </a:effectRef>
+          <a:fontRef idx="minor">
+            <a:schemeClr val="lt1"/>
+          </a:fontRef>
+        </p:style>
+        <p:txBody>
+          <a:bodyPr rtlCol="0" anchor="ctr"/>
+          <a:lstStyle/>
+          <a:p>
+            <a:pPr algn="ctr"/>
           </a:p>
         </p:txBody>
       </p:sp>
@@ -3850,67 +6268,79 @@
         </p:nvSpPr>
         <p:spPr>
           <a:xfrm>
-            <a:off x="4114800" y="1828800"/>
-            <a:ext cx="2743200" cy="731520"/>
-          </a:xfrm>
-          <a:prstGeom prst="rect">
-            <a:avLst/>
-          </a:prstGeom>
-          <a:noFill/>
-        </p:spPr>
-        <p:txBody>
-          <a:bodyPr wrap="square">
-            <a:spAutoFit/>
-          </a:bodyPr>
-          <a:lstStyle/>
-          <a:p>
-            <a:pPr algn="l"/>
-            <a:r>
-              <a:rPr sz="4800" b="1">
-                <a:solidFill>
-                  <a:srgbClr val="D4A853"/>
-                </a:solidFill>
-                <a:latin typeface="Arial"/>
-                <a:ea typeface="Microsoft YaHei"/>
-              </a:rPr>
-              <a:t>8</a:t>
-            </a:r>
-          </a:p>
-        </p:txBody>
-      </p:sp>
-      <p:sp>
-        <p:nvSpPr>
-          <p:cNvPr id="6" name="TextBox 5"/>
-          <p:cNvSpPr txBox="1"/>
-          <p:nvPr/>
-        </p:nvSpPr>
-        <p:spPr>
-          <a:xfrm>
-            <a:off x="4114800" y="2651760"/>
-            <a:ext cx="2743200" cy="365760"/>
-          </a:xfrm>
-          <a:prstGeom prst="rect">
-            <a:avLst/>
-          </a:prstGeom>
-          <a:noFill/>
-        </p:spPr>
-        <p:txBody>
-          <a:bodyPr wrap="square">
-            <a:spAutoFit/>
-          </a:bodyPr>
-          <a:lstStyle/>
-          <a:p>
-            <a:pPr algn="l"/>
-            <a:r>
-              <a:rPr sz="1500" b="0">
-                <a:solidFill>
-                  <a:srgbClr val="9A9A9A"/>
-                </a:solidFill>
-                <a:latin typeface="Arial"/>
-                <a:ea typeface="Microsoft YaHei"/>
-              </a:rPr>
-              <a:t>地区</a:t>
-            </a:r>
+            <a:off x="658368" y="1481328"/>
+            <a:ext cx="9692640" cy="347472"/>
+          </a:xfrm>
+          <a:prstGeom prst="rect">
+            <a:avLst/>
+          </a:prstGeom>
+          <a:noFill/>
+        </p:spPr>
+        <p:txBody>
+          <a:bodyPr wrap="square" lIns="0" rIns="0" tIns="0" bIns="0" anchor="t">
+            <a:spAutoFit/>
+          </a:bodyPr>
+          <a:lstStyle/>
+          <a:p>
+            <a:pPr algn="l">
+              <a:lnSpc>
+                <a:spcPct val="108000"/>
+              </a:lnSpc>
+            </a:pPr>
+            <a:r>
+              <a:rPr sz="1300" b="0">
+                <a:solidFill>
+                  <a:srgbClr val="B0BEC5"/>
+                </a:solidFill>
+                <a:latin typeface="Aptos"/>
+              </a:rPr>
+              <a:t>The dashboard summarizes the operating view business users can reuse.</a:t>
+            </a:r>
+          </a:p>
+        </p:txBody>
+      </p:sp>
+      <p:sp>
+        <p:nvSpPr>
+          <p:cNvPr id="6" name="Rectangle 5"/>
+          <p:cNvSpPr/>
+          <p:nvPr/>
+        </p:nvSpPr>
+        <p:spPr>
+          <a:xfrm>
+            <a:off x="658368" y="1901952"/>
+            <a:ext cx="2587752" cy="1371600"/>
+          </a:xfrm>
+          <a:prstGeom prst="rect">
+            <a:avLst/>
+          </a:prstGeom>
+          <a:solidFill>
+            <a:srgbClr val="1F3056"/>
+          </a:solidFill>
+          <a:ln w="12700">
+            <a:solidFill>
+              <a:srgbClr val="2D426D"/>
+            </a:solidFill>
+          </a:ln>
+        </p:spPr>
+        <p:style>
+          <a:lnRef idx="1">
+            <a:schemeClr val="accent1"/>
+          </a:lnRef>
+          <a:fillRef idx="3">
+            <a:schemeClr val="accent1"/>
+          </a:fillRef>
+          <a:effectRef idx="2">
+            <a:schemeClr val="accent1"/>
+          </a:effectRef>
+          <a:fontRef idx="minor">
+            <a:schemeClr val="lt1"/>
+          </a:fontRef>
+        </p:style>
+        <p:txBody>
+          <a:bodyPr rtlCol="0" anchor="ctr"/>
+          <a:lstStyle/>
+          <a:p>
+            <a:pPr algn="ctr"/>
           </a:p>
         </p:txBody>
       </p:sp>
@@ -3922,30 +6352,33 @@
         </p:nvSpPr>
         <p:spPr>
           <a:xfrm>
-            <a:off x="7315200" y="1828800"/>
-            <a:ext cx="2743200" cy="731520"/>
-          </a:xfrm>
-          <a:prstGeom prst="rect">
-            <a:avLst/>
-          </a:prstGeom>
-          <a:noFill/>
-        </p:spPr>
-        <p:txBody>
-          <a:bodyPr wrap="square">
-            <a:spAutoFit/>
-          </a:bodyPr>
-          <a:lstStyle/>
-          <a:p>
-            <a:pPr algn="l"/>
-            <a:r>
-              <a:rPr sz="4800" b="1">
-                <a:solidFill>
-                  <a:srgbClr val="D4A853"/>
-                </a:solidFill>
-                <a:latin typeface="Arial"/>
-                <a:ea typeface="Microsoft YaHei"/>
-              </a:rPr>
-              <a:t>20</a:t>
+            <a:off x="822960" y="2066544"/>
+            <a:ext cx="2258568" cy="201168"/>
+          </a:xfrm>
+          <a:prstGeom prst="rect">
+            <a:avLst/>
+          </a:prstGeom>
+          <a:noFill/>
+        </p:spPr>
+        <p:txBody>
+          <a:bodyPr wrap="square" lIns="0" rIns="0" tIns="0" bIns="0" anchor="t">
+            <a:spAutoFit/>
+          </a:bodyPr>
+          <a:lstStyle/>
+          <a:p>
+            <a:pPr algn="l">
+              <a:lnSpc>
+                <a:spcPct val="108000"/>
+              </a:lnSpc>
+            </a:pPr>
+            <a:r>
+              <a:rPr sz="1050" b="1">
+                <a:solidFill>
+                  <a:srgbClr val="B0BEC5"/>
+                </a:solidFill>
+                <a:latin typeface="Aptos"/>
+              </a:rPr>
+              <a:t>TOTAL REVENUE</a:t>
             </a:r>
           </a:p>
         </p:txBody>
@@ -3958,30 +6391,33 @@
         </p:nvSpPr>
         <p:spPr>
           <a:xfrm>
-            <a:off x="7315200" y="2651760"/>
-            <a:ext cx="2743200" cy="365760"/>
-          </a:xfrm>
-          <a:prstGeom prst="rect">
-            <a:avLst/>
-          </a:prstGeom>
-          <a:noFill/>
-        </p:spPr>
-        <p:txBody>
-          <a:bodyPr wrap="square">
-            <a:spAutoFit/>
-          </a:bodyPr>
-          <a:lstStyle/>
-          <a:p>
-            <a:pPr algn="l"/>
-            <a:r>
-              <a:rPr sz="1500" b="0">
-                <a:solidFill>
-                  <a:srgbClr val="9A9A9A"/>
-                </a:solidFill>
-                <a:latin typeface="Arial"/>
-                <a:ea typeface="Microsoft YaHei"/>
-              </a:rPr>
-              <a:t>品类</a:t>
+            <a:off x="822960" y="2359152"/>
+            <a:ext cx="2258568" cy="420624"/>
+          </a:xfrm>
+          <a:prstGeom prst="rect">
+            <a:avLst/>
+          </a:prstGeom>
+          <a:noFill/>
+        </p:spPr>
+        <p:txBody>
+          <a:bodyPr wrap="square" lIns="0" rIns="0" tIns="0" bIns="0" anchor="t">
+            <a:spAutoFit/>
+          </a:bodyPr>
+          <a:lstStyle/>
+          <a:p>
+            <a:pPr algn="l">
+              <a:lnSpc>
+                <a:spcPct val="108000"/>
+              </a:lnSpc>
+            </a:pPr>
+            <a:r>
+              <a:rPr sz="2700" b="1">
+                <a:solidFill>
+                  <a:srgbClr val="FFB300"/>
+                </a:solidFill>
+                <a:latin typeface="Aptos Display"/>
+              </a:rPr>
+              <a:t>¥232M</a:t>
             </a:r>
           </a:p>
         </p:txBody>
@@ -3994,68 +6430,1329 @@
         </p:nvSpPr>
         <p:spPr>
           <a:xfrm>
-            <a:off x="914400" y="4114800"/>
-            <a:ext cx="9144000" cy="1371600"/>
-          </a:xfrm>
-          <a:prstGeom prst="rect">
-            <a:avLst/>
-          </a:prstGeom>
-          <a:noFill/>
-        </p:spPr>
-        <p:txBody>
-          <a:bodyPr wrap="square">
-            <a:spAutoFit/>
-          </a:bodyPr>
-          <a:lstStyle/>
-          <a:p>
-            <a:pPr algn="l">
-              <a:spcAft>
-                <a:spcPts val="1200"/>
-              </a:spcAft>
-            </a:pPr>
-            <a:r>
-              <a:rPr sz="1500">
-                <a:solidFill>
-                  <a:srgbClr val="F0EEE8"/>
-                </a:solidFill>
-                <a:latin typeface="Arial"/>
-                <a:ea typeface="Microsoft YaHei"/>
-              </a:rPr>
-              <a:t>  —  覆盖 8 个 KPI 指标</a:t>
-            </a:r>
-          </a:p>
-          <a:p>
-            <a:pPr algn="l">
-              <a:spcAft>
-                <a:spcPts val="1200"/>
-              </a:spcAft>
-            </a:pPr>
-            <a:r>
-              <a:rPr sz="1500">
-                <a:solidFill>
-                  <a:srgbClr val="F0EEE8"/>
-                </a:solidFill>
-                <a:latin typeface="Arial"/>
-                <a:ea typeface="Microsoft YaHei"/>
-              </a:rPr>
-              <a:t>  —  支持跨地区、跨品类对比</a:t>
-            </a:r>
-          </a:p>
-          <a:p>
-            <a:pPr algn="l">
-              <a:spcAft>
-                <a:spcPts val="1200"/>
-              </a:spcAft>
-            </a:pPr>
-            <a:r>
-              <a:rPr sz="1500">
-                <a:solidFill>
-                  <a:srgbClr val="F0EEE8"/>
-                </a:solidFill>
-                <a:latin typeface="Arial"/>
-                <a:ea typeface="Microsoft YaHei"/>
-              </a:rPr>
-              <a:t>  —  异常检测与趋势分析</a:t>
+            <a:off x="822960" y="2871216"/>
+            <a:ext cx="2258568" cy="320040"/>
+          </a:xfrm>
+          <a:prstGeom prst="rect">
+            <a:avLst/>
+          </a:prstGeom>
+          <a:noFill/>
+        </p:spPr>
+        <p:txBody>
+          <a:bodyPr wrap="square" lIns="0" rIns="0" tIns="0" bIns="0" anchor="t">
+            <a:spAutoFit/>
+          </a:bodyPr>
+          <a:lstStyle/>
+          <a:p>
+            <a:pPr algn="l">
+              <a:lnSpc>
+                <a:spcPct val="108000"/>
+              </a:lnSpc>
+            </a:pPr>
+            <a:r>
+              <a:rPr sz="1050" b="0">
+                <a:solidFill>
+                  <a:srgbClr val="B0BEC5"/>
+                </a:solidFill>
+                <a:latin typeface="Aptos"/>
+              </a:rPr>
+              <a:t>30-month demo history</a:t>
+            </a:r>
+          </a:p>
+        </p:txBody>
+      </p:sp>
+      <p:sp>
+        <p:nvSpPr>
+          <p:cNvPr id="10" name="Rectangle 9"/>
+          <p:cNvSpPr/>
+          <p:nvPr/>
+        </p:nvSpPr>
+        <p:spPr>
+          <a:xfrm>
+            <a:off x="3474720" y="1901952"/>
+            <a:ext cx="2587752" cy="1371600"/>
+          </a:xfrm>
+          <a:prstGeom prst="rect">
+            <a:avLst/>
+          </a:prstGeom>
+          <a:solidFill>
+            <a:srgbClr val="1F3056"/>
+          </a:solidFill>
+          <a:ln w="12700">
+            <a:solidFill>
+              <a:srgbClr val="2D426D"/>
+            </a:solidFill>
+          </a:ln>
+        </p:spPr>
+        <p:style>
+          <a:lnRef idx="1">
+            <a:schemeClr val="accent1"/>
+          </a:lnRef>
+          <a:fillRef idx="3">
+            <a:schemeClr val="accent1"/>
+          </a:fillRef>
+          <a:effectRef idx="2">
+            <a:schemeClr val="accent1"/>
+          </a:effectRef>
+          <a:fontRef idx="minor">
+            <a:schemeClr val="lt1"/>
+          </a:fontRef>
+        </p:style>
+        <p:txBody>
+          <a:bodyPr rtlCol="0" anchor="ctr"/>
+          <a:lstStyle/>
+          <a:p>
+            <a:pPr algn="ctr"/>
+          </a:p>
+        </p:txBody>
+      </p:sp>
+      <p:sp>
+        <p:nvSpPr>
+          <p:cNvPr id="11" name="TextBox 10"/>
+          <p:cNvSpPr txBox="1"/>
+          <p:nvPr/>
+        </p:nvSpPr>
+        <p:spPr>
+          <a:xfrm>
+            <a:off x="3639312" y="2066544"/>
+            <a:ext cx="2258568" cy="201168"/>
+          </a:xfrm>
+          <a:prstGeom prst="rect">
+            <a:avLst/>
+          </a:prstGeom>
+          <a:noFill/>
+        </p:spPr>
+        <p:txBody>
+          <a:bodyPr wrap="square" lIns="0" rIns="0" tIns="0" bIns="0" anchor="t">
+            <a:spAutoFit/>
+          </a:bodyPr>
+          <a:lstStyle/>
+          <a:p>
+            <a:pPr algn="l">
+              <a:lnSpc>
+                <a:spcPct val="108000"/>
+              </a:lnSpc>
+            </a:pPr>
+            <a:r>
+              <a:rPr sz="1050" b="1">
+                <a:solidFill>
+                  <a:srgbClr val="B0BEC5"/>
+                </a:solidFill>
+                <a:latin typeface="Aptos"/>
+              </a:rPr>
+              <a:t>AOV</a:t>
+            </a:r>
+          </a:p>
+        </p:txBody>
+      </p:sp>
+      <p:sp>
+        <p:nvSpPr>
+          <p:cNvPr id="12" name="TextBox 11"/>
+          <p:cNvSpPr txBox="1"/>
+          <p:nvPr/>
+        </p:nvSpPr>
+        <p:spPr>
+          <a:xfrm>
+            <a:off x="3639312" y="2359152"/>
+            <a:ext cx="2258568" cy="420624"/>
+          </a:xfrm>
+          <a:prstGeom prst="rect">
+            <a:avLst/>
+          </a:prstGeom>
+          <a:noFill/>
+        </p:spPr>
+        <p:txBody>
+          <a:bodyPr wrap="square" lIns="0" rIns="0" tIns="0" bIns="0" anchor="t">
+            <a:spAutoFit/>
+          </a:bodyPr>
+          <a:lstStyle/>
+          <a:p>
+            <a:pPr algn="l">
+              <a:lnSpc>
+                <a:spcPct val="108000"/>
+              </a:lnSpc>
+            </a:pPr>
+            <a:r>
+              <a:rPr sz="2700" b="1">
+                <a:solidFill>
+                  <a:srgbClr val="FFB300"/>
+                </a:solidFill>
+                <a:latin typeface="Aptos Display"/>
+              </a:rPr>
+              <a:t>¥23K</a:t>
+            </a:r>
+          </a:p>
+        </p:txBody>
+      </p:sp>
+      <p:sp>
+        <p:nvSpPr>
+          <p:cNvPr id="13" name="TextBox 12"/>
+          <p:cNvSpPr txBox="1"/>
+          <p:nvPr/>
+        </p:nvSpPr>
+        <p:spPr>
+          <a:xfrm>
+            <a:off x="3639312" y="2871216"/>
+            <a:ext cx="2258568" cy="320040"/>
+          </a:xfrm>
+          <a:prstGeom prst="rect">
+            <a:avLst/>
+          </a:prstGeom>
+          <a:noFill/>
+        </p:spPr>
+        <p:txBody>
+          <a:bodyPr wrap="square" lIns="0" rIns="0" tIns="0" bIns="0" anchor="t">
+            <a:spAutoFit/>
+          </a:bodyPr>
+          <a:lstStyle/>
+          <a:p>
+            <a:pPr algn="l">
+              <a:lnSpc>
+                <a:spcPct val="108000"/>
+              </a:lnSpc>
+            </a:pPr>
+            <a:r>
+              <a:rPr sz="1050" b="0">
+                <a:solidFill>
+                  <a:srgbClr val="B0BEC5"/>
+                </a:solidFill>
+                <a:latin typeface="Aptos"/>
+              </a:rPr>
+              <a:t>Average order value</a:t>
+            </a:r>
+          </a:p>
+        </p:txBody>
+      </p:sp>
+      <p:sp>
+        <p:nvSpPr>
+          <p:cNvPr id="14" name="Rectangle 13"/>
+          <p:cNvSpPr/>
+          <p:nvPr/>
+        </p:nvSpPr>
+        <p:spPr>
+          <a:xfrm>
+            <a:off x="6291072" y="1901952"/>
+            <a:ext cx="2587752" cy="1371600"/>
+          </a:xfrm>
+          <a:prstGeom prst="rect">
+            <a:avLst/>
+          </a:prstGeom>
+          <a:solidFill>
+            <a:srgbClr val="1F3056"/>
+          </a:solidFill>
+          <a:ln w="12700">
+            <a:solidFill>
+              <a:srgbClr val="2D426D"/>
+            </a:solidFill>
+          </a:ln>
+        </p:spPr>
+        <p:style>
+          <a:lnRef idx="1">
+            <a:schemeClr val="accent1"/>
+          </a:lnRef>
+          <a:fillRef idx="3">
+            <a:schemeClr val="accent1"/>
+          </a:fillRef>
+          <a:effectRef idx="2">
+            <a:schemeClr val="accent1"/>
+          </a:effectRef>
+          <a:fontRef idx="minor">
+            <a:schemeClr val="lt1"/>
+          </a:fontRef>
+        </p:style>
+        <p:txBody>
+          <a:bodyPr rtlCol="0" anchor="ctr"/>
+          <a:lstStyle/>
+          <a:p>
+            <a:pPr algn="ctr"/>
+          </a:p>
+        </p:txBody>
+      </p:sp>
+      <p:sp>
+        <p:nvSpPr>
+          <p:cNvPr id="15" name="TextBox 14"/>
+          <p:cNvSpPr txBox="1"/>
+          <p:nvPr/>
+        </p:nvSpPr>
+        <p:spPr>
+          <a:xfrm>
+            <a:off x="6455664" y="2066544"/>
+            <a:ext cx="2258568" cy="201168"/>
+          </a:xfrm>
+          <a:prstGeom prst="rect">
+            <a:avLst/>
+          </a:prstGeom>
+          <a:noFill/>
+        </p:spPr>
+        <p:txBody>
+          <a:bodyPr wrap="square" lIns="0" rIns="0" tIns="0" bIns="0" anchor="t">
+            <a:spAutoFit/>
+          </a:bodyPr>
+          <a:lstStyle/>
+          <a:p>
+            <a:pPr algn="l">
+              <a:lnSpc>
+                <a:spcPct val="108000"/>
+              </a:lnSpc>
+            </a:pPr>
+            <a:r>
+              <a:rPr sz="1050" b="1">
+                <a:solidFill>
+                  <a:srgbClr val="B0BEC5"/>
+                </a:solidFill>
+                <a:latin typeface="Aptos"/>
+              </a:rPr>
+              <a:t>MARGIN</a:t>
+            </a:r>
+          </a:p>
+        </p:txBody>
+      </p:sp>
+      <p:sp>
+        <p:nvSpPr>
+          <p:cNvPr id="16" name="TextBox 15"/>
+          <p:cNvSpPr txBox="1"/>
+          <p:nvPr/>
+        </p:nvSpPr>
+        <p:spPr>
+          <a:xfrm>
+            <a:off x="6455664" y="2359152"/>
+            <a:ext cx="2258568" cy="420624"/>
+          </a:xfrm>
+          <a:prstGeom prst="rect">
+            <a:avLst/>
+          </a:prstGeom>
+          <a:noFill/>
+        </p:spPr>
+        <p:txBody>
+          <a:bodyPr wrap="square" lIns="0" rIns="0" tIns="0" bIns="0" anchor="t">
+            <a:spAutoFit/>
+          </a:bodyPr>
+          <a:lstStyle/>
+          <a:p>
+            <a:pPr algn="l">
+              <a:lnSpc>
+                <a:spcPct val="108000"/>
+              </a:lnSpc>
+            </a:pPr>
+            <a:r>
+              <a:rPr sz="2700" b="1">
+                <a:solidFill>
+                  <a:srgbClr val="4CAF50"/>
+                </a:solidFill>
+                <a:latin typeface="Aptos Display"/>
+              </a:rPr>
+              <a:t>46.7%</a:t>
+            </a:r>
+          </a:p>
+        </p:txBody>
+      </p:sp>
+      <p:sp>
+        <p:nvSpPr>
+          <p:cNvPr id="17" name="TextBox 16"/>
+          <p:cNvSpPr txBox="1"/>
+          <p:nvPr/>
+        </p:nvSpPr>
+        <p:spPr>
+          <a:xfrm>
+            <a:off x="6455664" y="2871216"/>
+            <a:ext cx="2258568" cy="320040"/>
+          </a:xfrm>
+          <a:prstGeom prst="rect">
+            <a:avLst/>
+          </a:prstGeom>
+          <a:noFill/>
+        </p:spPr>
+        <p:txBody>
+          <a:bodyPr wrap="square" lIns="0" rIns="0" tIns="0" bIns="0" anchor="t">
+            <a:spAutoFit/>
+          </a:bodyPr>
+          <a:lstStyle/>
+          <a:p>
+            <a:pPr algn="l">
+              <a:lnSpc>
+                <a:spcPct val="108000"/>
+              </a:lnSpc>
+            </a:pPr>
+            <a:r>
+              <a:rPr sz="1050" b="0">
+                <a:solidFill>
+                  <a:srgbClr val="B0BEC5"/>
+                </a:solidFill>
+                <a:latin typeface="Aptos"/>
+              </a:rPr>
+              <a:t>All-category average</a:t>
+            </a:r>
+          </a:p>
+        </p:txBody>
+      </p:sp>
+      <p:sp>
+        <p:nvSpPr>
+          <p:cNvPr id="18" name="Rectangle 17"/>
+          <p:cNvSpPr/>
+          <p:nvPr/>
+        </p:nvSpPr>
+        <p:spPr>
+          <a:xfrm>
+            <a:off x="9107424" y="1901952"/>
+            <a:ext cx="2587752" cy="1371600"/>
+          </a:xfrm>
+          <a:prstGeom prst="rect">
+            <a:avLst/>
+          </a:prstGeom>
+          <a:solidFill>
+            <a:srgbClr val="1F3056"/>
+          </a:solidFill>
+          <a:ln w="12700">
+            <a:solidFill>
+              <a:srgbClr val="2D426D"/>
+            </a:solidFill>
+          </a:ln>
+        </p:spPr>
+        <p:style>
+          <a:lnRef idx="1">
+            <a:schemeClr val="accent1"/>
+          </a:lnRef>
+          <a:fillRef idx="3">
+            <a:schemeClr val="accent1"/>
+          </a:fillRef>
+          <a:effectRef idx="2">
+            <a:schemeClr val="accent1"/>
+          </a:effectRef>
+          <a:fontRef idx="minor">
+            <a:schemeClr val="lt1"/>
+          </a:fontRef>
+        </p:style>
+        <p:txBody>
+          <a:bodyPr rtlCol="0" anchor="ctr"/>
+          <a:lstStyle/>
+          <a:p>
+            <a:pPr algn="ctr"/>
+          </a:p>
+        </p:txBody>
+      </p:sp>
+      <p:sp>
+        <p:nvSpPr>
+          <p:cNvPr id="19" name="TextBox 18"/>
+          <p:cNvSpPr txBox="1"/>
+          <p:nvPr/>
+        </p:nvSpPr>
+        <p:spPr>
+          <a:xfrm>
+            <a:off x="9272016" y="2066544"/>
+            <a:ext cx="2258568" cy="201168"/>
+          </a:xfrm>
+          <a:prstGeom prst="rect">
+            <a:avLst/>
+          </a:prstGeom>
+          <a:noFill/>
+        </p:spPr>
+        <p:txBody>
+          <a:bodyPr wrap="square" lIns="0" rIns="0" tIns="0" bIns="0" anchor="t">
+            <a:spAutoFit/>
+          </a:bodyPr>
+          <a:lstStyle/>
+          <a:p>
+            <a:pPr algn="l">
+              <a:lnSpc>
+                <a:spcPct val="108000"/>
+              </a:lnSpc>
+            </a:pPr>
+            <a:r>
+              <a:rPr sz="1050" b="1">
+                <a:solidFill>
+                  <a:srgbClr val="B0BEC5"/>
+                </a:solidFill>
+                <a:latin typeface="Aptos"/>
+              </a:rPr>
+              <a:t>REPEAT RATE</a:t>
+            </a:r>
+          </a:p>
+        </p:txBody>
+      </p:sp>
+      <p:sp>
+        <p:nvSpPr>
+          <p:cNvPr id="20" name="TextBox 19"/>
+          <p:cNvSpPr txBox="1"/>
+          <p:nvPr/>
+        </p:nvSpPr>
+        <p:spPr>
+          <a:xfrm>
+            <a:off x="9272016" y="2359152"/>
+            <a:ext cx="2258568" cy="420624"/>
+          </a:xfrm>
+          <a:prstGeom prst="rect">
+            <a:avLst/>
+          </a:prstGeom>
+          <a:noFill/>
+        </p:spPr>
+        <p:txBody>
+          <a:bodyPr wrap="square" lIns="0" rIns="0" tIns="0" bIns="0" anchor="t">
+            <a:spAutoFit/>
+          </a:bodyPr>
+          <a:lstStyle/>
+          <a:p>
+            <a:pPr algn="l">
+              <a:lnSpc>
+                <a:spcPct val="108000"/>
+              </a:lnSpc>
+            </a:pPr>
+            <a:r>
+              <a:rPr sz="2700" b="1">
+                <a:solidFill>
+                  <a:srgbClr val="4CAF50"/>
+                </a:solidFill>
+                <a:latin typeface="Aptos Display"/>
+              </a:rPr>
+              <a:t>100%</a:t>
+            </a:r>
+          </a:p>
+        </p:txBody>
+      </p:sp>
+      <p:sp>
+        <p:nvSpPr>
+          <p:cNvPr id="21" name="TextBox 20"/>
+          <p:cNvSpPr txBox="1"/>
+          <p:nvPr/>
+        </p:nvSpPr>
+        <p:spPr>
+          <a:xfrm>
+            <a:off x="9272016" y="2871216"/>
+            <a:ext cx="2258568" cy="320040"/>
+          </a:xfrm>
+          <a:prstGeom prst="rect">
+            <a:avLst/>
+          </a:prstGeom>
+          <a:noFill/>
+        </p:spPr>
+        <p:txBody>
+          <a:bodyPr wrap="square" lIns="0" rIns="0" tIns="0" bIns="0" anchor="t">
+            <a:spAutoFit/>
+          </a:bodyPr>
+          <a:lstStyle/>
+          <a:p>
+            <a:pPr algn="l">
+              <a:lnSpc>
+                <a:spcPct val="108000"/>
+              </a:lnSpc>
+            </a:pPr>
+            <a:r>
+              <a:rPr sz="1050" b="0">
+                <a:solidFill>
+                  <a:srgbClr val="B0BEC5"/>
+                </a:solidFill>
+                <a:latin typeface="Aptos"/>
+              </a:rPr>
+              <a:t>1,000 active buyers</a:t>
+            </a:r>
+          </a:p>
+        </p:txBody>
+      </p:sp>
+      <p:sp>
+        <p:nvSpPr>
+          <p:cNvPr id="22" name="Rectangle 21"/>
+          <p:cNvSpPr/>
+          <p:nvPr/>
+        </p:nvSpPr>
+        <p:spPr>
+          <a:xfrm>
+            <a:off x="658368" y="3584448"/>
+            <a:ext cx="2587752" cy="1371600"/>
+          </a:xfrm>
+          <a:prstGeom prst="rect">
+            <a:avLst/>
+          </a:prstGeom>
+          <a:solidFill>
+            <a:srgbClr val="1F3056"/>
+          </a:solidFill>
+          <a:ln w="12700">
+            <a:solidFill>
+              <a:srgbClr val="2D426D"/>
+            </a:solidFill>
+          </a:ln>
+        </p:spPr>
+        <p:style>
+          <a:lnRef idx="1">
+            <a:schemeClr val="accent1"/>
+          </a:lnRef>
+          <a:fillRef idx="3">
+            <a:schemeClr val="accent1"/>
+          </a:fillRef>
+          <a:effectRef idx="2">
+            <a:schemeClr val="accent1"/>
+          </a:effectRef>
+          <a:fontRef idx="minor">
+            <a:schemeClr val="lt1"/>
+          </a:fontRef>
+        </p:style>
+        <p:txBody>
+          <a:bodyPr rtlCol="0" anchor="ctr"/>
+          <a:lstStyle/>
+          <a:p>
+            <a:pPr algn="ctr"/>
+          </a:p>
+        </p:txBody>
+      </p:sp>
+      <p:sp>
+        <p:nvSpPr>
+          <p:cNvPr id="23" name="TextBox 22"/>
+          <p:cNvSpPr txBox="1"/>
+          <p:nvPr/>
+        </p:nvSpPr>
+        <p:spPr>
+          <a:xfrm>
+            <a:off x="822960" y="3749040"/>
+            <a:ext cx="2258568" cy="201168"/>
+          </a:xfrm>
+          <a:prstGeom prst="rect">
+            <a:avLst/>
+          </a:prstGeom>
+          <a:noFill/>
+        </p:spPr>
+        <p:txBody>
+          <a:bodyPr wrap="square" lIns="0" rIns="0" tIns="0" bIns="0" anchor="t">
+            <a:spAutoFit/>
+          </a:bodyPr>
+          <a:lstStyle/>
+          <a:p>
+            <a:pPr algn="l">
+              <a:lnSpc>
+                <a:spcPct val="108000"/>
+              </a:lnSpc>
+            </a:pPr>
+            <a:r>
+              <a:rPr sz="1050" b="1">
+                <a:solidFill>
+                  <a:srgbClr val="B0BEC5"/>
+                </a:solidFill>
+                <a:latin typeface="Aptos"/>
+              </a:rPr>
+              <a:t>COMPLETION</a:t>
+            </a:r>
+          </a:p>
+        </p:txBody>
+      </p:sp>
+      <p:sp>
+        <p:nvSpPr>
+          <p:cNvPr id="24" name="TextBox 23"/>
+          <p:cNvSpPr txBox="1"/>
+          <p:nvPr/>
+        </p:nvSpPr>
+        <p:spPr>
+          <a:xfrm>
+            <a:off x="822960" y="4041648"/>
+            <a:ext cx="2258568" cy="420624"/>
+          </a:xfrm>
+          <a:prstGeom prst="rect">
+            <a:avLst/>
+          </a:prstGeom>
+          <a:noFill/>
+        </p:spPr>
+        <p:txBody>
+          <a:bodyPr wrap="square" lIns="0" rIns="0" tIns="0" bIns="0" anchor="t">
+            <a:spAutoFit/>
+          </a:bodyPr>
+          <a:lstStyle/>
+          <a:p>
+            <a:pPr algn="l">
+              <a:lnSpc>
+                <a:spcPct val="108000"/>
+              </a:lnSpc>
+            </a:pPr>
+            <a:r>
+              <a:rPr sz="2700" b="1">
+                <a:solidFill>
+                  <a:srgbClr val="58A6FF"/>
+                </a:solidFill>
+                <a:latin typeface="Aptos Display"/>
+              </a:rPr>
+              <a:t>66.5%</a:t>
+            </a:r>
+          </a:p>
+        </p:txBody>
+      </p:sp>
+      <p:sp>
+        <p:nvSpPr>
+          <p:cNvPr id="25" name="TextBox 24"/>
+          <p:cNvSpPr txBox="1"/>
+          <p:nvPr/>
+        </p:nvSpPr>
+        <p:spPr>
+          <a:xfrm>
+            <a:off x="822960" y="4553712"/>
+            <a:ext cx="2258568" cy="320040"/>
+          </a:xfrm>
+          <a:prstGeom prst="rect">
+            <a:avLst/>
+          </a:prstGeom>
+          <a:noFill/>
+        </p:spPr>
+        <p:txBody>
+          <a:bodyPr wrap="square" lIns="0" rIns="0" tIns="0" bIns="0" anchor="t">
+            <a:spAutoFit/>
+          </a:bodyPr>
+          <a:lstStyle/>
+          <a:p>
+            <a:pPr algn="l">
+              <a:lnSpc>
+                <a:spcPct val="108000"/>
+              </a:lnSpc>
+            </a:pPr>
+            <a:r>
+              <a:rPr sz="1050" b="0">
+                <a:solidFill>
+                  <a:srgbClr val="B0BEC5"/>
+                </a:solidFill>
+                <a:latin typeface="Aptos"/>
+              </a:rPr>
+              <a:t>6,650 completed orders</a:t>
+            </a:r>
+          </a:p>
+        </p:txBody>
+      </p:sp>
+      <p:sp>
+        <p:nvSpPr>
+          <p:cNvPr id="26" name="Rectangle 25"/>
+          <p:cNvSpPr/>
+          <p:nvPr/>
+        </p:nvSpPr>
+        <p:spPr>
+          <a:xfrm>
+            <a:off x="3474720" y="3584448"/>
+            <a:ext cx="2587752" cy="1371600"/>
+          </a:xfrm>
+          <a:prstGeom prst="rect">
+            <a:avLst/>
+          </a:prstGeom>
+          <a:solidFill>
+            <a:srgbClr val="1F3056"/>
+          </a:solidFill>
+          <a:ln w="12700">
+            <a:solidFill>
+              <a:srgbClr val="2D426D"/>
+            </a:solidFill>
+          </a:ln>
+        </p:spPr>
+        <p:style>
+          <a:lnRef idx="1">
+            <a:schemeClr val="accent1"/>
+          </a:lnRef>
+          <a:fillRef idx="3">
+            <a:schemeClr val="accent1"/>
+          </a:fillRef>
+          <a:effectRef idx="2">
+            <a:schemeClr val="accent1"/>
+          </a:effectRef>
+          <a:fontRef idx="minor">
+            <a:schemeClr val="lt1"/>
+          </a:fontRef>
+        </p:style>
+        <p:txBody>
+          <a:bodyPr rtlCol="0" anchor="ctr"/>
+          <a:lstStyle/>
+          <a:p>
+            <a:pPr algn="ctr"/>
+          </a:p>
+        </p:txBody>
+      </p:sp>
+      <p:sp>
+        <p:nvSpPr>
+          <p:cNvPr id="27" name="TextBox 26"/>
+          <p:cNvSpPr txBox="1"/>
+          <p:nvPr/>
+        </p:nvSpPr>
+        <p:spPr>
+          <a:xfrm>
+            <a:off x="3639312" y="3749040"/>
+            <a:ext cx="2258568" cy="201168"/>
+          </a:xfrm>
+          <a:prstGeom prst="rect">
+            <a:avLst/>
+          </a:prstGeom>
+          <a:noFill/>
+        </p:spPr>
+        <p:txBody>
+          <a:bodyPr wrap="square" lIns="0" rIns="0" tIns="0" bIns="0" anchor="t">
+            <a:spAutoFit/>
+          </a:bodyPr>
+          <a:lstStyle/>
+          <a:p>
+            <a:pPr algn="l">
+              <a:lnSpc>
+                <a:spcPct val="108000"/>
+              </a:lnSpc>
+            </a:pPr>
+            <a:r>
+              <a:rPr sz="1050" b="1">
+                <a:solidFill>
+                  <a:srgbClr val="B0BEC5"/>
+                </a:solidFill>
+                <a:latin typeface="Aptos"/>
+              </a:rPr>
+              <a:t>REFUND</a:t>
+            </a:r>
+          </a:p>
+        </p:txBody>
+      </p:sp>
+      <p:sp>
+        <p:nvSpPr>
+          <p:cNvPr id="28" name="TextBox 27"/>
+          <p:cNvSpPr txBox="1"/>
+          <p:nvPr/>
+        </p:nvSpPr>
+        <p:spPr>
+          <a:xfrm>
+            <a:off x="3639312" y="4041648"/>
+            <a:ext cx="2258568" cy="420624"/>
+          </a:xfrm>
+          <a:prstGeom prst="rect">
+            <a:avLst/>
+          </a:prstGeom>
+          <a:noFill/>
+        </p:spPr>
+        <p:txBody>
+          <a:bodyPr wrap="square" lIns="0" rIns="0" tIns="0" bIns="0" anchor="t">
+            <a:spAutoFit/>
+          </a:bodyPr>
+          <a:lstStyle/>
+          <a:p>
+            <a:pPr algn="l">
+              <a:lnSpc>
+                <a:spcPct val="108000"/>
+              </a:lnSpc>
+            </a:pPr>
+            <a:r>
+              <a:rPr sz="2700" b="1">
+                <a:solidFill>
+                  <a:srgbClr val="FF6B6B"/>
+                </a:solidFill>
+                <a:latin typeface="Aptos Display"/>
+              </a:rPr>
+              <a:t>16.6%</a:t>
+            </a:r>
+          </a:p>
+        </p:txBody>
+      </p:sp>
+      <p:sp>
+        <p:nvSpPr>
+          <p:cNvPr id="29" name="TextBox 28"/>
+          <p:cNvSpPr txBox="1"/>
+          <p:nvPr/>
+        </p:nvSpPr>
+        <p:spPr>
+          <a:xfrm>
+            <a:off x="3639312" y="4553712"/>
+            <a:ext cx="2258568" cy="320040"/>
+          </a:xfrm>
+          <a:prstGeom prst="rect">
+            <a:avLst/>
+          </a:prstGeom>
+          <a:noFill/>
+        </p:spPr>
+        <p:txBody>
+          <a:bodyPr wrap="square" lIns="0" rIns="0" tIns="0" bIns="0" anchor="t">
+            <a:spAutoFit/>
+          </a:bodyPr>
+          <a:lstStyle/>
+          <a:p>
+            <a:pPr algn="l">
+              <a:lnSpc>
+                <a:spcPct val="108000"/>
+              </a:lnSpc>
+            </a:pPr>
+            <a:r>
+              <a:rPr sz="1050" b="0">
+                <a:solidFill>
+                  <a:srgbClr val="B0BEC5"/>
+                </a:solidFill>
+                <a:latin typeface="Aptos"/>
+              </a:rPr>
+              <a:t>1,664 refunded orders</a:t>
+            </a:r>
+          </a:p>
+        </p:txBody>
+      </p:sp>
+      <p:sp>
+        <p:nvSpPr>
+          <p:cNvPr id="30" name="Rectangle 29"/>
+          <p:cNvSpPr/>
+          <p:nvPr/>
+        </p:nvSpPr>
+        <p:spPr>
+          <a:xfrm>
+            <a:off x="6291072" y="3584448"/>
+            <a:ext cx="2587752" cy="1371600"/>
+          </a:xfrm>
+          <a:prstGeom prst="rect">
+            <a:avLst/>
+          </a:prstGeom>
+          <a:solidFill>
+            <a:srgbClr val="1F3056"/>
+          </a:solidFill>
+          <a:ln w="12700">
+            <a:solidFill>
+              <a:srgbClr val="2D426D"/>
+            </a:solidFill>
+          </a:ln>
+        </p:spPr>
+        <p:style>
+          <a:lnRef idx="1">
+            <a:schemeClr val="accent1"/>
+          </a:lnRef>
+          <a:fillRef idx="3">
+            <a:schemeClr val="accent1"/>
+          </a:fillRef>
+          <a:effectRef idx="2">
+            <a:schemeClr val="accent1"/>
+          </a:effectRef>
+          <a:fontRef idx="minor">
+            <a:schemeClr val="lt1"/>
+          </a:fontRef>
+        </p:style>
+        <p:txBody>
+          <a:bodyPr rtlCol="0" anchor="ctr"/>
+          <a:lstStyle/>
+          <a:p>
+            <a:pPr algn="ctr"/>
+          </a:p>
+        </p:txBody>
+      </p:sp>
+      <p:sp>
+        <p:nvSpPr>
+          <p:cNvPr id="31" name="TextBox 30"/>
+          <p:cNvSpPr txBox="1"/>
+          <p:nvPr/>
+        </p:nvSpPr>
+        <p:spPr>
+          <a:xfrm>
+            <a:off x="6455664" y="3749040"/>
+            <a:ext cx="2258568" cy="201168"/>
+          </a:xfrm>
+          <a:prstGeom prst="rect">
+            <a:avLst/>
+          </a:prstGeom>
+          <a:noFill/>
+        </p:spPr>
+        <p:txBody>
+          <a:bodyPr wrap="square" lIns="0" rIns="0" tIns="0" bIns="0" anchor="t">
+            <a:spAutoFit/>
+          </a:bodyPr>
+          <a:lstStyle/>
+          <a:p>
+            <a:pPr algn="l">
+              <a:lnSpc>
+                <a:spcPct val="108000"/>
+              </a:lnSpc>
+            </a:pPr>
+            <a:r>
+              <a:rPr sz="1050" b="1">
+                <a:solidFill>
+                  <a:srgbClr val="B0BEC5"/>
+                </a:solidFill>
+                <a:latin typeface="Aptos"/>
+              </a:rPr>
+              <a:t>BASKET</a:t>
+            </a:r>
+          </a:p>
+        </p:txBody>
+      </p:sp>
+      <p:sp>
+        <p:nvSpPr>
+          <p:cNvPr id="32" name="TextBox 31"/>
+          <p:cNvSpPr txBox="1"/>
+          <p:nvPr/>
+        </p:nvSpPr>
+        <p:spPr>
+          <a:xfrm>
+            <a:off x="6455664" y="4041648"/>
+            <a:ext cx="2258568" cy="420624"/>
+          </a:xfrm>
+          <a:prstGeom prst="rect">
+            <a:avLst/>
+          </a:prstGeom>
+          <a:noFill/>
+        </p:spPr>
+        <p:txBody>
+          <a:bodyPr wrap="square" lIns="0" rIns="0" tIns="0" bIns="0" anchor="t">
+            <a:spAutoFit/>
+          </a:bodyPr>
+          <a:lstStyle/>
+          <a:p>
+            <a:pPr algn="l">
+              <a:lnSpc>
+                <a:spcPct val="108000"/>
+              </a:lnSpc>
+            </a:pPr>
+            <a:r>
+              <a:rPr sz="2700" b="1">
+                <a:solidFill>
+                  <a:srgbClr val="FFB300"/>
+                </a:solidFill>
+                <a:latin typeface="Aptos Display"/>
+              </a:rPr>
+              <a:t>2.5 items</a:t>
+            </a:r>
+          </a:p>
+        </p:txBody>
+      </p:sp>
+      <p:sp>
+        <p:nvSpPr>
+          <p:cNvPr id="33" name="TextBox 32"/>
+          <p:cNvSpPr txBox="1"/>
+          <p:nvPr/>
+        </p:nvSpPr>
+        <p:spPr>
+          <a:xfrm>
+            <a:off x="6455664" y="4553712"/>
+            <a:ext cx="2258568" cy="320040"/>
+          </a:xfrm>
+          <a:prstGeom prst="rect">
+            <a:avLst/>
+          </a:prstGeom>
+          <a:noFill/>
+        </p:spPr>
+        <p:txBody>
+          <a:bodyPr wrap="square" lIns="0" rIns="0" tIns="0" bIns="0" anchor="t">
+            <a:spAutoFit/>
+          </a:bodyPr>
+          <a:lstStyle/>
+          <a:p>
+            <a:pPr algn="l">
+              <a:lnSpc>
+                <a:spcPct val="108000"/>
+              </a:lnSpc>
+            </a:pPr>
+            <a:r>
+              <a:rPr sz="1050" b="0">
+                <a:solidFill>
+                  <a:srgbClr val="B0BEC5"/>
+                </a:solidFill>
+                <a:latin typeface="Aptos"/>
+              </a:rPr>
+              <a:t>Average items per order</a:t>
+            </a:r>
+          </a:p>
+        </p:txBody>
+      </p:sp>
+      <p:sp>
+        <p:nvSpPr>
+          <p:cNvPr id="34" name="Rectangle 33"/>
+          <p:cNvSpPr/>
+          <p:nvPr/>
+        </p:nvSpPr>
+        <p:spPr>
+          <a:xfrm>
+            <a:off x="9107424" y="3584448"/>
+            <a:ext cx="2587752" cy="1371600"/>
+          </a:xfrm>
+          <a:prstGeom prst="rect">
+            <a:avLst/>
+          </a:prstGeom>
+          <a:solidFill>
+            <a:srgbClr val="1F3056"/>
+          </a:solidFill>
+          <a:ln w="12700">
+            <a:solidFill>
+              <a:srgbClr val="2D426D"/>
+            </a:solidFill>
+          </a:ln>
+        </p:spPr>
+        <p:style>
+          <a:lnRef idx="1">
+            <a:schemeClr val="accent1"/>
+          </a:lnRef>
+          <a:fillRef idx="3">
+            <a:schemeClr val="accent1"/>
+          </a:fillRef>
+          <a:effectRef idx="2">
+            <a:schemeClr val="accent1"/>
+          </a:effectRef>
+          <a:fontRef idx="minor">
+            <a:schemeClr val="lt1"/>
+          </a:fontRef>
+        </p:style>
+        <p:txBody>
+          <a:bodyPr rtlCol="0" anchor="ctr"/>
+          <a:lstStyle/>
+          <a:p>
+            <a:pPr algn="ctr"/>
+          </a:p>
+        </p:txBody>
+      </p:sp>
+      <p:sp>
+        <p:nvSpPr>
+          <p:cNvPr id="35" name="TextBox 34"/>
+          <p:cNvSpPr txBox="1"/>
+          <p:nvPr/>
+        </p:nvSpPr>
+        <p:spPr>
+          <a:xfrm>
+            <a:off x="9272016" y="3749040"/>
+            <a:ext cx="2258568" cy="201168"/>
+          </a:xfrm>
+          <a:prstGeom prst="rect">
+            <a:avLst/>
+          </a:prstGeom>
+          <a:noFill/>
+        </p:spPr>
+        <p:txBody>
+          <a:bodyPr wrap="square" lIns="0" rIns="0" tIns="0" bIns="0" anchor="t">
+            <a:spAutoFit/>
+          </a:bodyPr>
+          <a:lstStyle/>
+          <a:p>
+            <a:pPr algn="l">
+              <a:lnSpc>
+                <a:spcPct val="108000"/>
+              </a:lnSpc>
+            </a:pPr>
+            <a:r>
+              <a:rPr sz="1050" b="1">
+                <a:solidFill>
+                  <a:srgbClr val="B0BEC5"/>
+                </a:solidFill>
+                <a:latin typeface="Aptos"/>
+              </a:rPr>
+              <a:t>ACTIVE BUYERS</a:t>
+            </a:r>
+          </a:p>
+        </p:txBody>
+      </p:sp>
+      <p:sp>
+        <p:nvSpPr>
+          <p:cNvPr id="36" name="TextBox 35"/>
+          <p:cNvSpPr txBox="1"/>
+          <p:nvPr/>
+        </p:nvSpPr>
+        <p:spPr>
+          <a:xfrm>
+            <a:off x="9272016" y="4041648"/>
+            <a:ext cx="2258568" cy="420624"/>
+          </a:xfrm>
+          <a:prstGeom prst="rect">
+            <a:avLst/>
+          </a:prstGeom>
+          <a:noFill/>
+        </p:spPr>
+        <p:txBody>
+          <a:bodyPr wrap="square" lIns="0" rIns="0" tIns="0" bIns="0" anchor="t">
+            <a:spAutoFit/>
+          </a:bodyPr>
+          <a:lstStyle/>
+          <a:p>
+            <a:pPr algn="l">
+              <a:lnSpc>
+                <a:spcPct val="108000"/>
+              </a:lnSpc>
+            </a:pPr>
+            <a:r>
+              <a:rPr sz="2700" b="1">
+                <a:solidFill>
+                  <a:srgbClr val="58A6FF"/>
+                </a:solidFill>
+                <a:latin typeface="Aptos Display"/>
+              </a:rPr>
+              <a:t>1,000</a:t>
+            </a:r>
+          </a:p>
+        </p:txBody>
+      </p:sp>
+      <p:sp>
+        <p:nvSpPr>
+          <p:cNvPr id="37" name="TextBox 36"/>
+          <p:cNvSpPr txBox="1"/>
+          <p:nvPr/>
+        </p:nvSpPr>
+        <p:spPr>
+          <a:xfrm>
+            <a:off x="9272016" y="4553712"/>
+            <a:ext cx="2258568" cy="320040"/>
+          </a:xfrm>
+          <a:prstGeom prst="rect">
+            <a:avLst/>
+          </a:prstGeom>
+          <a:noFill/>
+        </p:spPr>
+        <p:txBody>
+          <a:bodyPr wrap="square" lIns="0" rIns="0" tIns="0" bIns="0" anchor="t">
+            <a:spAutoFit/>
+          </a:bodyPr>
+          <a:lstStyle/>
+          <a:p>
+            <a:pPr algn="l">
+              <a:lnSpc>
+                <a:spcPct val="108000"/>
+              </a:lnSpc>
+            </a:pPr>
+            <a:r>
+              <a:rPr sz="1050" b="0">
+                <a:solidFill>
+                  <a:srgbClr val="B0BEC5"/>
+                </a:solidFill>
+                <a:latin typeface="Aptos"/>
+              </a:rPr>
+              <a:t>Across 20 categories</a:t>
+            </a:r>
+          </a:p>
+        </p:txBody>
+      </p:sp>
+      <p:sp>
+        <p:nvSpPr>
+          <p:cNvPr id="38" name="Rectangle 37"/>
+          <p:cNvSpPr/>
+          <p:nvPr/>
+        </p:nvSpPr>
+        <p:spPr>
+          <a:xfrm>
+            <a:off x="658368" y="5321808"/>
+            <a:ext cx="10863072" cy="566928"/>
+          </a:xfrm>
+          <a:prstGeom prst="rect">
+            <a:avLst/>
+          </a:prstGeom>
+          <a:solidFill>
+            <a:srgbClr val="17243F"/>
+          </a:solidFill>
+          <a:ln w="12700">
+            <a:solidFill>
+              <a:srgbClr val="2D426D"/>
+            </a:solidFill>
+          </a:ln>
+        </p:spPr>
+        <p:style>
+          <a:lnRef idx="1">
+            <a:schemeClr val="accent1"/>
+          </a:lnRef>
+          <a:fillRef idx="3">
+            <a:schemeClr val="accent1"/>
+          </a:fillRef>
+          <a:effectRef idx="2">
+            <a:schemeClr val="accent1"/>
+          </a:effectRef>
+          <a:fontRef idx="minor">
+            <a:schemeClr val="lt1"/>
+          </a:fontRef>
+        </p:style>
+        <p:txBody>
+          <a:bodyPr rtlCol="0" anchor="ctr"/>
+          <a:lstStyle/>
+          <a:p>
+            <a:pPr algn="ctr"/>
+          </a:p>
+        </p:txBody>
+      </p:sp>
+      <p:sp>
+        <p:nvSpPr>
+          <p:cNvPr id="39" name="TextBox 38"/>
+          <p:cNvSpPr txBox="1"/>
+          <p:nvPr/>
+        </p:nvSpPr>
+        <p:spPr>
+          <a:xfrm>
+            <a:off x="877824" y="5504688"/>
+            <a:ext cx="10424160" cy="201168"/>
+          </a:xfrm>
+          <a:prstGeom prst="rect">
+            <a:avLst/>
+          </a:prstGeom>
+          <a:noFill/>
+        </p:spPr>
+        <p:txBody>
+          <a:bodyPr wrap="square" lIns="0" rIns="0" tIns="0" bIns="0" anchor="t">
+            <a:spAutoFit/>
+          </a:bodyPr>
+          <a:lstStyle/>
+          <a:p>
+            <a:pPr algn="l">
+              <a:lnSpc>
+                <a:spcPct val="108000"/>
+              </a:lnSpc>
+            </a:pPr>
+            <a:r>
+              <a:rPr sz="1400" b="1">
+                <a:solidFill>
+                  <a:srgbClr val="FFFFFF"/>
+                </a:solidFill>
+                <a:latin typeface="Aptos"/>
+              </a:rPr>
+              <a:t>Demo data scope: 10K orders | 500 products | 1,000 users | 8 regions | 20 categories</a:t>
+            </a:r>
+          </a:p>
+        </p:txBody>
+      </p:sp>
+      <p:sp>
+        <p:nvSpPr>
+          <p:cNvPr id="40" name="TextBox 39"/>
+          <p:cNvSpPr txBox="1"/>
+          <p:nvPr/>
+        </p:nvSpPr>
+        <p:spPr>
+          <a:xfrm>
+            <a:off x="658368" y="6510528"/>
+            <a:ext cx="5029200" cy="164592"/>
+          </a:xfrm>
+          <a:prstGeom prst="rect">
+            <a:avLst/>
+          </a:prstGeom>
+          <a:noFill/>
+        </p:spPr>
+        <p:txBody>
+          <a:bodyPr wrap="square" lIns="0" rIns="0" tIns="0" bIns="0" anchor="t">
+            <a:spAutoFit/>
+          </a:bodyPr>
+          <a:lstStyle/>
+          <a:p>
+            <a:pPr algn="l">
+              <a:lnSpc>
+                <a:spcPct val="108000"/>
+              </a:lnSpc>
+            </a:pPr>
+            <a:r>
+              <a:rPr sz="850" b="0">
+                <a:solidFill>
+                  <a:srgbClr val="7F90A8"/>
+                </a:solidFill>
+                <a:latin typeface="Aptos"/>
+              </a:rPr>
+              <a:t>QueryForge | ClawHunt Builder Camp 2026</a:t>
+            </a:r>
+          </a:p>
+        </p:txBody>
+      </p:sp>
+      <p:sp>
+        <p:nvSpPr>
+          <p:cNvPr id="41" name="TextBox 40"/>
+          <p:cNvSpPr txBox="1"/>
+          <p:nvPr/>
+        </p:nvSpPr>
+        <p:spPr>
+          <a:xfrm>
+            <a:off x="10972800" y="6510528"/>
+            <a:ext cx="594360" cy="164592"/>
+          </a:xfrm>
+          <a:prstGeom prst="rect">
+            <a:avLst/>
+          </a:prstGeom>
+          <a:noFill/>
+        </p:spPr>
+        <p:txBody>
+          <a:bodyPr wrap="square" lIns="0" rIns="0" tIns="0" bIns="0" anchor="t">
+            <a:spAutoFit/>
+          </a:bodyPr>
+          <a:lstStyle/>
+          <a:p>
+            <a:pPr algn="r">
+              <a:lnSpc>
+                <a:spcPct val="108000"/>
+              </a:lnSpc>
+            </a:pPr>
+            <a:r>
+              <a:rPr sz="850" b="0">
+                <a:solidFill>
+                  <a:srgbClr val="7F90A8"/>
+                </a:solidFill>
+                <a:latin typeface="Aptos"/>
+              </a:rPr>
+              <a:t>5/9</a:t>
             </a:r>
           </a:p>
         </p:txBody>
@@ -4074,7 +7771,7 @@
     <p:bg>
       <p:bgPr>
         <a:solidFill>
-          <a:srgbClr val="1A1F2E"/>
+          <a:srgbClr val="1B2A4A"/>
         </a:solidFill>
         <a:effectLst/>
       </p:bgPr>
@@ -4094,50 +7791,92 @@
         </p:nvSpPr>
         <p:spPr>
           <a:xfrm>
-            <a:off x="914400" y="914400"/>
-            <a:ext cx="9144000" cy="548640"/>
-          </a:xfrm>
-          <a:prstGeom prst="rect">
-            <a:avLst/>
-          </a:prstGeom>
-          <a:noFill/>
-        </p:spPr>
-        <p:txBody>
-          <a:bodyPr wrap="square">
-            <a:spAutoFit/>
-          </a:bodyPr>
-          <a:lstStyle/>
-          <a:p>
-            <a:pPr algn="l"/>
-            <a:r>
-              <a:rPr sz="3000" b="1">
-                <a:solidFill>
-                  <a:srgbClr val="F0EEE8"/>
-                </a:solidFill>
-                <a:latin typeface="Arial"/>
-                <a:ea typeface="Microsoft YaHei"/>
-              </a:rPr>
-              <a:t>一个产品，两方受益</a:t>
-            </a:r>
-          </a:p>
-        </p:txBody>
-      </p:sp>
-      <p:sp>
-        <p:nvSpPr>
-          <p:cNvPr id="3" name="Rounded Rectangle 2"/>
+            <a:off x="658368" y="384048"/>
+            <a:ext cx="3474720" cy="237744"/>
+          </a:xfrm>
+          <a:prstGeom prst="rect">
+            <a:avLst/>
+          </a:prstGeom>
+          <a:noFill/>
+        </p:spPr>
+        <p:txBody>
+          <a:bodyPr wrap="square" lIns="0" rIns="0" tIns="0" bIns="0" anchor="t">
+            <a:spAutoFit/>
+          </a:bodyPr>
+          <a:lstStyle/>
+          <a:p>
+            <a:pPr algn="l">
+              <a:lnSpc>
+                <a:spcPct val="108000"/>
+              </a:lnSpc>
+            </a:pPr>
+            <a:r>
+              <a:rPr sz="1000" b="1">
+                <a:solidFill>
+                  <a:srgbClr val="FFB300"/>
+                </a:solidFill>
+                <a:latin typeface="Aptos"/>
+              </a:rPr>
+              <a:t>HOW IT WORKS</a:t>
+            </a:r>
+          </a:p>
+        </p:txBody>
+      </p:sp>
+      <p:sp>
+        <p:nvSpPr>
+          <p:cNvPr id="3" name="TextBox 2"/>
+          <p:cNvSpPr txBox="1"/>
+          <p:nvPr/>
+        </p:nvSpPr>
+        <p:spPr>
+          <a:xfrm>
+            <a:off x="658368" y="658368"/>
+            <a:ext cx="8778240" cy="658368"/>
+          </a:xfrm>
+          <a:prstGeom prst="rect">
+            <a:avLst/>
+          </a:prstGeom>
+          <a:noFill/>
+        </p:spPr>
+        <p:txBody>
+          <a:bodyPr wrap="square" lIns="0" rIns="0" tIns="0" bIns="0" anchor="t">
+            <a:spAutoFit/>
+          </a:bodyPr>
+          <a:lstStyle/>
+          <a:p>
+            <a:pPr algn="l">
+              <a:lnSpc>
+                <a:spcPct val="108000"/>
+              </a:lnSpc>
+            </a:pPr>
+            <a:r>
+              <a:rPr sz="3200" b="1">
+                <a:solidFill>
+                  <a:srgbClr val="FFFFFF"/>
+                </a:solidFill>
+                <a:latin typeface="Aptos Display"/>
+              </a:rPr>
+              <a:t>Question to answer, with progress visible throughout.</a:t>
+            </a:r>
+          </a:p>
+        </p:txBody>
+      </p:sp>
+      <p:sp>
+        <p:nvSpPr>
+          <p:cNvPr id="4" name="Rectangle 3"/>
           <p:cNvSpPr/>
           <p:nvPr/>
         </p:nvSpPr>
         <p:spPr>
           <a:xfrm>
-            <a:off x="914400" y="1828800"/>
-            <a:ext cx="4572000" cy="3657600"/>
-          </a:xfrm>
-          <a:prstGeom prst="roundRect">
+            <a:off x="658368" y="1325880"/>
+            <a:ext cx="1965960" cy="38100"/>
+          </a:xfrm>
+          <a:prstGeom prst="rect">
             <a:avLst/>
           </a:prstGeom>
           <a:solidFill>
-            <a:srgbClr val="2A2F3E"/>
+            <a:srgbClr val="FFB300"/>
           </a:solidFill>
           <a:ln>
             <a:noFill/>
@@ -4167,97 +7906,64 @@
       </p:sp>
       <p:sp>
         <p:nvSpPr>
-          <p:cNvPr id="4" name="TextBox 3"/>
-          <p:cNvSpPr txBox="1"/>
-          <p:nvPr/>
-        </p:nvSpPr>
-        <p:spPr>
-          <a:xfrm>
-            <a:off x="1188720" y="2011680"/>
-            <a:ext cx="4023360" cy="365760"/>
-          </a:xfrm>
-          <a:prstGeom prst="rect">
-            <a:avLst/>
-          </a:prstGeom>
-          <a:noFill/>
-        </p:spPr>
-        <p:txBody>
-          <a:bodyPr wrap="square">
-            <a:spAutoFit/>
-          </a:bodyPr>
-          <a:lstStyle/>
-          <a:p>
-            <a:pPr algn="l"/>
-            <a:r>
-              <a:rPr sz="1600" b="1">
-                <a:solidFill>
-                  <a:srgbClr val="D4A853"/>
-                </a:solidFill>
-                <a:latin typeface="Arial"/>
-                <a:ea typeface="Microsoft YaHei"/>
-              </a:rPr>
-              <a:t>分析师</a:t>
-            </a:r>
-          </a:p>
-        </p:txBody>
-      </p:sp>
-      <p:sp>
-        <p:nvSpPr>
           <p:cNvPr id="5" name="TextBox 4"/>
           <p:cNvSpPr txBox="1"/>
           <p:nvPr/>
         </p:nvSpPr>
         <p:spPr>
           <a:xfrm>
-            <a:off x="1188720" y="2468880"/>
-            <a:ext cx="4023360" cy="2743200"/>
-          </a:xfrm>
-          <a:prstGeom prst="rect">
-            <a:avLst/>
-          </a:prstGeom>
-          <a:noFill/>
-        </p:spPr>
-        <p:txBody>
-          <a:bodyPr wrap="square">
-            <a:spAutoFit/>
-          </a:bodyPr>
-          <a:lstStyle/>
-          <a:p>
-            <a:pPr algn="l"/>
-            <a:r>
-              <a:rPr sz="1500" b="0">
-                <a:solidFill>
-                  <a:srgbClr val="F0EEE8"/>
-                </a:solidFill>
-                <a:latin typeface="Arial"/>
-                <a:ea typeface="Microsoft YaHei"/>
-              </a:rPr>
-              <a:t>减少重复取数工作
-专注于指标定义和数据治理
-从'拉数的'变成'定标准的'</a:t>
-            </a:r>
-          </a:p>
-        </p:txBody>
-      </p:sp>
-      <p:sp>
-        <p:nvSpPr>
-          <p:cNvPr id="6" name="Rounded Rectangle 5"/>
+            <a:off x="658368" y="1481328"/>
+            <a:ext cx="9692640" cy="347472"/>
+          </a:xfrm>
+          <a:prstGeom prst="rect">
+            <a:avLst/>
+          </a:prstGeom>
+          <a:noFill/>
+        </p:spPr>
+        <p:txBody>
+          <a:bodyPr wrap="square" lIns="0" rIns="0" tIns="0" bIns="0" anchor="t">
+            <a:spAutoFit/>
+          </a:bodyPr>
+          <a:lstStyle/>
+          <a:p>
+            <a:pPr algn="l">
+              <a:lnSpc>
+                <a:spcPct val="108000"/>
+              </a:lnSpc>
+            </a:pPr>
+            <a:r>
+              <a:rPr sz="1300" b="0">
+                <a:solidFill>
+                  <a:srgbClr val="B0BEC5"/>
+                </a:solidFill>
+                <a:latin typeface="Aptos"/>
+              </a:rPr>
+              <a:t>The flow is designed for business users: ask, watch progress, inspect the chart, reuse the metric.</a:t>
+            </a:r>
+          </a:p>
+        </p:txBody>
+      </p:sp>
+      <p:sp>
+        <p:nvSpPr>
+          <p:cNvPr id="6" name="Rectangle 5"/>
           <p:cNvSpPr/>
           <p:nvPr/>
         </p:nvSpPr>
         <p:spPr>
           <a:xfrm>
-            <a:off x="6400800" y="1828800"/>
-            <a:ext cx="4572000" cy="3657600"/>
-          </a:xfrm>
-          <a:prstGeom prst="roundRect">
+            <a:off x="658368" y="1938528"/>
+            <a:ext cx="2057400" cy="1371600"/>
+          </a:xfrm>
+          <a:prstGeom prst="rect">
             <a:avLst/>
           </a:prstGeom>
           <a:solidFill>
-            <a:srgbClr val="2A2F3E"/>
+            <a:srgbClr val="1F3056"/>
           </a:solidFill>
-          <a:ln>
-            <a:noFill/>
+          <a:ln w="12700">
+            <a:solidFill>
+              <a:srgbClr val="2D426D"/>
+            </a:solidFill>
           </a:ln>
         </p:spPr>
         <p:style>
@@ -4290,30 +7996,33 @@
         </p:nvSpPr>
         <p:spPr>
           <a:xfrm>
-            <a:off x="6675120" y="2011680"/>
-            <a:ext cx="4023360" cy="365760"/>
-          </a:xfrm>
-          <a:prstGeom prst="rect">
-            <a:avLst/>
-          </a:prstGeom>
-          <a:noFill/>
-        </p:spPr>
-        <p:txBody>
-          <a:bodyPr wrap="square">
-            <a:spAutoFit/>
-          </a:bodyPr>
-          <a:lstStyle/>
-          <a:p>
-            <a:pPr algn="l"/>
-            <a:r>
-              <a:rPr sz="1600" b="1">
-                <a:solidFill>
-                  <a:srgbClr val="D4A853"/>
-                </a:solidFill>
-                <a:latin typeface="Arial"/>
-                <a:ea typeface="Microsoft YaHei"/>
-              </a:rPr>
-              <a:t>业务团队</a:t>
+            <a:off x="822960" y="2066544"/>
+            <a:ext cx="548640" cy="256032"/>
+          </a:xfrm>
+          <a:prstGeom prst="rect">
+            <a:avLst/>
+          </a:prstGeom>
+          <a:noFill/>
+        </p:spPr>
+        <p:txBody>
+          <a:bodyPr wrap="square" lIns="0" rIns="0" tIns="0" bIns="0" anchor="t">
+            <a:spAutoFit/>
+          </a:bodyPr>
+          <a:lstStyle/>
+          <a:p>
+            <a:pPr algn="l">
+              <a:lnSpc>
+                <a:spcPct val="108000"/>
+              </a:lnSpc>
+            </a:pPr>
+            <a:r>
+              <a:rPr sz="1100" b="1">
+                <a:solidFill>
+                  <a:srgbClr val="FFB300"/>
+                </a:solidFill>
+                <a:latin typeface="Aptos"/>
+              </a:rPr>
+              <a:t>1</a:t>
             </a:r>
           </a:p>
         </p:txBody>
@@ -4326,32 +8035,915 @@
         </p:nvSpPr>
         <p:spPr>
           <a:xfrm>
-            <a:off x="6675120" y="2468880"/>
-            <a:ext cx="4023360" cy="2743200"/>
-          </a:xfrm>
-          <a:prstGeom prst="rect">
-            <a:avLst/>
-          </a:prstGeom>
-          <a:noFill/>
-        </p:spPr>
-        <p:txBody>
-          <a:bodyPr wrap="square">
-            <a:spAutoFit/>
-          </a:bodyPr>
-          <a:lstStyle/>
-          <a:p>
-            <a:pPr algn="l"/>
-            <a:r>
-              <a:rPr sz="1500" b="0">
-                <a:solidFill>
-                  <a:srgbClr val="F0EEE8"/>
-                </a:solidFill>
-                <a:latin typeface="Arial"/>
-                <a:ea typeface="Microsoft YaHei"/>
-              </a:rPr>
-              <a:t>随时提问，不用排队
-自己看数据，自己做决策
-从'等报表'到'看数据'</a:t>
+            <a:off x="822960" y="2395728"/>
+            <a:ext cx="1728216" cy="274320"/>
+          </a:xfrm>
+          <a:prstGeom prst="rect">
+            <a:avLst/>
+          </a:prstGeom>
+          <a:noFill/>
+        </p:spPr>
+        <p:txBody>
+          <a:bodyPr wrap="square" lIns="0" rIns="0" tIns="0" bIns="0" anchor="t">
+            <a:spAutoFit/>
+          </a:bodyPr>
+          <a:lstStyle/>
+          <a:p>
+            <a:pPr algn="l">
+              <a:lnSpc>
+                <a:spcPct val="108000"/>
+              </a:lnSpc>
+            </a:pPr>
+            <a:r>
+              <a:rPr sz="1550" b="1">
+                <a:solidFill>
+                  <a:srgbClr val="FFFFFF"/>
+                </a:solidFill>
+                <a:latin typeface="Aptos"/>
+              </a:rPr>
+              <a:t>Ask</a:t>
+            </a:r>
+          </a:p>
+        </p:txBody>
+      </p:sp>
+      <p:sp>
+        <p:nvSpPr>
+          <p:cNvPr id="9" name="TextBox 8"/>
+          <p:cNvSpPr txBox="1"/>
+          <p:nvPr/>
+        </p:nvSpPr>
+        <p:spPr>
+          <a:xfrm>
+            <a:off x="822960" y="2779776"/>
+            <a:ext cx="1728216" cy="411480"/>
+          </a:xfrm>
+          <a:prstGeom prst="rect">
+            <a:avLst/>
+          </a:prstGeom>
+          <a:noFill/>
+        </p:spPr>
+        <p:txBody>
+          <a:bodyPr wrap="square" lIns="0" rIns="0" tIns="0" bIns="0" anchor="t">
+            <a:spAutoFit/>
+          </a:bodyPr>
+          <a:lstStyle/>
+          <a:p>
+            <a:pPr algn="l">
+              <a:lnSpc>
+                <a:spcPct val="108000"/>
+              </a:lnSpc>
+            </a:pPr>
+            <a:r>
+              <a:rPr sz="1150" b="0">
+                <a:solidFill>
+                  <a:srgbClr val="B0BEC5"/>
+                </a:solidFill>
+                <a:latin typeface="Aptos"/>
+              </a:rPr>
+              <a:t>Type a business question in natural language.</a:t>
+            </a:r>
+          </a:p>
+        </p:txBody>
+      </p:sp>
+      <p:sp>
+        <p:nvSpPr>
+          <p:cNvPr id="10" name="TextBox 9"/>
+          <p:cNvSpPr txBox="1"/>
+          <p:nvPr/>
+        </p:nvSpPr>
+        <p:spPr>
+          <a:xfrm>
+            <a:off x="3044952" y="2514600"/>
+            <a:ext cx="310896" cy="164592"/>
+          </a:xfrm>
+          <a:prstGeom prst="rect">
+            <a:avLst/>
+          </a:prstGeom>
+          <a:noFill/>
+        </p:spPr>
+        <p:txBody>
+          <a:bodyPr wrap="square" lIns="0" rIns="0" tIns="0" bIns="0" anchor="t">
+            <a:spAutoFit/>
+          </a:bodyPr>
+          <a:lstStyle/>
+          <a:p>
+            <a:pPr algn="ctr">
+              <a:lnSpc>
+                <a:spcPct val="108000"/>
+              </a:lnSpc>
+            </a:pPr>
+            <a:r>
+              <a:rPr sz="1400" b="1">
+                <a:solidFill>
+                  <a:srgbClr val="FFB300"/>
+                </a:solidFill>
+                <a:latin typeface="Aptos"/>
+              </a:rPr>
+              <a:t>-&gt;</a:t>
+            </a:r>
+          </a:p>
+        </p:txBody>
+      </p:sp>
+      <p:sp>
+        <p:nvSpPr>
+          <p:cNvPr id="11" name="Rectangle 10"/>
+          <p:cNvSpPr/>
+          <p:nvPr/>
+        </p:nvSpPr>
+        <p:spPr>
+          <a:xfrm>
+            <a:off x="3429000" y="1938528"/>
+            <a:ext cx="2057400" cy="1371600"/>
+          </a:xfrm>
+          <a:prstGeom prst="rect">
+            <a:avLst/>
+          </a:prstGeom>
+          <a:solidFill>
+            <a:srgbClr val="1F3056"/>
+          </a:solidFill>
+          <a:ln w="12700">
+            <a:solidFill>
+              <a:srgbClr val="2D426D"/>
+            </a:solidFill>
+          </a:ln>
+        </p:spPr>
+        <p:style>
+          <a:lnRef idx="1">
+            <a:schemeClr val="accent1"/>
+          </a:lnRef>
+          <a:fillRef idx="3">
+            <a:schemeClr val="accent1"/>
+          </a:fillRef>
+          <a:effectRef idx="2">
+            <a:schemeClr val="accent1"/>
+          </a:effectRef>
+          <a:fontRef idx="minor">
+            <a:schemeClr val="lt1"/>
+          </a:fontRef>
+        </p:style>
+        <p:txBody>
+          <a:bodyPr rtlCol="0" anchor="ctr"/>
+          <a:lstStyle/>
+          <a:p>
+            <a:pPr algn="ctr"/>
+          </a:p>
+        </p:txBody>
+      </p:sp>
+      <p:sp>
+        <p:nvSpPr>
+          <p:cNvPr id="12" name="TextBox 11"/>
+          <p:cNvSpPr txBox="1"/>
+          <p:nvPr/>
+        </p:nvSpPr>
+        <p:spPr>
+          <a:xfrm>
+            <a:off x="3593592" y="2066544"/>
+            <a:ext cx="548640" cy="256032"/>
+          </a:xfrm>
+          <a:prstGeom prst="rect">
+            <a:avLst/>
+          </a:prstGeom>
+          <a:noFill/>
+        </p:spPr>
+        <p:txBody>
+          <a:bodyPr wrap="square" lIns="0" rIns="0" tIns="0" bIns="0" anchor="t">
+            <a:spAutoFit/>
+          </a:bodyPr>
+          <a:lstStyle/>
+          <a:p>
+            <a:pPr algn="l">
+              <a:lnSpc>
+                <a:spcPct val="108000"/>
+              </a:lnSpc>
+            </a:pPr>
+            <a:r>
+              <a:rPr sz="1100" b="1">
+                <a:solidFill>
+                  <a:srgbClr val="58A6FF"/>
+                </a:solidFill>
+                <a:latin typeface="Aptos"/>
+              </a:rPr>
+              <a:t>2</a:t>
+            </a:r>
+          </a:p>
+        </p:txBody>
+      </p:sp>
+      <p:sp>
+        <p:nvSpPr>
+          <p:cNvPr id="13" name="TextBox 12"/>
+          <p:cNvSpPr txBox="1"/>
+          <p:nvPr/>
+        </p:nvSpPr>
+        <p:spPr>
+          <a:xfrm>
+            <a:off x="3593592" y="2395728"/>
+            <a:ext cx="1728216" cy="274320"/>
+          </a:xfrm>
+          <a:prstGeom prst="rect">
+            <a:avLst/>
+          </a:prstGeom>
+          <a:noFill/>
+        </p:spPr>
+        <p:txBody>
+          <a:bodyPr wrap="square" lIns="0" rIns="0" tIns="0" bIns="0" anchor="t">
+            <a:spAutoFit/>
+          </a:bodyPr>
+          <a:lstStyle/>
+          <a:p>
+            <a:pPr algn="l">
+              <a:lnSpc>
+                <a:spcPct val="108000"/>
+              </a:lnSpc>
+            </a:pPr>
+            <a:r>
+              <a:rPr sz="1550" b="1">
+                <a:solidFill>
+                  <a:srgbClr val="FFFFFF"/>
+                </a:solidFill>
+                <a:latin typeface="Aptos"/>
+              </a:rPr>
+              <a:t>Stream</a:t>
+            </a:r>
+          </a:p>
+        </p:txBody>
+      </p:sp>
+      <p:sp>
+        <p:nvSpPr>
+          <p:cNvPr id="14" name="TextBox 13"/>
+          <p:cNvSpPr txBox="1"/>
+          <p:nvPr/>
+        </p:nvSpPr>
+        <p:spPr>
+          <a:xfrm>
+            <a:off x="3593592" y="2779776"/>
+            <a:ext cx="1728216" cy="411480"/>
+          </a:xfrm>
+          <a:prstGeom prst="rect">
+            <a:avLst/>
+          </a:prstGeom>
+          <a:noFill/>
+        </p:spPr>
+        <p:txBody>
+          <a:bodyPr wrap="square" lIns="0" rIns="0" tIns="0" bIns="0" anchor="t">
+            <a:spAutoFit/>
+          </a:bodyPr>
+          <a:lstStyle/>
+          <a:p>
+            <a:pPr algn="l">
+              <a:lnSpc>
+                <a:spcPct val="108000"/>
+              </a:lnSpc>
+            </a:pPr>
+            <a:r>
+              <a:rPr sz="1150" b="0">
+                <a:solidFill>
+                  <a:srgbClr val="B0BEC5"/>
+                </a:solidFill>
+                <a:latin typeface="Aptos"/>
+              </a:rPr>
+              <a:t>Progress updates show what is happening.</a:t>
+            </a:r>
+          </a:p>
+        </p:txBody>
+      </p:sp>
+      <p:sp>
+        <p:nvSpPr>
+          <p:cNvPr id="15" name="TextBox 14"/>
+          <p:cNvSpPr txBox="1"/>
+          <p:nvPr/>
+        </p:nvSpPr>
+        <p:spPr>
+          <a:xfrm>
+            <a:off x="5815584" y="2514600"/>
+            <a:ext cx="310896" cy="164592"/>
+          </a:xfrm>
+          <a:prstGeom prst="rect">
+            <a:avLst/>
+          </a:prstGeom>
+          <a:noFill/>
+        </p:spPr>
+        <p:txBody>
+          <a:bodyPr wrap="square" lIns="0" rIns="0" tIns="0" bIns="0" anchor="t">
+            <a:spAutoFit/>
+          </a:bodyPr>
+          <a:lstStyle/>
+          <a:p>
+            <a:pPr algn="ctr">
+              <a:lnSpc>
+                <a:spcPct val="108000"/>
+              </a:lnSpc>
+            </a:pPr>
+            <a:r>
+              <a:rPr sz="1400" b="1">
+                <a:solidFill>
+                  <a:srgbClr val="FFB300"/>
+                </a:solidFill>
+                <a:latin typeface="Aptos"/>
+              </a:rPr>
+              <a:t>-&gt;</a:t>
+            </a:r>
+          </a:p>
+        </p:txBody>
+      </p:sp>
+      <p:sp>
+        <p:nvSpPr>
+          <p:cNvPr id="16" name="Rectangle 15"/>
+          <p:cNvSpPr/>
+          <p:nvPr/>
+        </p:nvSpPr>
+        <p:spPr>
+          <a:xfrm>
+            <a:off x="6199632" y="1938528"/>
+            <a:ext cx="2057400" cy="1371600"/>
+          </a:xfrm>
+          <a:prstGeom prst="rect">
+            <a:avLst/>
+          </a:prstGeom>
+          <a:solidFill>
+            <a:srgbClr val="1F3056"/>
+          </a:solidFill>
+          <a:ln w="12700">
+            <a:solidFill>
+              <a:srgbClr val="2D426D"/>
+            </a:solidFill>
+          </a:ln>
+        </p:spPr>
+        <p:style>
+          <a:lnRef idx="1">
+            <a:schemeClr val="accent1"/>
+          </a:lnRef>
+          <a:fillRef idx="3">
+            <a:schemeClr val="accent1"/>
+          </a:fillRef>
+          <a:effectRef idx="2">
+            <a:schemeClr val="accent1"/>
+          </a:effectRef>
+          <a:fontRef idx="minor">
+            <a:schemeClr val="lt1"/>
+          </a:fontRef>
+        </p:style>
+        <p:txBody>
+          <a:bodyPr rtlCol="0" anchor="ctr"/>
+          <a:lstStyle/>
+          <a:p>
+            <a:pPr algn="ctr"/>
+          </a:p>
+        </p:txBody>
+      </p:sp>
+      <p:sp>
+        <p:nvSpPr>
+          <p:cNvPr id="17" name="TextBox 16"/>
+          <p:cNvSpPr txBox="1"/>
+          <p:nvPr/>
+        </p:nvSpPr>
+        <p:spPr>
+          <a:xfrm>
+            <a:off x="6364224" y="2066544"/>
+            <a:ext cx="548640" cy="256032"/>
+          </a:xfrm>
+          <a:prstGeom prst="rect">
+            <a:avLst/>
+          </a:prstGeom>
+          <a:noFill/>
+        </p:spPr>
+        <p:txBody>
+          <a:bodyPr wrap="square" lIns="0" rIns="0" tIns="0" bIns="0" anchor="t">
+            <a:spAutoFit/>
+          </a:bodyPr>
+          <a:lstStyle/>
+          <a:p>
+            <a:pPr algn="l">
+              <a:lnSpc>
+                <a:spcPct val="108000"/>
+              </a:lnSpc>
+            </a:pPr>
+            <a:r>
+              <a:rPr sz="1100" b="1">
+                <a:solidFill>
+                  <a:srgbClr val="4CAF50"/>
+                </a:solidFill>
+                <a:latin typeface="Aptos"/>
+              </a:rPr>
+              <a:t>3</a:t>
+            </a:r>
+          </a:p>
+        </p:txBody>
+      </p:sp>
+      <p:sp>
+        <p:nvSpPr>
+          <p:cNvPr id="18" name="TextBox 17"/>
+          <p:cNvSpPr txBox="1"/>
+          <p:nvPr/>
+        </p:nvSpPr>
+        <p:spPr>
+          <a:xfrm>
+            <a:off x="6364224" y="2395728"/>
+            <a:ext cx="1728216" cy="274320"/>
+          </a:xfrm>
+          <a:prstGeom prst="rect">
+            <a:avLst/>
+          </a:prstGeom>
+          <a:noFill/>
+        </p:spPr>
+        <p:txBody>
+          <a:bodyPr wrap="square" lIns="0" rIns="0" tIns="0" bIns="0" anchor="t">
+            <a:spAutoFit/>
+          </a:bodyPr>
+          <a:lstStyle/>
+          <a:p>
+            <a:pPr algn="l">
+              <a:lnSpc>
+                <a:spcPct val="108000"/>
+              </a:lnSpc>
+            </a:pPr>
+            <a:r>
+              <a:rPr sz="1550" b="1">
+                <a:solidFill>
+                  <a:srgbClr val="FFFFFF"/>
+                </a:solidFill>
+                <a:latin typeface="Aptos"/>
+              </a:rPr>
+              <a:t>Answer</a:t>
+            </a:r>
+          </a:p>
+        </p:txBody>
+      </p:sp>
+      <p:sp>
+        <p:nvSpPr>
+          <p:cNvPr id="19" name="TextBox 18"/>
+          <p:cNvSpPr txBox="1"/>
+          <p:nvPr/>
+        </p:nvSpPr>
+        <p:spPr>
+          <a:xfrm>
+            <a:off x="6364224" y="2779776"/>
+            <a:ext cx="1728216" cy="411480"/>
+          </a:xfrm>
+          <a:prstGeom prst="rect">
+            <a:avLst/>
+          </a:prstGeom>
+          <a:noFill/>
+        </p:spPr>
+        <p:txBody>
+          <a:bodyPr wrap="square" lIns="0" rIns="0" tIns="0" bIns="0" anchor="t">
+            <a:spAutoFit/>
+          </a:bodyPr>
+          <a:lstStyle/>
+          <a:p>
+            <a:pPr algn="l">
+              <a:lnSpc>
+                <a:spcPct val="108000"/>
+              </a:lnSpc>
+            </a:pPr>
+            <a:r>
+              <a:rPr sz="1150" b="0">
+                <a:solidFill>
+                  <a:srgbClr val="B0BEC5"/>
+                </a:solidFill>
+                <a:latin typeface="Aptos"/>
+              </a:rPr>
+              <a:t>Data appears as charts, tables, or KPI cards.</a:t>
+            </a:r>
+          </a:p>
+        </p:txBody>
+      </p:sp>
+      <p:sp>
+        <p:nvSpPr>
+          <p:cNvPr id="20" name="TextBox 19"/>
+          <p:cNvSpPr txBox="1"/>
+          <p:nvPr/>
+        </p:nvSpPr>
+        <p:spPr>
+          <a:xfrm>
+            <a:off x="8586216" y="2514600"/>
+            <a:ext cx="310896" cy="164592"/>
+          </a:xfrm>
+          <a:prstGeom prst="rect">
+            <a:avLst/>
+          </a:prstGeom>
+          <a:noFill/>
+        </p:spPr>
+        <p:txBody>
+          <a:bodyPr wrap="square" lIns="0" rIns="0" tIns="0" bIns="0" anchor="t">
+            <a:spAutoFit/>
+          </a:bodyPr>
+          <a:lstStyle/>
+          <a:p>
+            <a:pPr algn="ctr">
+              <a:lnSpc>
+                <a:spcPct val="108000"/>
+              </a:lnSpc>
+            </a:pPr>
+            <a:r>
+              <a:rPr sz="1400" b="1">
+                <a:solidFill>
+                  <a:srgbClr val="FFB300"/>
+                </a:solidFill>
+                <a:latin typeface="Aptos"/>
+              </a:rPr>
+              <a:t>-&gt;</a:t>
+            </a:r>
+          </a:p>
+        </p:txBody>
+      </p:sp>
+      <p:sp>
+        <p:nvSpPr>
+          <p:cNvPr id="21" name="Rectangle 20"/>
+          <p:cNvSpPr/>
+          <p:nvPr/>
+        </p:nvSpPr>
+        <p:spPr>
+          <a:xfrm>
+            <a:off x="8970264" y="1938528"/>
+            <a:ext cx="2057400" cy="1371600"/>
+          </a:xfrm>
+          <a:prstGeom prst="rect">
+            <a:avLst/>
+          </a:prstGeom>
+          <a:solidFill>
+            <a:srgbClr val="1F3056"/>
+          </a:solidFill>
+          <a:ln w="12700">
+            <a:solidFill>
+              <a:srgbClr val="2D426D"/>
+            </a:solidFill>
+          </a:ln>
+        </p:spPr>
+        <p:style>
+          <a:lnRef idx="1">
+            <a:schemeClr val="accent1"/>
+          </a:lnRef>
+          <a:fillRef idx="3">
+            <a:schemeClr val="accent1"/>
+          </a:fillRef>
+          <a:effectRef idx="2">
+            <a:schemeClr val="accent1"/>
+          </a:effectRef>
+          <a:fontRef idx="minor">
+            <a:schemeClr val="lt1"/>
+          </a:fontRef>
+        </p:style>
+        <p:txBody>
+          <a:bodyPr rtlCol="0" anchor="ctr"/>
+          <a:lstStyle/>
+          <a:p>
+            <a:pPr algn="ctr"/>
+          </a:p>
+        </p:txBody>
+      </p:sp>
+      <p:sp>
+        <p:nvSpPr>
+          <p:cNvPr id="22" name="TextBox 21"/>
+          <p:cNvSpPr txBox="1"/>
+          <p:nvPr/>
+        </p:nvSpPr>
+        <p:spPr>
+          <a:xfrm>
+            <a:off x="9134856" y="2066544"/>
+            <a:ext cx="548640" cy="256032"/>
+          </a:xfrm>
+          <a:prstGeom prst="rect">
+            <a:avLst/>
+          </a:prstGeom>
+          <a:noFill/>
+        </p:spPr>
+        <p:txBody>
+          <a:bodyPr wrap="square" lIns="0" rIns="0" tIns="0" bIns="0" anchor="t">
+            <a:spAutoFit/>
+          </a:bodyPr>
+          <a:lstStyle/>
+          <a:p>
+            <a:pPr algn="l">
+              <a:lnSpc>
+                <a:spcPct val="108000"/>
+              </a:lnSpc>
+            </a:pPr>
+            <a:r>
+              <a:rPr sz="1100" b="1">
+                <a:solidFill>
+                  <a:srgbClr val="FFB300"/>
+                </a:solidFill>
+                <a:latin typeface="Aptos"/>
+              </a:rPr>
+              <a:t>4</a:t>
+            </a:r>
+          </a:p>
+        </p:txBody>
+      </p:sp>
+      <p:sp>
+        <p:nvSpPr>
+          <p:cNvPr id="23" name="TextBox 22"/>
+          <p:cNvSpPr txBox="1"/>
+          <p:nvPr/>
+        </p:nvSpPr>
+        <p:spPr>
+          <a:xfrm>
+            <a:off x="9134856" y="2395728"/>
+            <a:ext cx="1728216" cy="274320"/>
+          </a:xfrm>
+          <a:prstGeom prst="rect">
+            <a:avLst/>
+          </a:prstGeom>
+          <a:noFill/>
+        </p:spPr>
+        <p:txBody>
+          <a:bodyPr wrap="square" lIns="0" rIns="0" tIns="0" bIns="0" anchor="t">
+            <a:spAutoFit/>
+          </a:bodyPr>
+          <a:lstStyle/>
+          <a:p>
+            <a:pPr algn="l">
+              <a:lnSpc>
+                <a:spcPct val="108000"/>
+              </a:lnSpc>
+            </a:pPr>
+            <a:r>
+              <a:rPr sz="1550" b="1">
+                <a:solidFill>
+                  <a:srgbClr val="FFFFFF"/>
+                </a:solidFill>
+                <a:latin typeface="Aptos"/>
+              </a:rPr>
+              <a:t>Reuse</a:t>
+            </a:r>
+          </a:p>
+        </p:txBody>
+      </p:sp>
+      <p:sp>
+        <p:nvSpPr>
+          <p:cNvPr id="24" name="TextBox 23"/>
+          <p:cNvSpPr txBox="1"/>
+          <p:nvPr/>
+        </p:nvSpPr>
+        <p:spPr>
+          <a:xfrm>
+            <a:off x="9134856" y="2779776"/>
+            <a:ext cx="1728216" cy="411480"/>
+          </a:xfrm>
+          <a:prstGeom prst="rect">
+            <a:avLst/>
+          </a:prstGeom>
+          <a:noFill/>
+        </p:spPr>
+        <p:txBody>
+          <a:bodyPr wrap="square" lIns="0" rIns="0" tIns="0" bIns="0" anchor="t">
+            <a:spAutoFit/>
+          </a:bodyPr>
+          <a:lstStyle/>
+          <a:p>
+            <a:pPr algn="l">
+              <a:lnSpc>
+                <a:spcPct val="108000"/>
+              </a:lnSpc>
+            </a:pPr>
+            <a:r>
+              <a:rPr sz="1150" b="0">
+                <a:solidFill>
+                  <a:srgbClr val="B0BEC5"/>
+                </a:solidFill>
+                <a:latin typeface="Aptos"/>
+              </a:rPr>
+              <a:t>Save useful answers into the metric library.</a:t>
+            </a:r>
+          </a:p>
+        </p:txBody>
+      </p:sp>
+      <p:sp>
+        <p:nvSpPr>
+          <p:cNvPr id="25" name="Rectangle 24"/>
+          <p:cNvSpPr/>
+          <p:nvPr/>
+        </p:nvSpPr>
+        <p:spPr>
+          <a:xfrm>
+            <a:off x="2240280" y="4187952"/>
+            <a:ext cx="7635240" cy="1078992"/>
+          </a:xfrm>
+          <a:prstGeom prst="rect">
+            <a:avLst/>
+          </a:prstGeom>
+          <a:solidFill>
+            <a:srgbClr val="17243F"/>
+          </a:solidFill>
+          <a:ln w="12700">
+            <a:solidFill>
+              <a:srgbClr val="2D426D"/>
+            </a:solidFill>
+          </a:ln>
+        </p:spPr>
+        <p:style>
+          <a:lnRef idx="1">
+            <a:schemeClr val="accent1"/>
+          </a:lnRef>
+          <a:fillRef idx="3">
+            <a:schemeClr val="accent1"/>
+          </a:fillRef>
+          <a:effectRef idx="2">
+            <a:schemeClr val="accent1"/>
+          </a:effectRef>
+          <a:fontRef idx="minor">
+            <a:schemeClr val="lt1"/>
+          </a:fontRef>
+        </p:style>
+        <p:txBody>
+          <a:bodyPr rtlCol="0" anchor="ctr"/>
+          <a:lstStyle/>
+          <a:p>
+            <a:pPr algn="ctr"/>
+          </a:p>
+        </p:txBody>
+      </p:sp>
+      <p:sp>
+        <p:nvSpPr>
+          <p:cNvPr id="26" name="TextBox 25"/>
+          <p:cNvSpPr txBox="1"/>
+          <p:nvPr/>
+        </p:nvSpPr>
+        <p:spPr>
+          <a:xfrm>
+            <a:off x="2523744" y="4425696"/>
+            <a:ext cx="1874519" cy="274320"/>
+          </a:xfrm>
+          <a:prstGeom prst="rect">
+            <a:avLst/>
+          </a:prstGeom>
+          <a:noFill/>
+        </p:spPr>
+        <p:txBody>
+          <a:bodyPr wrap="square" lIns="0" rIns="0" tIns="0" bIns="0" anchor="t">
+            <a:spAutoFit/>
+          </a:bodyPr>
+          <a:lstStyle/>
+          <a:p>
+            <a:pPr algn="l">
+              <a:lnSpc>
+                <a:spcPct val="108000"/>
+              </a:lnSpc>
+            </a:pPr>
+            <a:r>
+              <a:rPr sz="1500" b="1">
+                <a:solidFill>
+                  <a:srgbClr val="FFFFFF"/>
+                </a:solidFill>
+                <a:latin typeface="Aptos"/>
+              </a:rPr>
+              <a:t>Self-correction loop</a:t>
+            </a:r>
+          </a:p>
+        </p:txBody>
+      </p:sp>
+      <p:sp>
+        <p:nvSpPr>
+          <p:cNvPr id="27" name="TextBox 26"/>
+          <p:cNvSpPr txBox="1"/>
+          <p:nvPr/>
+        </p:nvSpPr>
+        <p:spPr>
+          <a:xfrm>
+            <a:off x="4617720" y="4407408"/>
+            <a:ext cx="4800600" cy="411480"/>
+          </a:xfrm>
+          <a:prstGeom prst="rect">
+            <a:avLst/>
+          </a:prstGeom>
+          <a:noFill/>
+        </p:spPr>
+        <p:txBody>
+          <a:bodyPr wrap="square" lIns="0" rIns="0" tIns="0" bIns="0" anchor="t">
+            <a:spAutoFit/>
+          </a:bodyPr>
+          <a:lstStyle/>
+          <a:p>
+            <a:pPr algn="l">
+              <a:lnSpc>
+                <a:spcPct val="108000"/>
+              </a:lnSpc>
+            </a:pPr>
+            <a:r>
+              <a:rPr sz="1250" b="0">
+                <a:solidFill>
+                  <a:srgbClr val="B0BEC5"/>
+                </a:solidFill>
+                <a:latin typeface="Aptos"/>
+              </a:rPr>
+              <a:t>If a query fails, QueryForge fixes the attempt and retries so the user can stay focused on the business question.</a:t>
+            </a:r>
+          </a:p>
+        </p:txBody>
+      </p:sp>
+      <p:sp>
+        <p:nvSpPr>
+          <p:cNvPr id="28" name="TextBox 27"/>
+          <p:cNvSpPr txBox="1"/>
+          <p:nvPr/>
+        </p:nvSpPr>
+        <p:spPr>
+          <a:xfrm>
+            <a:off x="658368" y="5760720"/>
+            <a:ext cx="10424160" cy="292608"/>
+          </a:xfrm>
+          <a:prstGeom prst="rect">
+            <a:avLst/>
+          </a:prstGeom>
+          <a:noFill/>
+        </p:spPr>
+        <p:txBody>
+          <a:bodyPr wrap="square" lIns="0" rIns="0" tIns="0" bIns="0" anchor="t">
+            <a:spAutoFit/>
+          </a:bodyPr>
+          <a:lstStyle/>
+          <a:p>
+            <a:pPr algn="l">
+              <a:lnSpc>
+                <a:spcPct val="108000"/>
+              </a:lnSpc>
+            </a:pPr>
+            <a:r>
+              <a:rPr sz="1400" b="1">
+                <a:solidFill>
+                  <a:srgbClr val="FFFFFF"/>
+                </a:solidFill>
+                <a:latin typeface="Aptos"/>
+              </a:rPr>
+              <a:t>No handoff is required for routine data questions once the metrics have been set up.</a:t>
+            </a:r>
+          </a:p>
+        </p:txBody>
+      </p:sp>
+      <p:sp>
+        <p:nvSpPr>
+          <p:cNvPr id="29" name="TextBox 28"/>
+          <p:cNvSpPr txBox="1"/>
+          <p:nvPr/>
+        </p:nvSpPr>
+        <p:spPr>
+          <a:xfrm>
+            <a:off x="658368" y="6510528"/>
+            <a:ext cx="5029200" cy="164592"/>
+          </a:xfrm>
+          <a:prstGeom prst="rect">
+            <a:avLst/>
+          </a:prstGeom>
+          <a:noFill/>
+        </p:spPr>
+        <p:txBody>
+          <a:bodyPr wrap="square" lIns="0" rIns="0" tIns="0" bIns="0" anchor="t">
+            <a:spAutoFit/>
+          </a:bodyPr>
+          <a:lstStyle/>
+          <a:p>
+            <a:pPr algn="l">
+              <a:lnSpc>
+                <a:spcPct val="108000"/>
+              </a:lnSpc>
+            </a:pPr>
+            <a:r>
+              <a:rPr sz="850" b="0">
+                <a:solidFill>
+                  <a:srgbClr val="7F90A8"/>
+                </a:solidFill>
+                <a:latin typeface="Aptos"/>
+              </a:rPr>
+              <a:t>QueryForge | ClawHunt Builder Camp 2026</a:t>
+            </a:r>
+          </a:p>
+        </p:txBody>
+      </p:sp>
+      <p:sp>
+        <p:nvSpPr>
+          <p:cNvPr id="30" name="TextBox 29"/>
+          <p:cNvSpPr txBox="1"/>
+          <p:nvPr/>
+        </p:nvSpPr>
+        <p:spPr>
+          <a:xfrm>
+            <a:off x="10972800" y="6510528"/>
+            <a:ext cx="594360" cy="164592"/>
+          </a:xfrm>
+          <a:prstGeom prst="rect">
+            <a:avLst/>
+          </a:prstGeom>
+          <a:noFill/>
+        </p:spPr>
+        <p:txBody>
+          <a:bodyPr wrap="square" lIns="0" rIns="0" tIns="0" bIns="0" anchor="t">
+            <a:spAutoFit/>
+          </a:bodyPr>
+          <a:lstStyle/>
+          <a:p>
+            <a:pPr algn="r">
+              <a:lnSpc>
+                <a:spcPct val="108000"/>
+              </a:lnSpc>
+            </a:pPr>
+            <a:r>
+              <a:rPr sz="850" b="0">
+                <a:solidFill>
+                  <a:srgbClr val="7F90A8"/>
+                </a:solidFill>
+                <a:latin typeface="Aptos"/>
+              </a:rPr>
+              <a:t>6/9</a:t>
             </a:r>
           </a:p>
         </p:txBody>
@@ -4370,7 +8962,7 @@
     <p:bg>
       <p:bgPr>
         <a:solidFill>
-          <a:srgbClr val="1A1F2E"/>
+          <a:srgbClr val="1B2A4A"/>
         </a:solidFill>
         <a:effectLst/>
       </p:bgPr>
@@ -4390,30 +8982,33 @@
         </p:nvSpPr>
         <p:spPr>
           <a:xfrm>
-            <a:off x="914400" y="914400"/>
-            <a:ext cx="9144000" cy="548640"/>
-          </a:xfrm>
-          <a:prstGeom prst="rect">
-            <a:avLst/>
-          </a:prstGeom>
-          <a:noFill/>
-        </p:spPr>
-        <p:txBody>
-          <a:bodyPr wrap="square">
-            <a:spAutoFit/>
-          </a:bodyPr>
-          <a:lstStyle/>
-          <a:p>
-            <a:pPr algn="l"/>
-            <a:r>
-              <a:rPr sz="3000" b="1">
-                <a:solidFill>
-                  <a:srgbClr val="F0EEE8"/>
-                </a:solidFill>
-                <a:latin typeface="Arial"/>
-                <a:ea typeface="Microsoft YaHei"/>
-              </a:rPr>
-              <a:t>谁需要这个工具</a:t>
+            <a:off x="658368" y="384048"/>
+            <a:ext cx="3474720" cy="237744"/>
+          </a:xfrm>
+          <a:prstGeom prst="rect">
+            <a:avLst/>
+          </a:prstGeom>
+          <a:noFill/>
+        </p:spPr>
+        <p:txBody>
+          <a:bodyPr wrap="square" lIns="0" rIns="0" tIns="0" bIns="0" anchor="t">
+            <a:spAutoFit/>
+          </a:bodyPr>
+          <a:lstStyle/>
+          <a:p>
+            <a:pPr algn="l">
+              <a:lnSpc>
+                <a:spcPct val="108000"/>
+              </a:lnSpc>
+            </a:pPr>
+            <a:r>
+              <a:rPr sz="1000" b="1">
+                <a:solidFill>
+                  <a:srgbClr val="FFB300"/>
+                </a:solidFill>
+                <a:latin typeface="Aptos"/>
+              </a:rPr>
+              <a:t>USE CASES</a:t>
             </a:r>
           </a:p>
         </p:txBody>
@@ -4426,85 +9021,880 @@
         </p:nvSpPr>
         <p:spPr>
           <a:xfrm>
-            <a:off x="914400" y="1828800"/>
-            <a:ext cx="9144000" cy="1828800"/>
-          </a:xfrm>
-          <a:prstGeom prst="rect">
-            <a:avLst/>
-          </a:prstGeom>
-          <a:noFill/>
-        </p:spPr>
-        <p:txBody>
-          <a:bodyPr wrap="square">
-            <a:spAutoFit/>
-          </a:bodyPr>
-          <a:lstStyle/>
-          <a:p>
-            <a:pPr algn="l">
-              <a:spcAft>
-                <a:spcPts val="1200"/>
-              </a:spcAft>
-            </a:pPr>
-            <a:r>
-              <a:rPr sz="1500">
-                <a:solidFill>
-                  <a:srgbClr val="F0EEE8"/>
-                </a:solidFill>
-                <a:latin typeface="Arial"/>
-                <a:ea typeface="Microsoft YaHei"/>
-              </a:rPr>
-              <a:t>  —  电商运营 — 每天看销售、库存、转化</a:t>
-            </a:r>
-          </a:p>
-          <a:p>
-            <a:pPr algn="l">
-              <a:spcAft>
-                <a:spcPts val="1200"/>
-              </a:spcAft>
-            </a:pPr>
-            <a:r>
-              <a:rPr sz="1500">
-                <a:solidFill>
-                  <a:srgbClr val="F0EEE8"/>
-                </a:solidFill>
-                <a:latin typeface="Arial"/>
-                <a:ea typeface="Microsoft YaHei"/>
-              </a:rPr>
-              <a:t>  —  市场团队 — 活动效果、渠道对比、用户画像</a:t>
-            </a:r>
-          </a:p>
-          <a:p>
-            <a:pPr algn="l">
-              <a:spcAft>
-                <a:spcPts val="1200"/>
-              </a:spcAft>
-            </a:pPr>
-            <a:r>
-              <a:rPr sz="1500">
-                <a:solidFill>
-                  <a:srgbClr val="F0EEE8"/>
-                </a:solidFill>
-                <a:latin typeface="Arial"/>
-                <a:ea typeface="Microsoft YaHei"/>
-              </a:rPr>
-              <a:t>  —  管理层 — 经营日报、异常预警、决策支持</a:t>
-            </a:r>
-          </a:p>
-          <a:p>
-            <a:pPr algn="l">
-              <a:spcAft>
-                <a:spcPts val="1200"/>
-              </a:spcAft>
-            </a:pPr>
-            <a:r>
-              <a:rPr sz="1500">
-                <a:solidFill>
-                  <a:srgbClr val="F0EEE8"/>
-                </a:solidFill>
-                <a:latin typeface="Arial"/>
-                <a:ea typeface="Microsoft YaHei"/>
-              </a:rPr>
-              <a:t>  —  财务 — 收入分析、成本归因、预算执行</a:t>
+            <a:off x="658368" y="658368"/>
+            <a:ext cx="8778240" cy="658368"/>
+          </a:xfrm>
+          <a:prstGeom prst="rect">
+            <a:avLst/>
+          </a:prstGeom>
+          <a:noFill/>
+        </p:spPr>
+        <p:txBody>
+          <a:bodyPr wrap="square" lIns="0" rIns="0" tIns="0" bIns="0" anchor="t">
+            <a:spAutoFit/>
+          </a:bodyPr>
+          <a:lstStyle/>
+          <a:p>
+            <a:pPr algn="l">
+              <a:lnSpc>
+                <a:spcPct val="108000"/>
+              </a:lnSpc>
+            </a:pPr>
+            <a:r>
+              <a:rPr sz="3200" b="1">
+                <a:solidFill>
+                  <a:srgbClr val="FFFFFF"/>
+                </a:solidFill>
+                <a:latin typeface="Aptos Display"/>
+              </a:rPr>
+              <a:t>The demo scenarios map directly to operating questions.</a:t>
+            </a:r>
+          </a:p>
+        </p:txBody>
+      </p:sp>
+      <p:sp>
+        <p:nvSpPr>
+          <p:cNvPr id="4" name="Rectangle 3"/>
+          <p:cNvSpPr/>
+          <p:nvPr/>
+        </p:nvSpPr>
+        <p:spPr>
+          <a:xfrm>
+            <a:off x="658368" y="1325880"/>
+            <a:ext cx="1965960" cy="38100"/>
+          </a:xfrm>
+          <a:prstGeom prst="rect">
+            <a:avLst/>
+          </a:prstGeom>
+          <a:solidFill>
+            <a:srgbClr val="FFB300"/>
+          </a:solidFill>
+          <a:ln>
+            <a:noFill/>
+          </a:ln>
+        </p:spPr>
+        <p:style>
+          <a:lnRef idx="1">
+            <a:schemeClr val="accent1"/>
+          </a:lnRef>
+          <a:fillRef idx="3">
+            <a:schemeClr val="accent1"/>
+          </a:fillRef>
+          <a:effectRef idx="2">
+            <a:schemeClr val="accent1"/>
+          </a:effectRef>
+          <a:fontRef idx="minor">
+            <a:schemeClr val="lt1"/>
+          </a:fontRef>
+        </p:style>
+        <p:txBody>
+          <a:bodyPr rtlCol="0" anchor="ctr"/>
+          <a:lstStyle/>
+          <a:p>
+            <a:pPr algn="ctr"/>
+          </a:p>
+        </p:txBody>
+      </p:sp>
+      <p:sp>
+        <p:nvSpPr>
+          <p:cNvPr id="5" name="TextBox 4"/>
+          <p:cNvSpPr txBox="1"/>
+          <p:nvPr/>
+        </p:nvSpPr>
+        <p:spPr>
+          <a:xfrm>
+            <a:off x="658368" y="1481328"/>
+            <a:ext cx="9692640" cy="347472"/>
+          </a:xfrm>
+          <a:prstGeom prst="rect">
+            <a:avLst/>
+          </a:prstGeom>
+          <a:noFill/>
+        </p:spPr>
+        <p:txBody>
+          <a:bodyPr wrap="square" lIns="0" rIns="0" tIns="0" bIns="0" anchor="t">
+            <a:spAutoFit/>
+          </a:bodyPr>
+          <a:lstStyle/>
+          <a:p>
+            <a:pPr algn="l">
+              <a:lnSpc>
+                <a:spcPct val="108000"/>
+              </a:lnSpc>
+            </a:pPr>
+            <a:r>
+              <a:rPr sz="1300" b="0">
+                <a:solidFill>
+                  <a:srgbClr val="B0BEC5"/>
+                </a:solidFill>
+                <a:latin typeface="Aptos"/>
+              </a:rPr>
+              <a:t>Each scenario starts with a business question and ends with a reusable visual answer.</a:t>
+            </a:r>
+          </a:p>
+        </p:txBody>
+      </p:sp>
+      <p:sp>
+        <p:nvSpPr>
+          <p:cNvPr id="6" name="Rectangle 5"/>
+          <p:cNvSpPr/>
+          <p:nvPr/>
+        </p:nvSpPr>
+        <p:spPr>
+          <a:xfrm>
+            <a:off x="658368" y="1938528"/>
+            <a:ext cx="5285232" cy="1261872"/>
+          </a:xfrm>
+          <a:prstGeom prst="rect">
+            <a:avLst/>
+          </a:prstGeom>
+          <a:solidFill>
+            <a:srgbClr val="1F3056"/>
+          </a:solidFill>
+          <a:ln w="12700">
+            <a:solidFill>
+              <a:srgbClr val="2D426D"/>
+            </a:solidFill>
+          </a:ln>
+        </p:spPr>
+        <p:style>
+          <a:lnRef idx="1">
+            <a:schemeClr val="accent1"/>
+          </a:lnRef>
+          <a:fillRef idx="3">
+            <a:schemeClr val="accent1"/>
+          </a:fillRef>
+          <a:effectRef idx="2">
+            <a:schemeClr val="accent1"/>
+          </a:effectRef>
+          <a:fontRef idx="minor">
+            <a:schemeClr val="lt1"/>
+          </a:fontRef>
+        </p:style>
+        <p:txBody>
+          <a:bodyPr rtlCol="0" anchor="ctr"/>
+          <a:lstStyle/>
+          <a:p>
+            <a:pPr algn="ctr"/>
+          </a:p>
+        </p:txBody>
+      </p:sp>
+      <p:sp>
+        <p:nvSpPr>
+          <p:cNvPr id="7" name="TextBox 6"/>
+          <p:cNvSpPr txBox="1"/>
+          <p:nvPr/>
+        </p:nvSpPr>
+        <p:spPr>
+          <a:xfrm>
+            <a:off x="859536" y="2103120"/>
+            <a:ext cx="4882896" cy="237744"/>
+          </a:xfrm>
+          <a:prstGeom prst="rect">
+            <a:avLst/>
+          </a:prstGeom>
+          <a:noFill/>
+        </p:spPr>
+        <p:txBody>
+          <a:bodyPr wrap="square" lIns="0" rIns="0" tIns="0" bIns="0" anchor="t">
+            <a:spAutoFit/>
+          </a:bodyPr>
+          <a:lstStyle/>
+          <a:p>
+            <a:pPr algn="l">
+              <a:lnSpc>
+                <a:spcPct val="108000"/>
+              </a:lnSpc>
+            </a:pPr>
+            <a:r>
+              <a:rPr sz="1600" b="1">
+                <a:solidFill>
+                  <a:srgbClr val="FFFFFF"/>
+                </a:solidFill>
+                <a:latin typeface="Aptos"/>
+              </a:rPr>
+              <a:t>Regional performance</a:t>
+            </a:r>
+          </a:p>
+        </p:txBody>
+      </p:sp>
+      <p:sp>
+        <p:nvSpPr>
+          <p:cNvPr id="8" name="TextBox 7"/>
+          <p:cNvSpPr txBox="1"/>
+          <p:nvPr/>
+        </p:nvSpPr>
+        <p:spPr>
+          <a:xfrm>
+            <a:off x="859536" y="2468880"/>
+            <a:ext cx="4882896" cy="256032"/>
+          </a:xfrm>
+          <a:prstGeom prst="rect">
+            <a:avLst/>
+          </a:prstGeom>
+          <a:noFill/>
+        </p:spPr>
+        <p:txBody>
+          <a:bodyPr wrap="square" lIns="0" rIns="0" tIns="0" bIns="0" anchor="t">
+            <a:spAutoFit/>
+          </a:bodyPr>
+          <a:lstStyle/>
+          <a:p>
+            <a:pPr algn="l">
+              <a:lnSpc>
+                <a:spcPct val="108000"/>
+              </a:lnSpc>
+            </a:pPr>
+            <a:r>
+              <a:rPr sz="1250" b="0">
+                <a:solidFill>
+                  <a:srgbClr val="B0BEC5"/>
+                </a:solidFill>
+                <a:latin typeface="Aptos"/>
+              </a:rPr>
+              <a:t>How are regions contributing to revenue over time?</a:t>
+            </a:r>
+          </a:p>
+        </p:txBody>
+      </p:sp>
+      <p:sp>
+        <p:nvSpPr>
+          <p:cNvPr id="9" name="TextBox 8"/>
+          <p:cNvSpPr txBox="1"/>
+          <p:nvPr/>
+        </p:nvSpPr>
+        <p:spPr>
+          <a:xfrm>
+            <a:off x="859536" y="2816352"/>
+            <a:ext cx="4882896" cy="219456"/>
+          </a:xfrm>
+          <a:prstGeom prst="rect">
+            <a:avLst/>
+          </a:prstGeom>
+          <a:noFill/>
+        </p:spPr>
+        <p:txBody>
+          <a:bodyPr wrap="square" lIns="0" rIns="0" tIns="0" bIns="0" anchor="t">
+            <a:spAutoFit/>
+          </a:bodyPr>
+          <a:lstStyle/>
+          <a:p>
+            <a:pPr algn="l">
+              <a:lnSpc>
+                <a:spcPct val="108000"/>
+              </a:lnSpc>
+            </a:pPr>
+            <a:r>
+              <a:rPr sz="1200" b="1">
+                <a:solidFill>
+                  <a:srgbClr val="FFB300"/>
+                </a:solidFill>
+                <a:latin typeface="Aptos"/>
+              </a:rPr>
+              <a:t>Output: region distribution and monthly trend.</a:t>
+            </a:r>
+          </a:p>
+        </p:txBody>
+      </p:sp>
+      <p:sp>
+        <p:nvSpPr>
+          <p:cNvPr id="10" name="Rectangle 9"/>
+          <p:cNvSpPr/>
+          <p:nvPr/>
+        </p:nvSpPr>
+        <p:spPr>
+          <a:xfrm>
+            <a:off x="6254496" y="1938528"/>
+            <a:ext cx="5285232" cy="1261872"/>
+          </a:xfrm>
+          <a:prstGeom prst="rect">
+            <a:avLst/>
+          </a:prstGeom>
+          <a:solidFill>
+            <a:srgbClr val="1F3056"/>
+          </a:solidFill>
+          <a:ln w="12700">
+            <a:solidFill>
+              <a:srgbClr val="2D426D"/>
+            </a:solidFill>
+          </a:ln>
+        </p:spPr>
+        <p:style>
+          <a:lnRef idx="1">
+            <a:schemeClr val="accent1"/>
+          </a:lnRef>
+          <a:fillRef idx="3">
+            <a:schemeClr val="accent1"/>
+          </a:fillRef>
+          <a:effectRef idx="2">
+            <a:schemeClr val="accent1"/>
+          </a:effectRef>
+          <a:fontRef idx="minor">
+            <a:schemeClr val="lt1"/>
+          </a:fontRef>
+        </p:style>
+        <p:txBody>
+          <a:bodyPr rtlCol="0" anchor="ctr"/>
+          <a:lstStyle/>
+          <a:p>
+            <a:pPr algn="ctr"/>
+          </a:p>
+        </p:txBody>
+      </p:sp>
+      <p:sp>
+        <p:nvSpPr>
+          <p:cNvPr id="11" name="TextBox 10"/>
+          <p:cNvSpPr txBox="1"/>
+          <p:nvPr/>
+        </p:nvSpPr>
+        <p:spPr>
+          <a:xfrm>
+            <a:off x="6455664" y="2103120"/>
+            <a:ext cx="4882896" cy="237744"/>
+          </a:xfrm>
+          <a:prstGeom prst="rect">
+            <a:avLst/>
+          </a:prstGeom>
+          <a:noFill/>
+        </p:spPr>
+        <p:txBody>
+          <a:bodyPr wrap="square" lIns="0" rIns="0" tIns="0" bIns="0" anchor="t">
+            <a:spAutoFit/>
+          </a:bodyPr>
+          <a:lstStyle/>
+          <a:p>
+            <a:pPr algn="l">
+              <a:lnSpc>
+                <a:spcPct val="108000"/>
+              </a:lnSpc>
+            </a:pPr>
+            <a:r>
+              <a:rPr sz="1600" b="1">
+                <a:solidFill>
+                  <a:srgbClr val="FFFFFF"/>
+                </a:solidFill>
+                <a:latin typeface="Aptos"/>
+              </a:rPr>
+              <a:t>Category margin</a:t>
+            </a:r>
+          </a:p>
+        </p:txBody>
+      </p:sp>
+      <p:sp>
+        <p:nvSpPr>
+          <p:cNvPr id="12" name="TextBox 11"/>
+          <p:cNvSpPr txBox="1"/>
+          <p:nvPr/>
+        </p:nvSpPr>
+        <p:spPr>
+          <a:xfrm>
+            <a:off x="6455664" y="2468880"/>
+            <a:ext cx="4882896" cy="256032"/>
+          </a:xfrm>
+          <a:prstGeom prst="rect">
+            <a:avLst/>
+          </a:prstGeom>
+          <a:noFill/>
+        </p:spPr>
+        <p:txBody>
+          <a:bodyPr wrap="square" lIns="0" rIns="0" tIns="0" bIns="0" anchor="t">
+            <a:spAutoFit/>
+          </a:bodyPr>
+          <a:lstStyle/>
+          <a:p>
+            <a:pPr algn="l">
+              <a:lnSpc>
+                <a:spcPct val="108000"/>
+              </a:lnSpc>
+            </a:pPr>
+            <a:r>
+              <a:rPr sz="1250" b="0">
+                <a:solidFill>
+                  <a:srgbClr val="B0BEC5"/>
+                </a:solidFill>
+                <a:latin typeface="Aptos"/>
+              </a:rPr>
+              <a:t>Which categories carry the strongest margin?</a:t>
+            </a:r>
+          </a:p>
+        </p:txBody>
+      </p:sp>
+      <p:sp>
+        <p:nvSpPr>
+          <p:cNvPr id="13" name="TextBox 12"/>
+          <p:cNvSpPr txBox="1"/>
+          <p:nvPr/>
+        </p:nvSpPr>
+        <p:spPr>
+          <a:xfrm>
+            <a:off x="6455664" y="2816352"/>
+            <a:ext cx="4882896" cy="219456"/>
+          </a:xfrm>
+          <a:prstGeom prst="rect">
+            <a:avLst/>
+          </a:prstGeom>
+          <a:noFill/>
+        </p:spPr>
+        <p:txBody>
+          <a:bodyPr wrap="square" lIns="0" rIns="0" tIns="0" bIns="0" anchor="t">
+            <a:spAutoFit/>
+          </a:bodyPr>
+          <a:lstStyle/>
+          <a:p>
+            <a:pPr algn="l">
+              <a:lnSpc>
+                <a:spcPct val="108000"/>
+              </a:lnSpc>
+            </a:pPr>
+            <a:r>
+              <a:rPr sz="1200" b="1">
+                <a:solidFill>
+                  <a:srgbClr val="FFB300"/>
+                </a:solidFill>
+                <a:latin typeface="Aptos"/>
+              </a:rPr>
+              <a:t>Output: category comparison view.</a:t>
+            </a:r>
+          </a:p>
+        </p:txBody>
+      </p:sp>
+      <p:sp>
+        <p:nvSpPr>
+          <p:cNvPr id="14" name="Rectangle 13"/>
+          <p:cNvSpPr/>
+          <p:nvPr/>
+        </p:nvSpPr>
+        <p:spPr>
+          <a:xfrm>
+            <a:off x="658368" y="3493008"/>
+            <a:ext cx="5285232" cy="1261872"/>
+          </a:xfrm>
+          <a:prstGeom prst="rect">
+            <a:avLst/>
+          </a:prstGeom>
+          <a:solidFill>
+            <a:srgbClr val="1F3056"/>
+          </a:solidFill>
+          <a:ln w="12700">
+            <a:solidFill>
+              <a:srgbClr val="2D426D"/>
+            </a:solidFill>
+          </a:ln>
+        </p:spPr>
+        <p:style>
+          <a:lnRef idx="1">
+            <a:schemeClr val="accent1"/>
+          </a:lnRef>
+          <a:fillRef idx="3">
+            <a:schemeClr val="accent1"/>
+          </a:fillRef>
+          <a:effectRef idx="2">
+            <a:schemeClr val="accent1"/>
+          </a:effectRef>
+          <a:fontRef idx="minor">
+            <a:schemeClr val="lt1"/>
+          </a:fontRef>
+        </p:style>
+        <p:txBody>
+          <a:bodyPr rtlCol="0" anchor="ctr"/>
+          <a:lstStyle/>
+          <a:p>
+            <a:pPr algn="ctr"/>
+          </a:p>
+        </p:txBody>
+      </p:sp>
+      <p:sp>
+        <p:nvSpPr>
+          <p:cNvPr id="15" name="TextBox 14"/>
+          <p:cNvSpPr txBox="1"/>
+          <p:nvPr/>
+        </p:nvSpPr>
+        <p:spPr>
+          <a:xfrm>
+            <a:off x="859536" y="3657600"/>
+            <a:ext cx="4882896" cy="237744"/>
+          </a:xfrm>
+          <a:prstGeom prst="rect">
+            <a:avLst/>
+          </a:prstGeom>
+          <a:noFill/>
+        </p:spPr>
+        <p:txBody>
+          <a:bodyPr wrap="square" lIns="0" rIns="0" tIns="0" bIns="0" anchor="t">
+            <a:spAutoFit/>
+          </a:bodyPr>
+          <a:lstStyle/>
+          <a:p>
+            <a:pPr algn="l">
+              <a:lnSpc>
+                <a:spcPct val="108000"/>
+              </a:lnSpc>
+            </a:pPr>
+            <a:r>
+              <a:rPr sz="1600" b="1">
+                <a:solidFill>
+                  <a:srgbClr val="FFFFFF"/>
+                </a:solidFill>
+                <a:latin typeface="Aptos"/>
+              </a:rPr>
+              <a:t>Product focus</a:t>
+            </a:r>
+          </a:p>
+        </p:txBody>
+      </p:sp>
+      <p:sp>
+        <p:nvSpPr>
+          <p:cNvPr id="16" name="TextBox 15"/>
+          <p:cNvSpPr txBox="1"/>
+          <p:nvPr/>
+        </p:nvSpPr>
+        <p:spPr>
+          <a:xfrm>
+            <a:off x="859536" y="4023360"/>
+            <a:ext cx="4882896" cy="256032"/>
+          </a:xfrm>
+          <a:prstGeom prst="rect">
+            <a:avLst/>
+          </a:prstGeom>
+          <a:noFill/>
+        </p:spPr>
+        <p:txBody>
+          <a:bodyPr wrap="square" lIns="0" rIns="0" tIns="0" bIns="0" anchor="t">
+            <a:spAutoFit/>
+          </a:bodyPr>
+          <a:lstStyle/>
+          <a:p>
+            <a:pPr algn="l">
+              <a:lnSpc>
+                <a:spcPct val="108000"/>
+              </a:lnSpc>
+            </a:pPr>
+            <a:r>
+              <a:rPr sz="1250" b="0">
+                <a:solidFill>
+                  <a:srgbClr val="B0BEC5"/>
+                </a:solidFill>
+                <a:latin typeface="Aptos"/>
+              </a:rPr>
+              <a:t>Which products are driving the most revenue?</a:t>
+            </a:r>
+          </a:p>
+        </p:txBody>
+      </p:sp>
+      <p:sp>
+        <p:nvSpPr>
+          <p:cNvPr id="17" name="TextBox 16"/>
+          <p:cNvSpPr txBox="1"/>
+          <p:nvPr/>
+        </p:nvSpPr>
+        <p:spPr>
+          <a:xfrm>
+            <a:off x="859536" y="4370832"/>
+            <a:ext cx="4882896" cy="219456"/>
+          </a:xfrm>
+          <a:prstGeom prst="rect">
+            <a:avLst/>
+          </a:prstGeom>
+          <a:noFill/>
+        </p:spPr>
+        <p:txBody>
+          <a:bodyPr wrap="square" lIns="0" rIns="0" tIns="0" bIns="0" anchor="t">
+            <a:spAutoFit/>
+          </a:bodyPr>
+          <a:lstStyle/>
+          <a:p>
+            <a:pPr algn="l">
+              <a:lnSpc>
+                <a:spcPct val="108000"/>
+              </a:lnSpc>
+            </a:pPr>
+            <a:r>
+              <a:rPr sz="1200" b="1">
+                <a:solidFill>
+                  <a:srgbClr val="FFB300"/>
+                </a:solidFill>
+                <a:latin typeface="Aptos"/>
+              </a:rPr>
+              <a:t>Output: top products table.</a:t>
+            </a:r>
+          </a:p>
+        </p:txBody>
+      </p:sp>
+      <p:sp>
+        <p:nvSpPr>
+          <p:cNvPr id="18" name="Rectangle 17"/>
+          <p:cNvSpPr/>
+          <p:nvPr/>
+        </p:nvSpPr>
+        <p:spPr>
+          <a:xfrm>
+            <a:off x="6254496" y="3493008"/>
+            <a:ext cx="5285232" cy="1261872"/>
+          </a:xfrm>
+          <a:prstGeom prst="rect">
+            <a:avLst/>
+          </a:prstGeom>
+          <a:solidFill>
+            <a:srgbClr val="1F3056"/>
+          </a:solidFill>
+          <a:ln w="12700">
+            <a:solidFill>
+              <a:srgbClr val="2D426D"/>
+            </a:solidFill>
+          </a:ln>
+        </p:spPr>
+        <p:style>
+          <a:lnRef idx="1">
+            <a:schemeClr val="accent1"/>
+          </a:lnRef>
+          <a:fillRef idx="3">
+            <a:schemeClr val="accent1"/>
+          </a:fillRef>
+          <a:effectRef idx="2">
+            <a:schemeClr val="accent1"/>
+          </a:effectRef>
+          <a:fontRef idx="minor">
+            <a:schemeClr val="lt1"/>
+          </a:fontRef>
+        </p:style>
+        <p:txBody>
+          <a:bodyPr rtlCol="0" anchor="ctr"/>
+          <a:lstStyle/>
+          <a:p>
+            <a:pPr algn="ctr"/>
+          </a:p>
+        </p:txBody>
+      </p:sp>
+      <p:sp>
+        <p:nvSpPr>
+          <p:cNvPr id="19" name="TextBox 18"/>
+          <p:cNvSpPr txBox="1"/>
+          <p:nvPr/>
+        </p:nvSpPr>
+        <p:spPr>
+          <a:xfrm>
+            <a:off x="6455664" y="3657600"/>
+            <a:ext cx="4882896" cy="237744"/>
+          </a:xfrm>
+          <a:prstGeom prst="rect">
+            <a:avLst/>
+          </a:prstGeom>
+          <a:noFill/>
+        </p:spPr>
+        <p:txBody>
+          <a:bodyPr wrap="square" lIns="0" rIns="0" tIns="0" bIns="0" anchor="t">
+            <a:spAutoFit/>
+          </a:bodyPr>
+          <a:lstStyle/>
+          <a:p>
+            <a:pPr algn="l">
+              <a:lnSpc>
+                <a:spcPct val="108000"/>
+              </a:lnSpc>
+            </a:pPr>
+            <a:r>
+              <a:rPr sz="1600" b="1">
+                <a:solidFill>
+                  <a:srgbClr val="FFFFFF"/>
+                </a:solidFill>
+                <a:latin typeface="Aptos"/>
+              </a:rPr>
+              <a:t>Customer behavior</a:t>
+            </a:r>
+          </a:p>
+        </p:txBody>
+      </p:sp>
+      <p:sp>
+        <p:nvSpPr>
+          <p:cNvPr id="20" name="TextBox 19"/>
+          <p:cNvSpPr txBox="1"/>
+          <p:nvPr/>
+        </p:nvSpPr>
+        <p:spPr>
+          <a:xfrm>
+            <a:off x="6455664" y="4023360"/>
+            <a:ext cx="4882896" cy="256032"/>
+          </a:xfrm>
+          <a:prstGeom prst="rect">
+            <a:avLst/>
+          </a:prstGeom>
+          <a:noFill/>
+        </p:spPr>
+        <p:txBody>
+          <a:bodyPr wrap="square" lIns="0" rIns="0" tIns="0" bIns="0" anchor="t">
+            <a:spAutoFit/>
+          </a:bodyPr>
+          <a:lstStyle/>
+          <a:p>
+            <a:pPr algn="l">
+              <a:lnSpc>
+                <a:spcPct val="108000"/>
+              </a:lnSpc>
+            </a:pPr>
+            <a:r>
+              <a:rPr sz="1250" b="0">
+                <a:solidFill>
+                  <a:srgbClr val="B0BEC5"/>
+                </a:solidFill>
+                <a:latin typeface="Aptos"/>
+              </a:rPr>
+              <a:t>Which buyers and segments show repeat activity?</a:t>
+            </a:r>
+          </a:p>
+        </p:txBody>
+      </p:sp>
+      <p:sp>
+        <p:nvSpPr>
+          <p:cNvPr id="21" name="TextBox 20"/>
+          <p:cNvSpPr txBox="1"/>
+          <p:nvPr/>
+        </p:nvSpPr>
+        <p:spPr>
+          <a:xfrm>
+            <a:off x="6455664" y="4370832"/>
+            <a:ext cx="4882896" cy="219456"/>
+          </a:xfrm>
+          <a:prstGeom prst="rect">
+            <a:avLst/>
+          </a:prstGeom>
+          <a:noFill/>
+        </p:spPr>
+        <p:txBody>
+          <a:bodyPr wrap="square" lIns="0" rIns="0" tIns="0" bIns="0" anchor="t">
+            <a:spAutoFit/>
+          </a:bodyPr>
+          <a:lstStyle/>
+          <a:p>
+            <a:pPr algn="l">
+              <a:lnSpc>
+                <a:spcPct val="108000"/>
+              </a:lnSpc>
+            </a:pPr>
+            <a:r>
+              <a:rPr sz="1200" b="1">
+                <a:solidFill>
+                  <a:srgbClr val="FFB300"/>
+                </a:solidFill>
+                <a:latin typeface="Aptos"/>
+              </a:rPr>
+              <a:t>Output: repeat buyer and user segment views.</a:t>
+            </a:r>
+          </a:p>
+        </p:txBody>
+      </p:sp>
+      <p:sp>
+        <p:nvSpPr>
+          <p:cNvPr id="22" name="TextBox 21"/>
+          <p:cNvSpPr txBox="1"/>
+          <p:nvPr/>
+        </p:nvSpPr>
+        <p:spPr>
+          <a:xfrm>
+            <a:off x="658368" y="5797296"/>
+            <a:ext cx="10607040" cy="256032"/>
+          </a:xfrm>
+          <a:prstGeom prst="rect">
+            <a:avLst/>
+          </a:prstGeom>
+          <a:noFill/>
+        </p:spPr>
+        <p:txBody>
+          <a:bodyPr wrap="square" lIns="0" rIns="0" tIns="0" bIns="0" anchor="t">
+            <a:spAutoFit/>
+          </a:bodyPr>
+          <a:lstStyle/>
+          <a:p>
+            <a:pPr algn="l">
+              <a:lnSpc>
+                <a:spcPct val="108000"/>
+              </a:lnSpc>
+            </a:pPr>
+            <a:r>
+              <a:rPr sz="1400" b="1">
+                <a:solidFill>
+                  <a:srgbClr val="FFFFFF"/>
+                </a:solidFill>
+                <a:latin typeface="Aptos"/>
+              </a:rPr>
+              <a:t>The same surface supports quick exploration and repeated management reporting.</a:t>
+            </a:r>
+          </a:p>
+        </p:txBody>
+      </p:sp>
+      <p:sp>
+        <p:nvSpPr>
+          <p:cNvPr id="23" name="TextBox 22"/>
+          <p:cNvSpPr txBox="1"/>
+          <p:nvPr/>
+        </p:nvSpPr>
+        <p:spPr>
+          <a:xfrm>
+            <a:off x="658368" y="6510528"/>
+            <a:ext cx="5029200" cy="164592"/>
+          </a:xfrm>
+          <a:prstGeom prst="rect">
+            <a:avLst/>
+          </a:prstGeom>
+          <a:noFill/>
+        </p:spPr>
+        <p:txBody>
+          <a:bodyPr wrap="square" lIns="0" rIns="0" tIns="0" bIns="0" anchor="t">
+            <a:spAutoFit/>
+          </a:bodyPr>
+          <a:lstStyle/>
+          <a:p>
+            <a:pPr algn="l">
+              <a:lnSpc>
+                <a:spcPct val="108000"/>
+              </a:lnSpc>
+            </a:pPr>
+            <a:r>
+              <a:rPr sz="850" b="0">
+                <a:solidFill>
+                  <a:srgbClr val="7F90A8"/>
+                </a:solidFill>
+                <a:latin typeface="Aptos"/>
+              </a:rPr>
+              <a:t>QueryForge | ClawHunt Builder Camp 2026</a:t>
+            </a:r>
+          </a:p>
+        </p:txBody>
+      </p:sp>
+      <p:sp>
+        <p:nvSpPr>
+          <p:cNvPr id="24" name="TextBox 23"/>
+          <p:cNvSpPr txBox="1"/>
+          <p:nvPr/>
+        </p:nvSpPr>
+        <p:spPr>
+          <a:xfrm>
+            <a:off x="10972800" y="6510528"/>
+            <a:ext cx="594360" cy="164592"/>
+          </a:xfrm>
+          <a:prstGeom prst="rect">
+            <a:avLst/>
+          </a:prstGeom>
+          <a:noFill/>
+        </p:spPr>
+        <p:txBody>
+          <a:bodyPr wrap="square" lIns="0" rIns="0" tIns="0" bIns="0" anchor="t">
+            <a:spAutoFit/>
+          </a:bodyPr>
+          <a:lstStyle/>
+          <a:p>
+            <a:pPr algn="r">
+              <a:lnSpc>
+                <a:spcPct val="108000"/>
+              </a:lnSpc>
+            </a:pPr>
+            <a:r>
+              <a:rPr sz="850" b="0">
+                <a:solidFill>
+                  <a:srgbClr val="7F90A8"/>
+                </a:solidFill>
+                <a:latin typeface="Aptos"/>
+              </a:rPr>
+              <a:t>7/9</a:t>
             </a:r>
           </a:p>
         </p:txBody>
@@ -4523,7 +9913,7 @@
     <p:bg>
       <p:bgPr>
         <a:solidFill>
-          <a:srgbClr val="1A1F2E"/>
+          <a:srgbClr val="1B2A4A"/>
         </a:solidFill>
         <a:effectLst/>
       </p:bgPr>
@@ -4543,28 +9933,703 @@
         </p:nvSpPr>
         <p:spPr>
           <a:xfrm>
-            <a:off x="914400" y="2286000"/>
-            <a:ext cx="9144000" cy="914400"/>
-          </a:xfrm>
-          <a:prstGeom prst="rect">
-            <a:avLst/>
-          </a:prstGeom>
-          <a:noFill/>
-        </p:spPr>
-        <p:txBody>
-          <a:bodyPr wrap="square">
-            <a:spAutoFit/>
-          </a:bodyPr>
-          <a:lstStyle/>
-          <a:p>
-            <a:pPr algn="l"/>
-            <a:r>
-              <a:rPr sz="4800" b="1">
-                <a:solidFill>
-                  <a:srgbClr val="F0EEE8"/>
-                </a:solidFill>
-                <a:latin typeface="Arial"/>
-                <a:ea typeface="Microsoft YaHei"/>
+            <a:off x="658368" y="384048"/>
+            <a:ext cx="3474720" cy="237744"/>
+          </a:xfrm>
+          <a:prstGeom prst="rect">
+            <a:avLst/>
+          </a:prstGeom>
+          <a:noFill/>
+        </p:spPr>
+        <p:txBody>
+          <a:bodyPr wrap="square" lIns="0" rIns="0" tIns="0" bIns="0" anchor="t">
+            <a:spAutoFit/>
+          </a:bodyPr>
+          <a:lstStyle/>
+          <a:p>
+            <a:pPr algn="l">
+              <a:lnSpc>
+                <a:spcPct val="108000"/>
+              </a:lnSpc>
+            </a:pPr>
+            <a:r>
+              <a:rPr sz="1000" b="1">
+                <a:solidFill>
+                  <a:srgbClr val="FFB300"/>
+                </a:solidFill>
+                <a:latin typeface="Aptos"/>
+              </a:rPr>
+              <a:t>WHAT'S NEXT</a:t>
+            </a:r>
+          </a:p>
+        </p:txBody>
+      </p:sp>
+      <p:sp>
+        <p:nvSpPr>
+          <p:cNvPr id="3" name="TextBox 2"/>
+          <p:cNvSpPr txBox="1"/>
+          <p:nvPr/>
+        </p:nvSpPr>
+        <p:spPr>
+          <a:xfrm>
+            <a:off x="658368" y="658368"/>
+            <a:ext cx="8778240" cy="658368"/>
+          </a:xfrm>
+          <a:prstGeom prst="rect">
+            <a:avLst/>
+          </a:prstGeom>
+          <a:noFill/>
+        </p:spPr>
+        <p:txBody>
+          <a:bodyPr wrap="square" lIns="0" rIns="0" tIns="0" bIns="0" anchor="t">
+            <a:spAutoFit/>
+          </a:bodyPr>
+          <a:lstStyle/>
+          <a:p>
+            <a:pPr algn="l">
+              <a:lnSpc>
+                <a:spcPct val="108000"/>
+              </a:lnSpc>
+            </a:pPr>
+            <a:r>
+              <a:rPr sz="3200" b="1">
+                <a:solidFill>
+                  <a:srgbClr val="FFFFFF"/>
+                </a:solidFill>
+                <a:latin typeface="Aptos Display"/>
+              </a:rPr>
+              <a:t>Move from a hackathon demo to a business-ready tool.</a:t>
+            </a:r>
+          </a:p>
+        </p:txBody>
+      </p:sp>
+      <p:sp>
+        <p:nvSpPr>
+          <p:cNvPr id="4" name="Rectangle 3"/>
+          <p:cNvSpPr/>
+          <p:nvPr/>
+        </p:nvSpPr>
+        <p:spPr>
+          <a:xfrm>
+            <a:off x="658368" y="1325880"/>
+            <a:ext cx="1965960" cy="38100"/>
+          </a:xfrm>
+          <a:prstGeom prst="rect">
+            <a:avLst/>
+          </a:prstGeom>
+          <a:solidFill>
+            <a:srgbClr val="FFB300"/>
+          </a:solidFill>
+          <a:ln>
+            <a:noFill/>
+          </a:ln>
+        </p:spPr>
+        <p:style>
+          <a:lnRef idx="1">
+            <a:schemeClr val="accent1"/>
+          </a:lnRef>
+          <a:fillRef idx="3">
+            <a:schemeClr val="accent1"/>
+          </a:fillRef>
+          <a:effectRef idx="2">
+            <a:schemeClr val="accent1"/>
+          </a:effectRef>
+          <a:fontRef idx="minor">
+            <a:schemeClr val="lt1"/>
+          </a:fontRef>
+        </p:style>
+        <p:txBody>
+          <a:bodyPr rtlCol="0" anchor="ctr"/>
+          <a:lstStyle/>
+          <a:p>
+            <a:pPr algn="ctr"/>
+          </a:p>
+        </p:txBody>
+      </p:sp>
+      <p:sp>
+        <p:nvSpPr>
+          <p:cNvPr id="5" name="TextBox 4"/>
+          <p:cNvSpPr txBox="1"/>
+          <p:nvPr/>
+        </p:nvSpPr>
+        <p:spPr>
+          <a:xfrm>
+            <a:off x="658368" y="1481328"/>
+            <a:ext cx="9692640" cy="347472"/>
+          </a:xfrm>
+          <a:prstGeom prst="rect">
+            <a:avLst/>
+          </a:prstGeom>
+          <a:noFill/>
+        </p:spPr>
+        <p:txBody>
+          <a:bodyPr wrap="square" lIns="0" rIns="0" tIns="0" bIns="0" anchor="t">
+            <a:spAutoFit/>
+          </a:bodyPr>
+          <a:lstStyle/>
+          <a:p>
+            <a:pPr algn="l">
+              <a:lnSpc>
+                <a:spcPct val="108000"/>
+              </a:lnSpc>
+            </a:pPr>
+            <a:r>
+              <a:rPr sz="1300" b="0">
+                <a:solidFill>
+                  <a:srgbClr val="B0BEC5"/>
+                </a:solidFill>
+                <a:latin typeface="Aptos"/>
+              </a:rPr>
+              <a:t>The roadmap extends the existing product without adding unsupported market or revenue claims.</a:t>
+            </a:r>
+          </a:p>
+        </p:txBody>
+      </p:sp>
+      <p:sp>
+        <p:nvSpPr>
+          <p:cNvPr id="6" name="Rectangle 5"/>
+          <p:cNvSpPr/>
+          <p:nvPr/>
+        </p:nvSpPr>
+        <p:spPr>
+          <a:xfrm>
+            <a:off x="658368" y="2011680"/>
+            <a:ext cx="10881360" cy="950976"/>
+          </a:xfrm>
+          <a:prstGeom prst="rect">
+            <a:avLst/>
+          </a:prstGeom>
+          <a:solidFill>
+            <a:srgbClr val="1F3056"/>
+          </a:solidFill>
+          <a:ln w="12700">
+            <a:solidFill>
+              <a:srgbClr val="2D426D"/>
+            </a:solidFill>
+          </a:ln>
+        </p:spPr>
+        <p:style>
+          <a:lnRef idx="1">
+            <a:schemeClr val="accent1"/>
+          </a:lnRef>
+          <a:fillRef idx="3">
+            <a:schemeClr val="accent1"/>
+          </a:fillRef>
+          <a:effectRef idx="2">
+            <a:schemeClr val="accent1"/>
+          </a:effectRef>
+          <a:fontRef idx="minor">
+            <a:schemeClr val="lt1"/>
+          </a:fontRef>
+        </p:style>
+        <p:txBody>
+          <a:bodyPr rtlCol="0" anchor="ctr"/>
+          <a:lstStyle/>
+          <a:p>
+            <a:pPr algn="ctr"/>
+          </a:p>
+        </p:txBody>
+      </p:sp>
+      <p:sp>
+        <p:nvSpPr>
+          <p:cNvPr id="7" name="TextBox 6"/>
+          <p:cNvSpPr txBox="1"/>
+          <p:nvPr/>
+        </p:nvSpPr>
+        <p:spPr>
+          <a:xfrm>
+            <a:off x="914400" y="2212848"/>
+            <a:ext cx="1828800" cy="256032"/>
+          </a:xfrm>
+          <a:prstGeom prst="rect">
+            <a:avLst/>
+          </a:prstGeom>
+          <a:noFill/>
+        </p:spPr>
+        <p:txBody>
+          <a:bodyPr wrap="square" lIns="0" rIns="0" tIns="0" bIns="0" anchor="t">
+            <a:spAutoFit/>
+          </a:bodyPr>
+          <a:lstStyle/>
+          <a:p>
+            <a:pPr algn="l">
+              <a:lnSpc>
+                <a:spcPct val="108000"/>
+              </a:lnSpc>
+            </a:pPr>
+            <a:r>
+              <a:rPr sz="1700" b="1">
+                <a:solidFill>
+                  <a:srgbClr val="FFB300"/>
+                </a:solidFill>
+                <a:latin typeface="Aptos"/>
+              </a:rPr>
+              <a:t>Deployment</a:t>
+            </a:r>
+          </a:p>
+        </p:txBody>
+      </p:sp>
+      <p:sp>
+        <p:nvSpPr>
+          <p:cNvPr id="8" name="TextBox 7"/>
+          <p:cNvSpPr txBox="1"/>
+          <p:nvPr/>
+        </p:nvSpPr>
+        <p:spPr>
+          <a:xfrm>
+            <a:off x="2990088" y="2194560"/>
+            <a:ext cx="7909560" cy="420624"/>
+          </a:xfrm>
+          <a:prstGeom prst="rect">
+            <a:avLst/>
+          </a:prstGeom>
+          <a:noFill/>
+        </p:spPr>
+        <p:txBody>
+          <a:bodyPr wrap="square" lIns="0" rIns="0" tIns="0" bIns="0" anchor="t">
+            <a:spAutoFit/>
+          </a:bodyPr>
+          <a:lstStyle/>
+          <a:p>
+            <a:pPr algn="l">
+              <a:lnSpc>
+                <a:spcPct val="108000"/>
+              </a:lnSpc>
+            </a:pPr>
+            <a:r>
+              <a:rPr sz="1300" b="0">
+                <a:solidFill>
+                  <a:srgbClr val="B0BEC5"/>
+                </a:solidFill>
+                <a:latin typeface="Aptos"/>
+              </a:rPr>
+              <a:t>Harden the live environment, improve onboarding, and make the demo easier to hand off to evaluators or early users.</a:t>
+            </a:r>
+          </a:p>
+        </p:txBody>
+      </p:sp>
+      <p:sp>
+        <p:nvSpPr>
+          <p:cNvPr id="9" name="Rectangle 8"/>
+          <p:cNvSpPr/>
+          <p:nvPr/>
+        </p:nvSpPr>
+        <p:spPr>
+          <a:xfrm>
+            <a:off x="658368" y="3273552"/>
+            <a:ext cx="10881360" cy="950976"/>
+          </a:xfrm>
+          <a:prstGeom prst="rect">
+            <a:avLst/>
+          </a:prstGeom>
+          <a:solidFill>
+            <a:srgbClr val="1F3056"/>
+          </a:solidFill>
+          <a:ln w="12700">
+            <a:solidFill>
+              <a:srgbClr val="2D426D"/>
+            </a:solidFill>
+          </a:ln>
+        </p:spPr>
+        <p:style>
+          <a:lnRef idx="1">
+            <a:schemeClr val="accent1"/>
+          </a:lnRef>
+          <a:fillRef idx="3">
+            <a:schemeClr val="accent1"/>
+          </a:fillRef>
+          <a:effectRef idx="2">
+            <a:schemeClr val="accent1"/>
+          </a:effectRef>
+          <a:fontRef idx="minor">
+            <a:schemeClr val="lt1"/>
+          </a:fontRef>
+        </p:style>
+        <p:txBody>
+          <a:bodyPr rtlCol="0" anchor="ctr"/>
+          <a:lstStyle/>
+          <a:p>
+            <a:pPr algn="ctr"/>
+          </a:p>
+        </p:txBody>
+      </p:sp>
+      <p:sp>
+        <p:nvSpPr>
+          <p:cNvPr id="10" name="TextBox 9"/>
+          <p:cNvSpPr txBox="1"/>
+          <p:nvPr/>
+        </p:nvSpPr>
+        <p:spPr>
+          <a:xfrm>
+            <a:off x="914400" y="3474720"/>
+            <a:ext cx="1828800" cy="256032"/>
+          </a:xfrm>
+          <a:prstGeom prst="rect">
+            <a:avLst/>
+          </a:prstGeom>
+          <a:noFill/>
+        </p:spPr>
+        <p:txBody>
+          <a:bodyPr wrap="square" lIns="0" rIns="0" tIns="0" bIns="0" anchor="t">
+            <a:spAutoFit/>
+          </a:bodyPr>
+          <a:lstStyle/>
+          <a:p>
+            <a:pPr algn="l">
+              <a:lnSpc>
+                <a:spcPct val="108000"/>
+              </a:lnSpc>
+            </a:pPr>
+            <a:r>
+              <a:rPr sz="1700" b="1">
+                <a:solidFill>
+                  <a:srgbClr val="FFB300"/>
+                </a:solidFill>
+                <a:latin typeface="Aptos"/>
+              </a:rPr>
+              <a:t>More data sources</a:t>
+            </a:r>
+          </a:p>
+        </p:txBody>
+      </p:sp>
+      <p:sp>
+        <p:nvSpPr>
+          <p:cNvPr id="11" name="TextBox 10"/>
+          <p:cNvSpPr txBox="1"/>
+          <p:nvPr/>
+        </p:nvSpPr>
+        <p:spPr>
+          <a:xfrm>
+            <a:off x="2990088" y="3456432"/>
+            <a:ext cx="7909560" cy="420624"/>
+          </a:xfrm>
+          <a:prstGeom prst="rect">
+            <a:avLst/>
+          </a:prstGeom>
+          <a:noFill/>
+        </p:spPr>
+        <p:txBody>
+          <a:bodyPr wrap="square" lIns="0" rIns="0" tIns="0" bIns="0" anchor="t">
+            <a:spAutoFit/>
+          </a:bodyPr>
+          <a:lstStyle/>
+          <a:p>
+            <a:pPr algn="l">
+              <a:lnSpc>
+                <a:spcPct val="108000"/>
+              </a:lnSpc>
+            </a:pPr>
+            <a:r>
+              <a:rPr sz="1300" b="0">
+                <a:solidFill>
+                  <a:srgbClr val="B0BEC5"/>
+                </a:solidFill>
+                <a:latin typeface="Aptos"/>
+              </a:rPr>
+              <a:t>Connect additional business datasets beyond the ecommerce demo while preserving the same question-to-chart experience.</a:t>
+            </a:r>
+          </a:p>
+        </p:txBody>
+      </p:sp>
+      <p:sp>
+        <p:nvSpPr>
+          <p:cNvPr id="12" name="Rectangle 11"/>
+          <p:cNvSpPr/>
+          <p:nvPr/>
+        </p:nvSpPr>
+        <p:spPr>
+          <a:xfrm>
+            <a:off x="658368" y="4535424"/>
+            <a:ext cx="10881360" cy="950976"/>
+          </a:xfrm>
+          <a:prstGeom prst="rect">
+            <a:avLst/>
+          </a:prstGeom>
+          <a:solidFill>
+            <a:srgbClr val="1F3056"/>
+          </a:solidFill>
+          <a:ln w="12700">
+            <a:solidFill>
+              <a:srgbClr val="2D426D"/>
+            </a:solidFill>
+          </a:ln>
+        </p:spPr>
+        <p:style>
+          <a:lnRef idx="1">
+            <a:schemeClr val="accent1"/>
+          </a:lnRef>
+          <a:fillRef idx="3">
+            <a:schemeClr val="accent1"/>
+          </a:fillRef>
+          <a:effectRef idx="2">
+            <a:schemeClr val="accent1"/>
+          </a:effectRef>
+          <a:fontRef idx="minor">
+            <a:schemeClr val="lt1"/>
+          </a:fontRef>
+        </p:style>
+        <p:txBody>
+          <a:bodyPr rtlCol="0" anchor="ctr"/>
+          <a:lstStyle/>
+          <a:p>
+            <a:pPr algn="ctr"/>
+          </a:p>
+        </p:txBody>
+      </p:sp>
+      <p:sp>
+        <p:nvSpPr>
+          <p:cNvPr id="13" name="TextBox 12"/>
+          <p:cNvSpPr txBox="1"/>
+          <p:nvPr/>
+        </p:nvSpPr>
+        <p:spPr>
+          <a:xfrm>
+            <a:off x="914400" y="4736592"/>
+            <a:ext cx="1828800" cy="256032"/>
+          </a:xfrm>
+          <a:prstGeom prst="rect">
+            <a:avLst/>
+          </a:prstGeom>
+          <a:noFill/>
+        </p:spPr>
+        <p:txBody>
+          <a:bodyPr wrap="square" lIns="0" rIns="0" tIns="0" bIns="0" anchor="t">
+            <a:spAutoFit/>
+          </a:bodyPr>
+          <a:lstStyle/>
+          <a:p>
+            <a:pPr algn="l">
+              <a:lnSpc>
+                <a:spcPct val="108000"/>
+              </a:lnSpc>
+            </a:pPr>
+            <a:r>
+              <a:rPr sz="1700" b="1">
+                <a:solidFill>
+                  <a:srgbClr val="FFB300"/>
+                </a:solidFill>
+                <a:latin typeface="Aptos"/>
+              </a:rPr>
+              <a:t>Team features</a:t>
+            </a:r>
+          </a:p>
+        </p:txBody>
+      </p:sp>
+      <p:sp>
+        <p:nvSpPr>
+          <p:cNvPr id="14" name="TextBox 13"/>
+          <p:cNvSpPr txBox="1"/>
+          <p:nvPr/>
+        </p:nvSpPr>
+        <p:spPr>
+          <a:xfrm>
+            <a:off x="2990088" y="4718304"/>
+            <a:ext cx="7909560" cy="420624"/>
+          </a:xfrm>
+          <a:prstGeom prst="rect">
+            <a:avLst/>
+          </a:prstGeom>
+          <a:noFill/>
+        </p:spPr>
+        <p:txBody>
+          <a:bodyPr wrap="square" lIns="0" rIns="0" tIns="0" bIns="0" anchor="t">
+            <a:spAutoFit/>
+          </a:bodyPr>
+          <a:lstStyle/>
+          <a:p>
+            <a:pPr algn="l">
+              <a:lnSpc>
+                <a:spcPct val="108000"/>
+              </a:lnSpc>
+            </a:pPr>
+            <a:r>
+              <a:rPr sz="1300" b="0">
+                <a:solidFill>
+                  <a:srgbClr val="B0BEC5"/>
+                </a:solidFill>
+                <a:latin typeface="Aptos"/>
+              </a:rPr>
+              <a:t>Add shared metric libraries, saved views, and collaboration controls for analysts and business stakeholders.</a:t>
+            </a:r>
+          </a:p>
+        </p:txBody>
+      </p:sp>
+      <p:sp>
+        <p:nvSpPr>
+          <p:cNvPr id="15" name="TextBox 14"/>
+          <p:cNvSpPr txBox="1"/>
+          <p:nvPr/>
+        </p:nvSpPr>
+        <p:spPr>
+          <a:xfrm>
+            <a:off x="658368" y="6510528"/>
+            <a:ext cx="5029200" cy="164592"/>
+          </a:xfrm>
+          <a:prstGeom prst="rect">
+            <a:avLst/>
+          </a:prstGeom>
+          <a:noFill/>
+        </p:spPr>
+        <p:txBody>
+          <a:bodyPr wrap="square" lIns="0" rIns="0" tIns="0" bIns="0" anchor="t">
+            <a:spAutoFit/>
+          </a:bodyPr>
+          <a:lstStyle/>
+          <a:p>
+            <a:pPr algn="l">
+              <a:lnSpc>
+                <a:spcPct val="108000"/>
+              </a:lnSpc>
+            </a:pPr>
+            <a:r>
+              <a:rPr sz="850" b="0">
+                <a:solidFill>
+                  <a:srgbClr val="7F90A8"/>
+                </a:solidFill>
+                <a:latin typeface="Aptos"/>
+              </a:rPr>
+              <a:t>QueryForge | ClawHunt Builder Camp 2026</a:t>
+            </a:r>
+          </a:p>
+        </p:txBody>
+      </p:sp>
+      <p:sp>
+        <p:nvSpPr>
+          <p:cNvPr id="16" name="TextBox 15"/>
+          <p:cNvSpPr txBox="1"/>
+          <p:nvPr/>
+        </p:nvSpPr>
+        <p:spPr>
+          <a:xfrm>
+            <a:off x="10972800" y="6510528"/>
+            <a:ext cx="594360" cy="164592"/>
+          </a:xfrm>
+          <a:prstGeom prst="rect">
+            <a:avLst/>
+          </a:prstGeom>
+          <a:noFill/>
+        </p:spPr>
+        <p:txBody>
+          <a:bodyPr wrap="square" lIns="0" rIns="0" tIns="0" bIns="0" anchor="t">
+            <a:spAutoFit/>
+          </a:bodyPr>
+          <a:lstStyle/>
+          <a:p>
+            <a:pPr algn="r">
+              <a:lnSpc>
+                <a:spcPct val="108000"/>
+              </a:lnSpc>
+            </a:pPr>
+            <a:r>
+              <a:rPr sz="850" b="0">
+                <a:solidFill>
+                  <a:srgbClr val="7F90A8"/>
+                </a:solidFill>
+                <a:latin typeface="Aptos"/>
+              </a:rPr>
+              <a:t>8/9</a:t>
+            </a:r>
+          </a:p>
+        </p:txBody>
+      </p:sp>
+    </p:spTree>
+  </p:cSld>
+  <p:clrMapOvr>
+    <a:masterClrMapping/>
+  </p:clrMapOvr>
+</p:sld>
+</file>
+
+<file path=ppt/slides/slide9.xml><?xml version="1.0" encoding="utf-8"?>
+<p:sld xmlns:a="http://schemas.openxmlformats.org/drawingml/2006/main" xmlns:p="http://schemas.openxmlformats.org/presentationml/2006/main" xmlns:r="http://schemas.openxmlformats.org/officeDocument/2006/relationships">
+  <p:cSld>
+    <p:bg>
+      <p:bgPr>
+        <a:solidFill>
+          <a:srgbClr val="1B2A4A"/>
+        </a:solidFill>
+        <a:effectLst/>
+      </p:bgPr>
+    </p:bg>
+    <p:spTree>
+      <p:nvGrpSpPr>
+        <p:cNvPr id="1" name=""/>
+        <p:cNvGrpSpPr/>
+        <p:nvPr/>
+      </p:nvGrpSpPr>
+      <p:grpSpPr/>
+      <p:sp>
+        <p:nvSpPr>
+          <p:cNvPr id="2" name="TextBox 1"/>
+          <p:cNvSpPr txBox="1"/>
+          <p:nvPr/>
+        </p:nvSpPr>
+        <p:spPr>
+          <a:xfrm>
+            <a:off x="658368" y="804672"/>
+            <a:ext cx="2560320" cy="219456"/>
+          </a:xfrm>
+          <a:prstGeom prst="rect">
+            <a:avLst/>
+          </a:prstGeom>
+          <a:noFill/>
+        </p:spPr>
+        <p:txBody>
+          <a:bodyPr wrap="square" lIns="0" rIns="0" tIns="0" bIns="0" anchor="t">
+            <a:spAutoFit/>
+          </a:bodyPr>
+          <a:lstStyle/>
+          <a:p>
+            <a:pPr algn="l">
+              <a:lnSpc>
+                <a:spcPct val="108000"/>
+              </a:lnSpc>
+            </a:pPr>
+            <a:r>
+              <a:rPr sz="1000" b="1">
+                <a:solidFill>
+                  <a:srgbClr val="FFB300"/>
+                </a:solidFill>
+                <a:latin typeface="Aptos"/>
+              </a:rPr>
+              <a:t>CTA</a:t>
+            </a:r>
+          </a:p>
+        </p:txBody>
+      </p:sp>
+      <p:sp>
+        <p:nvSpPr>
+          <p:cNvPr id="3" name="TextBox 2"/>
+          <p:cNvSpPr txBox="1"/>
+          <p:nvPr/>
+        </p:nvSpPr>
+        <p:spPr>
+          <a:xfrm>
+            <a:off x="658368" y="1298448"/>
+            <a:ext cx="6583680" cy="768096"/>
+          </a:xfrm>
+          <a:prstGeom prst="rect">
+            <a:avLst/>
+          </a:prstGeom>
+          <a:noFill/>
+        </p:spPr>
+        <p:txBody>
+          <a:bodyPr wrap="square" lIns="0" rIns="0" tIns="0" bIns="0" anchor="t">
+            <a:spAutoFit/>
+          </a:bodyPr>
+          <a:lstStyle/>
+          <a:p>
+            <a:pPr algn="l">
+              <a:lnSpc>
+                <a:spcPct val="108000"/>
+              </a:lnSpc>
+            </a:pPr>
+            <a:r>
+              <a:rPr sz="5500" b="1">
+                <a:solidFill>
+                  <a:srgbClr val="FFB300"/>
+                </a:solidFill>
+                <a:latin typeface="Aptos Display"/>
               </a:rPr>
               <a:t>QueryForge</a:t>
             </a:r>
@@ -4573,73 +10638,400 @@
       </p:sp>
       <p:sp>
         <p:nvSpPr>
-          <p:cNvPr id="3" name="TextBox 2"/>
-          <p:cNvSpPr txBox="1"/>
-          <p:nvPr/>
-        </p:nvSpPr>
-        <p:spPr>
-          <a:xfrm>
-            <a:off x="914400" y="3200400"/>
-            <a:ext cx="9144000" cy="731520"/>
-          </a:xfrm>
-          <a:prstGeom prst="rect">
-            <a:avLst/>
-          </a:prstGeom>
-          <a:noFill/>
-        </p:spPr>
-        <p:txBody>
-          <a:bodyPr wrap="square">
-            <a:spAutoFit/>
-          </a:bodyPr>
-          <a:lstStyle/>
-          <a:p>
-            <a:pPr algn="l"/>
-            <a:r>
-              <a:rPr sz="1800" b="0">
-                <a:solidFill>
-                  <a:srgbClr val="9A9A9A"/>
-                </a:solidFill>
-                <a:latin typeface="Arial"/>
-                <a:ea typeface="Microsoft YaHei"/>
-              </a:rPr>
-              <a:t>让数据分析师做更有价值的事
-让业务团队自己找到答案</a:t>
-            </a:r>
-          </a:p>
-        </p:txBody>
-      </p:sp>
-      <p:sp>
-        <p:nvSpPr>
-          <p:cNvPr id="4" name="TextBox 3"/>
-          <p:cNvSpPr txBox="1"/>
-          <p:nvPr/>
-        </p:nvSpPr>
-        <p:spPr>
-          <a:xfrm>
-            <a:off x="914400" y="5943600"/>
-            <a:ext cx="9144000" cy="365760"/>
-          </a:xfrm>
-          <a:prstGeom prst="rect">
-            <a:avLst/>
-          </a:prstGeom>
-          <a:noFill/>
-        </p:spPr>
-        <p:txBody>
-          <a:bodyPr wrap="square">
-            <a:spAutoFit/>
-          </a:bodyPr>
-          <a:lstStyle/>
-          <a:p>
-            <a:pPr algn="l"/>
+          <p:cNvPr id="4" name="Rectangle 3"/>
+          <p:cNvSpPr/>
+          <p:nvPr/>
+        </p:nvSpPr>
+        <p:spPr>
+          <a:xfrm>
+            <a:off x="658368" y="2212848"/>
+            <a:ext cx="2331720" cy="50800"/>
+          </a:xfrm>
+          <a:prstGeom prst="rect">
+            <a:avLst/>
+          </a:prstGeom>
+          <a:solidFill>
+            <a:srgbClr val="FFB300"/>
+          </a:solidFill>
+          <a:ln>
+            <a:noFill/>
+          </a:ln>
+        </p:spPr>
+        <p:style>
+          <a:lnRef idx="1">
+            <a:schemeClr val="accent1"/>
+          </a:lnRef>
+          <a:fillRef idx="3">
+            <a:schemeClr val="accent1"/>
+          </a:fillRef>
+          <a:effectRef idx="2">
+            <a:schemeClr val="accent1"/>
+          </a:effectRef>
+          <a:fontRef idx="minor">
+            <a:schemeClr val="lt1"/>
+          </a:fontRef>
+        </p:style>
+        <p:txBody>
+          <a:bodyPr rtlCol="0" anchor="ctr"/>
+          <a:lstStyle/>
+          <a:p>
+            <a:pPr algn="ctr"/>
+          </a:p>
+        </p:txBody>
+      </p:sp>
+      <p:sp>
+        <p:nvSpPr>
+          <p:cNvPr id="5" name="TextBox 4"/>
+          <p:cNvSpPr txBox="1"/>
+          <p:nvPr/>
+        </p:nvSpPr>
+        <p:spPr>
+          <a:xfrm>
+            <a:off x="658368" y="2615184"/>
+            <a:ext cx="8046720" cy="585216"/>
+          </a:xfrm>
+          <a:prstGeom prst="rect">
+            <a:avLst/>
+          </a:prstGeom>
+          <a:noFill/>
+        </p:spPr>
+        <p:txBody>
+          <a:bodyPr wrap="square" lIns="0" rIns="0" tIns="0" bIns="0" anchor="t">
+            <a:spAutoFit/>
+          </a:bodyPr>
+          <a:lstStyle/>
+          <a:p>
+            <a:pPr algn="l">
+              <a:lnSpc>
+                <a:spcPct val="108000"/>
+              </a:lnSpc>
+            </a:pPr>
+            <a:r>
+              <a:rPr sz="2300" b="1">
+                <a:solidFill>
+                  <a:srgbClr val="FFFFFF"/>
+                </a:solidFill>
+                <a:latin typeface="Aptos"/>
+              </a:rPr>
+              <a:t>Let business teams ask for data directly while analysts own the reusable metrics.</a:t>
+            </a:r>
+          </a:p>
+        </p:txBody>
+      </p:sp>
+      <p:sp>
+        <p:nvSpPr>
+          <p:cNvPr id="6" name="Rectangle 5"/>
+          <p:cNvSpPr/>
+          <p:nvPr/>
+        </p:nvSpPr>
+        <p:spPr>
+          <a:xfrm>
+            <a:off x="658368" y="3913632"/>
+            <a:ext cx="10424160" cy="1280160"/>
+          </a:xfrm>
+          <a:prstGeom prst="rect">
+            <a:avLst/>
+          </a:prstGeom>
+          <a:solidFill>
+            <a:srgbClr val="1F3056"/>
+          </a:solidFill>
+          <a:ln w="12700">
+            <a:solidFill>
+              <a:srgbClr val="2D426D"/>
+            </a:solidFill>
+          </a:ln>
+        </p:spPr>
+        <p:style>
+          <a:lnRef idx="1">
+            <a:schemeClr val="accent1"/>
+          </a:lnRef>
+          <a:fillRef idx="3">
+            <a:schemeClr val="accent1"/>
+          </a:fillRef>
+          <a:effectRef idx="2">
+            <a:schemeClr val="accent1"/>
+          </a:effectRef>
+          <a:fontRef idx="minor">
+            <a:schemeClr val="lt1"/>
+          </a:fontRef>
+        </p:style>
+        <p:txBody>
+          <a:bodyPr rtlCol="0" anchor="ctr"/>
+          <a:lstStyle/>
+          <a:p>
+            <a:pPr algn="ctr"/>
+          </a:p>
+        </p:txBody>
+      </p:sp>
+      <p:sp>
+        <p:nvSpPr>
+          <p:cNvPr id="7" name="TextBox 6"/>
+          <p:cNvSpPr txBox="1"/>
+          <p:nvPr/>
+        </p:nvSpPr>
+        <p:spPr>
+          <a:xfrm>
+            <a:off x="932688" y="4187952"/>
+            <a:ext cx="1417320" cy="219456"/>
+          </a:xfrm>
+          <a:prstGeom prst="rect">
+            <a:avLst/>
+          </a:prstGeom>
+          <a:noFill/>
+        </p:spPr>
+        <p:txBody>
+          <a:bodyPr wrap="square" lIns="0" rIns="0" tIns="0" bIns="0" anchor="t">
+            <a:spAutoFit/>
+          </a:bodyPr>
+          <a:lstStyle/>
+          <a:p>
+            <a:pPr algn="l">
+              <a:lnSpc>
+                <a:spcPct val="108000"/>
+              </a:lnSpc>
+            </a:pPr>
+            <a:r>
+              <a:rPr sz="1200" b="1">
+                <a:solidFill>
+                  <a:srgbClr val="B0BEC5"/>
+                </a:solidFill>
+                <a:latin typeface="Aptos"/>
+              </a:rPr>
+              <a:t>LIVE DEMO</a:t>
+            </a:r>
+          </a:p>
+        </p:txBody>
+      </p:sp>
+      <p:sp>
+        <p:nvSpPr>
+          <p:cNvPr id="8" name="TextBox 7"/>
+          <p:cNvSpPr txBox="1"/>
+          <p:nvPr/>
+        </p:nvSpPr>
+        <p:spPr>
+          <a:xfrm>
+            <a:off x="2359152" y="4151376"/>
+            <a:ext cx="7863840" cy="274320"/>
+          </a:xfrm>
+          <a:prstGeom prst="rect">
+            <a:avLst/>
+          </a:prstGeom>
+          <a:noFill/>
+        </p:spPr>
+        <p:txBody>
+          <a:bodyPr wrap="square" lIns="0" rIns="0" tIns="0" bIns="0" anchor="t">
+            <a:spAutoFit/>
+          </a:bodyPr>
+          <a:lstStyle/>
+          <a:p>
+            <a:pPr algn="l">
+              <a:lnSpc>
+                <a:spcPct val="108000"/>
+              </a:lnSpc>
+            </a:pPr>
+            <a:r>
+              <a:rPr sz="1800" b="1">
+                <a:solidFill>
+                  <a:srgbClr val="58A6FF"/>
+                </a:solidFill>
+                <a:latin typeface="Aptos"/>
+              </a:rPr>
+              <a:t>queryforge-production-8d6f.up.railway.app</a:t>
+            </a:r>
+          </a:p>
+        </p:txBody>
+      </p:sp>
+      <p:sp>
+        <p:nvSpPr>
+          <p:cNvPr id="9" name="TextBox 8"/>
+          <p:cNvSpPr txBox="1"/>
+          <p:nvPr/>
+        </p:nvSpPr>
+        <p:spPr>
+          <a:xfrm>
+            <a:off x="932688" y="4700016"/>
+            <a:ext cx="1417320" cy="219456"/>
+          </a:xfrm>
+          <a:prstGeom prst="rect">
+            <a:avLst/>
+          </a:prstGeom>
+          <a:noFill/>
+        </p:spPr>
+        <p:txBody>
+          <a:bodyPr wrap="square" lIns="0" rIns="0" tIns="0" bIns="0" anchor="t">
+            <a:spAutoFit/>
+          </a:bodyPr>
+          <a:lstStyle/>
+          <a:p>
+            <a:pPr algn="l">
+              <a:lnSpc>
+                <a:spcPct val="108000"/>
+              </a:lnSpc>
+            </a:pPr>
+            <a:r>
+              <a:rPr sz="1200" b="1">
+                <a:solidFill>
+                  <a:srgbClr val="B0BEC5"/>
+                </a:solidFill>
+                <a:latin typeface="Aptos"/>
+              </a:rPr>
+              <a:t>GITHUB</a:t>
+            </a:r>
+          </a:p>
+        </p:txBody>
+      </p:sp>
+      <p:sp>
+        <p:nvSpPr>
+          <p:cNvPr id="10" name="TextBox 9"/>
+          <p:cNvSpPr txBox="1"/>
+          <p:nvPr/>
+        </p:nvSpPr>
+        <p:spPr>
+          <a:xfrm>
+            <a:off x="2359152" y="4663440"/>
+            <a:ext cx="7863840" cy="274320"/>
+          </a:xfrm>
+          <a:prstGeom prst="rect">
+            <a:avLst/>
+          </a:prstGeom>
+          <a:noFill/>
+        </p:spPr>
+        <p:txBody>
+          <a:bodyPr wrap="square" lIns="0" rIns="0" tIns="0" bIns="0" anchor="t">
+            <a:spAutoFit/>
+          </a:bodyPr>
+          <a:lstStyle/>
+          <a:p>
+            <a:pPr algn="l">
+              <a:lnSpc>
+                <a:spcPct val="108000"/>
+              </a:lnSpc>
+            </a:pPr>
+            <a:r>
+              <a:rPr sz="1800" b="1">
+                <a:solidFill>
+                  <a:srgbClr val="58A6FF"/>
+                </a:solidFill>
+                <a:latin typeface="Aptos"/>
+              </a:rPr>
+              <a:t>github.com/eric-stone-plus/queryforge</a:t>
+            </a:r>
+          </a:p>
+        </p:txBody>
+      </p:sp>
+      <p:sp>
+        <p:nvSpPr>
+          <p:cNvPr id="11" name="TextBox 10"/>
+          <p:cNvSpPr txBox="1"/>
+          <p:nvPr/>
+        </p:nvSpPr>
+        <p:spPr>
+          <a:xfrm>
+            <a:off x="658368" y="5870448"/>
+            <a:ext cx="7498079" cy="219456"/>
+          </a:xfrm>
+          <a:prstGeom prst="rect">
+            <a:avLst/>
+          </a:prstGeom>
+          <a:noFill/>
+        </p:spPr>
+        <p:txBody>
+          <a:bodyPr wrap="square" lIns="0" rIns="0" tIns="0" bIns="0" anchor="t">
+            <a:spAutoFit/>
+          </a:bodyPr>
+          <a:lstStyle/>
+          <a:p>
+            <a:pPr algn="l">
+              <a:lnSpc>
+                <a:spcPct val="108000"/>
+              </a:lnSpc>
+            </a:pPr>
             <a:r>
               <a:rPr sz="1200" b="0">
                 <a:solidFill>
-                  <a:srgbClr val="9A9A9A"/>
-                </a:solidFill>
-                <a:latin typeface="Arial"/>
-                <a:ea typeface="Microsoft YaHei"/>
-              </a:rPr>
-              <a:t>ClawHunt Builder Camp 2026</a:t>
+                  <a:srgbClr val="B0BEC5"/>
+                </a:solidFill>
+                <a:latin typeface="Aptos"/>
+              </a:rPr>
+              <a:t>Built at ClawHunt Builder Camp 2026 in 72 hours | MiMo v2.5 Pro</a:t>
+            </a:r>
+          </a:p>
+        </p:txBody>
+      </p:sp>
+      <p:sp>
+        <p:nvSpPr>
+          <p:cNvPr id="12" name="TextBox 11"/>
+          <p:cNvSpPr txBox="1"/>
+          <p:nvPr/>
+        </p:nvSpPr>
+        <p:spPr>
+          <a:xfrm>
+            <a:off x="658368" y="6510528"/>
+            <a:ext cx="5029200" cy="164592"/>
+          </a:xfrm>
+          <a:prstGeom prst="rect">
+            <a:avLst/>
+          </a:prstGeom>
+          <a:noFill/>
+        </p:spPr>
+        <p:txBody>
+          <a:bodyPr wrap="square" lIns="0" rIns="0" tIns="0" bIns="0" anchor="t">
+            <a:spAutoFit/>
+          </a:bodyPr>
+          <a:lstStyle/>
+          <a:p>
+            <a:pPr algn="l">
+              <a:lnSpc>
+                <a:spcPct val="108000"/>
+              </a:lnSpc>
+            </a:pPr>
+            <a:r>
+              <a:rPr sz="850" b="0">
+                <a:solidFill>
+                  <a:srgbClr val="7F90A8"/>
+                </a:solidFill>
+                <a:latin typeface="Aptos"/>
+              </a:rPr>
+              <a:t>QueryForge | ClawHunt Builder Camp 2026</a:t>
+            </a:r>
+          </a:p>
+        </p:txBody>
+      </p:sp>
+      <p:sp>
+        <p:nvSpPr>
+          <p:cNvPr id="13" name="TextBox 12"/>
+          <p:cNvSpPr txBox="1"/>
+          <p:nvPr/>
+        </p:nvSpPr>
+        <p:spPr>
+          <a:xfrm>
+            <a:off x="10972800" y="6510528"/>
+            <a:ext cx="594360" cy="164592"/>
+          </a:xfrm>
+          <a:prstGeom prst="rect">
+            <a:avLst/>
+          </a:prstGeom>
+          <a:noFill/>
+        </p:spPr>
+        <p:txBody>
+          <a:bodyPr wrap="square" lIns="0" rIns="0" tIns="0" bIns="0" anchor="t">
+            <a:spAutoFit/>
+          </a:bodyPr>
+          <a:lstStyle/>
+          <a:p>
+            <a:pPr algn="r">
+              <a:lnSpc>
+                <a:spcPct val="108000"/>
+              </a:lnSpc>
+            </a:pPr>
+            <a:r>
+              <a:rPr sz="850" b="0">
+                <a:solidFill>
+                  <a:srgbClr val="7F90A8"/>
+                </a:solidFill>
+                <a:latin typeface="Aptos"/>
+              </a:rPr>
+              <a:t>9/9</a:t>
             </a:r>
           </a:p>
         </p:txBody>

--- a/assets/QueryForge-Pitch.pptx
+++ b/assets/QueryForge-Pitch.pptx
@@ -3514,7 +3514,7 @@
         <p:spPr>
           <a:xfrm>
             <a:off x="1188720" y="4160520"/>
-            <a:ext cx="9966960" cy="1188720"/>
+            <a:ext cx="6446520" cy="1188720"/>
           </a:xfrm>
           <a:prstGeom prst="rect">
             <a:avLst/>
@@ -3528,71 +3528,74 @@
           <a:lstStyle/>
           <a:p>
             <a:pPr algn="l">
-              <a:spcAft>
-                <a:spcPts val="800"/>
-              </a:spcAft>
-            </a:pPr>
-            <a:r>
-              <a:rPr sz="1300" b="0">
-                <a:solidFill>
-                  <a:srgbClr val="4EA8DE"/>
-                </a:solidFill>
-                <a:latin typeface="Arial"/>
-                <a:ea typeface="Microsoft YaHei"/>
+              <a:lnSpc>
+                <a:spcPct val="112000"/>
+              </a:lnSpc>
+              <a:spcAft>
+                <a:spcPts val="800"/>
+              </a:spcAft>
+            </a:pPr>
+            <a:r>
+              <a:rPr b="1" sz="1500">
+                <a:solidFill>
+                  <a:srgbClr val="D4A853"/>
+                </a:solidFill>
+                <a:latin typeface="Microsoft YaHei"/>
+                <a:ea typeface="Microsoft YaHei"/>
+                <a:cs typeface="Microsoft YaHei"/>
               </a:rPr>
               <a:t>在线演示：queryforge-production-8d6f.up.railway.app</a:t>
             </a:r>
           </a:p>
           <a:p>
-            <a:pPr algn="l">
-              <a:spcAft>
-                <a:spcPts val="800"/>
-              </a:spcAft>
-            </a:pPr>
-            <a:r>
-              <a:rPr sz="1300" b="0">
-                <a:solidFill>
-                  <a:srgbClr val="4EA8DE"/>
-                </a:solidFill>
-                <a:latin typeface="Arial"/>
-                <a:ea typeface="Microsoft YaHei"/>
+            <a:pPr>
+              <a:spcAft>
+                <a:spcPts val="700"/>
+              </a:spcAft>
+            </a:pPr>
+            <a:r>
+              <a:rPr b="1" sz="1400">
+                <a:solidFill>
+                  <a:srgbClr val="C8C4BC"/>
+                </a:solidFill>
+                <a:latin typeface="Microsoft YaHei"/>
+                <a:ea typeface="Microsoft YaHei"/>
+                <a:cs typeface="Microsoft YaHei"/>
               </a:rPr>
               <a:t>GitHub：github.com/eric-stone-plus/queryforge</a:t>
             </a:r>
           </a:p>
           <a:p>
-            <a:pPr algn="l">
-              <a:spcAft>
-                <a:spcPts val="800"/>
-              </a:spcAft>
-            </a:pPr>
-            <a:r>
-              <a:rPr sz="1300" b="0">
-                <a:solidFill>
-                  <a:srgbClr val="F0EEE8"/>
-                </a:solidFill>
-                <a:latin typeface="Arial"/>
-                <a:ea typeface="Microsoft YaHei"/>
-              </a:rPr>
-              <a:t/>
-            </a:r>
-          </a:p>
-          <a:p>
-            <a:pPr algn="l">
-              <a:spcAft>
-                <a:spcPts val="800"/>
-              </a:spcAft>
-            </a:pPr>
-            <a:r>
-              <a:rPr sz="1300" b="1">
-                <a:solidFill>
-                  <a:srgbClr val="4CAF50"/>
-                </a:solidFill>
-                <a:latin typeface="Arial"/>
-                <a:ea typeface="Microsoft YaHei"/>
-              </a:rPr>
-              <a:t>欢迎现场提问测试，真实数据实时响应</a:t>
-            </a:r>
+            <a:pPr>
+              <a:spcAft>
+                <a:spcPts val="700"/>
+              </a:spcAft>
+            </a:pPr>
+          </a:p>
+          <a:p>
+            <a:pPr>
+              <a:spcAft>
+                <a:spcPts val="600"/>
+              </a:spcAft>
+            </a:pPr>
+            <a:r>
+              <a:rPr b="1" sz="1500">
+                <a:solidFill>
+                  <a:srgbClr val="F4F1E9"/>
+                </a:solidFill>
+                <a:latin typeface="Microsoft YaHei"/>
+                <a:ea typeface="Microsoft YaHei"/>
+                <a:cs typeface="Microsoft YaHei"/>
+              </a:rPr>
+              <a:t>欢迎现场扫码体验，真实数据实时响应</a:t>
+            </a:r>
+          </a:p>
+          <a:p>
+            <a:pPr>
+              <a:spcAft>
+                <a:spcPts val="700"/>
+              </a:spcAft>
+            </a:pPr>
           </a:p>
         </p:txBody>
       </p:sp>
@@ -3628,6 +3631,243 @@
                 <a:ea typeface="Microsoft YaHei"/>
               </a:rPr>
               <a:t>ClawHunt Builder Camp 2026 · Track A: Agents at Work</a:t>
+            </a:r>
+          </a:p>
+        </p:txBody>
+      </p:sp>
+      <p:sp>
+        <p:nvSpPr>
+          <p:cNvPr id="9" name="Rectangle 8"/>
+          <p:cNvSpPr/>
+          <p:nvPr/>
+        </p:nvSpPr>
+        <p:spPr>
+          <a:xfrm>
+            <a:off x="8641080" y="3401568"/>
+            <a:ext cx="2359152" cy="2359152"/>
+          </a:xfrm>
+          <a:prstGeom prst="rect">
+            <a:avLst/>
+          </a:prstGeom>
+          <a:solidFill>
+            <a:srgbClr val="2A2F3E"/>
+          </a:solidFill>
+          <a:ln w="12700">
+            <a:solidFill>
+              <a:srgbClr val="3B4356"/>
+            </a:solidFill>
+          </a:ln>
+        </p:spPr>
+        <p:style>
+          <a:lnRef idx="1">
+            <a:schemeClr val="accent1"/>
+          </a:lnRef>
+          <a:fillRef idx="3">
+            <a:schemeClr val="accent1"/>
+          </a:fillRef>
+          <a:effectRef idx="2">
+            <a:schemeClr val="accent1"/>
+          </a:effectRef>
+          <a:fontRef idx="minor">
+            <a:schemeClr val="lt1"/>
+          </a:fontRef>
+        </p:style>
+        <p:txBody>
+          <a:bodyPr rtlCol="0" anchor="ctr"/>
+          <a:lstStyle/>
+          <a:p>
+            <a:pPr algn="ctr"/>
+          </a:p>
+        </p:txBody>
+      </p:sp>
+      <p:sp>
+        <p:nvSpPr>
+          <p:cNvPr id="10" name="Rectangle 9"/>
+          <p:cNvSpPr/>
+          <p:nvPr/>
+        </p:nvSpPr>
+        <p:spPr>
+          <a:xfrm>
+            <a:off x="8833104" y="3593592"/>
+            <a:ext cx="1975104" cy="1975104"/>
+          </a:xfrm>
+          <a:prstGeom prst="rect">
+            <a:avLst/>
+          </a:prstGeom>
+          <a:solidFill>
+            <a:srgbClr val="FFFFFF"/>
+          </a:solidFill>
+          <a:ln>
+            <a:solidFill>
+              <a:srgbClr val="FFFFFF"/>
+            </a:solidFill>
+          </a:ln>
+        </p:spPr>
+        <p:style>
+          <a:lnRef idx="1">
+            <a:schemeClr val="accent1"/>
+          </a:lnRef>
+          <a:fillRef idx="3">
+            <a:schemeClr val="accent1"/>
+          </a:fillRef>
+          <a:effectRef idx="2">
+            <a:schemeClr val="accent1"/>
+          </a:effectRef>
+          <a:fontRef idx="minor">
+            <a:schemeClr val="lt1"/>
+          </a:fontRef>
+        </p:style>
+        <p:txBody>
+          <a:bodyPr rtlCol="0" anchor="ctr"/>
+          <a:lstStyle/>
+          <a:p>
+            <a:pPr algn="ctr"/>
+          </a:p>
+        </p:txBody>
+      </p:sp>
+      <p:pic>
+        <p:nvPicPr>
+          <p:cNvPr id="11" name="Picture 10" descr="railway-demo-qr.png"/>
+          <p:cNvPicPr>
+            <a:picLocks noChangeAspect="1"/>
+          </p:cNvPicPr>
+          <p:nvPr/>
+        </p:nvPicPr>
+        <p:blipFill>
+          <a:blip r:embed="rId2"/>
+          <a:stretch>
+            <a:fillRect/>
+          </a:stretch>
+        </p:blipFill>
+        <p:spPr>
+          <a:xfrm>
+            <a:off x="8887968" y="3648456"/>
+            <a:ext cx="1865376" cy="1865376"/>
+          </a:xfrm>
+          <a:prstGeom prst="rect">
+            <a:avLst/>
+          </a:prstGeom>
+        </p:spPr>
+      </p:pic>
+      <p:sp>
+        <p:nvSpPr>
+          <p:cNvPr id="12" name="TextBox 11"/>
+          <p:cNvSpPr txBox="1"/>
+          <p:nvPr/>
+        </p:nvSpPr>
+        <p:spPr>
+          <a:xfrm>
+            <a:off x="8641080" y="2962656"/>
+            <a:ext cx="2359152" cy="256032"/>
+          </a:xfrm>
+          <a:prstGeom prst="rect">
+            <a:avLst/>
+          </a:prstGeom>
+          <a:noFill/>
+        </p:spPr>
+        <p:txBody>
+          <a:bodyPr wrap="square" anchor="t" lIns="0" rIns="0" tIns="0" bIns="0">
+            <a:spAutoFit/>
+          </a:bodyPr>
+          <a:lstStyle/>
+          <a:p>
+            <a:pPr algn="ctr">
+              <a:lnSpc>
+                <a:spcPct val="108000"/>
+              </a:lnSpc>
+            </a:pPr>
+            <a:r>
+              <a:rPr sz="1400" b="1">
+                <a:solidFill>
+                  <a:srgbClr val="D4A853"/>
+                </a:solidFill>
+                <a:latin typeface="Microsoft YaHei"/>
+                <a:ea typeface="Microsoft YaHei"/>
+                <a:cs typeface="Microsoft YaHei"/>
+              </a:rPr>
+              <a:t>扫码体验</a:t>
+            </a:r>
+          </a:p>
+        </p:txBody>
+      </p:sp>
+      <p:sp>
+        <p:nvSpPr>
+          <p:cNvPr id="13" name="TextBox 12"/>
+          <p:cNvSpPr txBox="1"/>
+          <p:nvPr/>
+        </p:nvSpPr>
+        <p:spPr>
+          <a:xfrm>
+            <a:off x="8558784" y="5833872"/>
+            <a:ext cx="2514600" cy="201168"/>
+          </a:xfrm>
+          <a:prstGeom prst="rect">
+            <a:avLst/>
+          </a:prstGeom>
+          <a:noFill/>
+        </p:spPr>
+        <p:txBody>
+          <a:bodyPr wrap="square" anchor="t" lIns="0" rIns="0" tIns="0" bIns="0">
+            <a:spAutoFit/>
+          </a:bodyPr>
+          <a:lstStyle/>
+          <a:p>
+            <a:pPr algn="ctr">
+              <a:lnSpc>
+                <a:spcPct val="108000"/>
+              </a:lnSpc>
+            </a:pPr>
+            <a:r>
+              <a:rPr sz="980" b="1">
+                <a:solidFill>
+                  <a:srgbClr val="9A9A9A"/>
+                </a:solidFill>
+                <a:latin typeface="Microsoft YaHei"/>
+                <a:ea typeface="Microsoft YaHei"/>
+                <a:cs typeface="Microsoft YaHei"/>
+              </a:rPr>
+              <a:t>Railway 在线演示</a:t>
+            </a:r>
+          </a:p>
+        </p:txBody>
+      </p:sp>
+      <p:sp>
+        <p:nvSpPr>
+          <p:cNvPr id="14" name="TextBox 13"/>
+          <p:cNvSpPr txBox="1"/>
+          <p:nvPr/>
+        </p:nvSpPr>
+        <p:spPr>
+          <a:xfrm>
+            <a:off x="8302752" y="6053328"/>
+            <a:ext cx="3054096" cy="201168"/>
+          </a:xfrm>
+          <a:prstGeom prst="rect">
+            <a:avLst/>
+          </a:prstGeom>
+          <a:noFill/>
+        </p:spPr>
+        <p:txBody>
+          <a:bodyPr wrap="square" anchor="t" lIns="0" rIns="0" tIns="0" bIns="0">
+            <a:spAutoFit/>
+          </a:bodyPr>
+          <a:lstStyle/>
+          <a:p>
+            <a:pPr algn="ctr">
+              <a:lnSpc>
+                <a:spcPct val="108000"/>
+              </a:lnSpc>
+            </a:pPr>
+            <a:r>
+              <a:rPr sz="800" b="0">
+                <a:solidFill>
+                  <a:srgbClr val="C8C4BC"/>
+                </a:solidFill>
+                <a:latin typeface="Microsoft YaHei"/>
+                <a:ea typeface="Microsoft YaHei"/>
+                <a:cs typeface="Microsoft YaHei"/>
+              </a:rPr>
+              <a:t>queryforge-production-8d6f.up.railway.app</a:t>
             </a:r>
           </a:p>
         </p:txBody>

--- a/assets/QueryForge-Pitch.pptx
+++ b/assets/QueryForge-Pitch.pptx
@@ -114,6 +114,1056 @@
     </a:lvl9pPr>
   </p:defaultTextStyle>
 </p:presentation>
+</file>
+
+<file path=ppt/notesMasters/notesMaster1.xml><?xml version="1.0" encoding="utf-8"?>
+<p:notesMaster xmlns:a="http://schemas.openxmlformats.org/drawingml/2006/main" xmlns:p="http://schemas.openxmlformats.org/presentationml/2006/main" xmlns:r="http://schemas.openxmlformats.org/officeDocument/2006/relationships">
+  <p:cSld>
+    <p:bg>
+      <p:bgRef idx="1001">
+        <a:schemeClr val="bg1"/>
+      </p:bgRef>
+    </p:bg>
+    <p:spTree>
+      <p:nvGrpSpPr>
+        <p:cNvPr id="1" name=""/>
+        <p:cNvGrpSpPr/>
+        <p:nvPr/>
+      </p:nvGrpSpPr>
+      <p:grpSpPr>
+        <a:xfrm>
+          <a:off x="0" y="0"/>
+          <a:ext cx="0" cy="0"/>
+          <a:chOff x="0" y="0"/>
+          <a:chExt cx="0" cy="0"/>
+        </a:xfrm>
+      </p:grpSpPr>
+      <p:sp>
+        <p:nvSpPr>
+          <p:cNvPr id="2" name="Header Placeholder 1"/>
+          <p:cNvSpPr>
+            <a:spLocks noGrp="1"/>
+          </p:cNvSpPr>
+          <p:nvPr>
+            <p:ph type="hdr" sz="quarter"/>
+          </p:nvPr>
+        </p:nvSpPr>
+        <p:spPr>
+          <a:xfrm>
+            <a:off x="0" y="0"/>
+            <a:ext cx="2971800" cy="457200"/>
+          </a:xfrm>
+          <a:prstGeom prst="rect">
+            <a:avLst/>
+          </a:prstGeom>
+        </p:spPr>
+        <p:txBody>
+          <a:bodyPr vert="horz" lIns="91440" tIns="45720" rIns="91440" bIns="45720" rtlCol="0"/>
+          <a:lstStyle>
+            <a:lvl1pPr algn="l">
+              <a:defRPr sz="1200"/>
+            </a:lvl1pPr>
+          </a:lstStyle>
+          <a:p>
+            <a:endParaRPr lang="en-US"/>
+          </a:p>
+        </p:txBody>
+      </p:sp>
+      <p:sp>
+        <p:nvSpPr>
+          <p:cNvPr id="3" name="Date Placeholder 2"/>
+          <p:cNvSpPr>
+            <a:spLocks noGrp="1"/>
+          </p:cNvSpPr>
+          <p:nvPr>
+            <p:ph type="dt" idx="1"/>
+          </p:nvPr>
+        </p:nvSpPr>
+        <p:spPr>
+          <a:xfrm>
+            <a:off x="3884613" y="0"/>
+            <a:ext cx="2971800" cy="457200"/>
+          </a:xfrm>
+          <a:prstGeom prst="rect">
+            <a:avLst/>
+          </a:prstGeom>
+        </p:spPr>
+        <p:txBody>
+          <a:bodyPr vert="horz" lIns="91440" tIns="45720" rIns="91440" bIns="45720" rtlCol="0"/>
+          <a:lstStyle>
+            <a:lvl1pPr algn="r">
+              <a:defRPr sz="1200"/>
+            </a:lvl1pPr>
+          </a:lstStyle>
+          <a:p>
+            <a:fld id="{0F89C1C7-3DCD-1040-A9CF-14679D8B5DDD}" type="datetimeFigureOut">
+              <a:rPr lang="en-US" smtClean="0"/>
+              <a:t>10/17/16</a:t>
+            </a:fld>
+            <a:endParaRPr lang="en-US"/>
+          </a:p>
+        </p:txBody>
+      </p:sp>
+      <p:sp>
+        <p:nvSpPr>
+          <p:cNvPr id="4" name="Slide Image Placeholder 3"/>
+          <p:cNvSpPr>
+            <a:spLocks noGrp="1" noRot="1" noChangeAspect="1"/>
+          </p:cNvSpPr>
+          <p:nvPr>
+            <p:ph type="sldImg" idx="2"/>
+          </p:nvPr>
+        </p:nvSpPr>
+        <p:spPr>
+          <a:xfrm>
+            <a:off x="1143000" y="685800"/>
+            <a:ext cx="4572000" cy="3429000"/>
+          </a:xfrm>
+          <a:prstGeom prst="rect">
+            <a:avLst/>
+          </a:prstGeom>
+          <a:noFill/>
+          <a:ln w="12700">
+            <a:solidFill>
+              <a:prstClr val="black"/>
+            </a:solidFill>
+          </a:ln>
+        </p:spPr>
+        <p:txBody>
+          <a:bodyPr vert="horz" lIns="91440" tIns="45720" rIns="91440" bIns="45720" rtlCol="0" anchor="ctr"/>
+          <a:lstStyle/>
+          <a:p>
+            <a:endParaRPr lang="en-US"/>
+          </a:p>
+        </p:txBody>
+      </p:sp>
+      <p:sp>
+        <p:nvSpPr>
+          <p:cNvPr id="5" name="Notes Placeholder 4"/>
+          <p:cNvSpPr>
+            <a:spLocks noGrp="1"/>
+          </p:cNvSpPr>
+          <p:nvPr>
+            <p:ph type="body" sz="quarter" idx="3"/>
+          </p:nvPr>
+        </p:nvSpPr>
+        <p:spPr>
+          <a:xfrm>
+            <a:off x="685800" y="4343400"/>
+            <a:ext cx="5486400" cy="4114800"/>
+          </a:xfrm>
+          <a:prstGeom prst="rect">
+            <a:avLst/>
+          </a:prstGeom>
+        </p:spPr>
+        <p:txBody>
+          <a:bodyPr vert="horz" lIns="91440" tIns="45720" rIns="91440" bIns="45720" rtlCol="0"/>
+          <a:lstStyle/>
+          <a:p>
+            <a:pPr lvl="0"/>
+            <a:r>
+              <a:rPr lang="en-US" smtClean="0"/>
+              <a:t>Click to edit Master text styles</a:t>
+            </a:r>
+          </a:p>
+          <a:p>
+            <a:pPr lvl="1"/>
+            <a:r>
+              <a:rPr lang="en-US" smtClean="0"/>
+              <a:t>Second level</a:t>
+            </a:r>
+          </a:p>
+          <a:p>
+            <a:pPr lvl="2"/>
+            <a:r>
+              <a:rPr lang="en-US" smtClean="0"/>
+              <a:t>Third level</a:t>
+            </a:r>
+          </a:p>
+          <a:p>
+            <a:pPr lvl="3"/>
+            <a:r>
+              <a:rPr lang="en-US" smtClean="0"/>
+              <a:t>Fourth level</a:t>
+            </a:r>
+          </a:p>
+          <a:p>
+            <a:pPr lvl="4"/>
+            <a:r>
+              <a:rPr lang="en-US" smtClean="0"/>
+              <a:t>Fifth level</a:t>
+            </a:r>
+            <a:endParaRPr lang="en-US"/>
+          </a:p>
+        </p:txBody>
+      </p:sp>
+      <p:sp>
+        <p:nvSpPr>
+          <p:cNvPr id="6" name="Footer Placeholder 5"/>
+          <p:cNvSpPr>
+            <a:spLocks noGrp="1"/>
+          </p:cNvSpPr>
+          <p:nvPr>
+            <p:ph type="ftr" sz="quarter" idx="4"/>
+          </p:nvPr>
+        </p:nvSpPr>
+        <p:spPr>
+          <a:xfrm>
+            <a:off x="0" y="8685213"/>
+            <a:ext cx="2971800" cy="457200"/>
+          </a:xfrm>
+          <a:prstGeom prst="rect">
+            <a:avLst/>
+          </a:prstGeom>
+        </p:spPr>
+        <p:txBody>
+          <a:bodyPr vert="horz" lIns="91440" tIns="45720" rIns="91440" bIns="45720" rtlCol="0" anchor="b"/>
+          <a:lstStyle>
+            <a:lvl1pPr algn="l">
+              <a:defRPr sz="1200"/>
+            </a:lvl1pPr>
+          </a:lstStyle>
+          <a:p>
+            <a:endParaRPr lang="en-US"/>
+          </a:p>
+        </p:txBody>
+      </p:sp>
+      <p:sp>
+        <p:nvSpPr>
+          <p:cNvPr id="7" name="Slide Number Placeholder 6"/>
+          <p:cNvSpPr>
+            <a:spLocks noGrp="1"/>
+          </p:cNvSpPr>
+          <p:nvPr>
+            <p:ph type="sldNum" sz="quarter" idx="5"/>
+          </p:nvPr>
+        </p:nvSpPr>
+        <p:spPr>
+          <a:xfrm>
+            <a:off x="3884613" y="8685213"/>
+            <a:ext cx="2971800" cy="457200"/>
+          </a:xfrm>
+          <a:prstGeom prst="rect">
+            <a:avLst/>
+          </a:prstGeom>
+        </p:spPr>
+        <p:txBody>
+          <a:bodyPr vert="horz" lIns="91440" tIns="45720" rIns="91440" bIns="45720" rtlCol="0" anchor="b"/>
+          <a:lstStyle>
+            <a:lvl1pPr algn="r">
+              <a:defRPr sz="1200"/>
+            </a:lvl1pPr>
+          </a:lstStyle>
+          <a:p>
+            <a:fld id="{BB5E49A5-4136-284D-997B-48E1D791AD67}" type="slidenum">
+              <a:rPr lang="en-US" smtClean="0"/>
+              <a:t>‹#›</a:t>
+            </a:fld>
+            <a:endParaRPr lang="en-US"/>
+          </a:p>
+        </p:txBody>
+      </p:sp>
+    </p:spTree>
+    <p:extLst>
+      <p:ext uri="{BB962C8B-B14F-4D97-AF65-F5344CB8AC3E}">
+        <p14:creationId xmlns:p14="http://schemas.microsoft.com/office/powerpoint/2010/main" val="2623252185"/>
+      </p:ext>
+    </p:extLst>
+  </p:cSld>
+  <p:clrMap bg1="lt1" tx1="dk1" bg2="lt2" tx2="dk2" accent1="accent1" accent2="accent2" accent3="accent3" accent4="accent4" accent5="accent5" accent6="accent6" hlink="hlink" folHlink="folHlink"/>
+  <p:notesStyle>
+    <a:lvl1pPr marL="0" algn="l" defTabSz="457200" rtl="0" eaLnBrk="1" latinLnBrk="0" hangingPunct="1">
+      <a:defRPr sz="1200" kern="1200">
+        <a:solidFill>
+          <a:schemeClr val="tx1"/>
+        </a:solidFill>
+        <a:latin typeface="+mn-lt"/>
+        <a:ea typeface="+mn-ea"/>
+        <a:cs typeface="+mn-cs"/>
+      </a:defRPr>
+    </a:lvl1pPr>
+    <a:lvl2pPr marL="457200" algn="l" defTabSz="457200" rtl="0" eaLnBrk="1" latinLnBrk="0" hangingPunct="1">
+      <a:defRPr sz="1200" kern="1200">
+        <a:solidFill>
+          <a:schemeClr val="tx1"/>
+        </a:solidFill>
+        <a:latin typeface="+mn-lt"/>
+        <a:ea typeface="+mn-ea"/>
+        <a:cs typeface="+mn-cs"/>
+      </a:defRPr>
+    </a:lvl2pPr>
+    <a:lvl3pPr marL="914400" algn="l" defTabSz="457200" rtl="0" eaLnBrk="1" latinLnBrk="0" hangingPunct="1">
+      <a:defRPr sz="1200" kern="1200">
+        <a:solidFill>
+          <a:schemeClr val="tx1"/>
+        </a:solidFill>
+        <a:latin typeface="+mn-lt"/>
+        <a:ea typeface="+mn-ea"/>
+        <a:cs typeface="+mn-cs"/>
+      </a:defRPr>
+    </a:lvl3pPr>
+    <a:lvl4pPr marL="1371600" algn="l" defTabSz="457200" rtl="0" eaLnBrk="1" latinLnBrk="0" hangingPunct="1">
+      <a:defRPr sz="1200" kern="1200">
+        <a:solidFill>
+          <a:schemeClr val="tx1"/>
+        </a:solidFill>
+        <a:latin typeface="+mn-lt"/>
+        <a:ea typeface="+mn-ea"/>
+        <a:cs typeface="+mn-cs"/>
+      </a:defRPr>
+    </a:lvl4pPr>
+    <a:lvl5pPr marL="1828800" algn="l" defTabSz="457200" rtl="0" eaLnBrk="1" latinLnBrk="0" hangingPunct="1">
+      <a:defRPr sz="1200" kern="1200">
+        <a:solidFill>
+          <a:schemeClr val="tx1"/>
+        </a:solidFill>
+        <a:latin typeface="+mn-lt"/>
+        <a:ea typeface="+mn-ea"/>
+        <a:cs typeface="+mn-cs"/>
+      </a:defRPr>
+    </a:lvl5pPr>
+    <a:lvl6pPr marL="2286000" algn="l" defTabSz="457200" rtl="0" eaLnBrk="1" latinLnBrk="0" hangingPunct="1">
+      <a:defRPr sz="1200" kern="1200">
+        <a:solidFill>
+          <a:schemeClr val="tx1"/>
+        </a:solidFill>
+        <a:latin typeface="+mn-lt"/>
+        <a:ea typeface="+mn-ea"/>
+        <a:cs typeface="+mn-cs"/>
+      </a:defRPr>
+    </a:lvl6pPr>
+    <a:lvl7pPr marL="2743200" algn="l" defTabSz="457200" rtl="0" eaLnBrk="1" latinLnBrk="0" hangingPunct="1">
+      <a:defRPr sz="1200" kern="1200">
+        <a:solidFill>
+          <a:schemeClr val="tx1"/>
+        </a:solidFill>
+        <a:latin typeface="+mn-lt"/>
+        <a:ea typeface="+mn-ea"/>
+        <a:cs typeface="+mn-cs"/>
+      </a:defRPr>
+    </a:lvl7pPr>
+    <a:lvl8pPr marL="3200400" algn="l" defTabSz="457200" rtl="0" eaLnBrk="1" latinLnBrk="0" hangingPunct="1">
+      <a:defRPr sz="1200" kern="1200">
+        <a:solidFill>
+          <a:schemeClr val="tx1"/>
+        </a:solidFill>
+        <a:latin typeface="+mn-lt"/>
+        <a:ea typeface="+mn-ea"/>
+        <a:cs typeface="+mn-cs"/>
+      </a:defRPr>
+    </a:lvl8pPr>
+    <a:lvl9pPr marL="3657600" algn="l" defTabSz="457200" rtl="0" eaLnBrk="1" latinLnBrk="0" hangingPunct="1">
+      <a:defRPr sz="1200" kern="1200">
+        <a:solidFill>
+          <a:schemeClr val="tx1"/>
+        </a:solidFill>
+        <a:latin typeface="+mn-lt"/>
+        <a:ea typeface="+mn-ea"/>
+        <a:cs typeface="+mn-cs"/>
+      </a:defRPr>
+    </a:lvl9pPr>
+  </p:notesStyle>
+</p:notesMaster>
+</file>
+
+<file path=ppt/notesSlides/notesSlide1.xml><?xml version="1.0" encoding="utf-8"?>
+<p:notes xmlns:a="http://schemas.openxmlformats.org/drawingml/2006/main" xmlns:p="http://schemas.openxmlformats.org/presentationml/2006/main" xmlns:r="http://schemas.openxmlformats.org/officeDocument/2006/relationships">
+  <p:cSld>
+    <p:spTree>
+      <p:nvGrpSpPr>
+        <p:cNvPr id="1" name=""/>
+        <p:cNvGrpSpPr/>
+        <p:nvPr/>
+      </p:nvGrpSpPr>
+      <p:grpSpPr>
+        <a:xfrm>
+          <a:off x="0" y="0"/>
+          <a:ext cx="0" cy="0"/>
+          <a:chOff x="0" y="0"/>
+          <a:chExt cx="0" cy="0"/>
+        </a:xfrm>
+      </p:grpSpPr>
+      <p:sp>
+        <p:nvSpPr>
+          <p:cNvPr id="2" name="Slide Image Placeholder 1"/>
+          <p:cNvSpPr>
+            <a:spLocks noGrp="1"/>
+          </p:cNvSpPr>
+          <p:nvPr>
+            <p:ph type="sldImg" idx="2"/>
+          </p:nvPr>
+        </p:nvSpPr>
+        <p:spPr/>
+      </p:sp>
+      <p:sp>
+        <p:nvSpPr>
+          <p:cNvPr id="3" name="Notes Placeholder 2"/>
+          <p:cNvSpPr>
+            <a:spLocks noGrp="1"/>
+          </p:cNvSpPr>
+          <p:nvPr>
+            <p:ph type="body" idx="3" sz="quarter"/>
+          </p:nvPr>
+        </p:nvSpPr>
+        <p:spPr/>
+        <p:txBody>
+          <a:bodyPr/>
+          <a:lstStyle/>
+          <a:p>
+            <a:r>
+              <a:t>大家好，我是 QueryForge 的开发者。QueryForge 是一个 AI 数据分析智能体，让业务团队用自然语言直接提问。我们用 Kaggle 上 Olist 巴西电商的真实数据——99,441 笔订单——做了完整验证。不要提模型名和框架。</a:t>
+            </a:r>
+          </a:p>
+        </p:txBody>
+      </p:sp>
+      <p:sp>
+        <p:nvSpPr>
+          <p:cNvPr id="4" name="Slide Number Placeholder 3"/>
+          <p:cNvSpPr>
+            <a:spLocks noGrp="1"/>
+          </p:cNvSpPr>
+          <p:nvPr>
+            <p:ph type="sldNum" idx="5" sz="quarter"/>
+          </p:nvPr>
+        </p:nvSpPr>
+        <p:spPr/>
+      </p:sp>
+    </p:spTree>
+  </p:cSld>
+  <p:clrMapOvr>
+    <a:masterClrMapping/>
+  </p:clrMapOvr>
+</p:notes>
+</file>
+
+<file path=ppt/notesSlides/notesSlide10.xml><?xml version="1.0" encoding="utf-8"?>
+<p:notes xmlns:a="http://schemas.openxmlformats.org/drawingml/2006/main" xmlns:p="http://schemas.openxmlformats.org/presentationml/2006/main" xmlns:r="http://schemas.openxmlformats.org/officeDocument/2006/relationships">
+  <p:cSld>
+    <p:spTree>
+      <p:nvGrpSpPr>
+        <p:cNvPr id="1" name=""/>
+        <p:cNvGrpSpPr/>
+        <p:nvPr/>
+      </p:nvGrpSpPr>
+      <p:grpSpPr>
+        <a:xfrm>
+          <a:off x="0" y="0"/>
+          <a:ext cx="0" cy="0"/>
+          <a:chOff x="0" y="0"/>
+          <a:chExt cx="0" cy="0"/>
+        </a:xfrm>
+      </p:grpSpPr>
+      <p:sp>
+        <p:nvSpPr>
+          <p:cNvPr id="2" name="Slide Image Placeholder 1"/>
+          <p:cNvSpPr>
+            <a:spLocks noGrp="1"/>
+          </p:cNvSpPr>
+          <p:nvPr>
+            <p:ph type="sldImg" idx="2"/>
+          </p:nvPr>
+        </p:nvSpPr>
+        <p:spPr/>
+      </p:sp>
+      <p:sp>
+        <p:nvSpPr>
+          <p:cNvPr id="3" name="Notes Placeholder 2"/>
+          <p:cNvSpPr>
+            <a:spLocks noGrp="1"/>
+          </p:cNvSpPr>
+          <p:nvPr>
+            <p:ph type="body" idx="3" sz="quarter"/>
+          </p:nvPr>
+        </p:nvSpPr>
+        <p:spPr/>
+        <p:txBody>
+          <a:bodyPr/>
+          <a:lstStyle/>
+          <a:p>
+            <a:r>
+              <a:t>结束语：不是替代分析师，是放大10倍。扫二维码体验，GitHub开源。谢谢。指向二维码。时间允许可现场开演示。</a:t>
+            </a:r>
+          </a:p>
+        </p:txBody>
+      </p:sp>
+      <p:sp>
+        <p:nvSpPr>
+          <p:cNvPr id="4" name="Slide Number Placeholder 3"/>
+          <p:cNvSpPr>
+            <a:spLocks noGrp="1"/>
+          </p:cNvSpPr>
+          <p:nvPr>
+            <p:ph type="sldNum" idx="5" sz="quarter"/>
+          </p:nvPr>
+        </p:nvSpPr>
+        <p:spPr/>
+      </p:sp>
+    </p:spTree>
+  </p:cSld>
+  <p:clrMapOvr>
+    <a:masterClrMapping/>
+  </p:clrMapOvr>
+</p:notes>
+</file>
+
+<file path=ppt/notesSlides/notesSlide2.xml><?xml version="1.0" encoding="utf-8"?>
+<p:notes xmlns:a="http://schemas.openxmlformats.org/drawingml/2006/main" xmlns:p="http://schemas.openxmlformats.org/presentationml/2006/main" xmlns:r="http://schemas.openxmlformats.org/officeDocument/2006/relationships">
+  <p:cSld>
+    <p:spTree>
+      <p:nvGrpSpPr>
+        <p:cNvPr id="1" name=""/>
+        <p:cNvGrpSpPr/>
+        <p:nvPr/>
+      </p:nvGrpSpPr>
+      <p:grpSpPr>
+        <a:xfrm>
+          <a:off x="0" y="0"/>
+          <a:ext cx="0" cy="0"/>
+          <a:chOff x="0" y="0"/>
+          <a:chExt cx="0" cy="0"/>
+        </a:xfrm>
+      </p:grpSpPr>
+      <p:sp>
+        <p:nvSpPr>
+          <p:cNvPr id="2" name="Slide Image Placeholder 1"/>
+          <p:cNvSpPr>
+            <a:spLocks noGrp="1"/>
+          </p:cNvSpPr>
+          <p:nvPr>
+            <p:ph type="sldImg" idx="2"/>
+          </p:nvPr>
+        </p:nvSpPr>
+        <p:spPr/>
+      </p:sp>
+      <p:sp>
+        <p:nvSpPr>
+          <p:cNvPr id="3" name="Notes Placeholder 2"/>
+          <p:cNvSpPr>
+            <a:spLocks noGrp="1"/>
+          </p:cNvSpPr>
+          <p:nvPr>
+            <p:ph type="body" idx="3" sz="quarter"/>
+          </p:nvPr>
+        </p:nvSpPr>
+        <p:spPr/>
+        <p:txBody>
+          <a:bodyPr/>
+          <a:lstStyle/>
+          <a:p>
+            <a:r>
+              <a:t>痛点：分析师 80% 时间在重复拉数。运营问华东卖了多少，得排队；市场问哪个品类增长最快，得等报表。关键句：痛点不是没有数据，是数据到不了需要的人手里。</a:t>
+            </a:r>
+          </a:p>
+        </p:txBody>
+      </p:sp>
+      <p:sp>
+        <p:nvSpPr>
+          <p:cNvPr id="4" name="Slide Number Placeholder 3"/>
+          <p:cNvSpPr>
+            <a:spLocks noGrp="1"/>
+          </p:cNvSpPr>
+          <p:nvPr>
+            <p:ph type="sldNum" idx="5" sz="quarter"/>
+          </p:nvPr>
+        </p:nvSpPr>
+        <p:spPr/>
+      </p:sp>
+    </p:spTree>
+  </p:cSld>
+  <p:clrMapOvr>
+    <a:masterClrMapping/>
+  </p:clrMapOvr>
+</p:notes>
+</file>
+
+<file path=ppt/notesSlides/notesSlide3.xml><?xml version="1.0" encoding="utf-8"?>
+<p:notes xmlns:a="http://schemas.openxmlformats.org/drawingml/2006/main" xmlns:p="http://schemas.openxmlformats.org/presentationml/2006/main" xmlns:r="http://schemas.openxmlformats.org/officeDocument/2006/relationships">
+  <p:cSld>
+    <p:spTree>
+      <p:nvGrpSpPr>
+        <p:cNvPr id="1" name=""/>
+        <p:cNvGrpSpPr/>
+        <p:nvPr/>
+      </p:nvGrpSpPr>
+      <p:grpSpPr>
+        <a:xfrm>
+          <a:off x="0" y="0"/>
+          <a:ext cx="0" cy="0"/>
+          <a:chOff x="0" y="0"/>
+          <a:chExt cx="0" cy="0"/>
+        </a:xfrm>
+      </p:grpSpPr>
+      <p:sp>
+        <p:nvSpPr>
+          <p:cNvPr id="2" name="Slide Image Placeholder 1"/>
+          <p:cNvSpPr>
+            <a:spLocks noGrp="1"/>
+          </p:cNvSpPr>
+          <p:nvPr>
+            <p:ph type="sldImg" idx="2"/>
+          </p:nvPr>
+        </p:nvSpPr>
+        <p:spPr/>
+      </p:sp>
+      <p:sp>
+        <p:nvSpPr>
+          <p:cNvPr id="3" name="Notes Placeholder 2"/>
+          <p:cNvSpPr>
+            <a:spLocks noGrp="1"/>
+          </p:cNvSpPr>
+          <p:nvPr>
+            <p:ph type="body" idx="3" sz="quarter"/>
+          </p:nvPr>
+        </p:nvSpPr>
+        <p:spPr/>
+        <p:txBody>
+          <a:bodyPr/>
+          <a:lstStyle/>
+          <a:p>
+            <a:r>
+              <a:t>方案：分析师定义一次指标口径，业务团队永久使用。从提需求等三天到自己问自己看。不是每次重新理解，而是一次定义永久可用。</a:t>
+            </a:r>
+          </a:p>
+        </p:txBody>
+      </p:sp>
+      <p:sp>
+        <p:nvSpPr>
+          <p:cNvPr id="4" name="Slide Number Placeholder 3"/>
+          <p:cNvSpPr>
+            <a:spLocks noGrp="1"/>
+          </p:cNvSpPr>
+          <p:nvPr>
+            <p:ph type="sldNum" idx="5" sz="quarter"/>
+          </p:nvPr>
+        </p:nvSpPr>
+        <p:spPr/>
+      </p:sp>
+    </p:spTree>
+  </p:cSld>
+  <p:clrMapOvr>
+    <a:masterClrMapping/>
+  </p:clrMapOvr>
+</p:notes>
+</file>
+
+<file path=ppt/notesSlides/notesSlide4.xml><?xml version="1.0" encoding="utf-8"?>
+<p:notes xmlns:a="http://schemas.openxmlformats.org/drawingml/2006/main" xmlns:p="http://schemas.openxmlformats.org/presentationml/2006/main" xmlns:r="http://schemas.openxmlformats.org/officeDocument/2006/relationships">
+  <p:cSld>
+    <p:spTree>
+      <p:nvGrpSpPr>
+        <p:cNvPr id="1" name=""/>
+        <p:cNvGrpSpPr/>
+        <p:nvPr/>
+      </p:nvGrpSpPr>
+      <p:grpSpPr>
+        <a:xfrm>
+          <a:off x="0" y="0"/>
+          <a:ext cx="0" cy="0"/>
+          <a:chOff x="0" y="0"/>
+          <a:chExt cx="0" cy="0"/>
+        </a:xfrm>
+      </p:grpSpPr>
+      <p:sp>
+        <p:nvSpPr>
+          <p:cNvPr id="2" name="Slide Image Placeholder 1"/>
+          <p:cNvSpPr>
+            <a:spLocks noGrp="1"/>
+          </p:cNvSpPr>
+          <p:nvPr>
+            <p:ph type="sldImg" idx="2"/>
+          </p:nvPr>
+        </p:nvSpPr>
+        <p:spPr/>
+      </p:sp>
+      <p:sp>
+        <p:nvSpPr>
+          <p:cNvPr id="3" name="Notes Placeholder 2"/>
+          <p:cNvSpPr>
+            <a:spLocks noGrp="1"/>
+          </p:cNvSpPr>
+          <p:nvPr>
+            <p:ph type="body" idx="3" sz="quarter"/>
+          </p:nvPr>
+        </p:nvSpPr>
+        <p:spPr/>
+        <p:txBody>
+          <a:bodyPr/>
+          <a:lstStyle/>
+          <a:p>
+            <a:r>
+              <a:t>四能力快速过：取数可视化、归因建议、智能纠错、指标库。不要展开，演示环节现场展示。</a:t>
+            </a:r>
+          </a:p>
+        </p:txBody>
+      </p:sp>
+      <p:sp>
+        <p:nvSpPr>
+          <p:cNvPr id="4" name="Slide Number Placeholder 3"/>
+          <p:cNvSpPr>
+            <a:spLocks noGrp="1"/>
+          </p:cNvSpPr>
+          <p:nvPr>
+            <p:ph type="sldNum" idx="5" sz="quarter"/>
+          </p:nvPr>
+        </p:nvSpPr>
+        <p:spPr/>
+      </p:sp>
+    </p:spTree>
+  </p:cSld>
+  <p:clrMapOvr>
+    <a:masterClrMapping/>
+  </p:clrMapOvr>
+</p:notes>
+</file>
+
+<file path=ppt/notesSlides/notesSlide5.xml><?xml version="1.0" encoding="utf-8"?>
+<p:notes xmlns:a="http://schemas.openxmlformats.org/drawingml/2006/main" xmlns:p="http://schemas.openxmlformats.org/presentationml/2006/main" xmlns:r="http://schemas.openxmlformats.org/officeDocument/2006/relationships">
+  <p:cSld>
+    <p:spTree>
+      <p:nvGrpSpPr>
+        <p:cNvPr id="1" name=""/>
+        <p:cNvGrpSpPr/>
+        <p:nvPr/>
+      </p:nvGrpSpPr>
+      <p:grpSpPr>
+        <a:xfrm>
+          <a:off x="0" y="0"/>
+          <a:ext cx="0" cy="0"/>
+          <a:chOff x="0" y="0"/>
+          <a:chExt cx="0" cy="0"/>
+        </a:xfrm>
+      </p:grpSpPr>
+      <p:sp>
+        <p:nvSpPr>
+          <p:cNvPr id="2" name="Slide Image Placeholder 1"/>
+          <p:cNvSpPr>
+            <a:spLocks noGrp="1"/>
+          </p:cNvSpPr>
+          <p:nvPr>
+            <p:ph type="sldImg" idx="2"/>
+          </p:nvPr>
+        </p:nvSpPr>
+        <p:spPr/>
+      </p:sp>
+      <p:sp>
+        <p:nvSpPr>
+          <p:cNvPr id="3" name="Notes Placeholder 2"/>
+          <p:cNvSpPr>
+            <a:spLocks noGrp="1"/>
+          </p:cNvSpPr>
+          <p:nvPr>
+            <p:ph type="body" idx="3" sz="quarter"/>
+          </p:nvPr>
+        </p:nvSpPr>
+        <p:spPr/>
+        <p:txBody>
+          <a:bodyPr/>
+          <a:lstStyle/>
+          <a:p>
+            <a:r>
+              <a:t>真实数据：Olist 巴西电商 99K 订单 96K 用户 74 品类。评委可随时验证——数据集公开，查询可复现。</a:t>
+            </a:r>
+          </a:p>
+        </p:txBody>
+      </p:sp>
+      <p:sp>
+        <p:nvSpPr>
+          <p:cNvPr id="4" name="Slide Number Placeholder 3"/>
+          <p:cNvSpPr>
+            <a:spLocks noGrp="1"/>
+          </p:cNvSpPr>
+          <p:nvPr>
+            <p:ph type="sldNum" idx="5" sz="quarter"/>
+          </p:nvPr>
+        </p:nvSpPr>
+        <p:spPr/>
+      </p:sp>
+    </p:spTree>
+  </p:cSld>
+  <p:clrMapOvr>
+    <a:masterClrMapping/>
+  </p:clrMapOvr>
+</p:notes>
+</file>
+
+<file path=ppt/notesSlides/notesSlide6.xml><?xml version="1.0" encoding="utf-8"?>
+<p:notes xmlns:a="http://schemas.openxmlformats.org/drawingml/2006/main" xmlns:p="http://schemas.openxmlformats.org/presentationml/2006/main" xmlns:r="http://schemas.openxmlformats.org/officeDocument/2006/relationships">
+  <p:cSld>
+    <p:spTree>
+      <p:nvGrpSpPr>
+        <p:cNvPr id="1" name=""/>
+        <p:cNvGrpSpPr/>
+        <p:nvPr/>
+      </p:nvGrpSpPr>
+      <p:grpSpPr>
+        <a:xfrm>
+          <a:off x="0" y="0"/>
+          <a:ext cx="0" cy="0"/>
+          <a:chOff x="0" y="0"/>
+          <a:chExt cx="0" cy="0"/>
+        </a:xfrm>
+      </p:grpSpPr>
+      <p:sp>
+        <p:nvSpPr>
+          <p:cNvPr id="2" name="Slide Image Placeholder 1"/>
+          <p:cNvSpPr>
+            <a:spLocks noGrp="1"/>
+          </p:cNvSpPr>
+          <p:nvPr>
+            <p:ph type="sldImg" idx="2"/>
+          </p:nvPr>
+        </p:nvSpPr>
+        <p:spPr/>
+      </p:sp>
+      <p:sp>
+        <p:nvSpPr>
+          <p:cNvPr id="3" name="Notes Placeholder 2"/>
+          <p:cNvSpPr>
+            <a:spLocks noGrp="1"/>
+          </p:cNvSpPr>
+          <p:nvPr>
+            <p:ph type="body" idx="3" sz="quarter"/>
+          </p:nvPr>
+        </p:nvSpPr>
+        <p:spPr/>
+        <p:txBody>
+          <a:bodyPr/>
+          <a:lstStyle/>
+          <a:p>
+            <a:r>
+              <a:t>三层架构：受控语义层（不靠LLM猜表名）、验证式Agent循环（SQL→验证→执行→分析）、企业数据平面（Schema-only、只读、AST校验）。关键句：不是套壳ChatGPT，每层有安全边界。</a:t>
+            </a:r>
+          </a:p>
+        </p:txBody>
+      </p:sp>
+      <p:sp>
+        <p:nvSpPr>
+          <p:cNvPr id="4" name="Slide Number Placeholder 3"/>
+          <p:cNvSpPr>
+            <a:spLocks noGrp="1"/>
+          </p:cNvSpPr>
+          <p:nvPr>
+            <p:ph type="sldNum" idx="5" sz="quarter"/>
+          </p:nvPr>
+        </p:nvSpPr>
+        <p:spPr/>
+      </p:sp>
+    </p:spTree>
+  </p:cSld>
+  <p:clrMapOvr>
+    <a:masterClrMapping/>
+  </p:clrMapOvr>
+</p:notes>
+</file>
+
+<file path=ppt/notesSlides/notesSlide7.xml><?xml version="1.0" encoding="utf-8"?>
+<p:notes xmlns:a="http://schemas.openxmlformats.org/drawingml/2006/main" xmlns:p="http://schemas.openxmlformats.org/presentationml/2006/main" xmlns:r="http://schemas.openxmlformats.org/officeDocument/2006/relationships">
+  <p:cSld>
+    <p:spTree>
+      <p:nvGrpSpPr>
+        <p:cNvPr id="1" name=""/>
+        <p:cNvGrpSpPr/>
+        <p:nvPr/>
+      </p:nvGrpSpPr>
+      <p:grpSpPr>
+        <a:xfrm>
+          <a:off x="0" y="0"/>
+          <a:ext cx="0" cy="0"/>
+          <a:chOff x="0" y="0"/>
+          <a:chExt cx="0" cy="0"/>
+        </a:xfrm>
+      </p:grpSpPr>
+      <p:sp>
+        <p:nvSpPr>
+          <p:cNvPr id="2" name="Slide Image Placeholder 1"/>
+          <p:cNvSpPr>
+            <a:spLocks noGrp="1"/>
+          </p:cNvSpPr>
+          <p:nvPr>
+            <p:ph type="sldImg" idx="2"/>
+          </p:nvPr>
+        </p:nvSpPr>
+        <p:spPr/>
+      </p:sp>
+      <p:sp>
+        <p:nvSpPr>
+          <p:cNvPr id="3" name="Notes Placeholder 2"/>
+          <p:cNvSpPr>
+            <a:spLocks noGrp="1"/>
+          </p:cNvSpPr>
+          <p:nvPr>
+            <p:ph type="body" idx="3" sz="quarter"/>
+          </p:nvPr>
+        </p:nvSpPr>
+        <p:spPr/>
+        <p:txBody>
+          <a:bodyPr/>
+          <a:lstStyle/>
+          <a:p>
+            <a:r>
+              <a:t>数据合规：LLM只看Schema不看数据。SQL语法树解析只允许SELECT。数据库只读连接。生产路线图：RLS、PII脱敏、审计日志。同Snowflake Cortex和Databricks AI/BI。</a:t>
+            </a:r>
+          </a:p>
+        </p:txBody>
+      </p:sp>
+      <p:sp>
+        <p:nvSpPr>
+          <p:cNvPr id="4" name="Slide Number Placeholder 3"/>
+          <p:cNvSpPr>
+            <a:spLocks noGrp="1"/>
+          </p:cNvSpPr>
+          <p:nvPr>
+            <p:ph type="sldNum" idx="5" sz="quarter"/>
+          </p:nvPr>
+        </p:nvSpPr>
+        <p:spPr/>
+      </p:sp>
+    </p:spTree>
+  </p:cSld>
+  <p:clrMapOvr>
+    <a:masterClrMapping/>
+  </p:clrMapOvr>
+</p:notes>
+</file>
+
+<file path=ppt/notesSlides/notesSlide8.xml><?xml version="1.0" encoding="utf-8"?>
+<p:notes xmlns:a="http://schemas.openxmlformats.org/drawingml/2006/main" xmlns:p="http://schemas.openxmlformats.org/presentationml/2006/main" xmlns:r="http://schemas.openxmlformats.org/officeDocument/2006/relationships">
+  <p:cSld>
+    <p:spTree>
+      <p:nvGrpSpPr>
+        <p:cNvPr id="1" name=""/>
+        <p:cNvGrpSpPr/>
+        <p:nvPr/>
+      </p:nvGrpSpPr>
+      <p:grpSpPr>
+        <a:xfrm>
+          <a:off x="0" y="0"/>
+          <a:ext cx="0" cy="0"/>
+          <a:chOff x="0" y="0"/>
+          <a:chExt cx="0" cy="0"/>
+        </a:xfrm>
+      </p:grpSpPr>
+      <p:sp>
+        <p:nvSpPr>
+          <p:cNvPr id="2" name="Slide Image Placeholder 1"/>
+          <p:cNvSpPr>
+            <a:spLocks noGrp="1"/>
+          </p:cNvSpPr>
+          <p:nvPr>
+            <p:ph type="sldImg" idx="2"/>
+          </p:nvPr>
+        </p:nvSpPr>
+        <p:spPr/>
+      </p:sp>
+      <p:sp>
+        <p:nvSpPr>
+          <p:cNvPr id="3" name="Notes Placeholder 2"/>
+          <p:cNvSpPr>
+            <a:spLocks noGrp="1"/>
+          </p:cNvSpPr>
+          <p:nvPr>
+            <p:ph type="body" idx="3" sz="quarter"/>
+          </p:nvPr>
+        </p:nvSpPr>
+        <p:spPr/>
+        <p:txBody>
+          <a:bodyPr/>
+          <a:lstStyle/>
+          <a:p>
+            <a:r>
+              <a:t>生产路径快速过：Phase1 MVP 1-2周，Phase2 企业试用1-2月，Phase3 规模化3-6月。每查询$0.003。证明想过商业化就行。</a:t>
+            </a:r>
+          </a:p>
+        </p:txBody>
+      </p:sp>
+      <p:sp>
+        <p:nvSpPr>
+          <p:cNvPr id="4" name="Slide Number Placeholder 3"/>
+          <p:cNvSpPr>
+            <a:spLocks noGrp="1"/>
+          </p:cNvSpPr>
+          <p:nvPr>
+            <p:ph type="sldNum" idx="5" sz="quarter"/>
+          </p:nvPr>
+        </p:nvSpPr>
+        <p:spPr/>
+      </p:sp>
+    </p:spTree>
+  </p:cSld>
+  <p:clrMapOvr>
+    <a:masterClrMapping/>
+  </p:clrMapOvr>
+</p:notes>
+</file>
+
+<file path=ppt/notesSlides/notesSlide9.xml><?xml version="1.0" encoding="utf-8"?>
+<p:notes xmlns:a="http://schemas.openxmlformats.org/drawingml/2006/main" xmlns:p="http://schemas.openxmlformats.org/presentationml/2006/main" xmlns:r="http://schemas.openxmlformats.org/officeDocument/2006/relationships">
+  <p:cSld>
+    <p:spTree>
+      <p:nvGrpSpPr>
+        <p:cNvPr id="1" name=""/>
+        <p:cNvGrpSpPr/>
+        <p:nvPr/>
+      </p:nvGrpSpPr>
+      <p:grpSpPr>
+        <a:xfrm>
+          <a:off x="0" y="0"/>
+          <a:ext cx="0" cy="0"/>
+          <a:chOff x="0" y="0"/>
+          <a:chExt cx="0" cy="0"/>
+        </a:xfrm>
+      </p:grpSpPr>
+      <p:sp>
+        <p:nvSpPr>
+          <p:cNvPr id="2" name="Slide Image Placeholder 1"/>
+          <p:cNvSpPr>
+            <a:spLocks noGrp="1"/>
+          </p:cNvSpPr>
+          <p:nvPr>
+            <p:ph type="sldImg" idx="2"/>
+          </p:nvPr>
+        </p:nvSpPr>
+        <p:spPr/>
+      </p:sp>
+      <p:sp>
+        <p:nvSpPr>
+          <p:cNvPr id="3" name="Notes Placeholder 2"/>
+          <p:cNvSpPr>
+            <a:spLocks noGrp="1"/>
+          </p:cNvSpPr>
+          <p:nvPr>
+            <p:ph type="body" idx="3" sz="quarter"/>
+          </p:nvPr>
+        </p:nvSpPr>
+        <p:spPr/>
+        <p:txBody>
+          <a:bodyPr/>
+          <a:lstStyle/>
+          <a:p>
+            <a:r>
+              <a:t>双重价值：分析师减少80%重复工作变成定标准的，业务从等3天变成10秒。关键句：分析师被解放，业务被赋能。</a:t>
+            </a:r>
+          </a:p>
+        </p:txBody>
+      </p:sp>
+      <p:sp>
+        <p:nvSpPr>
+          <p:cNvPr id="4" name="Slide Number Placeholder 3"/>
+          <p:cNvSpPr>
+            <a:spLocks noGrp="1"/>
+          </p:cNvSpPr>
+          <p:nvPr>
+            <p:ph type="sldNum" idx="5" sz="quarter"/>
+          </p:nvPr>
+        </p:nvSpPr>
+        <p:spPr/>
+      </p:sp>
+    </p:spTree>
+  </p:cSld>
+  <p:clrMapOvr>
+    <a:masterClrMapping/>
+  </p:clrMapOvr>
+</p:notes>
 </file>
 
 <file path=ppt/slideLayouts/slideLayout1.xml><?xml version="1.0" encoding="utf-8"?>
@@ -3113,8 +4163,8 @@
         </p:nvSpPr>
         <p:spPr>
           <a:xfrm>
-            <a:off x="914400" y="1371600"/>
-            <a:ext cx="9144000" cy="457200"/>
+            <a:off x="914400" y="2011680"/>
+            <a:ext cx="9144000" cy="914400"/>
           </a:xfrm>
           <a:prstGeom prst="rect">
             <a:avLst/>
@@ -3129,45 +4179,9 @@
           <a:p>
             <a:pPr algn="l"/>
             <a:r>
-              <a:rPr sz="1800" b="0">
-                <a:solidFill>
-                  <a:srgbClr val="9A9A9A"/>
-                </a:solidFill>
-                <a:latin typeface="Arial"/>
-                <a:ea typeface="Microsoft YaHei"/>
-              </a:rPr>
-              <a:t>数据分析师每周 60% 的时间在做同一件事：拉报表</a:t>
-            </a:r>
-          </a:p>
-        </p:txBody>
-      </p:sp>
-      <p:sp>
-        <p:nvSpPr>
-          <p:cNvPr id="3" name="TextBox 2"/>
-          <p:cNvSpPr txBox="1"/>
-          <p:nvPr/>
-        </p:nvSpPr>
-        <p:spPr>
-          <a:xfrm>
-            <a:off x="914400" y="2011680"/>
-            <a:ext cx="9144000" cy="914400"/>
-          </a:xfrm>
-          <a:prstGeom prst="rect">
-            <a:avLst/>
-          </a:prstGeom>
-          <a:noFill/>
-        </p:spPr>
-        <p:txBody>
-          <a:bodyPr wrap="square">
-            <a:spAutoFit/>
-          </a:bodyPr>
-          <a:lstStyle/>
-          <a:p>
-            <a:pPr algn="l"/>
-            <a:r>
-              <a:rPr sz="4800" b="1">
-                <a:solidFill>
-                  <a:srgbClr val="F0EEE8"/>
+              <a:rPr sz="5200" b="1">
+                <a:solidFill>
+                  <a:srgbClr val="FFFFFF"/>
                 </a:solidFill>
                 <a:latin typeface="Arial"/>
                 <a:ea typeface="Microsoft YaHei"/>
@@ -3179,13 +4193,49 @@
       </p:sp>
       <p:sp>
         <p:nvSpPr>
+          <p:cNvPr id="3" name="TextBox 2"/>
+          <p:cNvSpPr txBox="1"/>
+          <p:nvPr/>
+        </p:nvSpPr>
+        <p:spPr>
+          <a:xfrm>
+            <a:off x="914400" y="3017520"/>
+            <a:ext cx="9144000" cy="548640"/>
+          </a:xfrm>
+          <a:prstGeom prst="rect">
+            <a:avLst/>
+          </a:prstGeom>
+          <a:noFill/>
+        </p:spPr>
+        <p:txBody>
+          <a:bodyPr wrap="square">
+            <a:spAutoFit/>
+          </a:bodyPr>
+          <a:lstStyle/>
+          <a:p>
+            <a:pPr algn="l"/>
+            <a:r>
+              <a:rPr sz="2000" b="0">
+                <a:solidFill>
+                  <a:srgbClr val="9A9A9A"/>
+                </a:solidFill>
+                <a:latin typeface="Arial"/>
+                <a:ea typeface="Microsoft YaHei"/>
+              </a:rPr>
+              <a:t>AI 数据分析智能体 · 让业务团队自助取数</a:t>
+            </a:r>
+          </a:p>
+        </p:txBody>
+      </p:sp>
+      <p:sp>
+        <p:nvSpPr>
           <p:cNvPr id="4" name="TextBox 3"/>
           <p:cNvSpPr txBox="1"/>
           <p:nvPr/>
         </p:nvSpPr>
         <p:spPr>
           <a:xfrm>
-            <a:off x="914400" y="3017520"/>
+            <a:off x="914400" y="3840480"/>
             <a:ext cx="9144000" cy="457200"/>
           </a:xfrm>
           <a:prstGeom prst="rect">
@@ -3201,14 +4251,14 @@
           <a:p>
             <a:pPr algn="l"/>
             <a:r>
-              <a:rPr sz="2000" b="0">
-                <a:solidFill>
-                  <a:srgbClr val="D4A853"/>
+              <a:rPr sz="1400" b="0">
+                <a:solidFill>
+                  <a:srgbClr val="9A9A9A"/>
                 </a:solidFill>
                 <a:latin typeface="Arial"/>
                 <a:ea typeface="Microsoft YaHei"/>
               </a:rPr>
-              <a:t>让业务团队自助取数，解放数据分析师</a:t>
+              <a:t>ClawHunt Builder Camp 2026 · 72 小时构建</a:t>
             </a:r>
           </a:p>
         </p:txBody>
@@ -3221,8 +4271,8 @@
         </p:nvSpPr>
         <p:spPr>
           <a:xfrm>
-            <a:off x="914400" y="3840480"/>
-            <a:ext cx="9144000" cy="457200"/>
+            <a:off x="914400" y="4389120"/>
+            <a:ext cx="9144000" cy="365760"/>
           </a:xfrm>
           <a:prstGeom prst="rect">
             <a:avLst/>
@@ -3237,14 +4287,14 @@
           <a:p>
             <a:pPr algn="l"/>
             <a:r>
-              <a:rPr sz="1400" b="0">
-                <a:solidFill>
-                  <a:srgbClr val="9A9A9A"/>
+              <a:rPr sz="1300" b="0">
+                <a:solidFill>
+                  <a:srgbClr val="D4A853"/>
                 </a:solidFill>
                 <a:latin typeface="Arial"/>
                 <a:ea typeface="Microsoft YaHei"/>
               </a:rPr>
-              <a:t>自然语言提问 → 自动生成 SQL → 实时可视化 → 异常归因 → 决策建议</a:t>
+              <a:t>基于 Olist 真实电商数据（99,441 笔订单）验证</a:t>
             </a:r>
           </a:p>
         </p:txBody>
@@ -3273,14 +4323,14 @@
           <a:p>
             <a:pPr algn="l"/>
             <a:r>
-              <a:rPr sz="1200" b="0">
+              <a:rPr sz="1100" b="0">
                 <a:solidFill>
                   <a:srgbClr val="9A9A9A"/>
                 </a:solidFill>
                 <a:latin typeface="Arial"/>
                 <a:ea typeface="Microsoft YaHei"/>
               </a:rPr>
-              <a:t>ClawHunt Builder Camp 2026 · Track A: Agents at Work</a:t>
+              <a:t>queryforge-production-8d6f.up.railway.app</a:t>
             </a:r>
           </a:p>
         </p:txBody>
@@ -3319,7 +4369,7 @@
         </p:nvSpPr>
         <p:spPr>
           <a:xfrm>
-            <a:off x="914400" y="1828800"/>
+            <a:off x="914400" y="2011680"/>
             <a:ext cx="9144000" cy="914400"/>
           </a:xfrm>
           <a:prstGeom prst="rect">
@@ -3335,9 +4385,9 @@
           <a:p>
             <a:pPr algn="l"/>
             <a:r>
-              <a:rPr sz="4800" b="1">
-                <a:solidFill>
-                  <a:srgbClr val="F0EEE8"/>
+              <a:rPr sz="5200" b="1">
+                <a:solidFill>
+                  <a:srgbClr val="FFFFFF"/>
                 </a:solidFill>
                 <a:latin typeface="Arial"/>
                 <a:ea typeface="Microsoft YaHei"/>
@@ -3355,8 +4405,8 @@
         </p:nvSpPr>
         <p:spPr>
           <a:xfrm>
-            <a:off x="914400" y="2743200"/>
-            <a:ext cx="9144000" cy="457200"/>
+            <a:off x="914400" y="3017520"/>
+            <a:ext cx="9144000" cy="731520"/>
           </a:xfrm>
           <a:prstGeom prst="rect">
             <a:avLst/>
@@ -3373,99 +4423,86 @@
             <a:r>
               <a:rPr sz="1800" b="0">
                 <a:solidFill>
-                  <a:srgbClr val="D4A853"/>
+                  <a:srgbClr val="9A9A9A"/>
                 </a:solidFill>
                 <a:latin typeface="Arial"/>
                 <a:ea typeface="Microsoft YaHei"/>
               </a:rPr>
-              <a:t>让数据分析师做更有价值的事，让业务团队自己找到答案</a:t>
-            </a:r>
-          </a:p>
-        </p:txBody>
-      </p:sp>
-      <p:sp>
-        <p:nvSpPr>
-          <p:cNvPr id="4" name="Rounded Rectangle 3"/>
-          <p:cNvSpPr/>
+              <a:t>受控的对话式分析层
+不是让 AI 替代分析师，而是让分析师的能力通过 AI 放大 10 倍</a:t>
+            </a:r>
+          </a:p>
+        </p:txBody>
+      </p:sp>
+      <p:sp>
+        <p:nvSpPr>
+          <p:cNvPr id="4" name="TextBox 3"/>
+          <p:cNvSpPr txBox="1"/>
           <p:nvPr/>
         </p:nvSpPr>
         <p:spPr>
           <a:xfrm>
-            <a:off x="914400" y="3657600"/>
-            <a:ext cx="10515600" cy="1828800"/>
-          </a:xfrm>
-          <a:prstGeom prst="roundRect">
-            <a:avLst/>
-          </a:prstGeom>
-          <a:solidFill>
-            <a:srgbClr val="2A2F3E"/>
-          </a:solidFill>
-          <a:ln>
-            <a:noFill/>
-          </a:ln>
-        </p:spPr>
-        <p:style>
-          <a:lnRef idx="1">
-            <a:schemeClr val="accent1"/>
-          </a:lnRef>
-          <a:fillRef idx="3">
-            <a:schemeClr val="accent1"/>
-          </a:fillRef>
-          <a:effectRef idx="2">
-            <a:schemeClr val="accent1"/>
-          </a:effectRef>
-          <a:fontRef idx="minor">
-            <a:schemeClr val="lt1"/>
-          </a:fontRef>
-        </p:style>
-        <p:txBody>
-          <a:bodyPr rtlCol="0" anchor="ctr"/>
-          <a:lstStyle/>
-          <a:p>
-            <a:pPr algn="ctr"/>
-          </a:p>
-        </p:txBody>
-      </p:sp>
-      <p:sp>
-        <p:nvSpPr>
-          <p:cNvPr id="5" name="Rectangle 4"/>
-          <p:cNvSpPr/>
+            <a:off x="914400" y="4389120"/>
+            <a:ext cx="9144000" cy="365760"/>
+          </a:xfrm>
+          <a:prstGeom prst="rect">
+            <a:avLst/>
+          </a:prstGeom>
+          <a:noFill/>
+        </p:spPr>
+        <p:txBody>
+          <a:bodyPr wrap="square">
+            <a:spAutoFit/>
+          </a:bodyPr>
+          <a:lstStyle/>
+          <a:p>
+            <a:pPr algn="l"/>
+            <a:r>
+              <a:rPr sz="1400" b="0">
+                <a:solidFill>
+                  <a:srgbClr val="D4A853"/>
+                </a:solidFill>
+                <a:latin typeface="Arial"/>
+                <a:ea typeface="Microsoft YaHei"/>
+              </a:rPr>
+              <a:t>queryforge-production-8d6f.up.railway.app</a:t>
+            </a:r>
+          </a:p>
+        </p:txBody>
+      </p:sp>
+      <p:sp>
+        <p:nvSpPr>
+          <p:cNvPr id="5" name="TextBox 4"/>
+          <p:cNvSpPr txBox="1"/>
           <p:nvPr/>
         </p:nvSpPr>
         <p:spPr>
           <a:xfrm>
-            <a:off x="914400" y="3703320"/>
-            <a:ext cx="50800" cy="1737360"/>
+            <a:off x="914400" y="4846320"/>
+            <a:ext cx="9144000" cy="365760"/>
           </a:xfrm>
           <a:prstGeom prst="rect">
             <a:avLst/>
           </a:prstGeom>
-          <a:solidFill>
-            <a:srgbClr val="4CAF50"/>
-          </a:solidFill>
-          <a:ln>
-            <a:noFill/>
-          </a:ln>
-        </p:spPr>
-        <p:style>
-          <a:lnRef idx="1">
-            <a:schemeClr val="accent1"/>
-          </a:lnRef>
-          <a:fillRef idx="3">
-            <a:schemeClr val="accent1"/>
-          </a:fillRef>
-          <a:effectRef idx="2">
-            <a:schemeClr val="accent1"/>
-          </a:effectRef>
-          <a:fontRef idx="minor">
-            <a:schemeClr val="lt1"/>
-          </a:fontRef>
-        </p:style>
-        <p:txBody>
-          <a:bodyPr rtlCol="0" anchor="ctr"/>
-          <a:lstStyle/>
-          <a:p>
-            <a:pPr algn="ctr"/>
+          <a:noFill/>
+        </p:spPr>
+        <p:txBody>
+          <a:bodyPr wrap="square">
+            <a:spAutoFit/>
+          </a:bodyPr>
+          <a:lstStyle/>
+          <a:p>
+            <a:pPr algn="l"/>
+            <a:r>
+              <a:rPr sz="1200" b="0">
+                <a:solidFill>
+                  <a:srgbClr val="9A9A9A"/>
+                </a:solidFill>
+                <a:latin typeface="Arial"/>
+                <a:ea typeface="Microsoft YaHei"/>
+              </a:rPr>
+              <a:t>github.com/eric-stone-plus/queryforge</a:t>
+            </a:r>
           </a:p>
         </p:txBody>
       </p:sp>
@@ -3477,8 +4514,8 @@
         </p:nvSpPr>
         <p:spPr>
           <a:xfrm>
-            <a:off x="1188720" y="3794760"/>
-            <a:ext cx="9966960" cy="320040"/>
+            <a:off x="914400" y="5943600"/>
+            <a:ext cx="9144000" cy="365760"/>
           </a:xfrm>
           <a:prstGeom prst="rect">
             <a:avLst/>
@@ -3493,241 +4530,21 @@
           <a:p>
             <a:pPr algn="l"/>
             <a:r>
-              <a:rPr sz="1600" b="1">
-                <a:solidFill>
-                  <a:srgbClr val="4CAF50"/>
+              <a:rPr sz="1100" b="0">
+                <a:solidFill>
+                  <a:srgbClr val="9A9A9A"/>
                 </a:solidFill>
                 <a:latin typeface="Arial"/>
                 <a:ea typeface="Microsoft YaHei"/>
               </a:rPr>
-              <a:t>现场体验</a:t>
-            </a:r>
-          </a:p>
-        </p:txBody>
-      </p:sp>
-      <p:sp>
-        <p:nvSpPr>
-          <p:cNvPr id="7" name="TextBox 6"/>
-          <p:cNvSpPr txBox="1"/>
-          <p:nvPr/>
-        </p:nvSpPr>
-        <p:spPr>
-          <a:xfrm>
-            <a:off x="1188720" y="4160520"/>
-            <a:ext cx="6446520" cy="1188720"/>
-          </a:xfrm>
-          <a:prstGeom prst="rect">
-            <a:avLst/>
-          </a:prstGeom>
-          <a:noFill/>
-        </p:spPr>
-        <p:txBody>
-          <a:bodyPr wrap="square">
-            <a:spAutoFit/>
-          </a:bodyPr>
-          <a:lstStyle/>
-          <a:p>
-            <a:pPr algn="l">
-              <a:lnSpc>
-                <a:spcPct val="112000"/>
-              </a:lnSpc>
-              <a:spcAft>
-                <a:spcPts val="800"/>
-              </a:spcAft>
-            </a:pPr>
-            <a:r>
-              <a:rPr b="1" sz="1500">
-                <a:solidFill>
-                  <a:srgbClr val="D4A853"/>
-                </a:solidFill>
-                <a:latin typeface="Microsoft YaHei"/>
-                <a:ea typeface="Microsoft YaHei"/>
-                <a:cs typeface="Microsoft YaHei"/>
-              </a:rPr>
-              <a:t>在线演示：queryforge-production-8d6f.up.railway.app</a:t>
-            </a:r>
-          </a:p>
-          <a:p>
-            <a:pPr>
-              <a:spcAft>
-                <a:spcPts val="700"/>
-              </a:spcAft>
-            </a:pPr>
-            <a:r>
-              <a:rPr b="1" sz="1400">
-                <a:solidFill>
-                  <a:srgbClr val="C8C4BC"/>
-                </a:solidFill>
-                <a:latin typeface="Microsoft YaHei"/>
-                <a:ea typeface="Microsoft YaHei"/>
-                <a:cs typeface="Microsoft YaHei"/>
-              </a:rPr>
-              <a:t>GitHub：github.com/eric-stone-plus/queryforge</a:t>
-            </a:r>
-          </a:p>
-          <a:p>
-            <a:pPr>
-              <a:spcAft>
-                <a:spcPts val="700"/>
-              </a:spcAft>
-            </a:pPr>
-          </a:p>
-          <a:p>
-            <a:pPr>
-              <a:spcAft>
-                <a:spcPts val="600"/>
-              </a:spcAft>
-            </a:pPr>
-            <a:r>
-              <a:rPr b="1" sz="1500">
-                <a:solidFill>
-                  <a:srgbClr val="F4F1E9"/>
-                </a:solidFill>
-                <a:latin typeface="Microsoft YaHei"/>
-                <a:ea typeface="Microsoft YaHei"/>
-                <a:cs typeface="Microsoft YaHei"/>
-              </a:rPr>
-              <a:t>欢迎现场扫码体验，真实数据实时响应</a:t>
-            </a:r>
-          </a:p>
-          <a:p>
-            <a:pPr>
-              <a:spcAft>
-                <a:spcPts val="700"/>
-              </a:spcAft>
-            </a:pPr>
-          </a:p>
-        </p:txBody>
-      </p:sp>
-      <p:sp>
-        <p:nvSpPr>
-          <p:cNvPr id="8" name="TextBox 7"/>
-          <p:cNvSpPr txBox="1"/>
-          <p:nvPr/>
-        </p:nvSpPr>
-        <p:spPr>
-          <a:xfrm>
-            <a:off x="914400" y="5943600"/>
-            <a:ext cx="9144000" cy="365760"/>
-          </a:xfrm>
-          <a:prstGeom prst="rect">
-            <a:avLst/>
-          </a:prstGeom>
-          <a:noFill/>
-        </p:spPr>
-        <p:txBody>
-          <a:bodyPr wrap="square">
-            <a:spAutoFit/>
-          </a:bodyPr>
-          <a:lstStyle/>
-          <a:p>
-            <a:pPr algn="l"/>
-            <a:r>
-              <a:rPr sz="1200" b="0">
-                <a:solidFill>
-                  <a:srgbClr val="9A9A9A"/>
-                </a:solidFill>
-                <a:latin typeface="Arial"/>
-                <a:ea typeface="Microsoft YaHei"/>
-              </a:rPr>
-              <a:t>ClawHunt Builder Camp 2026 · Track A: Agents at Work</a:t>
-            </a:r>
-          </a:p>
-        </p:txBody>
-      </p:sp>
-      <p:sp>
-        <p:nvSpPr>
-          <p:cNvPr id="9" name="Rectangle 8"/>
-          <p:cNvSpPr/>
-          <p:nvPr/>
-        </p:nvSpPr>
-        <p:spPr>
-          <a:xfrm>
-            <a:off x="8641080" y="3401568"/>
-            <a:ext cx="2359152" cy="2359152"/>
-          </a:xfrm>
-          <a:prstGeom prst="rect">
-            <a:avLst/>
-          </a:prstGeom>
-          <a:solidFill>
-            <a:srgbClr val="2A2F3E"/>
-          </a:solidFill>
-          <a:ln w="12700">
-            <a:solidFill>
-              <a:srgbClr val="3B4356"/>
-            </a:solidFill>
-          </a:ln>
-        </p:spPr>
-        <p:style>
-          <a:lnRef idx="1">
-            <a:schemeClr val="accent1"/>
-          </a:lnRef>
-          <a:fillRef idx="3">
-            <a:schemeClr val="accent1"/>
-          </a:fillRef>
-          <a:effectRef idx="2">
-            <a:schemeClr val="accent1"/>
-          </a:effectRef>
-          <a:fontRef idx="minor">
-            <a:schemeClr val="lt1"/>
-          </a:fontRef>
-        </p:style>
-        <p:txBody>
-          <a:bodyPr rtlCol="0" anchor="ctr"/>
-          <a:lstStyle/>
-          <a:p>
-            <a:pPr algn="ctr"/>
-          </a:p>
-        </p:txBody>
-      </p:sp>
-      <p:sp>
-        <p:nvSpPr>
-          <p:cNvPr id="10" name="Rectangle 9"/>
-          <p:cNvSpPr/>
-          <p:nvPr/>
-        </p:nvSpPr>
-        <p:spPr>
-          <a:xfrm>
-            <a:off x="8833104" y="3593592"/>
-            <a:ext cx="1975104" cy="1975104"/>
-          </a:xfrm>
-          <a:prstGeom prst="rect">
-            <a:avLst/>
-          </a:prstGeom>
-          <a:solidFill>
-            <a:srgbClr val="FFFFFF"/>
-          </a:solidFill>
-          <a:ln>
-            <a:solidFill>
-              <a:srgbClr val="FFFFFF"/>
-            </a:solidFill>
-          </a:ln>
-        </p:spPr>
-        <p:style>
-          <a:lnRef idx="1">
-            <a:schemeClr val="accent1"/>
-          </a:lnRef>
-          <a:fillRef idx="3">
-            <a:schemeClr val="accent1"/>
-          </a:fillRef>
-          <a:effectRef idx="2">
-            <a:schemeClr val="accent1"/>
-          </a:effectRef>
-          <a:fontRef idx="minor">
-            <a:schemeClr val="lt1"/>
-          </a:fontRef>
-        </p:style>
-        <p:txBody>
-          <a:bodyPr rtlCol="0" anchor="ctr"/>
-          <a:lstStyle/>
-          <a:p>
-            <a:pPr algn="ctr"/>
+              <a:t>ClawHunt Builder Camp 2026 · Track A</a:t>
+            </a:r>
           </a:p>
         </p:txBody>
       </p:sp>
       <p:pic>
         <p:nvPicPr>
-          <p:cNvPr id="11" name="Picture 10" descr="railway-demo-qr.png"/>
+          <p:cNvPr id="7" name="Picture 6" descr="qr-railway.png"/>
           <p:cNvPicPr>
             <a:picLocks noChangeAspect="1"/>
           </p:cNvPicPr>
@@ -3741,137 +4558,14 @@
         </p:blipFill>
         <p:spPr>
           <a:xfrm>
-            <a:off x="8887968" y="3648456"/>
-            <a:ext cx="1865376" cy="1865376"/>
+            <a:off x="8686800" y="4114800"/>
+            <a:ext cx="1645920" cy="1645920"/>
           </a:xfrm>
           <a:prstGeom prst="rect">
             <a:avLst/>
           </a:prstGeom>
         </p:spPr>
       </p:pic>
-      <p:sp>
-        <p:nvSpPr>
-          <p:cNvPr id="12" name="TextBox 11"/>
-          <p:cNvSpPr txBox="1"/>
-          <p:nvPr/>
-        </p:nvSpPr>
-        <p:spPr>
-          <a:xfrm>
-            <a:off x="8641080" y="2962656"/>
-            <a:ext cx="2359152" cy="256032"/>
-          </a:xfrm>
-          <a:prstGeom prst="rect">
-            <a:avLst/>
-          </a:prstGeom>
-          <a:noFill/>
-        </p:spPr>
-        <p:txBody>
-          <a:bodyPr wrap="square" anchor="t" lIns="0" rIns="0" tIns="0" bIns="0">
-            <a:spAutoFit/>
-          </a:bodyPr>
-          <a:lstStyle/>
-          <a:p>
-            <a:pPr algn="ctr">
-              <a:lnSpc>
-                <a:spcPct val="108000"/>
-              </a:lnSpc>
-            </a:pPr>
-            <a:r>
-              <a:rPr sz="1400" b="1">
-                <a:solidFill>
-                  <a:srgbClr val="D4A853"/>
-                </a:solidFill>
-                <a:latin typeface="Microsoft YaHei"/>
-                <a:ea typeface="Microsoft YaHei"/>
-                <a:cs typeface="Microsoft YaHei"/>
-              </a:rPr>
-              <a:t>扫码体验</a:t>
-            </a:r>
-          </a:p>
-        </p:txBody>
-      </p:sp>
-      <p:sp>
-        <p:nvSpPr>
-          <p:cNvPr id="13" name="TextBox 12"/>
-          <p:cNvSpPr txBox="1"/>
-          <p:nvPr/>
-        </p:nvSpPr>
-        <p:spPr>
-          <a:xfrm>
-            <a:off x="8558784" y="5833872"/>
-            <a:ext cx="2514600" cy="201168"/>
-          </a:xfrm>
-          <a:prstGeom prst="rect">
-            <a:avLst/>
-          </a:prstGeom>
-          <a:noFill/>
-        </p:spPr>
-        <p:txBody>
-          <a:bodyPr wrap="square" anchor="t" lIns="0" rIns="0" tIns="0" bIns="0">
-            <a:spAutoFit/>
-          </a:bodyPr>
-          <a:lstStyle/>
-          <a:p>
-            <a:pPr algn="ctr">
-              <a:lnSpc>
-                <a:spcPct val="108000"/>
-              </a:lnSpc>
-            </a:pPr>
-            <a:r>
-              <a:rPr sz="980" b="1">
-                <a:solidFill>
-                  <a:srgbClr val="9A9A9A"/>
-                </a:solidFill>
-                <a:latin typeface="Microsoft YaHei"/>
-                <a:ea typeface="Microsoft YaHei"/>
-                <a:cs typeface="Microsoft YaHei"/>
-              </a:rPr>
-              <a:t>Railway 在线演示</a:t>
-            </a:r>
-          </a:p>
-        </p:txBody>
-      </p:sp>
-      <p:sp>
-        <p:nvSpPr>
-          <p:cNvPr id="14" name="TextBox 13"/>
-          <p:cNvSpPr txBox="1"/>
-          <p:nvPr/>
-        </p:nvSpPr>
-        <p:spPr>
-          <a:xfrm>
-            <a:off x="8302752" y="6053328"/>
-            <a:ext cx="3054096" cy="201168"/>
-          </a:xfrm>
-          <a:prstGeom prst="rect">
-            <a:avLst/>
-          </a:prstGeom>
-          <a:noFill/>
-        </p:spPr>
-        <p:txBody>
-          <a:bodyPr wrap="square" anchor="t" lIns="0" rIns="0" tIns="0" bIns="0">
-            <a:spAutoFit/>
-          </a:bodyPr>
-          <a:lstStyle/>
-          <a:p>
-            <a:pPr algn="ctr">
-              <a:lnSpc>
-                <a:spcPct val="108000"/>
-              </a:lnSpc>
-            </a:pPr>
-            <a:r>
-              <a:rPr sz="800" b="0">
-                <a:solidFill>
-                  <a:srgbClr val="C8C4BC"/>
-                </a:solidFill>
-                <a:latin typeface="Microsoft YaHei"/>
-                <a:ea typeface="Microsoft YaHei"/>
-                <a:cs typeface="Microsoft YaHei"/>
-              </a:rPr>
-              <a:t>queryforge-production-8d6f.up.railway.app</a:t>
-            </a:r>
-          </a:p>
-        </p:txBody>
-      </p:sp>
     </p:spTree>
   </p:cSld>
   <p:clrMapOvr>
@@ -3942,8 +4636,8 @@
         </p:nvSpPr>
         <p:spPr>
           <a:xfrm>
-            <a:off x="914400" y="1645920"/>
-            <a:ext cx="2743200" cy="731520"/>
+            <a:off x="914400" y="1828800"/>
+            <a:ext cx="9144000" cy="2011680"/>
           </a:xfrm>
           <a:prstGeom prst="rect">
             <a:avLst/>
@@ -3956,16 +4650,71 @@
           </a:bodyPr>
           <a:lstStyle/>
           <a:p>
-            <a:pPr algn="l"/>
-            <a:r>
-              <a:rPr sz="4800" b="1">
-                <a:solidFill>
-                  <a:srgbClr val="D4A853"/>
+            <a:pPr algn="l">
+              <a:spcAft>
+                <a:spcPts val="1400"/>
+              </a:spcAft>
+            </a:pPr>
+            <a:r>
+              <a:rPr sz="1500">
+                <a:solidFill>
+                  <a:srgbClr val="F0EEE8"/>
                 </a:solidFill>
                 <a:latin typeface="Arial"/>
                 <a:ea typeface="Microsoft YaHei"/>
               </a:rPr>
-              <a:t>60%</a:t>
+              <a:t>  —  运营问"华东上个月卖了多少" → 找分析师排队</a:t>
+            </a:r>
+          </a:p>
+          <a:p>
+            <a:pPr algn="l">
+              <a:spcAft>
+                <a:spcPts val="1400"/>
+              </a:spcAft>
+            </a:pPr>
+            <a:r>
+              <a:rPr sz="1500">
+                <a:solidFill>
+                  <a:srgbClr val="F0EEE8"/>
+                </a:solidFill>
+                <a:latin typeface="Arial"/>
+                <a:ea typeface="Microsoft YaHei"/>
+              </a:rPr>
+              <a:t>  —  市场问"哪个品类增长最快" → 排期等报表</a:t>
+            </a:r>
+          </a:p>
+          <a:p>
+            <a:pPr algn="l">
+              <a:spcAft>
+                <a:spcPts val="1400"/>
+              </a:spcAft>
+            </a:pPr>
+            <a:r>
+              <a:rPr sz="1500">
+                <a:solidFill>
+                  <a:srgbClr val="F0EEE8"/>
+                </a:solidFill>
+                <a:latin typeface="Arial"/>
+                <a:ea typeface="Microsoft YaHei"/>
+              </a:rPr>
+              <a:t>  —  老板问"为什么这个月下滑" → 加急再加急</a:t>
+            </a:r>
+          </a:p>
+          <a:p>
+            <a:pPr algn="l">
+              <a:spcAft>
+                <a:spcPts val="1400"/>
+              </a:spcAft>
+            </a:pPr>
+            <a:r>
+              <a:rPr sz="1500">
+                <a:solidFill>
+                  <a:srgbClr val="F0EEE8"/>
+                </a:solidFill>
+                <a:latin typeface="Arial"/>
+                <a:ea typeface="Microsoft YaHei"/>
+              </a:rPr>
+              <a:t>  —  同一个指标，不同部门问 10 遍，改 10 遍</a:t>
             </a:r>
           </a:p>
         </p:txBody>
@@ -3978,8 +4727,8 @@
         </p:nvSpPr>
         <p:spPr>
           <a:xfrm>
-            <a:off x="914400" y="2468880"/>
-            <a:ext cx="2743200" cy="365760"/>
+            <a:off x="914400" y="4389120"/>
+            <a:ext cx="9144000" cy="457200"/>
           </a:xfrm>
           <a:prstGeom prst="rect">
             <a:avLst/>
@@ -3994,114 +4743,28 @@
           <a:p>
             <a:pPr algn="l"/>
             <a:r>
-              <a:rPr sz="1500" b="0">
-                <a:solidFill>
-                  <a:srgbClr val="9A9A9A"/>
+              <a:rPr sz="1400" b="0">
+                <a:solidFill>
+                  <a:srgbClr val="D4A853"/>
                 </a:solidFill>
                 <a:latin typeface="Arial"/>
                 <a:ea typeface="Microsoft YaHei"/>
               </a:rPr>
-              <a:t>数据分析师的时间花在重复取数上</a:t>
-            </a:r>
-          </a:p>
-        </p:txBody>
-      </p:sp>
-      <p:sp>
-        <p:nvSpPr>
-          <p:cNvPr id="5" name="Rounded Rectangle 4"/>
-          <p:cNvSpPr/>
-          <p:nvPr/>
-        </p:nvSpPr>
-        <p:spPr>
-          <a:xfrm>
-            <a:off x="914400" y="3200400"/>
-            <a:ext cx="4754880" cy="2560320"/>
-          </a:xfrm>
-          <a:prstGeom prst="roundRect">
-            <a:avLst/>
-          </a:prstGeom>
-          <a:solidFill>
-            <a:srgbClr val="2A2F3E"/>
-          </a:solidFill>
-          <a:ln>
-            <a:noFill/>
-          </a:ln>
-        </p:spPr>
-        <p:style>
-          <a:lnRef idx="1">
-            <a:schemeClr val="accent1"/>
-          </a:lnRef>
-          <a:fillRef idx="3">
-            <a:schemeClr val="accent1"/>
-          </a:fillRef>
-          <a:effectRef idx="2">
-            <a:schemeClr val="accent1"/>
-          </a:effectRef>
-          <a:fontRef idx="minor">
-            <a:schemeClr val="lt1"/>
-          </a:fontRef>
-        </p:style>
-        <p:txBody>
-          <a:bodyPr rtlCol="0" anchor="ctr"/>
-          <a:lstStyle/>
-          <a:p>
-            <a:pPr algn="ctr"/>
-          </a:p>
-        </p:txBody>
-      </p:sp>
-      <p:sp>
-        <p:nvSpPr>
-          <p:cNvPr id="6" name="Rectangle 5"/>
-          <p:cNvSpPr/>
-          <p:nvPr/>
-        </p:nvSpPr>
-        <p:spPr>
-          <a:xfrm>
-            <a:off x="914400" y="3246120"/>
-            <a:ext cx="50800" cy="2468880"/>
-          </a:xfrm>
-          <a:prstGeom prst="rect">
-            <a:avLst/>
-          </a:prstGeom>
-          <a:solidFill>
-            <a:srgbClr val="CF222E"/>
-          </a:solidFill>
-          <a:ln>
-            <a:noFill/>
-          </a:ln>
-        </p:spPr>
-        <p:style>
-          <a:lnRef idx="1">
-            <a:schemeClr val="accent1"/>
-          </a:lnRef>
-          <a:fillRef idx="3">
-            <a:schemeClr val="accent1"/>
-          </a:fillRef>
-          <a:effectRef idx="2">
-            <a:schemeClr val="accent1"/>
-          </a:effectRef>
-          <a:fontRef idx="minor">
-            <a:schemeClr val="lt1"/>
-          </a:fontRef>
-        </p:style>
-        <p:txBody>
-          <a:bodyPr rtlCol="0" anchor="ctr"/>
-          <a:lstStyle/>
-          <a:p>
-            <a:pPr algn="ctr"/>
-          </a:p>
-        </p:txBody>
-      </p:sp>
-      <p:sp>
-        <p:nvSpPr>
-          <p:cNvPr id="7" name="TextBox 6"/>
+              <a:t>数据分析师每周 60% 时间在重复拉数，真正有价值的深度分析被挤占</a:t>
+            </a:r>
+          </a:p>
+        </p:txBody>
+      </p:sp>
+      <p:sp>
+        <p:nvSpPr>
+          <p:cNvPr id="5" name="TextBox 4"/>
           <p:cNvSpPr txBox="1"/>
           <p:nvPr/>
         </p:nvSpPr>
         <p:spPr>
           <a:xfrm>
-            <a:off x="1188720" y="3337560"/>
-            <a:ext cx="4206240" cy="320040"/>
+            <a:off x="914400" y="5943600"/>
+            <a:ext cx="9144000" cy="365760"/>
           </a:xfrm>
           <a:prstGeom prst="rect">
             <a:avLst/>
@@ -4116,354 +4779,14 @@
           <a:p>
             <a:pPr algn="l"/>
             <a:r>
-              <a:rPr sz="1600" b="1">
-                <a:solidFill>
-                  <a:srgbClr val="CF222E"/>
+              <a:rPr sz="1100" b="0">
+                <a:solidFill>
+                  <a:srgbClr val="9A9A9A"/>
                 </a:solidFill>
                 <a:latin typeface="Arial"/>
                 <a:ea typeface="Microsoft YaHei"/>
               </a:rPr>
-              <a:t>分析师的一天</a:t>
-            </a:r>
-          </a:p>
-        </p:txBody>
-      </p:sp>
-      <p:sp>
-        <p:nvSpPr>
-          <p:cNvPr id="8" name="TextBox 7"/>
-          <p:cNvSpPr txBox="1"/>
-          <p:nvPr/>
-        </p:nvSpPr>
-        <p:spPr>
-          <a:xfrm>
-            <a:off x="1188720" y="3703320"/>
-            <a:ext cx="4206240" cy="1920240"/>
-          </a:xfrm>
-          <a:prstGeom prst="rect">
-            <a:avLst/>
-          </a:prstGeom>
-          <a:noFill/>
-        </p:spPr>
-        <p:txBody>
-          <a:bodyPr wrap="square">
-            <a:spAutoFit/>
-          </a:bodyPr>
-          <a:lstStyle/>
-          <a:p>
-            <a:pPr algn="l">
-              <a:spcAft>
-                <a:spcPts val="800"/>
-              </a:spcAft>
-            </a:pPr>
-            <a:r>
-              <a:rPr sz="1300" b="0">
-                <a:solidFill>
-                  <a:srgbClr val="9A9A9A"/>
-                </a:solidFill>
-                <a:latin typeface="Arial"/>
-                <a:ea typeface="Microsoft YaHei"/>
-              </a:rPr>
-              <a:t>"帮我拉一下上个月各地区的 GMV"</a:t>
-            </a:r>
-          </a:p>
-          <a:p>
-            <a:pPr algn="l">
-              <a:spcAft>
-                <a:spcPts val="800"/>
-              </a:spcAft>
-            </a:pPr>
-            <a:r>
-              <a:rPr sz="1300" b="0">
-                <a:solidFill>
-                  <a:srgbClr val="9A9A9A"/>
-                </a:solidFill>
-                <a:latin typeface="Arial"/>
-                <a:ea typeface="Microsoft YaHei"/>
-              </a:rPr>
-              <a:t>"口径改一下，要按下单时间不是支付时间"</a:t>
-            </a:r>
-          </a:p>
-          <a:p>
-            <a:pPr algn="l">
-              <a:spcAft>
-                <a:spcPts val="800"/>
-              </a:spcAft>
-            </a:pPr>
-            <a:r>
-              <a:rPr sz="1300" b="0">
-                <a:solidFill>
-                  <a:srgbClr val="9A9A9A"/>
-                </a:solidFill>
-                <a:latin typeface="Arial"/>
-                <a:ea typeface="Microsoft YaHei"/>
-              </a:rPr>
-              <a:t>"再加一个退货率的列"</a:t>
-            </a:r>
-          </a:p>
-          <a:p>
-            <a:pPr algn="l">
-              <a:spcAft>
-                <a:spcPts val="800"/>
-              </a:spcAft>
-            </a:pPr>
-            <a:r>
-              <a:rPr sz="1300" b="1">
-                <a:solidFill>
-                  <a:srgbClr val="CF222E"/>
-                </a:solidFill>
-                <a:latin typeface="Arial"/>
-                <a:ea typeface="Microsoft YaHei"/>
-              </a:rPr>
-              <a:t>每天 2-3 小时在重复拉报表</a:t>
-            </a:r>
-          </a:p>
-        </p:txBody>
-      </p:sp>
-      <p:sp>
-        <p:nvSpPr>
-          <p:cNvPr id="9" name="Rounded Rectangle 8"/>
-          <p:cNvSpPr/>
-          <p:nvPr/>
-        </p:nvSpPr>
-        <p:spPr>
-          <a:xfrm>
-            <a:off x="6217920" y="3200400"/>
-            <a:ext cx="4754880" cy="2560320"/>
-          </a:xfrm>
-          <a:prstGeom prst="roundRect">
-            <a:avLst/>
-          </a:prstGeom>
-          <a:solidFill>
-            <a:srgbClr val="2A2F3E"/>
-          </a:solidFill>
-          <a:ln>
-            <a:noFill/>
-          </a:ln>
-        </p:spPr>
-        <p:style>
-          <a:lnRef idx="1">
-            <a:schemeClr val="accent1"/>
-          </a:lnRef>
-          <a:fillRef idx="3">
-            <a:schemeClr val="accent1"/>
-          </a:fillRef>
-          <a:effectRef idx="2">
-            <a:schemeClr val="accent1"/>
-          </a:effectRef>
-          <a:fontRef idx="minor">
-            <a:schemeClr val="lt1"/>
-          </a:fontRef>
-        </p:style>
-        <p:txBody>
-          <a:bodyPr rtlCol="0" anchor="ctr"/>
-          <a:lstStyle/>
-          <a:p>
-            <a:pPr algn="ctr"/>
-          </a:p>
-        </p:txBody>
-      </p:sp>
-      <p:sp>
-        <p:nvSpPr>
-          <p:cNvPr id="10" name="Rectangle 9"/>
-          <p:cNvSpPr/>
-          <p:nvPr/>
-        </p:nvSpPr>
-        <p:spPr>
-          <a:xfrm>
-            <a:off x="6217920" y="3246120"/>
-            <a:ext cx="50800" cy="2468880"/>
-          </a:xfrm>
-          <a:prstGeom prst="rect">
-            <a:avLst/>
-          </a:prstGeom>
-          <a:solidFill>
-            <a:srgbClr val="CF222E"/>
-          </a:solidFill>
-          <a:ln>
-            <a:noFill/>
-          </a:ln>
-        </p:spPr>
-        <p:style>
-          <a:lnRef idx="1">
-            <a:schemeClr val="accent1"/>
-          </a:lnRef>
-          <a:fillRef idx="3">
-            <a:schemeClr val="accent1"/>
-          </a:fillRef>
-          <a:effectRef idx="2">
-            <a:schemeClr val="accent1"/>
-          </a:effectRef>
-          <a:fontRef idx="minor">
-            <a:schemeClr val="lt1"/>
-          </a:fontRef>
-        </p:style>
-        <p:txBody>
-          <a:bodyPr rtlCol="0" anchor="ctr"/>
-          <a:lstStyle/>
-          <a:p>
-            <a:pPr algn="ctr"/>
-          </a:p>
-        </p:txBody>
-      </p:sp>
-      <p:sp>
-        <p:nvSpPr>
-          <p:cNvPr id="11" name="TextBox 10"/>
-          <p:cNvSpPr txBox="1"/>
-          <p:nvPr/>
-        </p:nvSpPr>
-        <p:spPr>
-          <a:xfrm>
-            <a:off x="6492240" y="3337560"/>
-            <a:ext cx="4206240" cy="320040"/>
-          </a:xfrm>
-          <a:prstGeom prst="rect">
-            <a:avLst/>
-          </a:prstGeom>
-          <a:noFill/>
-        </p:spPr>
-        <p:txBody>
-          <a:bodyPr wrap="square">
-            <a:spAutoFit/>
-          </a:bodyPr>
-          <a:lstStyle/>
-          <a:p>
-            <a:pPr algn="l"/>
-            <a:r>
-              <a:rPr sz="1600" b="1">
-                <a:solidFill>
-                  <a:srgbClr val="CF222E"/>
-                </a:solidFill>
-                <a:latin typeface="Arial"/>
-                <a:ea typeface="Microsoft YaHei"/>
-              </a:rPr>
-              <a:t>业务团队的一天</a:t>
-            </a:r>
-          </a:p>
-        </p:txBody>
-      </p:sp>
-      <p:sp>
-        <p:nvSpPr>
-          <p:cNvPr id="12" name="TextBox 11"/>
-          <p:cNvSpPr txBox="1"/>
-          <p:nvPr/>
-        </p:nvSpPr>
-        <p:spPr>
-          <a:xfrm>
-            <a:off x="6492240" y="3703320"/>
-            <a:ext cx="4206240" cy="1920240"/>
-          </a:xfrm>
-          <a:prstGeom prst="rect">
-            <a:avLst/>
-          </a:prstGeom>
-          <a:noFill/>
-        </p:spPr>
-        <p:txBody>
-          <a:bodyPr wrap="square">
-            <a:spAutoFit/>
-          </a:bodyPr>
-          <a:lstStyle/>
-          <a:p>
-            <a:pPr algn="l">
-              <a:spcAft>
-                <a:spcPts val="800"/>
-              </a:spcAft>
-            </a:pPr>
-            <a:r>
-              <a:rPr sz="1300" b="0">
-                <a:solidFill>
-                  <a:srgbClr val="9A9A9A"/>
-                </a:solidFill>
-                <a:latin typeface="Arial"/>
-                <a:ea typeface="Microsoft YaHei"/>
-              </a:rPr>
-              <a:t>周一提需求，周三还没拿到数据</a:t>
-            </a:r>
-          </a:p>
-          <a:p>
-            <a:pPr algn="l">
-              <a:spcAft>
-                <a:spcPts val="800"/>
-              </a:spcAft>
-            </a:pPr>
-            <a:r>
-              <a:rPr sz="1300" b="0">
-                <a:solidFill>
-                  <a:srgbClr val="9A9A9A"/>
-                </a:solidFill>
-                <a:latin typeface="Arial"/>
-                <a:ea typeface="Microsoft YaHei"/>
-              </a:rPr>
-              <a:t>拿到数据发现字段不对，又要重来</a:t>
-            </a:r>
-          </a:p>
-          <a:p>
-            <a:pPr algn="l">
-              <a:spcAft>
-                <a:spcPts val="800"/>
-              </a:spcAft>
-            </a:pPr>
-            <a:r>
-              <a:rPr sz="1300" b="0">
-                <a:solidFill>
-                  <a:srgbClr val="9A9A9A"/>
-                </a:solidFill>
-                <a:latin typeface="Arial"/>
-                <a:ea typeface="Microsoft YaHei"/>
-              </a:rPr>
-              <a:t>一个简单报表，改了 5 版</a:t>
-            </a:r>
-          </a:p>
-          <a:p>
-            <a:pPr algn="l">
-              <a:spcAft>
-                <a:spcPts val="800"/>
-              </a:spcAft>
-            </a:pPr>
-            <a:r>
-              <a:rPr sz="1300" b="1">
-                <a:solidFill>
-                  <a:srgbClr val="CF222E"/>
-                </a:solidFill>
-                <a:latin typeface="Arial"/>
-                <a:ea typeface="Microsoft YaHei"/>
-              </a:rPr>
-              <a:t>排期等待 1-3 天是常态</a:t>
-            </a:r>
-          </a:p>
-        </p:txBody>
-      </p:sp>
-      <p:sp>
-        <p:nvSpPr>
-          <p:cNvPr id="13" name="TextBox 12"/>
-          <p:cNvSpPr txBox="1"/>
-          <p:nvPr/>
-        </p:nvSpPr>
-        <p:spPr>
-          <a:xfrm>
-            <a:off x="914400" y="6035040"/>
-            <a:ext cx="9144000" cy="274320"/>
-          </a:xfrm>
-          <a:prstGeom prst="rect">
-            <a:avLst/>
-          </a:prstGeom>
-          <a:noFill/>
-        </p:spPr>
-        <p:txBody>
-          <a:bodyPr wrap="square">
-            <a:spAutoFit/>
-          </a:bodyPr>
-          <a:lstStyle/>
-          <a:p>
-            <a:pPr algn="l"/>
-            <a:r>
-              <a:rPr sz="1200" b="0">
-                <a:solidFill>
-                  <a:srgbClr val="9A9A9A"/>
-                </a:solidFill>
-                <a:latin typeface="Arial"/>
-                <a:ea typeface="Microsoft YaHei"/>
-              </a:rPr>
-              <a:t>现有方案为什么不行：BI 工具需要学习成本，ChatGPT 不懂你的数据口径，每次都要重新解释表结构</a:t>
+              <a:t>痛点：不是没有数据，是数据到不了需要的人手里</a:t>
             </a:r>
           </a:p>
         </p:txBody>
@@ -4539,7 +4862,7 @@
         <p:spPr>
           <a:xfrm>
             <a:off x="914400" y="1645920"/>
-            <a:ext cx="9144000" cy="365760"/>
+            <a:ext cx="9144000" cy="457200"/>
           </a:xfrm>
           <a:prstGeom prst="rect">
             <a:avLst/>
@@ -4554,114 +4877,28 @@
           <a:p>
             <a:pPr algn="l"/>
             <a:r>
-              <a:rPr sz="1800" b="1">
+              <a:rPr sz="1500" b="0">
                 <a:solidFill>
                   <a:srgbClr val="D4A853"/>
                 </a:solidFill>
                 <a:latin typeface="Arial"/>
                 <a:ea typeface="Microsoft YaHei"/>
               </a:rPr>
-              <a:t>从「取数工具人」到「数据架构师」</a:t>
-            </a:r>
-          </a:p>
-        </p:txBody>
-      </p:sp>
-      <p:sp>
-        <p:nvSpPr>
-          <p:cNvPr id="4" name="Rounded Rectangle 3"/>
-          <p:cNvSpPr/>
-          <p:nvPr/>
-        </p:nvSpPr>
-        <p:spPr>
-          <a:xfrm>
-            <a:off x="914400" y="2377440"/>
-            <a:ext cx="2468880" cy="2926080"/>
-          </a:xfrm>
-          <a:prstGeom prst="roundRect">
-            <a:avLst/>
-          </a:prstGeom>
-          <a:solidFill>
-            <a:srgbClr val="2A2F3E"/>
-          </a:solidFill>
-          <a:ln>
-            <a:noFill/>
-          </a:ln>
-        </p:spPr>
-        <p:style>
-          <a:lnRef idx="1">
-            <a:schemeClr val="accent1"/>
-          </a:lnRef>
-          <a:fillRef idx="3">
-            <a:schemeClr val="accent1"/>
-          </a:fillRef>
-          <a:effectRef idx="2">
-            <a:schemeClr val="accent1"/>
-          </a:effectRef>
-          <a:fontRef idx="minor">
-            <a:schemeClr val="lt1"/>
-          </a:fontRef>
-        </p:style>
-        <p:txBody>
-          <a:bodyPr rtlCol="0" anchor="ctr"/>
-          <a:lstStyle/>
-          <a:p>
-            <a:pPr algn="ctr"/>
-          </a:p>
-        </p:txBody>
-      </p:sp>
-      <p:sp>
-        <p:nvSpPr>
-          <p:cNvPr id="5" name="Rectangle 4"/>
-          <p:cNvSpPr/>
-          <p:nvPr/>
-        </p:nvSpPr>
-        <p:spPr>
-          <a:xfrm>
-            <a:off x="914400" y="2423160"/>
-            <a:ext cx="50800" cy="2834640"/>
-          </a:xfrm>
-          <a:prstGeom prst="rect">
-            <a:avLst/>
-          </a:prstGeom>
-          <a:solidFill>
-            <a:srgbClr val="D4A853"/>
-          </a:solidFill>
-          <a:ln>
-            <a:noFill/>
-          </a:ln>
-        </p:spPr>
-        <p:style>
-          <a:lnRef idx="1">
-            <a:schemeClr val="accent1"/>
-          </a:lnRef>
-          <a:fillRef idx="3">
-            <a:schemeClr val="accent1"/>
-          </a:fillRef>
-          <a:effectRef idx="2">
-            <a:schemeClr val="accent1"/>
-          </a:effectRef>
-          <a:fontRef idx="minor">
-            <a:schemeClr val="lt1"/>
-          </a:fontRef>
-        </p:style>
-        <p:txBody>
-          <a:bodyPr rtlCol="0" anchor="ctr"/>
-          <a:lstStyle/>
-          <a:p>
-            <a:pPr algn="ctr"/>
-          </a:p>
-        </p:txBody>
-      </p:sp>
-      <p:sp>
-        <p:nvSpPr>
-          <p:cNvPr id="6" name="TextBox 5"/>
+              <a:t>核心机制：分析师把领域知识沉淀为可复用的指标资产</a:t>
+            </a:r>
+          </a:p>
+        </p:txBody>
+      </p:sp>
+      <p:sp>
+        <p:nvSpPr>
+          <p:cNvPr id="4" name="TextBox 3"/>
           <p:cNvSpPr txBox="1"/>
           <p:nvPr/>
         </p:nvSpPr>
         <p:spPr>
           <a:xfrm>
-            <a:off x="1188720" y="2514600"/>
-            <a:ext cx="1920240" cy="320040"/>
+            <a:off x="914400" y="2286000"/>
+            <a:ext cx="9144000" cy="2011680"/>
           </a:xfrm>
           <a:prstGeom prst="rect">
             <a:avLst/>
@@ -4674,30 +4911,85 @@
           </a:bodyPr>
           <a:lstStyle/>
           <a:p>
-            <a:pPr algn="l"/>
-            <a:r>
-              <a:rPr sz="1600" b="1">
-                <a:solidFill>
-                  <a:srgbClr val="D4A853"/>
+            <a:pPr algn="l">
+              <a:spcAft>
+                <a:spcPts val="1400"/>
+              </a:spcAft>
+            </a:pPr>
+            <a:r>
+              <a:rPr sz="1500">
+                <a:solidFill>
+                  <a:srgbClr val="F0EEE8"/>
                 </a:solidFill>
                 <a:latin typeface="Arial"/>
                 <a:ea typeface="Microsoft YaHei"/>
               </a:rPr>
-              <a:t>01  分析师定义指标</a:t>
-            </a:r>
-          </a:p>
-        </p:txBody>
-      </p:sp>
-      <p:sp>
-        <p:nvSpPr>
-          <p:cNvPr id="7" name="TextBox 6"/>
+              <a:t>  —  分析师定义数据口径和指标（一次性工作）</a:t>
+            </a:r>
+          </a:p>
+          <a:p>
+            <a:pPr algn="l">
+              <a:spcAft>
+                <a:spcPts val="1400"/>
+              </a:spcAft>
+            </a:pPr>
+            <a:r>
+              <a:rPr sz="1500">
+                <a:solidFill>
+                  <a:srgbClr val="F0EEE8"/>
+                </a:solidFill>
+                <a:latin typeface="Arial"/>
+                <a:ea typeface="Microsoft YaHei"/>
+              </a:rPr>
+              <a:t>  —  业务人员用自然语言提问，像和同事说话一样</a:t>
+            </a:r>
+          </a:p>
+          <a:p>
+            <a:pPr algn="l">
+              <a:spcAft>
+                <a:spcPts val="1400"/>
+              </a:spcAft>
+            </a:pPr>
+            <a:r>
+              <a:rPr sz="1500">
+                <a:solidFill>
+                  <a:srgbClr val="F0EEE8"/>
+                </a:solidFill>
+                <a:latin typeface="Arial"/>
+                <a:ea typeface="Microsoft YaHei"/>
+              </a:rPr>
+              <a:t>  —  系统理解意图、匹配指标、查询数据、生成图表</a:t>
+            </a:r>
+          </a:p>
+          <a:p>
+            <a:pPr algn="l">
+              <a:spcAft>
+                <a:spcPts val="1400"/>
+              </a:spcAft>
+            </a:pPr>
+            <a:r>
+              <a:rPr sz="1500">
+                <a:solidFill>
+                  <a:srgbClr val="F0EEE8"/>
+                </a:solidFill>
+                <a:latin typeface="Arial"/>
+                <a:ea typeface="Microsoft YaHei"/>
+              </a:rPr>
+              <a:t>  —  指标可保存、可复用，口径全公司统一</a:t>
+            </a:r>
+          </a:p>
+        </p:txBody>
+      </p:sp>
+      <p:sp>
+        <p:nvSpPr>
+          <p:cNvPr id="5" name="TextBox 4"/>
           <p:cNvSpPr txBox="1"/>
           <p:nvPr/>
         </p:nvSpPr>
         <p:spPr>
           <a:xfrm>
-            <a:off x="1188720" y="2880360"/>
-            <a:ext cx="1920240" cy="2286000"/>
+            <a:off x="914400" y="5943600"/>
+            <a:ext cx="9144000" cy="365760"/>
           </a:xfrm>
           <a:prstGeom prst="rect">
             <a:avLst/>
@@ -4710,769 +5002,16 @@
           </a:bodyPr>
           <a:lstStyle/>
           <a:p>
-            <a:pPr algn="l">
-              <a:spcAft>
-                <a:spcPts val="800"/>
-              </a:spcAft>
-            </a:pPr>
-            <a:r>
-              <a:rPr sz="1300" b="0">
-                <a:solidFill>
-                  <a:srgbClr val="F0EEE8"/>
+            <a:pPr algn="l"/>
+            <a:r>
+              <a:rPr sz="1100" b="0">
+                <a:solidFill>
+                  <a:srgbClr val="9A9A9A"/>
                 </a:solidFill>
                 <a:latin typeface="Arial"/>
                 <a:ea typeface="Microsoft YaHei"/>
               </a:rPr>
-              <a:t>调整底层数据</a:t>
-            </a:r>
-          </a:p>
-          <a:p>
-            <a:pPr algn="l">
-              <a:spcAft>
-                <a:spcPts val="800"/>
-              </a:spcAft>
-            </a:pPr>
-            <a:r>
-              <a:rPr sz="1300" b="0">
-                <a:solidFill>
-                  <a:srgbClr val="F0EEE8"/>
-                </a:solidFill>
-                <a:latin typeface="Arial"/>
-                <a:ea typeface="Microsoft YaHei"/>
-              </a:rPr>
-              <a:t>定义指标口径</a:t>
-            </a:r>
-          </a:p>
-          <a:p>
-            <a:pPr algn="l">
-              <a:spcAft>
-                <a:spcPts val="800"/>
-              </a:spcAft>
-            </a:pPr>
-            <a:r>
-              <a:rPr sz="1300" b="0">
-                <a:solidFill>
-                  <a:srgbClr val="F0EEE8"/>
-                </a:solidFill>
-                <a:latin typeface="Arial"/>
-                <a:ea typeface="Microsoft YaHei"/>
-              </a:rPr>
-              <a:t>配置看板</a:t>
-            </a:r>
-          </a:p>
-        </p:txBody>
-      </p:sp>
-      <p:sp>
-        <p:nvSpPr>
-          <p:cNvPr id="8" name="TextBox 7"/>
-          <p:cNvSpPr txBox="1"/>
-          <p:nvPr/>
-        </p:nvSpPr>
-        <p:spPr>
-          <a:xfrm>
-            <a:off x="3408680" y="3474720"/>
-            <a:ext cx="274320" cy="274320"/>
-          </a:xfrm>
-          <a:prstGeom prst="rect">
-            <a:avLst/>
-          </a:prstGeom>
-          <a:noFill/>
-        </p:spPr>
-        <p:txBody>
-          <a:bodyPr wrap="square">
-            <a:spAutoFit/>
-          </a:bodyPr>
-          <a:lstStyle/>
-          <a:p>
-            <a:pPr algn="l"/>
-            <a:r>
-              <a:rPr sz="1800" b="0">
-                <a:solidFill>
-                  <a:srgbClr val="9A9A9A"/>
-                </a:solidFill>
-                <a:latin typeface="Arial"/>
-                <a:ea typeface="Microsoft YaHei"/>
-              </a:rPr>
-              <a:t>→</a:t>
-            </a:r>
-          </a:p>
-        </p:txBody>
-      </p:sp>
-      <p:sp>
-        <p:nvSpPr>
-          <p:cNvPr id="9" name="Rounded Rectangle 8"/>
-          <p:cNvSpPr/>
-          <p:nvPr/>
-        </p:nvSpPr>
-        <p:spPr>
-          <a:xfrm>
-            <a:off x="3566160" y="2377440"/>
-            <a:ext cx="2468880" cy="2926080"/>
-          </a:xfrm>
-          <a:prstGeom prst="roundRect">
-            <a:avLst/>
-          </a:prstGeom>
-          <a:solidFill>
-            <a:srgbClr val="2A2F3E"/>
-          </a:solidFill>
-          <a:ln>
-            <a:noFill/>
-          </a:ln>
-        </p:spPr>
-        <p:style>
-          <a:lnRef idx="1">
-            <a:schemeClr val="accent1"/>
-          </a:lnRef>
-          <a:fillRef idx="3">
-            <a:schemeClr val="accent1"/>
-          </a:fillRef>
-          <a:effectRef idx="2">
-            <a:schemeClr val="accent1"/>
-          </a:effectRef>
-          <a:fontRef idx="minor">
-            <a:schemeClr val="lt1"/>
-          </a:fontRef>
-        </p:style>
-        <p:txBody>
-          <a:bodyPr rtlCol="0" anchor="ctr"/>
-          <a:lstStyle/>
-          <a:p>
-            <a:pPr algn="ctr"/>
-          </a:p>
-        </p:txBody>
-      </p:sp>
-      <p:sp>
-        <p:nvSpPr>
-          <p:cNvPr id="10" name="Rectangle 9"/>
-          <p:cNvSpPr/>
-          <p:nvPr/>
-        </p:nvSpPr>
-        <p:spPr>
-          <a:xfrm>
-            <a:off x="3566160" y="2423160"/>
-            <a:ext cx="50800" cy="2834640"/>
-          </a:xfrm>
-          <a:prstGeom prst="rect">
-            <a:avLst/>
-          </a:prstGeom>
-          <a:solidFill>
-            <a:srgbClr val="4EA8DE"/>
-          </a:solidFill>
-          <a:ln>
-            <a:noFill/>
-          </a:ln>
-        </p:spPr>
-        <p:style>
-          <a:lnRef idx="1">
-            <a:schemeClr val="accent1"/>
-          </a:lnRef>
-          <a:fillRef idx="3">
-            <a:schemeClr val="accent1"/>
-          </a:fillRef>
-          <a:effectRef idx="2">
-            <a:schemeClr val="accent1"/>
-          </a:effectRef>
-          <a:fontRef idx="minor">
-            <a:schemeClr val="lt1"/>
-          </a:fontRef>
-        </p:style>
-        <p:txBody>
-          <a:bodyPr rtlCol="0" anchor="ctr"/>
-          <a:lstStyle/>
-          <a:p>
-            <a:pPr algn="ctr"/>
-          </a:p>
-        </p:txBody>
-      </p:sp>
-      <p:sp>
-        <p:nvSpPr>
-          <p:cNvPr id="11" name="TextBox 10"/>
-          <p:cNvSpPr txBox="1"/>
-          <p:nvPr/>
-        </p:nvSpPr>
-        <p:spPr>
-          <a:xfrm>
-            <a:off x="3840480" y="2514600"/>
-            <a:ext cx="1920240" cy="320040"/>
-          </a:xfrm>
-          <a:prstGeom prst="rect">
-            <a:avLst/>
-          </a:prstGeom>
-          <a:noFill/>
-        </p:spPr>
-        <p:txBody>
-          <a:bodyPr wrap="square">
-            <a:spAutoFit/>
-          </a:bodyPr>
-          <a:lstStyle/>
-          <a:p>
-            <a:pPr algn="l"/>
-            <a:r>
-              <a:rPr sz="1600" b="1">
-                <a:solidFill>
-                  <a:srgbClr val="4EA8DE"/>
-                </a:solidFill>
-                <a:latin typeface="Arial"/>
-                <a:ea typeface="Microsoft YaHei"/>
-              </a:rPr>
-              <a:t>02  业务自然语言提问</a:t>
-            </a:r>
-          </a:p>
-        </p:txBody>
-      </p:sp>
-      <p:sp>
-        <p:nvSpPr>
-          <p:cNvPr id="12" name="TextBox 11"/>
-          <p:cNvSpPr txBox="1"/>
-          <p:nvPr/>
-        </p:nvSpPr>
-        <p:spPr>
-          <a:xfrm>
-            <a:off x="3840480" y="2880360"/>
-            <a:ext cx="1920240" cy="2286000"/>
-          </a:xfrm>
-          <a:prstGeom prst="rect">
-            <a:avLst/>
-          </a:prstGeom>
-          <a:noFill/>
-        </p:spPr>
-        <p:txBody>
-          <a:bodyPr wrap="square">
-            <a:spAutoFit/>
-          </a:bodyPr>
-          <a:lstStyle/>
-          <a:p>
-            <a:pPr algn="l">
-              <a:spcAft>
-                <a:spcPts val="800"/>
-              </a:spcAft>
-            </a:pPr>
-            <a:r>
-              <a:rPr sz="1300" b="0">
-                <a:solidFill>
-                  <a:srgbClr val="F0EEE8"/>
-                </a:solidFill>
-                <a:latin typeface="Arial"/>
-                <a:ea typeface="Microsoft YaHei"/>
-              </a:rPr>
-              <a:t>用中文描述需求</a:t>
-            </a:r>
-          </a:p>
-          <a:p>
-            <a:pPr algn="l">
-              <a:spcAft>
-                <a:spcPts val="800"/>
-              </a:spcAft>
-            </a:pPr>
-            <a:r>
-              <a:rPr sz="1300" b="0">
-                <a:solidFill>
-                  <a:srgbClr val="F0EEE8"/>
-                </a:solidFill>
-                <a:latin typeface="Arial"/>
-                <a:ea typeface="Microsoft YaHei"/>
-              </a:rPr>
-              <a:t>像和同事说话一样</a:t>
-            </a:r>
-          </a:p>
-        </p:txBody>
-      </p:sp>
-      <p:sp>
-        <p:nvSpPr>
-          <p:cNvPr id="13" name="TextBox 12"/>
-          <p:cNvSpPr txBox="1"/>
-          <p:nvPr/>
-        </p:nvSpPr>
-        <p:spPr>
-          <a:xfrm>
-            <a:off x="6060440" y="3474720"/>
-            <a:ext cx="274320" cy="274320"/>
-          </a:xfrm>
-          <a:prstGeom prst="rect">
-            <a:avLst/>
-          </a:prstGeom>
-          <a:noFill/>
-        </p:spPr>
-        <p:txBody>
-          <a:bodyPr wrap="square">
-            <a:spAutoFit/>
-          </a:bodyPr>
-          <a:lstStyle/>
-          <a:p>
-            <a:pPr algn="l"/>
-            <a:r>
-              <a:rPr sz="1800" b="0">
-                <a:solidFill>
-                  <a:srgbClr val="9A9A9A"/>
-                </a:solidFill>
-                <a:latin typeface="Arial"/>
-                <a:ea typeface="Microsoft YaHei"/>
-              </a:rPr>
-              <a:t>→</a:t>
-            </a:r>
-          </a:p>
-        </p:txBody>
-      </p:sp>
-      <p:sp>
-        <p:nvSpPr>
-          <p:cNvPr id="14" name="Rounded Rectangle 13"/>
-          <p:cNvSpPr/>
-          <p:nvPr/>
-        </p:nvSpPr>
-        <p:spPr>
-          <a:xfrm>
-            <a:off x="6217920" y="2377440"/>
-            <a:ext cx="2468880" cy="2926080"/>
-          </a:xfrm>
-          <a:prstGeom prst="roundRect">
-            <a:avLst/>
-          </a:prstGeom>
-          <a:solidFill>
-            <a:srgbClr val="2A2F3E"/>
-          </a:solidFill>
-          <a:ln>
-            <a:noFill/>
-          </a:ln>
-        </p:spPr>
-        <p:style>
-          <a:lnRef idx="1">
-            <a:schemeClr val="accent1"/>
-          </a:lnRef>
-          <a:fillRef idx="3">
-            <a:schemeClr val="accent1"/>
-          </a:fillRef>
-          <a:effectRef idx="2">
-            <a:schemeClr val="accent1"/>
-          </a:effectRef>
-          <a:fontRef idx="minor">
-            <a:schemeClr val="lt1"/>
-          </a:fontRef>
-        </p:style>
-        <p:txBody>
-          <a:bodyPr rtlCol="0" anchor="ctr"/>
-          <a:lstStyle/>
-          <a:p>
-            <a:pPr algn="ctr"/>
-          </a:p>
-        </p:txBody>
-      </p:sp>
-      <p:sp>
-        <p:nvSpPr>
-          <p:cNvPr id="15" name="Rectangle 14"/>
-          <p:cNvSpPr/>
-          <p:nvPr/>
-        </p:nvSpPr>
-        <p:spPr>
-          <a:xfrm>
-            <a:off x="6217920" y="2423160"/>
-            <a:ext cx="50800" cy="2834640"/>
-          </a:xfrm>
-          <a:prstGeom prst="rect">
-            <a:avLst/>
-          </a:prstGeom>
-          <a:solidFill>
-            <a:srgbClr val="4CAF50"/>
-          </a:solidFill>
-          <a:ln>
-            <a:noFill/>
-          </a:ln>
-        </p:spPr>
-        <p:style>
-          <a:lnRef idx="1">
-            <a:schemeClr val="accent1"/>
-          </a:lnRef>
-          <a:fillRef idx="3">
-            <a:schemeClr val="accent1"/>
-          </a:fillRef>
-          <a:effectRef idx="2">
-            <a:schemeClr val="accent1"/>
-          </a:effectRef>
-          <a:fontRef idx="minor">
-            <a:schemeClr val="lt1"/>
-          </a:fontRef>
-        </p:style>
-        <p:txBody>
-          <a:bodyPr rtlCol="0" anchor="ctr"/>
-          <a:lstStyle/>
-          <a:p>
-            <a:pPr algn="ctr"/>
-          </a:p>
-        </p:txBody>
-      </p:sp>
-      <p:sp>
-        <p:nvSpPr>
-          <p:cNvPr id="16" name="TextBox 15"/>
-          <p:cNvSpPr txBox="1"/>
-          <p:nvPr/>
-        </p:nvSpPr>
-        <p:spPr>
-          <a:xfrm>
-            <a:off x="6492240" y="2514600"/>
-            <a:ext cx="1920240" cy="320040"/>
-          </a:xfrm>
-          <a:prstGeom prst="rect">
-            <a:avLst/>
-          </a:prstGeom>
-          <a:noFill/>
-        </p:spPr>
-        <p:txBody>
-          <a:bodyPr wrap="square">
-            <a:spAutoFit/>
-          </a:bodyPr>
-          <a:lstStyle/>
-          <a:p>
-            <a:pPr algn="l"/>
-            <a:r>
-              <a:rPr sz="1600" b="1">
-                <a:solidFill>
-                  <a:srgbClr val="4CAF50"/>
-                </a:solidFill>
-                <a:latin typeface="Arial"/>
-                <a:ea typeface="Microsoft YaHei"/>
-              </a:rPr>
-              <a:t>03  AI 自动生成查询</a:t>
-            </a:r>
-          </a:p>
-        </p:txBody>
-      </p:sp>
-      <p:sp>
-        <p:nvSpPr>
-          <p:cNvPr id="17" name="TextBox 16"/>
-          <p:cNvSpPr txBox="1"/>
-          <p:nvPr/>
-        </p:nvSpPr>
-        <p:spPr>
-          <a:xfrm>
-            <a:off x="6492240" y="2880360"/>
-            <a:ext cx="1920240" cy="2286000"/>
-          </a:xfrm>
-          <a:prstGeom prst="rect">
-            <a:avLst/>
-          </a:prstGeom>
-          <a:noFill/>
-        </p:spPr>
-        <p:txBody>
-          <a:bodyPr wrap="square">
-            <a:spAutoFit/>
-          </a:bodyPr>
-          <a:lstStyle/>
-          <a:p>
-            <a:pPr algn="l">
-              <a:spcAft>
-                <a:spcPts val="800"/>
-              </a:spcAft>
-            </a:pPr>
-            <a:r>
-              <a:rPr sz="1300" b="0">
-                <a:solidFill>
-                  <a:srgbClr val="F0EEE8"/>
-                </a:solidFill>
-                <a:latin typeface="Arial"/>
-                <a:ea typeface="Microsoft YaHei"/>
-              </a:rPr>
-              <a:t>理解意图</a:t>
-            </a:r>
-          </a:p>
-          <a:p>
-            <a:pPr algn="l">
-              <a:spcAft>
-                <a:spcPts val="800"/>
-              </a:spcAft>
-            </a:pPr>
-            <a:r>
-              <a:rPr sz="1300" b="0">
-                <a:solidFill>
-                  <a:srgbClr val="F0EEE8"/>
-                </a:solidFill>
-                <a:latin typeface="Arial"/>
-                <a:ea typeface="Microsoft YaHei"/>
-              </a:rPr>
-              <a:t>匹配语义层</a:t>
-            </a:r>
-          </a:p>
-          <a:p>
-            <a:pPr algn="l">
-              <a:spcAft>
-                <a:spcPts val="800"/>
-              </a:spcAft>
-            </a:pPr>
-            <a:r>
-              <a:rPr sz="1300" b="0">
-                <a:solidFill>
-                  <a:srgbClr val="F0EEE8"/>
-                </a:solidFill>
-                <a:latin typeface="Arial"/>
-                <a:ea typeface="Microsoft YaHei"/>
-              </a:rPr>
-              <a:t>生成 SQL + 验证</a:t>
-            </a:r>
-          </a:p>
-        </p:txBody>
-      </p:sp>
-      <p:sp>
-        <p:nvSpPr>
-          <p:cNvPr id="18" name="TextBox 17"/>
-          <p:cNvSpPr txBox="1"/>
-          <p:nvPr/>
-        </p:nvSpPr>
-        <p:spPr>
-          <a:xfrm>
-            <a:off x="8712200" y="3474720"/>
-            <a:ext cx="274320" cy="274320"/>
-          </a:xfrm>
-          <a:prstGeom prst="rect">
-            <a:avLst/>
-          </a:prstGeom>
-          <a:noFill/>
-        </p:spPr>
-        <p:txBody>
-          <a:bodyPr wrap="square">
-            <a:spAutoFit/>
-          </a:bodyPr>
-          <a:lstStyle/>
-          <a:p>
-            <a:pPr algn="l"/>
-            <a:r>
-              <a:rPr sz="1800" b="0">
-                <a:solidFill>
-                  <a:srgbClr val="9A9A9A"/>
-                </a:solidFill>
-                <a:latin typeface="Arial"/>
-                <a:ea typeface="Microsoft YaHei"/>
-              </a:rPr>
-              <a:t>→</a:t>
-            </a:r>
-          </a:p>
-        </p:txBody>
-      </p:sp>
-      <p:sp>
-        <p:nvSpPr>
-          <p:cNvPr id="19" name="Rounded Rectangle 18"/>
-          <p:cNvSpPr/>
-          <p:nvPr/>
-        </p:nvSpPr>
-        <p:spPr>
-          <a:xfrm>
-            <a:off x="8869680" y="2377440"/>
-            <a:ext cx="2468880" cy="2926080"/>
-          </a:xfrm>
-          <a:prstGeom prst="roundRect">
-            <a:avLst/>
-          </a:prstGeom>
-          <a:solidFill>
-            <a:srgbClr val="2A2F3E"/>
-          </a:solidFill>
-          <a:ln>
-            <a:noFill/>
-          </a:ln>
-        </p:spPr>
-        <p:style>
-          <a:lnRef idx="1">
-            <a:schemeClr val="accent1"/>
-          </a:lnRef>
-          <a:fillRef idx="3">
-            <a:schemeClr val="accent1"/>
-          </a:fillRef>
-          <a:effectRef idx="2">
-            <a:schemeClr val="accent1"/>
-          </a:effectRef>
-          <a:fontRef idx="minor">
-            <a:schemeClr val="lt1"/>
-          </a:fontRef>
-        </p:style>
-        <p:txBody>
-          <a:bodyPr rtlCol="0" anchor="ctr"/>
-          <a:lstStyle/>
-          <a:p>
-            <a:pPr algn="ctr"/>
-          </a:p>
-        </p:txBody>
-      </p:sp>
-      <p:sp>
-        <p:nvSpPr>
-          <p:cNvPr id="20" name="Rectangle 19"/>
-          <p:cNvSpPr/>
-          <p:nvPr/>
-        </p:nvSpPr>
-        <p:spPr>
-          <a:xfrm>
-            <a:off x="8869680" y="2423160"/>
-            <a:ext cx="50800" cy="2834640"/>
-          </a:xfrm>
-          <a:prstGeom prst="rect">
-            <a:avLst/>
-          </a:prstGeom>
-          <a:solidFill>
-            <a:srgbClr val="8250DF"/>
-          </a:solidFill>
-          <a:ln>
-            <a:noFill/>
-          </a:ln>
-        </p:spPr>
-        <p:style>
-          <a:lnRef idx="1">
-            <a:schemeClr val="accent1"/>
-          </a:lnRef>
-          <a:fillRef idx="3">
-            <a:schemeClr val="accent1"/>
-          </a:fillRef>
-          <a:effectRef idx="2">
-            <a:schemeClr val="accent1"/>
-          </a:effectRef>
-          <a:fontRef idx="minor">
-            <a:schemeClr val="lt1"/>
-          </a:fontRef>
-        </p:style>
-        <p:txBody>
-          <a:bodyPr rtlCol="0" anchor="ctr"/>
-          <a:lstStyle/>
-          <a:p>
-            <a:pPr algn="ctr"/>
-          </a:p>
-        </p:txBody>
-      </p:sp>
-      <p:sp>
-        <p:nvSpPr>
-          <p:cNvPr id="21" name="TextBox 20"/>
-          <p:cNvSpPr txBox="1"/>
-          <p:nvPr/>
-        </p:nvSpPr>
-        <p:spPr>
-          <a:xfrm>
-            <a:off x="9144000" y="2514600"/>
-            <a:ext cx="1920240" cy="320040"/>
-          </a:xfrm>
-          <a:prstGeom prst="rect">
-            <a:avLst/>
-          </a:prstGeom>
-          <a:noFill/>
-        </p:spPr>
-        <p:txBody>
-          <a:bodyPr wrap="square">
-            <a:spAutoFit/>
-          </a:bodyPr>
-          <a:lstStyle/>
-          <a:p>
-            <a:pPr algn="l"/>
-            <a:r>
-              <a:rPr sz="1600" b="1">
-                <a:solidFill>
-                  <a:srgbClr val="8250DF"/>
-                </a:solidFill>
-                <a:latin typeface="Arial"/>
-                <a:ea typeface="Microsoft YaHei"/>
-              </a:rPr>
-              <a:t>04  返回可视化 + 建议</a:t>
-            </a:r>
-          </a:p>
-        </p:txBody>
-      </p:sp>
-      <p:sp>
-        <p:nvSpPr>
-          <p:cNvPr id="22" name="TextBox 21"/>
-          <p:cNvSpPr txBox="1"/>
-          <p:nvPr/>
-        </p:nvSpPr>
-        <p:spPr>
-          <a:xfrm>
-            <a:off x="9144000" y="2880360"/>
-            <a:ext cx="1920240" cy="2286000"/>
-          </a:xfrm>
-          <a:prstGeom prst="rect">
-            <a:avLst/>
-          </a:prstGeom>
-          <a:noFill/>
-        </p:spPr>
-        <p:txBody>
-          <a:bodyPr wrap="square">
-            <a:spAutoFit/>
-          </a:bodyPr>
-          <a:lstStyle/>
-          <a:p>
-            <a:pPr algn="l">
-              <a:spcAft>
-                <a:spcPts val="800"/>
-              </a:spcAft>
-            </a:pPr>
-            <a:r>
-              <a:rPr sz="1300" b="0">
-                <a:solidFill>
-                  <a:srgbClr val="F0EEE8"/>
-                </a:solidFill>
-                <a:latin typeface="Arial"/>
-                <a:ea typeface="Microsoft YaHei"/>
-              </a:rPr>
-              <a:t>图表、异常提示</a:t>
-            </a:r>
-          </a:p>
-          <a:p>
-            <a:pPr algn="l">
-              <a:spcAft>
-                <a:spcPts val="800"/>
-              </a:spcAft>
-            </a:pPr>
-            <a:r>
-              <a:rPr sz="1300" b="0">
-                <a:solidFill>
-                  <a:srgbClr val="F0EEE8"/>
-                </a:solidFill>
-                <a:latin typeface="Arial"/>
-                <a:ea typeface="Microsoft YaHei"/>
-              </a:rPr>
-              <a:t>决策建议</a:t>
-            </a:r>
-          </a:p>
-          <a:p>
-            <a:pPr algn="l">
-              <a:spcAft>
-                <a:spcPts val="800"/>
-              </a:spcAft>
-            </a:pPr>
-            <a:r>
-              <a:rPr sz="1300" b="0">
-                <a:solidFill>
-                  <a:srgbClr val="F0EEE8"/>
-                </a:solidFill>
-                <a:latin typeface="Arial"/>
-                <a:ea typeface="Microsoft YaHei"/>
-              </a:rPr>
-              <a:t>一次定义，无限查询</a:t>
-            </a:r>
-          </a:p>
-        </p:txBody>
-      </p:sp>
-      <p:sp>
-        <p:nvSpPr>
-          <p:cNvPr id="23" name="TextBox 22"/>
-          <p:cNvSpPr txBox="1"/>
-          <p:nvPr/>
-        </p:nvSpPr>
-        <p:spPr>
-          <a:xfrm>
-            <a:off x="914400" y="5669280"/>
-            <a:ext cx="10058400" cy="365760"/>
-          </a:xfrm>
-          <a:prstGeom prst="rect">
-            <a:avLst/>
-          </a:prstGeom>
-          <a:noFill/>
-        </p:spPr>
-        <p:txBody>
-          <a:bodyPr wrap="square">
-            <a:spAutoFit/>
-          </a:bodyPr>
-          <a:lstStyle/>
-          <a:p>
-            <a:pPr algn="l"/>
-            <a:r>
-              <a:rPr sz="1300" b="0">
-                <a:solidFill>
-                  <a:srgbClr val="9A9A9A"/>
-                </a:solidFill>
-                <a:latin typeface="Arial"/>
-                <a:ea typeface="Microsoft YaHei"/>
-              </a:rPr>
-              <a:t>与 ChatGPT 的区别：分析师的知识沉淀为语义资产，不是每次重新理解表结构</a:t>
+              <a:t>从"提需求等三天"到"自己问自己看" · 不是每次重新理解，而是一次定义永久可用</a:t>
             </a:r>
           </a:p>
         </p:txBody>
@@ -5548,7 +5087,7 @@
         <p:spPr>
           <a:xfrm>
             <a:off x="914400" y="1645920"/>
-            <a:ext cx="5303520" cy="4114800"/>
+            <a:ext cx="5029200" cy="2011680"/>
           </a:xfrm>
           <a:prstGeom prst="roundRect">
             <a:avLst/>
@@ -5584,20 +5123,94 @@
       </p:sp>
       <p:sp>
         <p:nvSpPr>
-          <p:cNvPr id="4" name="Rectangle 3"/>
+          <p:cNvPr id="4" name="TextBox 3"/>
+          <p:cNvSpPr txBox="1"/>
+          <p:nvPr/>
+        </p:nvSpPr>
+        <p:spPr>
+          <a:xfrm>
+            <a:off x="1188720" y="1828800"/>
+            <a:ext cx="4480560" cy="365760"/>
+          </a:xfrm>
+          <a:prstGeom prst="rect">
+            <a:avLst/>
+          </a:prstGeom>
+          <a:noFill/>
+        </p:spPr>
+        <p:txBody>
+          <a:bodyPr wrap="square">
+            <a:spAutoFit/>
+          </a:bodyPr>
+          <a:lstStyle/>
+          <a:p>
+            <a:pPr algn="l"/>
+            <a:r>
+              <a:rPr sz="1600" b="1">
+                <a:solidFill>
+                  <a:srgbClr val="D4A853"/>
+                </a:solidFill>
+                <a:latin typeface="Arial"/>
+                <a:ea typeface="Microsoft YaHei"/>
+              </a:rPr>
+              <a:t>取数 + 可视化</a:t>
+            </a:r>
+          </a:p>
+        </p:txBody>
+      </p:sp>
+      <p:sp>
+        <p:nvSpPr>
+          <p:cNvPr id="5" name="TextBox 4"/>
+          <p:cNvSpPr txBox="1"/>
+          <p:nvPr/>
+        </p:nvSpPr>
+        <p:spPr>
+          <a:xfrm>
+            <a:off x="1188720" y="2286000"/>
+            <a:ext cx="4480560" cy="1097280"/>
+          </a:xfrm>
+          <a:prstGeom prst="rect">
+            <a:avLst/>
+          </a:prstGeom>
+          <a:noFill/>
+        </p:spPr>
+        <p:txBody>
+          <a:bodyPr wrap="square">
+            <a:spAutoFit/>
+          </a:bodyPr>
+          <a:lstStyle/>
+          <a:p>
+            <a:pPr algn="l"/>
+            <a:r>
+              <a:rPr sz="1400" b="0">
+                <a:solidFill>
+                  <a:srgbClr val="F0EEE8"/>
+                </a:solidFill>
+                <a:latin typeface="Arial"/>
+                <a:ea typeface="Microsoft YaHei"/>
+              </a:rPr>
+              <a:t>"各地区本月销售额是多少"
+自动生成图表，一键切换维度
+支持柱状图、折线图、饼图、面积图</a:t>
+            </a:r>
+          </a:p>
+        </p:txBody>
+      </p:sp>
+      <p:sp>
+        <p:nvSpPr>
+          <p:cNvPr id="6" name="Rounded Rectangle 5"/>
           <p:cNvSpPr/>
           <p:nvPr/>
         </p:nvSpPr>
         <p:spPr>
           <a:xfrm>
-            <a:off x="914400" y="1691640"/>
-            <a:ext cx="50800" cy="4023360"/>
-          </a:xfrm>
-          <a:prstGeom prst="rect">
+            <a:off x="6217920" y="1645920"/>
+            <a:ext cx="5029200" cy="2011680"/>
+          </a:xfrm>
+          <a:prstGeom prst="roundRect">
             <a:avLst/>
           </a:prstGeom>
           <a:solidFill>
-            <a:srgbClr val="4CAF50"/>
+            <a:srgbClr val="2A2F3E"/>
           </a:solidFill>
           <a:ln>
             <a:noFill/>
@@ -5627,14 +5240,14 @@
       </p:sp>
       <p:sp>
         <p:nvSpPr>
-          <p:cNvPr id="5" name="TextBox 4"/>
+          <p:cNvPr id="7" name="TextBox 6"/>
           <p:cNvSpPr txBox="1"/>
           <p:nvPr/>
         </p:nvSpPr>
         <p:spPr>
           <a:xfrm>
-            <a:off x="1188720" y="1783080"/>
-            <a:ext cx="4754880" cy="320040"/>
+            <a:off x="6492240" y="1828800"/>
+            <a:ext cx="4480560" cy="365760"/>
           </a:xfrm>
           <a:prstGeom prst="rect">
             <a:avLst/>
@@ -5651,26 +5264,26 @@
             <a:r>
               <a:rPr sz="1600" b="1">
                 <a:solidFill>
-                  <a:srgbClr val="4CAF50"/>
+                  <a:srgbClr val="D4A853"/>
                 </a:solidFill>
                 <a:latin typeface="Arial"/>
                 <a:ea typeface="Microsoft YaHei"/>
               </a:rPr>
-              <a:t>完整处理链路</a:t>
-            </a:r>
-          </a:p>
-        </p:txBody>
-      </p:sp>
-      <p:sp>
-        <p:nvSpPr>
-          <p:cNvPr id="6" name="TextBox 5"/>
+              <a:t>归因 + 建议</a:t>
+            </a:r>
+          </a:p>
+        </p:txBody>
+      </p:sp>
+      <p:sp>
+        <p:nvSpPr>
+          <p:cNvPr id="8" name="TextBox 7"/>
           <p:cNvSpPr txBox="1"/>
           <p:nvPr/>
         </p:nvSpPr>
         <p:spPr>
           <a:xfrm>
-            <a:off x="1188720" y="2148840"/>
-            <a:ext cx="4754880" cy="3474720"/>
+            <a:off x="6492240" y="2286000"/>
+            <a:ext cx="4480560" cy="1097280"/>
           </a:xfrm>
           <a:prstGeom prst="rect">
             <a:avLst/>
@@ -5683,119 +5296,32 @@
           </a:bodyPr>
           <a:lstStyle/>
           <a:p>
-            <a:pPr algn="l">
-              <a:spcAft>
-                <a:spcPts val="800"/>
-              </a:spcAft>
-            </a:pPr>
-            <a:r>
-              <a:rPr sz="1300" b="0">
+            <a:pPr algn="l"/>
+            <a:r>
+              <a:rPr sz="1400" b="0">
                 <a:solidFill>
                   <a:srgbClr val="F0EEE8"/>
                 </a:solidFill>
                 <a:latin typeface="Arial"/>
                 <a:ea typeface="Microsoft YaHei"/>
               </a:rPr>
-              <a:t>取数 — "各地区本月销售额是多少"</a:t>
-            </a:r>
-          </a:p>
-          <a:p>
-            <a:pPr algn="l">
-              <a:spcAft>
-                <a:spcPts val="800"/>
-              </a:spcAft>
-            </a:pPr>
-            <a:r>
-              <a:rPr sz="1300" b="0">
-                <a:solidFill>
-                  <a:srgbClr val="F0EEE8"/>
-                </a:solidFill>
-                <a:latin typeface="Arial"/>
-                <a:ea typeface="Microsoft YaHei"/>
-              </a:rPr>
-              <a:t>可视化 — 自动生成图表，一键切换维度</a:t>
-            </a:r>
-          </a:p>
-          <a:p>
-            <a:pPr algn="l">
-              <a:spcAft>
-                <a:spcPts val="800"/>
-              </a:spcAft>
-            </a:pPr>
-            <a:r>
-              <a:rPr sz="1300" b="1">
-                <a:solidFill>
-                  <a:srgbClr val="D4A853"/>
-                </a:solidFill>
-                <a:latin typeface="Arial"/>
-                <a:ea typeface="Microsoft YaHei"/>
-              </a:rPr>
-              <a:t>归因 — "为什么东区下降了" → 自动找原因</a:t>
-            </a:r>
-          </a:p>
-          <a:p>
-            <a:pPr algn="l">
-              <a:spcAft>
-                <a:spcPts val="800"/>
-              </a:spcAft>
-            </a:pPr>
-            <a:r>
-              <a:rPr sz="1300" b="1">
-                <a:solidFill>
-                  <a:srgbClr val="D4A853"/>
-                </a:solidFill>
-                <a:latin typeface="Arial"/>
-                <a:ea typeface="Microsoft YaHei"/>
-              </a:rPr>
-              <a:t>建议 — 基于数据给出下一步行动</a:t>
-            </a:r>
-          </a:p>
-          <a:p>
-            <a:pPr algn="l">
-              <a:spcAft>
-                <a:spcPts val="800"/>
-              </a:spcAft>
-            </a:pPr>
-            <a:r>
-              <a:rPr sz="1300" b="0">
-                <a:solidFill>
-                  <a:srgbClr val="F0EEE8"/>
-                </a:solidFill>
-                <a:latin typeface="Arial"/>
-                <a:ea typeface="Microsoft YaHei"/>
-              </a:rPr>
-              <a:t/>
-            </a:r>
-          </a:p>
-          <a:p>
-            <a:pPr algn="l">
-              <a:spcAft>
-                <a:spcPts val="800"/>
-              </a:spcAft>
-            </a:pPr>
-            <a:r>
-              <a:rPr sz="1300" b="1">
-                <a:solidFill>
-                  <a:srgbClr val="4CAF50"/>
-                </a:solidFill>
-                <a:latin typeface="Arial"/>
-                <a:ea typeface="Microsoft YaHei"/>
-              </a:rPr>
-              <a:t>每个环节都有 AI 深度参与</a:t>
-            </a:r>
-          </a:p>
-        </p:txBody>
-      </p:sp>
-      <p:sp>
-        <p:nvSpPr>
-          <p:cNvPr id="7" name="Rounded Rectangle 6"/>
+              <a:t>"为什么东区下降了" → 自动找原因
+基于数据趋势给出下一步行动
+库存调整、营销策略、成本控制</a:t>
+            </a:r>
+          </a:p>
+        </p:txBody>
+      </p:sp>
+      <p:sp>
+        <p:nvSpPr>
+          <p:cNvPr id="9" name="Rounded Rectangle 8"/>
           <p:cNvSpPr/>
           <p:nvPr/>
         </p:nvSpPr>
         <p:spPr>
           <a:xfrm>
-            <a:off x="6583680" y="1645920"/>
-            <a:ext cx="4572000" cy="1828800"/>
+            <a:off x="914400" y="3931920"/>
+            <a:ext cx="5029200" cy="2011680"/>
           </a:xfrm>
           <a:prstGeom prst="roundRect">
             <a:avLst/>
@@ -5831,20 +5357,94 @@
       </p:sp>
       <p:sp>
         <p:nvSpPr>
-          <p:cNvPr id="8" name="Rectangle 7"/>
+          <p:cNvPr id="10" name="TextBox 9"/>
+          <p:cNvSpPr txBox="1"/>
+          <p:nvPr/>
+        </p:nvSpPr>
+        <p:spPr>
+          <a:xfrm>
+            <a:off x="1188720" y="4114800"/>
+            <a:ext cx="4480560" cy="365760"/>
+          </a:xfrm>
+          <a:prstGeom prst="rect">
+            <a:avLst/>
+          </a:prstGeom>
+          <a:noFill/>
+        </p:spPr>
+        <p:txBody>
+          <a:bodyPr wrap="square">
+            <a:spAutoFit/>
+          </a:bodyPr>
+          <a:lstStyle/>
+          <a:p>
+            <a:pPr algn="l"/>
+            <a:r>
+              <a:rPr sz="1600" b="1">
+                <a:solidFill>
+                  <a:srgbClr val="D4A853"/>
+                </a:solidFill>
+                <a:latin typeface="Arial"/>
+                <a:ea typeface="Microsoft YaHei"/>
+              </a:rPr>
+              <a:t>智能纠错</a:t>
+            </a:r>
+          </a:p>
+        </p:txBody>
+      </p:sp>
+      <p:sp>
+        <p:nvSpPr>
+          <p:cNvPr id="11" name="TextBox 10"/>
+          <p:cNvSpPr txBox="1"/>
+          <p:nvPr/>
+        </p:nvSpPr>
+        <p:spPr>
+          <a:xfrm>
+            <a:off x="1188720" y="4572000"/>
+            <a:ext cx="4480560" cy="1097280"/>
+          </a:xfrm>
+          <a:prstGeom prst="rect">
+            <a:avLst/>
+          </a:prstGeom>
+          <a:noFill/>
+        </p:spPr>
+        <p:txBody>
+          <a:bodyPr wrap="square">
+            <a:spAutoFit/>
+          </a:bodyPr>
+          <a:lstStyle/>
+          <a:p>
+            <a:pPr algn="l"/>
+            <a:r>
+              <a:rPr sz="1400" b="0">
+                <a:solidFill>
+                  <a:srgbClr val="F0EEE8"/>
+                </a:solidFill>
+                <a:latin typeface="Arial"/>
+                <a:ea typeface="Microsoft YaHei"/>
+              </a:rPr>
+              <a:t>查询出错时自动诊断原因
+修正查询并重试，用户看到完整过程
+不会被错误卡住，不需要手动调试</a:t>
+            </a:r>
+          </a:p>
+        </p:txBody>
+      </p:sp>
+      <p:sp>
+        <p:nvSpPr>
+          <p:cNvPr id="12" name="Rounded Rectangle 11"/>
           <p:cNvSpPr/>
           <p:nvPr/>
         </p:nvSpPr>
         <p:spPr>
           <a:xfrm>
-            <a:off x="6583680" y="1691640"/>
-            <a:ext cx="50800" cy="1737360"/>
-          </a:xfrm>
-          <a:prstGeom prst="rect">
+            <a:off x="6217920" y="3931920"/>
+            <a:ext cx="5029200" cy="2011680"/>
+          </a:xfrm>
+          <a:prstGeom prst="roundRect">
             <a:avLst/>
           </a:prstGeom>
           <a:solidFill>
-            <a:srgbClr val="D4A853"/>
+            <a:srgbClr val="2A2F3E"/>
           </a:solidFill>
           <a:ln>
             <a:noFill/>
@@ -5874,14 +5474,14 @@
       </p:sp>
       <p:sp>
         <p:nvSpPr>
-          <p:cNvPr id="9" name="TextBox 8"/>
+          <p:cNvPr id="13" name="TextBox 12"/>
           <p:cNvSpPr txBox="1"/>
           <p:nvPr/>
         </p:nvSpPr>
         <p:spPr>
           <a:xfrm>
-            <a:off x="6858000" y="1783080"/>
-            <a:ext cx="4023360" cy="320040"/>
+            <a:off x="6492240" y="4114800"/>
+            <a:ext cx="4480560" cy="365760"/>
           </a:xfrm>
           <a:prstGeom prst="rect">
             <a:avLst/>
@@ -5903,21 +5503,21 @@
                 <a:latin typeface="Arial"/>
                 <a:ea typeface="Microsoft YaHei"/>
               </a:rPr>
-              <a:t>自纠正循环</a:t>
-            </a:r>
-          </a:p>
-        </p:txBody>
-      </p:sp>
-      <p:sp>
-        <p:nvSpPr>
-          <p:cNvPr id="10" name="TextBox 9"/>
+              <a:t>分析师预设指标库</a:t>
+            </a:r>
+          </a:p>
+        </p:txBody>
+      </p:sp>
+      <p:sp>
+        <p:nvSpPr>
+          <p:cNvPr id="14" name="TextBox 13"/>
           <p:cNvSpPr txBox="1"/>
           <p:nvPr/>
         </p:nvSpPr>
         <p:spPr>
           <a:xfrm>
-            <a:off x="6858000" y="2148840"/>
-            <a:ext cx="4023360" cy="1188720"/>
+            <a:off x="6492240" y="4572000"/>
+            <a:ext cx="4480560" cy="1097280"/>
           </a:xfrm>
           <a:prstGeom prst="rect">
             <a:avLst/>
@@ -5930,250 +5530,18 @@
           </a:bodyPr>
           <a:lstStyle/>
           <a:p>
-            <a:pPr algn="l">
-              <a:spcAft>
-                <a:spcPts val="800"/>
-              </a:spcAft>
-            </a:pPr>
-            <a:r>
-              <a:rPr sz="1300" b="0">
+            <a:pPr algn="l"/>
+            <a:r>
+              <a:rPr sz="1400" b="0">
                 <a:solidFill>
                   <a:srgbClr val="F0EEE8"/>
                 </a:solidFill>
                 <a:latin typeface="Arial"/>
                 <a:ea typeface="Microsoft YaHei"/>
               </a:rPr>
-              <a:t>生成 SQL → 执行 → 检查结果</a:t>
-            </a:r>
-          </a:p>
-          <a:p>
-            <a:pPr algn="l">
-              <a:spcAft>
-                <a:spcPts val="800"/>
-              </a:spcAft>
-            </a:pPr>
-            <a:r>
-              <a:rPr sz="1300" b="1">
-                <a:solidFill>
-                  <a:srgbClr val="D4A853"/>
-                </a:solidFill>
-                <a:latin typeface="Arial"/>
-                <a:ea typeface="Microsoft YaHei"/>
-              </a:rPr>
-              <a:t>异常？→ 自动诊断 → 修正 SQL → 重试</a:t>
-            </a:r>
-          </a:p>
-          <a:p>
-            <a:pPr algn="l">
-              <a:spcAft>
-                <a:spcPts val="800"/>
-              </a:spcAft>
-            </a:pPr>
-            <a:r>
-              <a:rPr sz="1300" b="1">
-                <a:solidFill>
-                  <a:srgbClr val="4CAF50"/>
-                </a:solidFill>
-                <a:latin typeface="Arial"/>
-                <a:ea typeface="Microsoft YaHei"/>
-              </a:rPr>
-              <a:t>确保查询结果可靠，用户无感</a:t>
-            </a:r>
-          </a:p>
-        </p:txBody>
-      </p:sp>
-      <p:sp>
-        <p:nvSpPr>
-          <p:cNvPr id="11" name="Rounded Rectangle 10"/>
-          <p:cNvSpPr/>
-          <p:nvPr/>
-        </p:nvSpPr>
-        <p:spPr>
-          <a:xfrm>
-            <a:off x="6583680" y="3840480"/>
-            <a:ext cx="4572000" cy="1920240"/>
-          </a:xfrm>
-          <a:prstGeom prst="roundRect">
-            <a:avLst/>
-          </a:prstGeom>
-          <a:solidFill>
-            <a:srgbClr val="2A2F3E"/>
-          </a:solidFill>
-          <a:ln>
-            <a:noFill/>
-          </a:ln>
-        </p:spPr>
-        <p:style>
-          <a:lnRef idx="1">
-            <a:schemeClr val="accent1"/>
-          </a:lnRef>
-          <a:fillRef idx="3">
-            <a:schemeClr val="accent1"/>
-          </a:fillRef>
-          <a:effectRef idx="2">
-            <a:schemeClr val="accent1"/>
-          </a:effectRef>
-          <a:fontRef idx="minor">
-            <a:schemeClr val="lt1"/>
-          </a:fontRef>
-        </p:style>
-        <p:txBody>
-          <a:bodyPr rtlCol="0" anchor="ctr"/>
-          <a:lstStyle/>
-          <a:p>
-            <a:pPr algn="ctr"/>
-          </a:p>
-        </p:txBody>
-      </p:sp>
-      <p:sp>
-        <p:nvSpPr>
-          <p:cNvPr id="12" name="Rectangle 11"/>
-          <p:cNvSpPr/>
-          <p:nvPr/>
-        </p:nvSpPr>
-        <p:spPr>
-          <a:xfrm>
-            <a:off x="6583680" y="3886200"/>
-            <a:ext cx="50800" cy="1828800"/>
-          </a:xfrm>
-          <a:prstGeom prst="rect">
-            <a:avLst/>
-          </a:prstGeom>
-          <a:solidFill>
-            <a:srgbClr val="8250DF"/>
-          </a:solidFill>
-          <a:ln>
-            <a:noFill/>
-          </a:ln>
-        </p:spPr>
-        <p:style>
-          <a:lnRef idx="1">
-            <a:schemeClr val="accent1"/>
-          </a:lnRef>
-          <a:fillRef idx="3">
-            <a:schemeClr val="accent1"/>
-          </a:fillRef>
-          <a:effectRef idx="2">
-            <a:schemeClr val="accent1"/>
-          </a:effectRef>
-          <a:fontRef idx="minor">
-            <a:schemeClr val="lt1"/>
-          </a:fontRef>
-        </p:style>
-        <p:txBody>
-          <a:bodyPr rtlCol="0" anchor="ctr"/>
-          <a:lstStyle/>
-          <a:p>
-            <a:pPr algn="ctr"/>
-          </a:p>
-        </p:txBody>
-      </p:sp>
-      <p:sp>
-        <p:nvSpPr>
-          <p:cNvPr id="13" name="TextBox 12"/>
-          <p:cNvSpPr txBox="1"/>
-          <p:nvPr/>
-        </p:nvSpPr>
-        <p:spPr>
-          <a:xfrm>
-            <a:off x="6858000" y="3977640"/>
-            <a:ext cx="4023360" cy="320040"/>
-          </a:xfrm>
-          <a:prstGeom prst="rect">
-            <a:avLst/>
-          </a:prstGeom>
-          <a:noFill/>
-        </p:spPr>
-        <p:txBody>
-          <a:bodyPr wrap="square">
-            <a:spAutoFit/>
-          </a:bodyPr>
-          <a:lstStyle/>
-          <a:p>
-            <a:pPr algn="l"/>
-            <a:r>
-              <a:rPr sz="1600" b="1">
-                <a:solidFill>
-                  <a:srgbClr val="8250DF"/>
-                </a:solidFill>
-                <a:latin typeface="Arial"/>
-                <a:ea typeface="Microsoft YaHei"/>
-              </a:rPr>
-              <a:t>对抗审查机制</a:t>
-            </a:r>
-          </a:p>
-        </p:txBody>
-      </p:sp>
-      <p:sp>
-        <p:nvSpPr>
-          <p:cNvPr id="14" name="TextBox 13"/>
-          <p:cNvSpPr txBox="1"/>
-          <p:nvPr/>
-        </p:nvSpPr>
-        <p:spPr>
-          <a:xfrm>
-            <a:off x="6858000" y="4343400"/>
-            <a:ext cx="4023360" cy="1280160"/>
-          </a:xfrm>
-          <a:prstGeom prst="rect">
-            <a:avLst/>
-          </a:prstGeom>
-          <a:noFill/>
-        </p:spPr>
-        <p:txBody>
-          <a:bodyPr wrap="square">
-            <a:spAutoFit/>
-          </a:bodyPr>
-          <a:lstStyle/>
-          <a:p>
-            <a:pPr algn="l">
-              <a:spcAft>
-                <a:spcPts val="800"/>
-              </a:spcAft>
-            </a:pPr>
-            <a:r>
-              <a:rPr sz="1300" b="0">
-                <a:solidFill>
-                  <a:srgbClr val="F0EEE8"/>
-                </a:solidFill>
-                <a:latin typeface="Arial"/>
-                <a:ea typeface="Microsoft YaHei"/>
-              </a:rPr>
-              <a:t>生成结果由独立模块交叉验证</a:t>
-            </a:r>
-          </a:p>
-          <a:p>
-            <a:pPr algn="l">
-              <a:spcAft>
-                <a:spcPts val="800"/>
-              </a:spcAft>
-            </a:pPr>
-            <a:r>
-              <a:rPr sz="1300" b="1">
-                <a:solidFill>
-                  <a:srgbClr val="4CAF50"/>
-                </a:solidFill>
-                <a:latin typeface="Arial"/>
-                <a:ea typeface="Microsoft YaHei"/>
-              </a:rPr>
-              <a:t>降低幻觉风险，确保数据可靠</a:t>
-            </a:r>
-          </a:p>
-          <a:p>
-            <a:pPr algn="l">
-              <a:spcAft>
-                <a:spcPts val="800"/>
-              </a:spcAft>
-            </a:pPr>
-            <a:r>
-              <a:rPr sz="1300" b="1">
-                <a:solidFill>
-                  <a:srgbClr val="8250DF"/>
-                </a:solidFill>
-                <a:latin typeface="Arial"/>
-                <a:ea typeface="Microsoft YaHei"/>
-              </a:rPr>
-              <a:t>QUINTE 方法论：5 个 AI 互相挑刺</a:t>
+              <a:t>分析师预先定义常用指标
+业务人员一键选择即可查询
+确保全公司使用统一的指标定义</a:t>
             </a:r>
           </a:p>
         </p:txBody>
@@ -6235,94 +5603,80 @@
                 <a:latin typeface="Arial"/>
                 <a:ea typeface="Microsoft YaHei"/>
               </a:rPr>
-              <a:t>技术亮点：AI 用得到位</a:t>
-            </a:r>
-          </a:p>
-        </p:txBody>
-      </p:sp>
-      <p:sp>
-        <p:nvSpPr>
-          <p:cNvPr id="3" name="Rounded Rectangle 2"/>
-          <p:cNvSpPr/>
+              <a:t>在真实数据上验证 — Olist 巴西电商平台</a:t>
+            </a:r>
+          </a:p>
+        </p:txBody>
+      </p:sp>
+      <p:sp>
+        <p:nvSpPr>
+          <p:cNvPr id="3" name="TextBox 2"/>
+          <p:cNvSpPr txBox="1"/>
           <p:nvPr/>
         </p:nvSpPr>
         <p:spPr>
           <a:xfrm>
             <a:off x="914400" y="1645920"/>
-            <a:ext cx="3383280" cy="4114800"/>
-          </a:xfrm>
-          <a:prstGeom prst="roundRect">
-            <a:avLst/>
-          </a:prstGeom>
-          <a:solidFill>
-            <a:srgbClr val="2A2F3E"/>
-          </a:solidFill>
-          <a:ln>
-            <a:noFill/>
-          </a:ln>
-        </p:spPr>
-        <p:style>
-          <a:lnRef idx="1">
-            <a:schemeClr val="accent1"/>
-          </a:lnRef>
-          <a:fillRef idx="3">
-            <a:schemeClr val="accent1"/>
-          </a:fillRef>
-          <a:effectRef idx="2">
-            <a:schemeClr val="accent1"/>
-          </a:effectRef>
-          <a:fontRef idx="minor">
-            <a:schemeClr val="lt1"/>
-          </a:fontRef>
-        </p:style>
-        <p:txBody>
-          <a:bodyPr rtlCol="0" anchor="ctr"/>
-          <a:lstStyle/>
-          <a:p>
-            <a:pPr algn="ctr"/>
-          </a:p>
-        </p:txBody>
-      </p:sp>
-      <p:sp>
-        <p:nvSpPr>
-          <p:cNvPr id="4" name="Rectangle 3"/>
-          <p:cNvSpPr/>
+            <a:ext cx="2743200" cy="731520"/>
+          </a:xfrm>
+          <a:prstGeom prst="rect">
+            <a:avLst/>
+          </a:prstGeom>
+          <a:noFill/>
+        </p:spPr>
+        <p:txBody>
+          <a:bodyPr wrap="square">
+            <a:spAutoFit/>
+          </a:bodyPr>
+          <a:lstStyle/>
+          <a:p>
+            <a:pPr algn="l"/>
+            <a:r>
+              <a:rPr sz="4800" b="1">
+                <a:solidFill>
+                  <a:srgbClr val="D4A853"/>
+                </a:solidFill>
+                <a:latin typeface="Arial"/>
+                <a:ea typeface="Microsoft YaHei"/>
+              </a:rPr>
+              <a:t>99,441</a:t>
+            </a:r>
+          </a:p>
+        </p:txBody>
+      </p:sp>
+      <p:sp>
+        <p:nvSpPr>
+          <p:cNvPr id="4" name="TextBox 3"/>
+          <p:cNvSpPr txBox="1"/>
           <p:nvPr/>
         </p:nvSpPr>
         <p:spPr>
           <a:xfrm>
-            <a:off x="914400" y="1691640"/>
-            <a:ext cx="50800" cy="4023360"/>
+            <a:off x="914400" y="2468880"/>
+            <a:ext cx="2743200" cy="365760"/>
           </a:xfrm>
           <a:prstGeom prst="rect">
             <a:avLst/>
           </a:prstGeom>
-          <a:solidFill>
-            <a:srgbClr val="D4A853"/>
-          </a:solidFill>
-          <a:ln>
-            <a:noFill/>
-          </a:ln>
-        </p:spPr>
-        <p:style>
-          <a:lnRef idx="1">
-            <a:schemeClr val="accent1"/>
-          </a:lnRef>
-          <a:fillRef idx="3">
-            <a:schemeClr val="accent1"/>
-          </a:fillRef>
-          <a:effectRef idx="2">
-            <a:schemeClr val="accent1"/>
-          </a:effectRef>
-          <a:fontRef idx="minor">
-            <a:schemeClr val="lt1"/>
-          </a:fontRef>
-        </p:style>
-        <p:txBody>
-          <a:bodyPr rtlCol="0" anchor="ctr"/>
-          <a:lstStyle/>
-          <a:p>
-            <a:pPr algn="ctr"/>
+          <a:noFill/>
+        </p:spPr>
+        <p:txBody>
+          <a:bodyPr wrap="square">
+            <a:spAutoFit/>
+          </a:bodyPr>
+          <a:lstStyle/>
+          <a:p>
+            <a:pPr algn="l"/>
+            <a:r>
+              <a:rPr sz="1500" b="0">
+                <a:solidFill>
+                  <a:srgbClr val="9A9A9A"/>
+                </a:solidFill>
+                <a:latin typeface="Arial"/>
+                <a:ea typeface="Microsoft YaHei"/>
+              </a:rPr>
+              <a:t>真实订单</a:t>
+            </a:r>
           </a:p>
         </p:txBody>
       </p:sp>
@@ -6334,8 +5688,8 @@
         </p:nvSpPr>
         <p:spPr>
           <a:xfrm>
-            <a:off x="1188720" y="1783080"/>
-            <a:ext cx="2834640" cy="320040"/>
+            <a:off x="4114800" y="1645920"/>
+            <a:ext cx="2743200" cy="731520"/>
           </a:xfrm>
           <a:prstGeom prst="rect">
             <a:avLst/>
@@ -6350,14 +5704,14 @@
           <a:p>
             <a:pPr algn="l"/>
             <a:r>
-              <a:rPr sz="1600" b="1">
+              <a:rPr sz="4800" b="1">
                 <a:solidFill>
                   <a:srgbClr val="D4A853"/>
                 </a:solidFill>
                 <a:latin typeface="Arial"/>
                 <a:ea typeface="Microsoft YaHei"/>
               </a:rPr>
-              <a:t>语义层：知识沉淀</a:t>
+              <a:t>96,096</a:t>
             </a:r>
           </a:p>
         </p:txBody>
@@ -6370,8 +5724,8 @@
         </p:nvSpPr>
         <p:spPr>
           <a:xfrm>
-            <a:off x="1188720" y="2148840"/>
-            <a:ext cx="2834640" cy="3474720"/>
+            <a:off x="4114800" y="2468880"/>
+            <a:ext cx="2743200" cy="365760"/>
           </a:xfrm>
           <a:prstGeom prst="rect">
             <a:avLst/>
@@ -6384,205 +5738,212 @@
           </a:bodyPr>
           <a:lstStyle/>
           <a:p>
-            <a:pPr algn="l">
-              <a:spcAft>
-                <a:spcPts val="800"/>
-              </a:spcAft>
-            </a:pPr>
-            <a:r>
-              <a:rPr sz="1300" b="0">
-                <a:solidFill>
-                  <a:srgbClr val="F0EEE8"/>
+            <a:pPr algn="l"/>
+            <a:r>
+              <a:rPr sz="1500" b="0">
+                <a:solidFill>
+                  <a:srgbClr val="9A9A9A"/>
                 </a:solidFill>
                 <a:latin typeface="Arial"/>
                 <a:ea typeface="Microsoft YaHei"/>
               </a:rPr>
-              <a:t>分析师定义指标时</a:t>
-            </a:r>
-          </a:p>
-          <a:p>
-            <a:pPr algn="l">
-              <a:spcAft>
-                <a:spcPts val="800"/>
-              </a:spcAft>
-            </a:pPr>
-            <a:r>
-              <a:rPr sz="1300" b="1">
+              <a:t>真实用户</a:t>
+            </a:r>
+          </a:p>
+        </p:txBody>
+      </p:sp>
+      <p:sp>
+        <p:nvSpPr>
+          <p:cNvPr id="7" name="TextBox 6"/>
+          <p:cNvSpPr txBox="1"/>
+          <p:nvPr/>
+        </p:nvSpPr>
+        <p:spPr>
+          <a:xfrm>
+            <a:off x="7315200" y="1645920"/>
+            <a:ext cx="2743200" cy="731520"/>
+          </a:xfrm>
+          <a:prstGeom prst="rect">
+            <a:avLst/>
+          </a:prstGeom>
+          <a:noFill/>
+        </p:spPr>
+        <p:txBody>
+          <a:bodyPr wrap="square">
+            <a:spAutoFit/>
+          </a:bodyPr>
+          <a:lstStyle/>
+          <a:p>
+            <a:pPr algn="l"/>
+            <a:r>
+              <a:rPr sz="4800" b="1">
                 <a:solidFill>
                   <a:srgbClr val="D4A853"/>
                 </a:solidFill>
                 <a:latin typeface="Arial"/>
                 <a:ea typeface="Microsoft YaHei"/>
               </a:rPr>
-              <a:t>系统自动生成语义层</a:t>
-            </a:r>
-          </a:p>
-          <a:p>
-            <a:pPr algn="l">
-              <a:spcAft>
-                <a:spcPts val="800"/>
-              </a:spcAft>
-            </a:pPr>
-            <a:r>
-              <a:rPr sz="1300" b="0">
-                <a:solidFill>
-                  <a:srgbClr val="F0EEE8"/>
+              <a:t>74</a:t>
+            </a:r>
+          </a:p>
+        </p:txBody>
+      </p:sp>
+      <p:sp>
+        <p:nvSpPr>
+          <p:cNvPr id="8" name="TextBox 7"/>
+          <p:cNvSpPr txBox="1"/>
+          <p:nvPr/>
+        </p:nvSpPr>
+        <p:spPr>
+          <a:xfrm>
+            <a:off x="7315200" y="2468880"/>
+            <a:ext cx="2743200" cy="365760"/>
+          </a:xfrm>
+          <a:prstGeom prst="rect">
+            <a:avLst/>
+          </a:prstGeom>
+          <a:noFill/>
+        </p:spPr>
+        <p:txBody>
+          <a:bodyPr wrap="square">
+            <a:spAutoFit/>
+          </a:bodyPr>
+          <a:lstStyle/>
+          <a:p>
+            <a:pPr algn="l"/>
+            <a:r>
+              <a:rPr sz="1500" b="0">
+                <a:solidFill>
+                  <a:srgbClr val="9A9A9A"/>
                 </a:solidFill>
                 <a:latin typeface="Arial"/>
                 <a:ea typeface="Microsoft YaHei"/>
               </a:rPr>
-              <a:t>将业务语言映射到数据表结构</a:t>
-            </a:r>
-          </a:p>
-          <a:p>
-            <a:pPr algn="l">
-              <a:spcAft>
-                <a:spcPts val="800"/>
-              </a:spcAft>
-            </a:pPr>
-            <a:r>
-              <a:rPr sz="1300" b="0">
-                <a:solidFill>
-                  <a:srgbClr val="F0EEE8"/>
+              <a:t>商品品类</a:t>
+            </a:r>
+          </a:p>
+        </p:txBody>
+      </p:sp>
+      <p:sp>
+        <p:nvSpPr>
+          <p:cNvPr id="9" name="TextBox 8"/>
+          <p:cNvSpPr txBox="1"/>
+          <p:nvPr/>
+        </p:nvSpPr>
+        <p:spPr>
+          <a:xfrm>
+            <a:off x="914400" y="3200400"/>
+            <a:ext cx="9144000" cy="365760"/>
+          </a:xfrm>
+          <a:prstGeom prst="rect">
+            <a:avLst/>
+          </a:prstGeom>
+          <a:noFill/>
+        </p:spPr>
+        <p:txBody>
+          <a:bodyPr wrap="square">
+            <a:spAutoFit/>
+          </a:bodyPr>
+          <a:lstStyle/>
+          <a:p>
+            <a:pPr algn="l"/>
+            <a:r>
+              <a:rPr sz="1600" b="1">
+                <a:solidFill>
+                  <a:srgbClr val="D4A853"/>
                 </a:solidFill>
                 <a:latin typeface="Arial"/>
                 <a:ea typeface="Microsoft YaHei"/>
               </a:rPr>
-              <a:t/>
-            </a:r>
-          </a:p>
+              <a:t>来自 Kaggle 公开数据集，巴西最大电商平台真实交易数据：</a:t>
+            </a:r>
+          </a:p>
+        </p:txBody>
+      </p:sp>
+      <p:sp>
+        <p:nvSpPr>
+          <p:cNvPr id="10" name="TextBox 9"/>
+          <p:cNvSpPr txBox="1"/>
+          <p:nvPr/>
+        </p:nvSpPr>
+        <p:spPr>
+          <a:xfrm>
+            <a:off x="914400" y="3657600"/>
+            <a:ext cx="9144000" cy="1508760"/>
+          </a:xfrm>
+          <a:prstGeom prst="rect">
+            <a:avLst/>
+          </a:prstGeom>
+          <a:noFill/>
+        </p:spPr>
+        <p:txBody>
+          <a:bodyPr wrap="square">
+            <a:spAutoFit/>
+          </a:bodyPr>
+          <a:lstStyle/>
           <a:p>
             <a:pPr algn="l">
               <a:spcAft>
-                <a:spcPts val="800"/>
+                <a:spcPts val="1400"/>
               </a:spcAft>
             </a:pPr>
             <a:r>
-              <a:rPr sz="1300" b="1">
-                <a:solidFill>
-                  <a:srgbClr val="4CAF50"/>
+              <a:rPr sz="1500">
+                <a:solidFill>
+                  <a:srgbClr val="F0EEE8"/>
                 </a:solidFill>
                 <a:latin typeface="Arial"/>
                 <a:ea typeface="Microsoft YaHei"/>
               </a:rPr>
-              <a:t>不是每次重新理解表结构</a:t>
+              <a:t>  —  总营收 R$1,601万 · 客单价 R$161 · 完成率 97% · 复购率 3.1%</a:t>
             </a:r>
           </a:p>
           <a:p>
             <a:pPr algn="l">
               <a:spcAft>
-                <a:spcPts val="800"/>
+                <a:spcPts val="1400"/>
               </a:spcAft>
             </a:pPr>
             <a:r>
-              <a:rPr sz="1300" b="1">
-                <a:solidFill>
-                  <a:srgbClr val="4CAF50"/>
+              <a:rPr sz="1500">
+                <a:solidFill>
+                  <a:srgbClr val="F0EEE8"/>
                 </a:solidFill>
                 <a:latin typeface="Arial"/>
                 <a:ea typeface="Microsoft YaHei"/>
               </a:rPr>
-              <a:t>一次定义，永久可用</a:t>
-            </a:r>
-          </a:p>
-        </p:txBody>
-      </p:sp>
-      <p:sp>
-        <p:nvSpPr>
-          <p:cNvPr id="7" name="Rounded Rectangle 6"/>
-          <p:cNvSpPr/>
-          <p:nvPr/>
-        </p:nvSpPr>
-        <p:spPr>
-          <a:xfrm>
-            <a:off x="4663440" y="1645920"/>
-            <a:ext cx="3383280" cy="4114800"/>
-          </a:xfrm>
-          <a:prstGeom prst="roundRect">
-            <a:avLst/>
-          </a:prstGeom>
-          <a:solidFill>
-            <a:srgbClr val="2A2F3E"/>
-          </a:solidFill>
-          <a:ln>
-            <a:noFill/>
-          </a:ln>
-        </p:spPr>
-        <p:style>
-          <a:lnRef idx="1">
-            <a:schemeClr val="accent1"/>
-          </a:lnRef>
-          <a:fillRef idx="3">
-            <a:schemeClr val="accent1"/>
-          </a:fillRef>
-          <a:effectRef idx="2">
-            <a:schemeClr val="accent1"/>
-          </a:effectRef>
-          <a:fontRef idx="minor">
-            <a:schemeClr val="lt1"/>
-          </a:fontRef>
-        </p:style>
-        <p:txBody>
-          <a:bodyPr rtlCol="0" anchor="ctr"/>
-          <a:lstStyle/>
-          <a:p>
-            <a:pPr algn="ctr"/>
-          </a:p>
-        </p:txBody>
-      </p:sp>
-      <p:sp>
-        <p:nvSpPr>
-          <p:cNvPr id="8" name="Rectangle 7"/>
-          <p:cNvSpPr/>
-          <p:nvPr/>
-        </p:nvSpPr>
-        <p:spPr>
-          <a:xfrm>
-            <a:off x="4663440" y="1691640"/>
-            <a:ext cx="50800" cy="4023360"/>
-          </a:xfrm>
-          <a:prstGeom prst="rect">
-            <a:avLst/>
-          </a:prstGeom>
-          <a:solidFill>
-            <a:srgbClr val="4CAF50"/>
-          </a:solidFill>
-          <a:ln>
-            <a:noFill/>
-          </a:ln>
-        </p:spPr>
-        <p:style>
-          <a:lnRef idx="1">
-            <a:schemeClr val="accent1"/>
-          </a:lnRef>
-          <a:fillRef idx="3">
-            <a:schemeClr val="accent1"/>
-          </a:fillRef>
-          <a:effectRef idx="2">
-            <a:schemeClr val="accent1"/>
-          </a:effectRef>
-          <a:fontRef idx="minor">
-            <a:schemeClr val="lt1"/>
-          </a:fontRef>
-        </p:style>
-        <p:txBody>
-          <a:bodyPr rtlCol="0" anchor="ctr"/>
-          <a:lstStyle/>
-          <a:p>
-            <a:pPr algn="ctr"/>
-          </a:p>
-        </p:txBody>
-      </p:sp>
-      <p:sp>
-        <p:nvSpPr>
-          <p:cNvPr id="9" name="TextBox 8"/>
+              <a:t>  —  覆盖巴西5大地区，2016-2018年完整时间序列</a:t>
+            </a:r>
+          </a:p>
+          <a:p>
+            <a:pPr algn="l">
+              <a:spcAft>
+                <a:spcPts val="1400"/>
+              </a:spcAft>
+            </a:pPr>
+            <a:r>
+              <a:rPr sz="1500">
+                <a:solidFill>
+                  <a:srgbClr val="F0EEE8"/>
+                </a:solidFill>
+                <a:latin typeface="Arial"/>
+                <a:ea typeface="Microsoft YaHei"/>
+              </a:rPr>
+              <a:t>  —  数据包含订单、支付、商品、评价、物流全链路</a:t>
+            </a:r>
+          </a:p>
+        </p:txBody>
+      </p:sp>
+      <p:sp>
+        <p:nvSpPr>
+          <p:cNvPr id="11" name="TextBox 10"/>
           <p:cNvSpPr txBox="1"/>
           <p:nvPr/>
         </p:nvSpPr>
         <p:spPr>
           <a:xfrm>
-            <a:off x="4937760" y="1783080"/>
-            <a:ext cx="2834640" cy="320040"/>
+            <a:off x="914400" y="5943600"/>
+            <a:ext cx="9144000" cy="365760"/>
           </a:xfrm>
           <a:prstGeom prst="rect">
             <a:avLst/>
@@ -6597,386 +5958,14 @@
           <a:p>
             <a:pPr algn="l"/>
             <a:r>
-              <a:rPr sz="1600" b="1">
-                <a:solidFill>
-                  <a:srgbClr val="4CAF50"/>
+              <a:rPr sz="1100" b="0">
+                <a:solidFill>
+                  <a:srgbClr val="9A9A9A"/>
                 </a:solidFill>
                 <a:latin typeface="Arial"/>
                 <a:ea typeface="Microsoft YaHei"/>
               </a:rPr>
-              <a:t>自纠正：可靠输出</a:t>
-            </a:r>
-          </a:p>
-        </p:txBody>
-      </p:sp>
-      <p:sp>
-        <p:nvSpPr>
-          <p:cNvPr id="10" name="TextBox 9"/>
-          <p:cNvSpPr txBox="1"/>
-          <p:nvPr/>
-        </p:nvSpPr>
-        <p:spPr>
-          <a:xfrm>
-            <a:off x="4937760" y="2148840"/>
-            <a:ext cx="2834640" cy="3474720"/>
-          </a:xfrm>
-          <a:prstGeom prst="rect">
-            <a:avLst/>
-          </a:prstGeom>
-          <a:noFill/>
-        </p:spPr>
-        <p:txBody>
-          <a:bodyPr wrap="square">
-            <a:spAutoFit/>
-          </a:bodyPr>
-          <a:lstStyle/>
-          <a:p>
-            <a:pPr algn="l">
-              <a:spcAft>
-                <a:spcPts val="800"/>
-              </a:spcAft>
-            </a:pPr>
-            <a:r>
-              <a:rPr sz="1300" b="0">
-                <a:solidFill>
-                  <a:srgbClr val="F0EEE8"/>
-                </a:solidFill>
-                <a:latin typeface="Arial"/>
-                <a:ea typeface="Microsoft YaHei"/>
-              </a:rPr>
-              <a:t>生成查询后自动验证</a:t>
-            </a:r>
-          </a:p>
-          <a:p>
-            <a:pPr algn="l">
-              <a:spcAft>
-                <a:spcPts val="800"/>
-              </a:spcAft>
-            </a:pPr>
-            <a:r>
-              <a:rPr sz="1300" b="0">
-                <a:solidFill>
-                  <a:srgbClr val="F0EEE8"/>
-                </a:solidFill>
-                <a:latin typeface="Arial"/>
-                <a:ea typeface="Microsoft YaHei"/>
-              </a:rPr>
-              <a:t>检查数据合理性</a:t>
-            </a:r>
-          </a:p>
-          <a:p>
-            <a:pPr algn="l">
-              <a:spcAft>
-                <a:spcPts val="800"/>
-              </a:spcAft>
-            </a:pPr>
-            <a:r>
-              <a:rPr sz="1300" b="1">
-                <a:solidFill>
-                  <a:srgbClr val="D4A853"/>
-                </a:solidFill>
-                <a:latin typeface="Arial"/>
-                <a:ea typeface="Microsoft YaHei"/>
-              </a:rPr>
-              <a:t>异常结果触发重新推理</a:t>
-            </a:r>
-          </a:p>
-          <a:p>
-            <a:pPr algn="l">
-              <a:spcAft>
-                <a:spcPts val="800"/>
-              </a:spcAft>
-            </a:pPr>
-            <a:r>
-              <a:rPr sz="1300" b="0">
-                <a:solidFill>
-                  <a:srgbClr val="F0EEE8"/>
-                </a:solidFill>
-                <a:latin typeface="Arial"/>
-                <a:ea typeface="Microsoft YaHei"/>
-              </a:rPr>
-              <a:t/>
-            </a:r>
-          </a:p>
-          <a:p>
-            <a:pPr algn="l">
-              <a:spcAft>
-                <a:spcPts val="800"/>
-              </a:spcAft>
-            </a:pPr>
-            <a:r>
-              <a:rPr sz="1300" b="1">
-                <a:solidFill>
-                  <a:srgbClr val="4CAF50"/>
-                </a:solidFill>
-                <a:latin typeface="Arial"/>
-                <a:ea typeface="Microsoft YaHei"/>
-              </a:rPr>
-              <a:t>不是一次性生成</a:t>
-            </a:r>
-          </a:p>
-          <a:p>
-            <a:pPr algn="l">
-              <a:spcAft>
-                <a:spcPts val="800"/>
-              </a:spcAft>
-            </a:pPr>
-            <a:r>
-              <a:rPr sz="1300" b="1">
-                <a:solidFill>
-                  <a:srgbClr val="4CAF50"/>
-                </a:solidFill>
-                <a:latin typeface="Arial"/>
-                <a:ea typeface="Microsoft YaHei"/>
-              </a:rPr>
-              <a:t>而是生成→验证→修正的循环</a:t>
-            </a:r>
-          </a:p>
-        </p:txBody>
-      </p:sp>
-      <p:sp>
-        <p:nvSpPr>
-          <p:cNvPr id="11" name="Rounded Rectangle 10"/>
-          <p:cNvSpPr/>
-          <p:nvPr/>
-        </p:nvSpPr>
-        <p:spPr>
-          <a:xfrm>
-            <a:off x="8412480" y="1645920"/>
-            <a:ext cx="3200400" cy="4114800"/>
-          </a:xfrm>
-          <a:prstGeom prst="roundRect">
-            <a:avLst/>
-          </a:prstGeom>
-          <a:solidFill>
-            <a:srgbClr val="2A2F3E"/>
-          </a:solidFill>
-          <a:ln>
-            <a:noFill/>
-          </a:ln>
-        </p:spPr>
-        <p:style>
-          <a:lnRef idx="1">
-            <a:schemeClr val="accent1"/>
-          </a:lnRef>
-          <a:fillRef idx="3">
-            <a:schemeClr val="accent1"/>
-          </a:fillRef>
-          <a:effectRef idx="2">
-            <a:schemeClr val="accent1"/>
-          </a:effectRef>
-          <a:fontRef idx="minor">
-            <a:schemeClr val="lt1"/>
-          </a:fontRef>
-        </p:style>
-        <p:txBody>
-          <a:bodyPr rtlCol="0" anchor="ctr"/>
-          <a:lstStyle/>
-          <a:p>
-            <a:pPr algn="ctr"/>
-          </a:p>
-        </p:txBody>
-      </p:sp>
-      <p:sp>
-        <p:nvSpPr>
-          <p:cNvPr id="12" name="Rectangle 11"/>
-          <p:cNvSpPr/>
-          <p:nvPr/>
-        </p:nvSpPr>
-        <p:spPr>
-          <a:xfrm>
-            <a:off x="8412480" y="1691640"/>
-            <a:ext cx="50800" cy="4023360"/>
-          </a:xfrm>
-          <a:prstGeom prst="rect">
-            <a:avLst/>
-          </a:prstGeom>
-          <a:solidFill>
-            <a:srgbClr val="4EA8DE"/>
-          </a:solidFill>
-          <a:ln>
-            <a:noFill/>
-          </a:ln>
-        </p:spPr>
-        <p:style>
-          <a:lnRef idx="1">
-            <a:schemeClr val="accent1"/>
-          </a:lnRef>
-          <a:fillRef idx="3">
-            <a:schemeClr val="accent1"/>
-          </a:fillRef>
-          <a:effectRef idx="2">
-            <a:schemeClr val="accent1"/>
-          </a:effectRef>
-          <a:fontRef idx="minor">
-            <a:schemeClr val="lt1"/>
-          </a:fontRef>
-        </p:style>
-        <p:txBody>
-          <a:bodyPr rtlCol="0" anchor="ctr"/>
-          <a:lstStyle/>
-          <a:p>
-            <a:pPr algn="ctr"/>
-          </a:p>
-        </p:txBody>
-      </p:sp>
-      <p:sp>
-        <p:nvSpPr>
-          <p:cNvPr id="13" name="TextBox 12"/>
-          <p:cNvSpPr txBox="1"/>
-          <p:nvPr/>
-        </p:nvSpPr>
-        <p:spPr>
-          <a:xfrm>
-            <a:off x="8686800" y="1783080"/>
-            <a:ext cx="2651760" cy="320040"/>
-          </a:xfrm>
-          <a:prstGeom prst="rect">
-            <a:avLst/>
-          </a:prstGeom>
-          <a:noFill/>
-        </p:spPr>
-        <p:txBody>
-          <a:bodyPr wrap="square">
-            <a:spAutoFit/>
-          </a:bodyPr>
-          <a:lstStyle/>
-          <a:p>
-            <a:pPr algn="l"/>
-            <a:r>
-              <a:rPr sz="1600" b="1">
-                <a:solidFill>
-                  <a:srgbClr val="4EA8DE"/>
-                </a:solidFill>
-                <a:latin typeface="Arial"/>
-                <a:ea typeface="Microsoft YaHei"/>
-              </a:rPr>
-              <a:t>安全：多层防护</a:t>
-            </a:r>
-          </a:p>
-        </p:txBody>
-      </p:sp>
-      <p:sp>
-        <p:nvSpPr>
-          <p:cNvPr id="14" name="TextBox 13"/>
-          <p:cNvSpPr txBox="1"/>
-          <p:nvPr/>
-        </p:nvSpPr>
-        <p:spPr>
-          <a:xfrm>
-            <a:off x="8686800" y="2148840"/>
-            <a:ext cx="2651760" cy="3474720"/>
-          </a:xfrm>
-          <a:prstGeom prst="rect">
-            <a:avLst/>
-          </a:prstGeom>
-          <a:noFill/>
-        </p:spPr>
-        <p:txBody>
-          <a:bodyPr wrap="square">
-            <a:spAutoFit/>
-          </a:bodyPr>
-          <a:lstStyle/>
-          <a:p>
-            <a:pPr algn="l">
-              <a:spcAft>
-                <a:spcPts val="800"/>
-              </a:spcAft>
-            </a:pPr>
-            <a:r>
-              <a:rPr sz="1300" b="0">
-                <a:solidFill>
-                  <a:srgbClr val="F0EEE8"/>
-                </a:solidFill>
-                <a:latin typeface="Arial"/>
-                <a:ea typeface="Microsoft YaHei"/>
-              </a:rPr>
-              <a:t>AST 解析：只允许 SELECT</a:t>
-            </a:r>
-          </a:p>
-          <a:p>
-            <a:pPr algn="l">
-              <a:spcAft>
-                <a:spcPts val="800"/>
-              </a:spcAft>
-            </a:pPr>
-            <a:r>
-              <a:rPr sz="1300" b="0">
-                <a:solidFill>
-                  <a:srgbClr val="F0EEE8"/>
-                </a:solidFill>
-                <a:latin typeface="Arial"/>
-                <a:ea typeface="Microsoft YaHei"/>
-              </a:rPr>
-              <a:t>自动 LIMIT：防大查询</a:t>
-            </a:r>
-          </a:p>
-          <a:p>
-            <a:pPr algn="l">
-              <a:spcAft>
-                <a:spcPts val="800"/>
-              </a:spcAft>
-            </a:pPr>
-            <a:r>
-              <a:rPr sz="1300" b="0">
-                <a:solidFill>
-                  <a:srgbClr val="F0EEE8"/>
-                </a:solidFill>
-                <a:latin typeface="Arial"/>
-                <a:ea typeface="Microsoft YaHei"/>
-              </a:rPr>
-              <a:t>只读连接：无法写入</a:t>
-            </a:r>
-          </a:p>
-          <a:p>
-            <a:pPr algn="l">
-              <a:spcAft>
-                <a:spcPts val="800"/>
-              </a:spcAft>
-            </a:pPr>
-            <a:r>
-              <a:rPr sz="1300" b="0">
-                <a:solidFill>
-                  <a:srgbClr val="F0EEE8"/>
-                </a:solidFill>
-                <a:latin typeface="Arial"/>
-                <a:ea typeface="Microsoft YaHei"/>
-              </a:rPr>
-              <a:t/>
-            </a:r>
-          </a:p>
-          <a:p>
-            <a:pPr algn="l">
-              <a:spcAft>
-                <a:spcPts val="800"/>
-              </a:spcAft>
-            </a:pPr>
-            <a:r>
-              <a:rPr sz="1300" b="1">
-                <a:solidFill>
-                  <a:srgbClr val="D4A853"/>
-                </a:solidFill>
-                <a:latin typeface="Arial"/>
-                <a:ea typeface="Microsoft YaHei"/>
-              </a:rPr>
-              <a:t>三重防护</a:t>
-            </a:r>
-          </a:p>
-          <a:p>
-            <a:pPr algn="l">
-              <a:spcAft>
-                <a:spcPts val="800"/>
-              </a:spcAft>
-            </a:pPr>
-            <a:r>
-              <a:rPr sz="1300" b="1">
-                <a:solidFill>
-                  <a:srgbClr val="4CAF50"/>
-                </a:solidFill>
-                <a:latin typeface="Arial"/>
-                <a:ea typeface="Microsoft YaHei"/>
-              </a:rPr>
-              <a:t>即使绕过前两层也无法破坏数据</a:t>
+              <a:t>Olist Brazilian E-Commerce Public Dataset · Kaggle 最受欢迎电商数据集之一</a:t>
             </a:r>
           </a:p>
         </p:txBody>
@@ -7038,237 +6027,21 @@
                 <a:latin typeface="Arial"/>
                 <a:ea typeface="Microsoft YaHei"/>
               </a:rPr>
-              <a:t>在真实数据上验证</a:t>
-            </a:r>
-          </a:p>
-        </p:txBody>
-      </p:sp>
-      <p:sp>
-        <p:nvSpPr>
-          <p:cNvPr id="3" name="TextBox 2"/>
-          <p:cNvSpPr txBox="1"/>
-          <p:nvPr/>
-        </p:nvSpPr>
-        <p:spPr>
-          <a:xfrm>
-            <a:off x="914400" y="1645920"/>
-            <a:ext cx="2743200" cy="731520"/>
-          </a:xfrm>
-          <a:prstGeom prst="rect">
-            <a:avLst/>
-          </a:prstGeom>
-          <a:noFill/>
-        </p:spPr>
-        <p:txBody>
-          <a:bodyPr wrap="square">
-            <a:spAutoFit/>
-          </a:bodyPr>
-          <a:lstStyle/>
-          <a:p>
-            <a:pPr algn="l"/>
-            <a:r>
-              <a:rPr sz="4800" b="1">
-                <a:solidFill>
-                  <a:srgbClr val="D4A853"/>
-                </a:solidFill>
-                <a:latin typeface="Arial"/>
-                <a:ea typeface="Microsoft YaHei"/>
-              </a:rPr>
-              <a:t>10,000</a:t>
-            </a:r>
-          </a:p>
-        </p:txBody>
-      </p:sp>
-      <p:sp>
-        <p:nvSpPr>
-          <p:cNvPr id="4" name="TextBox 3"/>
-          <p:cNvSpPr txBox="1"/>
-          <p:nvPr/>
-        </p:nvSpPr>
-        <p:spPr>
-          <a:xfrm>
-            <a:off x="914400" y="2468880"/>
-            <a:ext cx="2743200" cy="365760"/>
-          </a:xfrm>
-          <a:prstGeom prst="rect">
-            <a:avLst/>
-          </a:prstGeom>
-          <a:noFill/>
-        </p:spPr>
-        <p:txBody>
-          <a:bodyPr wrap="square">
-            <a:spAutoFit/>
-          </a:bodyPr>
-          <a:lstStyle/>
-          <a:p>
-            <a:pPr algn="l"/>
-            <a:r>
-              <a:rPr sz="1500" b="0">
-                <a:solidFill>
-                  <a:srgbClr val="9A9A9A"/>
-                </a:solidFill>
-                <a:latin typeface="Arial"/>
-                <a:ea typeface="Microsoft YaHei"/>
-              </a:rPr>
-              <a:t>真实订单</a:t>
-            </a:r>
-          </a:p>
-        </p:txBody>
-      </p:sp>
-      <p:sp>
-        <p:nvSpPr>
-          <p:cNvPr id="5" name="TextBox 4"/>
-          <p:cNvSpPr txBox="1"/>
-          <p:nvPr/>
-        </p:nvSpPr>
-        <p:spPr>
-          <a:xfrm>
-            <a:off x="4114800" y="1645920"/>
-            <a:ext cx="2743200" cy="731520"/>
-          </a:xfrm>
-          <a:prstGeom prst="rect">
-            <a:avLst/>
-          </a:prstGeom>
-          <a:noFill/>
-        </p:spPr>
-        <p:txBody>
-          <a:bodyPr wrap="square">
-            <a:spAutoFit/>
-          </a:bodyPr>
-          <a:lstStyle/>
-          <a:p>
-            <a:pPr algn="l"/>
-            <a:r>
-              <a:rPr sz="4800" b="1">
-                <a:solidFill>
-                  <a:srgbClr val="D4A853"/>
-                </a:solidFill>
-                <a:latin typeface="Arial"/>
-                <a:ea typeface="Microsoft YaHei"/>
-              </a:rPr>
-              <a:t>8</a:t>
-            </a:r>
-          </a:p>
-        </p:txBody>
-      </p:sp>
-      <p:sp>
-        <p:nvSpPr>
-          <p:cNvPr id="6" name="TextBox 5"/>
-          <p:cNvSpPr txBox="1"/>
-          <p:nvPr/>
-        </p:nvSpPr>
-        <p:spPr>
-          <a:xfrm>
-            <a:off x="4114800" y="2468880"/>
-            <a:ext cx="2743200" cy="365760"/>
-          </a:xfrm>
-          <a:prstGeom prst="rect">
-            <a:avLst/>
-          </a:prstGeom>
-          <a:noFill/>
-        </p:spPr>
-        <p:txBody>
-          <a:bodyPr wrap="square">
-            <a:spAutoFit/>
-          </a:bodyPr>
-          <a:lstStyle/>
-          <a:p>
-            <a:pPr algn="l"/>
-            <a:r>
-              <a:rPr sz="1500" b="0">
-                <a:solidFill>
-                  <a:srgbClr val="9A9A9A"/>
-                </a:solidFill>
-                <a:latin typeface="Arial"/>
-                <a:ea typeface="Microsoft YaHei"/>
-              </a:rPr>
-              <a:t>地区覆盖</a:t>
-            </a:r>
-          </a:p>
-        </p:txBody>
-      </p:sp>
-      <p:sp>
-        <p:nvSpPr>
-          <p:cNvPr id="7" name="TextBox 6"/>
-          <p:cNvSpPr txBox="1"/>
-          <p:nvPr/>
-        </p:nvSpPr>
-        <p:spPr>
-          <a:xfrm>
-            <a:off x="7315200" y="1645920"/>
-            <a:ext cx="2743200" cy="731520"/>
-          </a:xfrm>
-          <a:prstGeom prst="rect">
-            <a:avLst/>
-          </a:prstGeom>
-          <a:noFill/>
-        </p:spPr>
-        <p:txBody>
-          <a:bodyPr wrap="square">
-            <a:spAutoFit/>
-          </a:bodyPr>
-          <a:lstStyle/>
-          <a:p>
-            <a:pPr algn="l"/>
-            <a:r>
-              <a:rPr sz="4800" b="1">
-                <a:solidFill>
-                  <a:srgbClr val="D4A853"/>
-                </a:solidFill>
-                <a:latin typeface="Arial"/>
-                <a:ea typeface="Microsoft YaHei"/>
-              </a:rPr>
-              <a:t>20</a:t>
-            </a:r>
-          </a:p>
-        </p:txBody>
-      </p:sp>
-      <p:sp>
-        <p:nvSpPr>
-          <p:cNvPr id="8" name="TextBox 7"/>
-          <p:cNvSpPr txBox="1"/>
-          <p:nvPr/>
-        </p:nvSpPr>
-        <p:spPr>
-          <a:xfrm>
-            <a:off x="7315200" y="2468880"/>
-            <a:ext cx="2743200" cy="365760"/>
-          </a:xfrm>
-          <a:prstGeom prst="rect">
-            <a:avLst/>
-          </a:prstGeom>
-          <a:noFill/>
-        </p:spPr>
-        <p:txBody>
-          <a:bodyPr wrap="square">
-            <a:spAutoFit/>
-          </a:bodyPr>
-          <a:lstStyle/>
-          <a:p>
-            <a:pPr algn="l"/>
-            <a:r>
-              <a:rPr sz="1500" b="0">
-                <a:solidFill>
-                  <a:srgbClr val="9A9A9A"/>
-                </a:solidFill>
-                <a:latin typeface="Arial"/>
-                <a:ea typeface="Microsoft YaHei"/>
-              </a:rPr>
-              <a:t>商品品类</a:t>
-            </a:r>
-          </a:p>
-        </p:txBody>
-      </p:sp>
-      <p:sp>
-        <p:nvSpPr>
-          <p:cNvPr id="9" name="Rounded Rectangle 8"/>
+              <a:t>三层架构：从 Demo 到企业级产品</a:t>
+            </a:r>
+          </a:p>
+        </p:txBody>
+      </p:sp>
+      <p:sp>
+        <p:nvSpPr>
+          <p:cNvPr id="3" name="Rounded Rectangle 2"/>
           <p:cNvSpPr/>
           <p:nvPr/>
         </p:nvSpPr>
         <p:spPr>
           <a:xfrm>
-            <a:off x="914400" y="3474720"/>
-            <a:ext cx="5029200" cy="2286000"/>
+            <a:off x="914400" y="1645920"/>
+            <a:ext cx="3383280" cy="4114800"/>
           </a:xfrm>
           <a:prstGeom prst="roundRect">
             <a:avLst/>
@@ -7304,20 +6077,95 @@
       </p:sp>
       <p:sp>
         <p:nvSpPr>
-          <p:cNvPr id="10" name="Rectangle 9"/>
+          <p:cNvPr id="4" name="TextBox 3"/>
+          <p:cNvSpPr txBox="1"/>
+          <p:nvPr/>
+        </p:nvSpPr>
+        <p:spPr>
+          <a:xfrm>
+            <a:off x="1188720" y="1828800"/>
+            <a:ext cx="2834640" cy="365760"/>
+          </a:xfrm>
+          <a:prstGeom prst="rect">
+            <a:avLst/>
+          </a:prstGeom>
+          <a:noFill/>
+        </p:spPr>
+        <p:txBody>
+          <a:bodyPr wrap="square">
+            <a:spAutoFit/>
+          </a:bodyPr>
+          <a:lstStyle/>
+          <a:p>
+            <a:pPr algn="l"/>
+            <a:r>
+              <a:rPr sz="1600" b="1">
+                <a:solidFill>
+                  <a:srgbClr val="D4A853"/>
+                </a:solidFill>
+                <a:latin typeface="Arial"/>
+                <a:ea typeface="Microsoft YaHei"/>
+              </a:rPr>
+              <a:t>受控语义层</a:t>
+            </a:r>
+          </a:p>
+        </p:txBody>
+      </p:sp>
+      <p:sp>
+        <p:nvSpPr>
+          <p:cNvPr id="5" name="TextBox 4"/>
+          <p:cNvSpPr txBox="1"/>
+          <p:nvPr/>
+        </p:nvSpPr>
+        <p:spPr>
+          <a:xfrm>
+            <a:off x="1188720" y="2286000"/>
+            <a:ext cx="2834640" cy="3200400"/>
+          </a:xfrm>
+          <a:prstGeom prst="rect">
+            <a:avLst/>
+          </a:prstGeom>
+          <a:noFill/>
+        </p:spPr>
+        <p:txBody>
+          <a:bodyPr wrap="square">
+            <a:spAutoFit/>
+          </a:bodyPr>
+          <a:lstStyle/>
+          <a:p>
+            <a:pPr algn="l"/>
+            <a:r>
+              <a:rPr sz="1400" b="0">
+                <a:solidFill>
+                  <a:srgbClr val="F0EEE8"/>
+                </a:solidFill>
+                <a:latin typeface="Arial"/>
+                <a:ea typeface="Microsoft YaHei"/>
+              </a:rPr>
+              <a:t>业务语言 → 指标定义 → SQL
+不靠 LLM 猜表名
+分析师定义一次，全公司复用
+防止口径不一致</a:t>
+            </a:r>
+          </a:p>
+        </p:txBody>
+      </p:sp>
+      <p:sp>
+        <p:nvSpPr>
+          <p:cNvPr id="6" name="Rounded Rectangle 5"/>
           <p:cNvSpPr/>
           <p:nvPr/>
         </p:nvSpPr>
         <p:spPr>
           <a:xfrm>
-            <a:off x="914400" y="3520440"/>
-            <a:ext cx="50800" cy="2194560"/>
-          </a:xfrm>
-          <a:prstGeom prst="rect">
+            <a:off x="4480560" y="1645920"/>
+            <a:ext cx="3383280" cy="4114800"/>
+          </a:xfrm>
+          <a:prstGeom prst="roundRect">
             <a:avLst/>
           </a:prstGeom>
           <a:solidFill>
-            <a:srgbClr val="D4A853"/>
+            <a:srgbClr val="2A2F3E"/>
           </a:solidFill>
           <a:ln>
             <a:noFill/>
@@ -7347,14 +6195,14 @@
       </p:sp>
       <p:sp>
         <p:nvSpPr>
-          <p:cNvPr id="11" name="TextBox 10"/>
+          <p:cNvPr id="7" name="TextBox 6"/>
           <p:cNvSpPr txBox="1"/>
           <p:nvPr/>
         </p:nvSpPr>
         <p:spPr>
           <a:xfrm>
-            <a:off x="1188720" y="3611880"/>
-            <a:ext cx="4480560" cy="320040"/>
+            <a:off x="4754880" y="1828800"/>
+            <a:ext cx="2834640" cy="365760"/>
           </a:xfrm>
           <a:prstGeom prst="rect">
             <a:avLst/>
@@ -7376,21 +6224,21 @@
                 <a:latin typeface="Arial"/>
                 <a:ea typeface="Microsoft YaHei"/>
               </a:rPr>
-              <a:t>查询能力</a:t>
-            </a:r>
-          </a:p>
-        </p:txBody>
-      </p:sp>
-      <p:sp>
-        <p:nvSpPr>
-          <p:cNvPr id="12" name="TextBox 11"/>
+              <a:t>验证式 Agent 循环</a:t>
+            </a:r>
+          </a:p>
+        </p:txBody>
+      </p:sp>
+      <p:sp>
+        <p:nvSpPr>
+          <p:cNvPr id="8" name="TextBox 7"/>
           <p:cNvSpPr txBox="1"/>
           <p:nvPr/>
         </p:nvSpPr>
         <p:spPr>
           <a:xfrm>
-            <a:off x="1188720" y="3977640"/>
-            <a:ext cx="4480560" cy="1645920"/>
+            <a:off x="4754880" y="2286000"/>
+            <a:ext cx="2834640" cy="3200400"/>
           </a:xfrm>
           <a:prstGeom prst="rect">
             <a:avLst/>
@@ -7403,85 +6251,33 @@
           </a:bodyPr>
           <a:lstStyle/>
           <a:p>
-            <a:pPr algn="l">
-              <a:spcAft>
-                <a:spcPts val="800"/>
-              </a:spcAft>
-            </a:pPr>
-            <a:r>
-              <a:rPr sz="1300" b="0">
+            <a:pPr algn="l"/>
+            <a:r>
+              <a:rPr sz="1400" b="0">
                 <a:solidFill>
                   <a:srgbClr val="F0EEE8"/>
                 </a:solidFill>
                 <a:latin typeface="Arial"/>
                 <a:ea typeface="Microsoft YaHei"/>
               </a:rPr>
-              <a:t>覆盖 8 个核心经营指标</a:t>
-            </a:r>
-          </a:p>
-          <a:p>
-            <a:pPr algn="l">
-              <a:spcAft>
-                <a:spcPts val="800"/>
-              </a:spcAft>
-            </a:pPr>
-            <a:r>
-              <a:rPr sz="1300" b="0">
-                <a:solidFill>
-                  <a:srgbClr val="F0EEE8"/>
-                </a:solidFill>
-                <a:latin typeface="Arial"/>
-                <a:ea typeface="Microsoft YaHei"/>
-              </a:rPr>
-              <a:t>支持跨地区、跨品类、跨时间对比</a:t>
-            </a:r>
-          </a:p>
-          <a:p>
-            <a:pPr algn="l">
-              <a:spcAft>
-                <a:spcPts val="800"/>
-              </a:spcAft>
-            </a:pPr>
-            <a:r>
-              <a:rPr sz="1300" b="0">
-                <a:solidFill>
-                  <a:srgbClr val="F0EEE8"/>
-                </a:solidFill>
-                <a:latin typeface="Arial"/>
-                <a:ea typeface="Microsoft YaHei"/>
-              </a:rPr>
-              <a:t>异常检测与趋势分析</a:t>
-            </a:r>
-          </a:p>
-          <a:p>
-            <a:pPr algn="l">
-              <a:spcAft>
-                <a:spcPts val="800"/>
-              </a:spcAft>
-            </a:pPr>
-            <a:r>
-              <a:rPr sz="1300" b="1">
-                <a:solidFill>
-                  <a:srgbClr val="D4A853"/>
-                </a:solidFill>
-                <a:latin typeface="Arial"/>
-                <a:ea typeface="Microsoft YaHei"/>
-              </a:rPr>
-              <a:t>自动选择最佳图表类型</a:t>
-            </a:r>
-          </a:p>
-        </p:txBody>
-      </p:sp>
-      <p:sp>
-        <p:nvSpPr>
-          <p:cNvPr id="13" name="Rounded Rectangle 12"/>
+              <a:t>生成 SQL → AST 验证 → 只读执行
+→ 结果分析 → 可视化
+自纠正：出错自动修正重试
+Kimi 是推理层，不是权威</a:t>
+            </a:r>
+          </a:p>
+        </p:txBody>
+      </p:sp>
+      <p:sp>
+        <p:nvSpPr>
+          <p:cNvPr id="9" name="Rounded Rectangle 8"/>
           <p:cNvSpPr/>
           <p:nvPr/>
         </p:nvSpPr>
         <p:spPr>
           <a:xfrm>
-            <a:off x="6400800" y="3474720"/>
-            <a:ext cx="4754880" cy="2286000"/>
+            <a:off x="8138160" y="1645920"/>
+            <a:ext cx="3383280" cy="4114800"/>
           </a:xfrm>
           <a:prstGeom prst="roundRect">
             <a:avLst/>
@@ -7517,57 +6313,14 @@
       </p:sp>
       <p:sp>
         <p:nvSpPr>
-          <p:cNvPr id="14" name="Rectangle 13"/>
-          <p:cNvSpPr/>
-          <p:nvPr/>
-        </p:nvSpPr>
-        <p:spPr>
-          <a:xfrm>
-            <a:off x="6400800" y="3520440"/>
-            <a:ext cx="50800" cy="2194560"/>
-          </a:xfrm>
-          <a:prstGeom prst="rect">
-            <a:avLst/>
-          </a:prstGeom>
-          <a:solidFill>
-            <a:srgbClr val="4CAF50"/>
-          </a:solidFill>
-          <a:ln>
-            <a:noFill/>
-          </a:ln>
-        </p:spPr>
-        <p:style>
-          <a:lnRef idx="1">
-            <a:schemeClr val="accent1"/>
-          </a:lnRef>
-          <a:fillRef idx="3">
-            <a:schemeClr val="accent1"/>
-          </a:fillRef>
-          <a:effectRef idx="2">
-            <a:schemeClr val="accent1"/>
-          </a:effectRef>
-          <a:fontRef idx="minor">
-            <a:schemeClr val="lt1"/>
-          </a:fontRef>
-        </p:style>
-        <p:txBody>
-          <a:bodyPr rtlCol="0" anchor="ctr"/>
-          <a:lstStyle/>
-          <a:p>
-            <a:pPr algn="ctr"/>
-          </a:p>
-        </p:txBody>
-      </p:sp>
-      <p:sp>
-        <p:nvSpPr>
-          <p:cNvPr id="15" name="TextBox 14"/>
+          <p:cNvPr id="10" name="TextBox 9"/>
           <p:cNvSpPr txBox="1"/>
           <p:nvPr/>
         </p:nvSpPr>
         <p:spPr>
           <a:xfrm>
-            <a:off x="6675120" y="3611880"/>
-            <a:ext cx="4206240" cy="320040"/>
+            <a:off x="8412480" y="1828800"/>
+            <a:ext cx="2834640" cy="365760"/>
           </a:xfrm>
           <a:prstGeom prst="rect">
             <a:avLst/>
@@ -7584,26 +6337,26 @@
             <a:r>
               <a:rPr sz="1600" b="1">
                 <a:solidFill>
-                  <a:srgbClr val="4CAF50"/>
+                  <a:srgbClr val="D4A853"/>
                 </a:solidFill>
                 <a:latin typeface="Arial"/>
                 <a:ea typeface="Microsoft YaHei"/>
               </a:rPr>
-              <a:t>4 个预设 Demo 查询</a:t>
-            </a:r>
-          </a:p>
-        </p:txBody>
-      </p:sp>
-      <p:sp>
-        <p:nvSpPr>
-          <p:cNvPr id="16" name="TextBox 15"/>
+              <a:t>企业数据平面</a:t>
+            </a:r>
+          </a:p>
+        </p:txBody>
+      </p:sp>
+      <p:sp>
+        <p:nvSpPr>
+          <p:cNvPr id="11" name="TextBox 10"/>
           <p:cNvSpPr txBox="1"/>
           <p:nvPr/>
         </p:nvSpPr>
         <p:spPr>
           <a:xfrm>
-            <a:off x="6675120" y="3977640"/>
-            <a:ext cx="4206240" cy="1645920"/>
+            <a:off x="8412480" y="2286000"/>
+            <a:ext cx="2834640" cy="3200400"/>
           </a:xfrm>
           <a:prstGeom prst="rect">
             <a:avLst/>
@@ -7616,107 +6369,55 @@
           </a:bodyPr>
           <a:lstStyle/>
           <a:p>
-            <a:pPr algn="l">
-              <a:spcAft>
-                <a:spcPts val="800"/>
-              </a:spcAft>
-            </a:pPr>
-            <a:r>
-              <a:rPr sz="1300" b="0">
-                <a:solidFill>
-                  <a:srgbClr val="9A9A9A"/>
+            <a:pPr algn="l"/>
+            <a:r>
+              <a:rPr sz="1400" b="0">
+                <a:solidFill>
+                  <a:srgbClr val="F0EEE8"/>
                 </a:solidFill>
                 <a:latin typeface="Arial"/>
                 <a:ea typeface="Microsoft YaHei"/>
               </a:rPr>
-              <a:t>「各地区月度销售额趋势」→ 折线图</a:t>
-            </a:r>
-          </a:p>
-          <a:p>
-            <a:pPr algn="l">
-              <a:spcAft>
-                <a:spcPts val="800"/>
-              </a:spcAft>
-            </a:pPr>
-            <a:r>
-              <a:rPr sz="1300" b="0">
+              <a:t>Schema-only 模型暴露
+只读数据库连接
+AST 级 SQL 安全校验
+审计日志 + RBAC 路线图</a:t>
+            </a:r>
+          </a:p>
+        </p:txBody>
+      </p:sp>
+      <p:sp>
+        <p:nvSpPr>
+          <p:cNvPr id="12" name="TextBox 11"/>
+          <p:cNvSpPr txBox="1"/>
+          <p:nvPr/>
+        </p:nvSpPr>
+        <p:spPr>
+          <a:xfrm>
+            <a:off x="914400" y="5943600"/>
+            <a:ext cx="9144000" cy="365760"/>
+          </a:xfrm>
+          <a:prstGeom prst="rect">
+            <a:avLst/>
+          </a:prstGeom>
+          <a:noFill/>
+        </p:spPr>
+        <p:txBody>
+          <a:bodyPr wrap="square">
+            <a:spAutoFit/>
+          </a:bodyPr>
+          <a:lstStyle/>
+          <a:p>
+            <a:pPr algn="l"/>
+            <a:r>
+              <a:rPr sz="1100" b="0">
                 <a:solidFill>
                   <a:srgbClr val="9A9A9A"/>
                 </a:solidFill>
                 <a:latin typeface="Arial"/>
                 <a:ea typeface="Microsoft YaHei"/>
               </a:rPr>
-              <a:t>「哪个品类利润率最高？」→ 柱状图</a:t>
-            </a:r>
-          </a:p>
-          <a:p>
-            <a:pPr algn="l">
-              <a:spcAft>
-                <a:spcPts val="800"/>
-              </a:spcAft>
-            </a:pPr>
-            <a:r>
-              <a:rPr sz="1300" b="0">
-                <a:solidFill>
-                  <a:srgbClr val="9A9A9A"/>
-                </a:solidFill>
-                <a:latin typeface="Arial"/>
-                <a:ea typeface="Microsoft YaHei"/>
-              </a:rPr>
-              <a:t>「Top 10 畅销商品」→ 排名表</a:t>
-            </a:r>
-          </a:p>
-          <a:p>
-            <a:pPr algn="l">
-              <a:spcAft>
-                <a:spcPts val="800"/>
-              </a:spcAft>
-            </a:pPr>
-            <a:r>
-              <a:rPr sz="1300" b="0">
-                <a:solidFill>
-                  <a:srgbClr val="9A9A9A"/>
-                </a:solidFill>
-                <a:latin typeface="Arial"/>
-                <a:ea typeface="Microsoft YaHei"/>
-              </a:rPr>
-              <a:t>「复购率最高的用户」→ 用户画像</a:t>
-            </a:r>
-          </a:p>
-        </p:txBody>
-      </p:sp>
-      <p:sp>
-        <p:nvSpPr>
-          <p:cNvPr id="17" name="TextBox 16"/>
-          <p:cNvSpPr txBox="1"/>
-          <p:nvPr/>
-        </p:nvSpPr>
-        <p:spPr>
-          <a:xfrm>
-            <a:off x="914400" y="6035040"/>
-            <a:ext cx="9144000" cy="274320"/>
-          </a:xfrm>
-          <a:prstGeom prst="rect">
-            <a:avLst/>
-          </a:prstGeom>
-          <a:noFill/>
-        </p:spPr>
-        <p:txBody>
-          <a:bodyPr wrap="square">
-            <a:spAutoFit/>
-          </a:bodyPr>
-          <a:lstStyle/>
-          <a:p>
-            <a:pPr algn="l"/>
-            <a:r>
-              <a:rPr sz="1200" b="0">
-                <a:solidFill>
-                  <a:srgbClr val="9A9A9A"/>
-                </a:solidFill>
-                <a:latin typeface="Arial"/>
-                <a:ea typeface="Microsoft YaHei"/>
-              </a:rPr>
-              <a:t>离线降级：API 不可用时自动使用预缓存结果，Demo 永不卡顿</a:t>
+              <a:t>LLM 不是安全边界 · 策略引擎和执行层才是</a:t>
             </a:r>
           </a:p>
         </p:txBody>
@@ -7778,94 +6479,152 @@
                 <a:latin typeface="Arial"/>
                 <a:ea typeface="Microsoft YaHei"/>
               </a:rPr>
-              <a:t>商业价值</a:t>
-            </a:r>
-          </a:p>
-        </p:txBody>
-      </p:sp>
-      <p:sp>
-        <p:nvSpPr>
-          <p:cNvPr id="3" name="Rounded Rectangle 2"/>
-          <p:cNvSpPr/>
+              <a:t>数据合规设计 — 企业买家最关心的问题</a:t>
+            </a:r>
+          </a:p>
+        </p:txBody>
+      </p:sp>
+      <p:sp>
+        <p:nvSpPr>
+          <p:cNvPr id="3" name="TextBox 2"/>
+          <p:cNvSpPr txBox="1"/>
           <p:nvPr/>
         </p:nvSpPr>
         <p:spPr>
           <a:xfrm>
-            <a:off x="914400" y="1645920"/>
-            <a:ext cx="3383280" cy="4114800"/>
-          </a:xfrm>
-          <a:prstGeom prst="roundRect">
-            <a:avLst/>
-          </a:prstGeom>
-          <a:solidFill>
-            <a:srgbClr val="2A2F3E"/>
-          </a:solidFill>
-          <a:ln>
-            <a:noFill/>
-          </a:ln>
-        </p:spPr>
-        <p:style>
-          <a:lnRef idx="1">
-            <a:schemeClr val="accent1"/>
-          </a:lnRef>
-          <a:fillRef idx="3">
-            <a:schemeClr val="accent1"/>
-          </a:fillRef>
-          <a:effectRef idx="2">
-            <a:schemeClr val="accent1"/>
-          </a:effectRef>
-          <a:fontRef idx="minor">
-            <a:schemeClr val="lt1"/>
-          </a:fontRef>
-        </p:style>
-        <p:txBody>
-          <a:bodyPr rtlCol="0" anchor="ctr"/>
-          <a:lstStyle/>
-          <a:p>
-            <a:pPr algn="ctr"/>
-          </a:p>
-        </p:txBody>
-      </p:sp>
-      <p:sp>
-        <p:nvSpPr>
-          <p:cNvPr id="4" name="Rectangle 3"/>
-          <p:cNvSpPr/>
+            <a:off x="914400" y="1828800"/>
+            <a:ext cx="9144000" cy="2514600"/>
+          </a:xfrm>
+          <a:prstGeom prst="rect">
+            <a:avLst/>
+          </a:prstGeom>
+          <a:noFill/>
+        </p:spPr>
+        <p:txBody>
+          <a:bodyPr wrap="square">
+            <a:spAutoFit/>
+          </a:bodyPr>
+          <a:lstStyle/>
+          <a:p>
+            <a:pPr algn="l">
+              <a:spcAft>
+                <a:spcPts val="1400"/>
+              </a:spcAft>
+            </a:pPr>
+            <a:r>
+              <a:rPr sz="1500">
+                <a:solidFill>
+                  <a:srgbClr val="F0EEE8"/>
+                </a:solidFill>
+                <a:latin typeface="Arial"/>
+                <a:ea typeface="Microsoft YaHei"/>
+              </a:rPr>
+              <a:t>  —  Schema-only 模型暴露：LLM 只看到表名和列名，永远不接触原始数据</a:t>
+            </a:r>
+          </a:p>
+          <a:p>
+            <a:pPr algn="l">
+              <a:spcAft>
+                <a:spcPts val="1400"/>
+              </a:spcAft>
+            </a:pPr>
+            <a:r>
+              <a:rPr sz="1500">
+                <a:solidFill>
+                  <a:srgbClr val="F0EEE8"/>
+                </a:solidFill>
+                <a:latin typeface="Arial"/>
+                <a:ea typeface="Microsoft YaHei"/>
+              </a:rPr>
+              <a:t>  —  AST 级 SQL 验证：用 node-sql-parser 解析 SQL 语法树，只允许 SELECT 查询</a:t>
+            </a:r>
+          </a:p>
+          <a:p>
+            <a:pPr algn="l">
+              <a:spcAft>
+                <a:spcPts val="1400"/>
+              </a:spcAft>
+            </a:pPr>
+            <a:r>
+              <a:rPr sz="1500">
+                <a:solidFill>
+                  <a:srgbClr val="F0EEE8"/>
+                </a:solidFill>
+                <a:latin typeface="Arial"/>
+                <a:ea typeface="Microsoft YaHei"/>
+              </a:rPr>
+              <a:t>  —  只读数据库连接：数据库层面配置 readonly 模式，即使代码有漏洞也无法写入</a:t>
+            </a:r>
+          </a:p>
+          <a:p>
+            <a:pPr algn="l">
+              <a:spcAft>
+                <a:spcPts val="1400"/>
+              </a:spcAft>
+            </a:pPr>
+            <a:r>
+              <a:rPr sz="1500">
+                <a:solidFill>
+                  <a:srgbClr val="F0EEE8"/>
+                </a:solidFill>
+                <a:latin typeface="Arial"/>
+                <a:ea typeface="Microsoft YaHei"/>
+              </a:rPr>
+              <a:t>  —  自动 LIMIT 注入：LLM 忘记加 LIMIT 时自动补全，防止全表扫描</a:t>
+            </a:r>
+          </a:p>
+          <a:p>
+            <a:pPr algn="l">
+              <a:spcAft>
+                <a:spcPts val="1400"/>
+              </a:spcAft>
+            </a:pPr>
+            <a:r>
+              <a:rPr sz="1500">
+                <a:solidFill>
+                  <a:srgbClr val="F0EEE8"/>
+                </a:solidFill>
+                <a:latin typeface="Arial"/>
+                <a:ea typeface="Microsoft YaHei"/>
+              </a:rPr>
+              <a:t>  —  生产路线图：行级安全（RLS）、PII 脱敏、审计日志、SSO/SAML</a:t>
+            </a:r>
+          </a:p>
+        </p:txBody>
+      </p:sp>
+      <p:sp>
+        <p:nvSpPr>
+          <p:cNvPr id="4" name="TextBox 3"/>
+          <p:cNvSpPr txBox="1"/>
           <p:nvPr/>
         </p:nvSpPr>
         <p:spPr>
           <a:xfrm>
-            <a:off x="914400" y="1691640"/>
-            <a:ext cx="50800" cy="4023360"/>
+            <a:off x="914400" y="4754880"/>
+            <a:ext cx="9144000" cy="457200"/>
           </a:xfrm>
           <a:prstGeom prst="rect">
             <a:avLst/>
           </a:prstGeom>
-          <a:solidFill>
-            <a:srgbClr val="D4A853"/>
-          </a:solidFill>
-          <a:ln>
-            <a:noFill/>
-          </a:ln>
-        </p:spPr>
-        <p:style>
-          <a:lnRef idx="1">
-            <a:schemeClr val="accent1"/>
-          </a:lnRef>
-          <a:fillRef idx="3">
-            <a:schemeClr val="accent1"/>
-          </a:fillRef>
-          <a:effectRef idx="2">
-            <a:schemeClr val="accent1"/>
-          </a:effectRef>
-          <a:fontRef idx="minor">
-            <a:schemeClr val="lt1"/>
-          </a:fontRef>
-        </p:style>
-        <p:txBody>
-          <a:bodyPr rtlCol="0" anchor="ctr"/>
-          <a:lstStyle/>
-          <a:p>
-            <a:pPr algn="ctr"/>
+          <a:noFill/>
+        </p:spPr>
+        <p:txBody>
+          <a:bodyPr wrap="square">
+            <a:spAutoFit/>
+          </a:bodyPr>
+          <a:lstStyle/>
+          <a:p>
+            <a:pPr algn="l"/>
+            <a:r>
+              <a:rPr sz="1300" b="0">
+                <a:solidFill>
+                  <a:srgbClr val="D4A853"/>
+                </a:solidFill>
+                <a:latin typeface="Arial"/>
+                <a:ea typeface="Microsoft YaHei"/>
+              </a:rPr>
+              <a:t>同样的架构模式：Snowflake Cortex、Databricks AI/BI 都采用'Schema-only + 只读执行'方案</a:t>
+            </a:r>
           </a:p>
         </p:txBody>
       </p:sp>
@@ -7877,8 +6636,8 @@
         </p:nvSpPr>
         <p:spPr>
           <a:xfrm>
-            <a:off x="1188720" y="1783080"/>
-            <a:ext cx="2834640" cy="320040"/>
+            <a:off x="914400" y="5943600"/>
+            <a:ext cx="9144000" cy="365760"/>
           </a:xfrm>
           <a:prstGeom prst="rect">
             <a:avLst/>
@@ -7893,701 +6652,14 @@
           <a:p>
             <a:pPr algn="l"/>
             <a:r>
-              <a:rPr sz="1600" b="1">
-                <a:solidFill>
-                  <a:srgbClr val="D4A853"/>
+              <a:rPr sz="1100" b="0">
+                <a:solidFill>
+                  <a:srgbClr val="9A9A9A"/>
                 </a:solidFill>
                 <a:latin typeface="Arial"/>
                 <a:ea typeface="Microsoft YaHei"/>
               </a:rPr>
-              <a:t>市场规模</a:t>
-            </a:r>
-          </a:p>
-        </p:txBody>
-      </p:sp>
-      <p:sp>
-        <p:nvSpPr>
-          <p:cNvPr id="6" name="TextBox 5"/>
-          <p:cNvSpPr txBox="1"/>
-          <p:nvPr/>
-        </p:nvSpPr>
-        <p:spPr>
-          <a:xfrm>
-            <a:off x="1188720" y="2148840"/>
-            <a:ext cx="2834640" cy="3474720"/>
-          </a:xfrm>
-          <a:prstGeom prst="rect">
-            <a:avLst/>
-          </a:prstGeom>
-          <a:noFill/>
-        </p:spPr>
-        <p:txBody>
-          <a:bodyPr wrap="square">
-            <a:spAutoFit/>
-          </a:bodyPr>
-          <a:lstStyle/>
-          <a:p>
-            <a:pPr algn="l">
-              <a:spcAft>
-                <a:spcPts val="800"/>
-              </a:spcAft>
-            </a:pPr>
-            <a:r>
-              <a:rPr sz="1300" b="0">
-                <a:solidFill>
-                  <a:srgbClr val="F0EEE8"/>
-                </a:solidFill>
-                <a:latin typeface="Arial"/>
-                <a:ea typeface="Microsoft YaHei"/>
-              </a:rPr>
-              <a:t>中国 50 万+ 数据分析师</a:t>
-            </a:r>
-          </a:p>
-          <a:p>
-            <a:pPr algn="l">
-              <a:spcAft>
-                <a:spcPts val="800"/>
-              </a:spcAft>
-            </a:pPr>
-            <a:r>
-              <a:rPr sz="1300" b="0">
-                <a:solidFill>
-                  <a:srgbClr val="F0EEE8"/>
-                </a:solidFill>
-                <a:latin typeface="Arial"/>
-                <a:ea typeface="Microsoft YaHei"/>
-              </a:rPr>
-              <a:t>每人每周 20+ 小时重复取数</a:t>
-            </a:r>
-          </a:p>
-          <a:p>
-            <a:pPr algn="l">
-              <a:spcAft>
-                <a:spcPts val="800"/>
-              </a:spcAft>
-            </a:pPr>
-            <a:r>
-              <a:rPr sz="1300" b="1">
-                <a:solidFill>
-                  <a:srgbClr val="D4A853"/>
-                </a:solidFill>
-                <a:latin typeface="Arial"/>
-                <a:ea typeface="Microsoft YaHei"/>
-              </a:rPr>
-              <a:t>自助式 BI 市场 CAGR 25%+</a:t>
-            </a:r>
-          </a:p>
-          <a:p>
-            <a:pPr algn="l">
-              <a:spcAft>
-                <a:spcPts val="800"/>
-              </a:spcAft>
-            </a:pPr>
-            <a:r>
-              <a:rPr sz="1300" b="0">
-                <a:solidFill>
-                  <a:srgbClr val="F0EEE8"/>
-                </a:solidFill>
-                <a:latin typeface="Arial"/>
-                <a:ea typeface="Microsoft YaHei"/>
-              </a:rPr>
-              <a:t/>
-            </a:r>
-          </a:p>
-          <a:p>
-            <a:pPr algn="l">
-              <a:spcAft>
-                <a:spcPts val="800"/>
-              </a:spcAft>
-            </a:pPr>
-            <a:r>
-              <a:rPr sz="1300" b="0">
-                <a:solidFill>
-                  <a:srgbClr val="9A9A9A"/>
-                </a:solidFill>
-                <a:latin typeface="Arial"/>
-                <a:ea typeface="Microsoft YaHei"/>
-              </a:rPr>
-              <a:t>目标客户</a:t>
-            </a:r>
-          </a:p>
-          <a:p>
-            <a:pPr algn="l">
-              <a:spcAft>
-                <a:spcPts val="800"/>
-              </a:spcAft>
-            </a:pPr>
-            <a:r>
-              <a:rPr sz="1300" b="0">
-                <a:solidFill>
-                  <a:srgbClr val="F0EEE8"/>
-                </a:solidFill>
-                <a:latin typeface="Arial"/>
-                <a:ea typeface="Microsoft YaHei"/>
-              </a:rPr>
-              <a:t>有数据团队、业务侧频繁提需求的中型企业</a:t>
-            </a:r>
-          </a:p>
-        </p:txBody>
-      </p:sp>
-      <p:sp>
-        <p:nvSpPr>
-          <p:cNvPr id="7" name="Rounded Rectangle 6"/>
-          <p:cNvSpPr/>
-          <p:nvPr/>
-        </p:nvSpPr>
-        <p:spPr>
-          <a:xfrm>
-            <a:off x="4663440" y="1645920"/>
-            <a:ext cx="3383280" cy="4114800"/>
-          </a:xfrm>
-          <a:prstGeom prst="roundRect">
-            <a:avLst/>
-          </a:prstGeom>
-          <a:solidFill>
-            <a:srgbClr val="2A2F3E"/>
-          </a:solidFill>
-          <a:ln>
-            <a:noFill/>
-          </a:ln>
-        </p:spPr>
-        <p:style>
-          <a:lnRef idx="1">
-            <a:schemeClr val="accent1"/>
-          </a:lnRef>
-          <a:fillRef idx="3">
-            <a:schemeClr val="accent1"/>
-          </a:fillRef>
-          <a:effectRef idx="2">
-            <a:schemeClr val="accent1"/>
-          </a:effectRef>
-          <a:fontRef idx="minor">
-            <a:schemeClr val="lt1"/>
-          </a:fontRef>
-        </p:style>
-        <p:txBody>
-          <a:bodyPr rtlCol="0" anchor="ctr"/>
-          <a:lstStyle/>
-          <a:p>
-            <a:pPr algn="ctr"/>
-          </a:p>
-        </p:txBody>
-      </p:sp>
-      <p:sp>
-        <p:nvSpPr>
-          <p:cNvPr id="8" name="Rectangle 7"/>
-          <p:cNvSpPr/>
-          <p:nvPr/>
-        </p:nvSpPr>
-        <p:spPr>
-          <a:xfrm>
-            <a:off x="4663440" y="1691640"/>
-            <a:ext cx="50800" cy="4023360"/>
-          </a:xfrm>
-          <a:prstGeom prst="rect">
-            <a:avLst/>
-          </a:prstGeom>
-          <a:solidFill>
-            <a:srgbClr val="4CAF50"/>
-          </a:solidFill>
-          <a:ln>
-            <a:noFill/>
-          </a:ln>
-        </p:spPr>
-        <p:style>
-          <a:lnRef idx="1">
-            <a:schemeClr val="accent1"/>
-          </a:lnRef>
-          <a:fillRef idx="3">
-            <a:schemeClr val="accent1"/>
-          </a:fillRef>
-          <a:effectRef idx="2">
-            <a:schemeClr val="accent1"/>
-          </a:effectRef>
-          <a:fontRef idx="minor">
-            <a:schemeClr val="lt1"/>
-          </a:fontRef>
-        </p:style>
-        <p:txBody>
-          <a:bodyPr rtlCol="0" anchor="ctr"/>
-          <a:lstStyle/>
-          <a:p>
-            <a:pPr algn="ctr"/>
-          </a:p>
-        </p:txBody>
-      </p:sp>
-      <p:sp>
-        <p:nvSpPr>
-          <p:cNvPr id="9" name="TextBox 8"/>
-          <p:cNvSpPr txBox="1"/>
-          <p:nvPr/>
-        </p:nvSpPr>
-        <p:spPr>
-          <a:xfrm>
-            <a:off x="4937760" y="1783080"/>
-            <a:ext cx="2834640" cy="320040"/>
-          </a:xfrm>
-          <a:prstGeom prst="rect">
-            <a:avLst/>
-          </a:prstGeom>
-          <a:noFill/>
-        </p:spPr>
-        <p:txBody>
-          <a:bodyPr wrap="square">
-            <a:spAutoFit/>
-          </a:bodyPr>
-          <a:lstStyle/>
-          <a:p>
-            <a:pPr algn="l"/>
-            <a:r>
-              <a:rPr sz="1600" b="1">
-                <a:solidFill>
-                  <a:srgbClr val="4CAF50"/>
-                </a:solidFill>
-                <a:latin typeface="Arial"/>
-                <a:ea typeface="Microsoft YaHei"/>
-              </a:rPr>
-              <a:t>商业模式</a:t>
-            </a:r>
-          </a:p>
-        </p:txBody>
-      </p:sp>
-      <p:sp>
-        <p:nvSpPr>
-          <p:cNvPr id="10" name="TextBox 9"/>
-          <p:cNvSpPr txBox="1"/>
-          <p:nvPr/>
-        </p:nvSpPr>
-        <p:spPr>
-          <a:xfrm>
-            <a:off x="4937760" y="2148840"/>
-            <a:ext cx="2834640" cy="3474720"/>
-          </a:xfrm>
-          <a:prstGeom prst="rect">
-            <a:avLst/>
-          </a:prstGeom>
-          <a:noFill/>
-        </p:spPr>
-        <p:txBody>
-          <a:bodyPr wrap="square">
-            <a:spAutoFit/>
-          </a:bodyPr>
-          <a:lstStyle/>
-          <a:p>
-            <a:pPr algn="l">
-              <a:spcAft>
-                <a:spcPts val="800"/>
-              </a:spcAft>
-            </a:pPr>
-            <a:r>
-              <a:rPr sz="1300" b="0">
-                <a:solidFill>
-                  <a:srgbClr val="F0EEE8"/>
-                </a:solidFill>
-                <a:latin typeface="Arial"/>
-                <a:ea typeface="Microsoft YaHei"/>
-              </a:rPr>
-              <a:t>分析师注册试用</a:t>
-            </a:r>
-          </a:p>
-          <a:p>
-            <a:pPr algn="l">
-              <a:spcAft>
-                <a:spcPts val="800"/>
-              </a:spcAft>
-            </a:pPr>
-            <a:r>
-              <a:rPr sz="1300" b="0">
-                <a:solidFill>
-                  <a:srgbClr val="9A9A9A"/>
-                </a:solidFill>
-                <a:latin typeface="Arial"/>
-                <a:ea typeface="Microsoft YaHei"/>
-              </a:rPr>
-              <a:t>  ↓</a:t>
-            </a:r>
-          </a:p>
-          <a:p>
-            <a:pPr algn="l">
-              <a:spcAft>
-                <a:spcPts val="800"/>
-              </a:spcAft>
-            </a:pPr>
-            <a:r>
-              <a:rPr sz="1300" b="0">
-                <a:solidFill>
-                  <a:srgbClr val="F0EEE8"/>
-                </a:solidFill>
-                <a:latin typeface="Arial"/>
-                <a:ea typeface="Microsoft YaHei"/>
-              </a:rPr>
-              <a:t>团队日常使用</a:t>
-            </a:r>
-          </a:p>
-          <a:p>
-            <a:pPr algn="l">
-              <a:spcAft>
-                <a:spcPts val="800"/>
-              </a:spcAft>
-            </a:pPr>
-            <a:r>
-              <a:rPr sz="1300" b="0">
-                <a:solidFill>
-                  <a:srgbClr val="9A9A9A"/>
-                </a:solidFill>
-                <a:latin typeface="Arial"/>
-                <a:ea typeface="Microsoft YaHei"/>
-              </a:rPr>
-              <a:t>  ↓</a:t>
-            </a:r>
-          </a:p>
-          <a:p>
-            <a:pPr algn="l">
-              <a:spcAft>
-                <a:spcPts val="800"/>
-              </a:spcAft>
-            </a:pPr>
-            <a:r>
-              <a:rPr sz="1300" b="1">
-                <a:solidFill>
-                  <a:srgbClr val="D4A853"/>
-                </a:solidFill>
-                <a:latin typeface="Arial"/>
-                <a:ea typeface="Microsoft YaHei"/>
-              </a:rPr>
-              <a:t>企业级采购</a:t>
-            </a:r>
-          </a:p>
-          <a:p>
-            <a:pPr algn="l">
-              <a:spcAft>
-                <a:spcPts val="800"/>
-              </a:spcAft>
-            </a:pPr>
-            <a:r>
-              <a:rPr sz="1300" b="0">
-                <a:solidFill>
-                  <a:srgbClr val="F0EEE8"/>
-                </a:solidFill>
-                <a:latin typeface="Arial"/>
-                <a:ea typeface="Microsoft YaHei"/>
-              </a:rPr>
-              <a:t/>
-            </a:r>
-          </a:p>
-          <a:p>
-            <a:pPr algn="l">
-              <a:spcAft>
-                <a:spcPts val="800"/>
-              </a:spcAft>
-            </a:pPr>
-            <a:r>
-              <a:rPr sz="1300" b="1">
-                <a:solidFill>
-                  <a:srgbClr val="4CAF50"/>
-                </a:solidFill>
-                <a:latin typeface="Arial"/>
-                <a:ea typeface="Microsoft YaHei"/>
-              </a:rPr>
-              <a:t>指标一旦定义，迁移成本高</a:t>
-            </a:r>
-          </a:p>
-          <a:p>
-            <a:pPr algn="l">
-              <a:spcAft>
-                <a:spcPts val="800"/>
-              </a:spcAft>
-            </a:pPr>
-            <a:r>
-              <a:rPr sz="1300" b="1">
-                <a:solidFill>
-                  <a:srgbClr val="4CAF50"/>
-                </a:solidFill>
-                <a:latin typeface="Arial"/>
-                <a:ea typeface="Microsoft YaHei"/>
-              </a:rPr>
-              <a:t>自然锁定，留存率高</a:t>
-            </a:r>
-          </a:p>
-        </p:txBody>
-      </p:sp>
-      <p:sp>
-        <p:nvSpPr>
-          <p:cNvPr id="11" name="Rounded Rectangle 10"/>
-          <p:cNvSpPr/>
-          <p:nvPr/>
-        </p:nvSpPr>
-        <p:spPr>
-          <a:xfrm>
-            <a:off x="8412480" y="1645920"/>
-            <a:ext cx="3200400" cy="4114800"/>
-          </a:xfrm>
-          <a:prstGeom prst="roundRect">
-            <a:avLst/>
-          </a:prstGeom>
-          <a:solidFill>
-            <a:srgbClr val="2A2F3E"/>
-          </a:solidFill>
-          <a:ln>
-            <a:noFill/>
-          </a:ln>
-        </p:spPr>
-        <p:style>
-          <a:lnRef idx="1">
-            <a:schemeClr val="accent1"/>
-          </a:lnRef>
-          <a:fillRef idx="3">
-            <a:schemeClr val="accent1"/>
-          </a:fillRef>
-          <a:effectRef idx="2">
-            <a:schemeClr val="accent1"/>
-          </a:effectRef>
-          <a:fontRef idx="minor">
-            <a:schemeClr val="lt1"/>
-          </a:fontRef>
-        </p:style>
-        <p:txBody>
-          <a:bodyPr rtlCol="0" anchor="ctr"/>
-          <a:lstStyle/>
-          <a:p>
-            <a:pPr algn="ctr"/>
-          </a:p>
-        </p:txBody>
-      </p:sp>
-      <p:sp>
-        <p:nvSpPr>
-          <p:cNvPr id="12" name="Rectangle 11"/>
-          <p:cNvSpPr/>
-          <p:nvPr/>
-        </p:nvSpPr>
-        <p:spPr>
-          <a:xfrm>
-            <a:off x="8412480" y="1691640"/>
-            <a:ext cx="50800" cy="4023360"/>
-          </a:xfrm>
-          <a:prstGeom prst="rect">
-            <a:avLst/>
-          </a:prstGeom>
-          <a:solidFill>
-            <a:srgbClr val="4EA8DE"/>
-          </a:solidFill>
-          <a:ln>
-            <a:noFill/>
-          </a:ln>
-        </p:spPr>
-        <p:style>
-          <a:lnRef idx="1">
-            <a:schemeClr val="accent1"/>
-          </a:lnRef>
-          <a:fillRef idx="3">
-            <a:schemeClr val="accent1"/>
-          </a:fillRef>
-          <a:effectRef idx="2">
-            <a:schemeClr val="accent1"/>
-          </a:effectRef>
-          <a:fontRef idx="minor">
-            <a:schemeClr val="lt1"/>
-          </a:fontRef>
-        </p:style>
-        <p:txBody>
-          <a:bodyPr rtlCol="0" anchor="ctr"/>
-          <a:lstStyle/>
-          <a:p>
-            <a:pPr algn="ctr"/>
-          </a:p>
-        </p:txBody>
-      </p:sp>
-      <p:sp>
-        <p:nvSpPr>
-          <p:cNvPr id="13" name="TextBox 12"/>
-          <p:cNvSpPr txBox="1"/>
-          <p:nvPr/>
-        </p:nvSpPr>
-        <p:spPr>
-          <a:xfrm>
-            <a:off x="8686800" y="1783080"/>
-            <a:ext cx="2651760" cy="320040"/>
-          </a:xfrm>
-          <a:prstGeom prst="rect">
-            <a:avLst/>
-          </a:prstGeom>
-          <a:noFill/>
-        </p:spPr>
-        <p:txBody>
-          <a:bodyPr wrap="square">
-            <a:spAutoFit/>
-          </a:bodyPr>
-          <a:lstStyle/>
-          <a:p>
-            <a:pPr algn="l"/>
-            <a:r>
-              <a:rPr sz="1600" b="1">
-                <a:solidFill>
-                  <a:srgbClr val="4EA8DE"/>
-                </a:solidFill>
-                <a:latin typeface="Arial"/>
-                <a:ea typeface="Microsoft YaHei"/>
-              </a:rPr>
-              <a:t>场景价值</a:t>
-            </a:r>
-          </a:p>
-        </p:txBody>
-      </p:sp>
-      <p:sp>
-        <p:nvSpPr>
-          <p:cNvPr id="14" name="TextBox 13"/>
-          <p:cNvSpPr txBox="1"/>
-          <p:nvPr/>
-        </p:nvSpPr>
-        <p:spPr>
-          <a:xfrm>
-            <a:off x="8686800" y="2148840"/>
-            <a:ext cx="2651760" cy="3474720"/>
-          </a:xfrm>
-          <a:prstGeom prst="rect">
-            <a:avLst/>
-          </a:prstGeom>
-          <a:noFill/>
-        </p:spPr>
-        <p:txBody>
-          <a:bodyPr wrap="square">
-            <a:spAutoFit/>
-          </a:bodyPr>
-          <a:lstStyle/>
-          <a:p>
-            <a:pPr algn="l">
-              <a:spcAft>
-                <a:spcPts val="800"/>
-              </a:spcAft>
-            </a:pPr>
-            <a:r>
-              <a:rPr sz="1300" b="1">
-                <a:solidFill>
-                  <a:srgbClr val="4EA8DE"/>
-                </a:solidFill>
-                <a:latin typeface="Arial"/>
-                <a:ea typeface="Microsoft YaHei"/>
-              </a:rPr>
-              <a:t>电商运营</a:t>
-            </a:r>
-          </a:p>
-          <a:p>
-            <a:pPr algn="l">
-              <a:spcAft>
-                <a:spcPts val="800"/>
-              </a:spcAft>
-            </a:pPr>
-            <a:r>
-              <a:rPr sz="1300" b="0">
-                <a:solidFill>
-                  <a:srgbClr val="F0EEE8"/>
-                </a:solidFill>
-                <a:latin typeface="Arial"/>
-                <a:ea typeface="Microsoft YaHei"/>
-              </a:rPr>
-              <a:t>每天看销售、库存、转化</a:t>
-            </a:r>
-          </a:p>
-          <a:p>
-            <a:pPr algn="l">
-              <a:spcAft>
-                <a:spcPts val="800"/>
-              </a:spcAft>
-            </a:pPr>
-            <a:r>
-              <a:rPr sz="1300" b="0">
-                <a:solidFill>
-                  <a:srgbClr val="F0EEE8"/>
-                </a:solidFill>
-                <a:latin typeface="Arial"/>
-                <a:ea typeface="Microsoft YaHei"/>
-              </a:rPr>
-              <a:t/>
-            </a:r>
-          </a:p>
-          <a:p>
-            <a:pPr algn="l">
-              <a:spcAft>
-                <a:spcPts val="800"/>
-              </a:spcAft>
-            </a:pPr>
-            <a:r>
-              <a:rPr sz="1300" b="1">
-                <a:solidFill>
-                  <a:srgbClr val="4EA8DE"/>
-                </a:solidFill>
-                <a:latin typeface="Arial"/>
-                <a:ea typeface="Microsoft YaHei"/>
-              </a:rPr>
-              <a:t>市场团队</a:t>
-            </a:r>
-          </a:p>
-          <a:p>
-            <a:pPr algn="l">
-              <a:spcAft>
-                <a:spcPts val="800"/>
-              </a:spcAft>
-            </a:pPr>
-            <a:r>
-              <a:rPr sz="1300" b="0">
-                <a:solidFill>
-                  <a:srgbClr val="F0EEE8"/>
-                </a:solidFill>
-                <a:latin typeface="Arial"/>
-                <a:ea typeface="Microsoft YaHei"/>
-              </a:rPr>
-              <a:t>活动效果、渠道对比</a:t>
-            </a:r>
-          </a:p>
-          <a:p>
-            <a:pPr algn="l">
-              <a:spcAft>
-                <a:spcPts val="800"/>
-              </a:spcAft>
-            </a:pPr>
-            <a:r>
-              <a:rPr sz="1300" b="0">
-                <a:solidFill>
-                  <a:srgbClr val="F0EEE8"/>
-                </a:solidFill>
-                <a:latin typeface="Arial"/>
-                <a:ea typeface="Microsoft YaHei"/>
-              </a:rPr>
-              <a:t/>
-            </a:r>
-          </a:p>
-          <a:p>
-            <a:pPr algn="l">
-              <a:spcAft>
-                <a:spcPts val="800"/>
-              </a:spcAft>
-            </a:pPr>
-            <a:r>
-              <a:rPr sz="1300" b="1">
-                <a:solidFill>
-                  <a:srgbClr val="4EA8DE"/>
-                </a:solidFill>
-                <a:latin typeface="Arial"/>
-                <a:ea typeface="Microsoft YaHei"/>
-              </a:rPr>
-              <a:t>管理层</a:t>
-            </a:r>
-          </a:p>
-          <a:p>
-            <a:pPr algn="l">
-              <a:spcAft>
-                <a:spcPts val="800"/>
-              </a:spcAft>
-            </a:pPr>
-            <a:r>
-              <a:rPr sz="1300" b="0">
-                <a:solidFill>
-                  <a:srgbClr val="F0EEE8"/>
-                </a:solidFill>
-                <a:latin typeface="Arial"/>
-                <a:ea typeface="Microsoft YaHei"/>
-              </a:rPr>
-              <a:t>经营日报、异常预警</a:t>
+              <a:t>QueryForge 不给 LLM 数据库权限 · AI 生成 SQL，数据库执行查询，策略引擎控制访问</a:t>
             </a:r>
           </a:p>
         </p:txBody>
@@ -8649,7 +6721,7 @@
                 <a:latin typeface="Arial"/>
                 <a:ea typeface="Microsoft YaHei"/>
               </a:rPr>
-              <a:t>典型场景：电商运营</a:t>
+              <a:t>从 Hackathon 到产品的路径</a:t>
             </a:r>
           </a:p>
         </p:txBody>
@@ -8663,7 +6735,7 @@
         <p:spPr>
           <a:xfrm>
             <a:off x="914400" y="1645920"/>
-            <a:ext cx="5029200" cy="4114800"/>
+            <a:ext cx="5029200" cy="1828800"/>
           </a:xfrm>
           <a:prstGeom prst="roundRect">
             <a:avLst/>
@@ -8699,20 +6771,95 @@
       </p:sp>
       <p:sp>
         <p:nvSpPr>
-          <p:cNvPr id="4" name="Rectangle 3"/>
+          <p:cNvPr id="4" name="TextBox 3"/>
+          <p:cNvSpPr txBox="1"/>
+          <p:nvPr/>
+        </p:nvSpPr>
+        <p:spPr>
+          <a:xfrm>
+            <a:off x="1188720" y="1828800"/>
+            <a:ext cx="4480560" cy="365760"/>
+          </a:xfrm>
+          <a:prstGeom prst="rect">
+            <a:avLst/>
+          </a:prstGeom>
+          <a:noFill/>
+        </p:spPr>
+        <p:txBody>
+          <a:bodyPr wrap="square">
+            <a:spAutoFit/>
+          </a:bodyPr>
+          <a:lstStyle/>
+          <a:p>
+            <a:pPr algn="l"/>
+            <a:r>
+              <a:rPr sz="1600" b="1">
+                <a:solidFill>
+                  <a:srgbClr val="D4A853"/>
+                </a:solidFill>
+                <a:latin typeface="Arial"/>
+                <a:ea typeface="Microsoft YaHei"/>
+              </a:rPr>
+              <a:t>Phase 1: 可售 MVP（1-2周）</a:t>
+            </a:r>
+          </a:p>
+        </p:txBody>
+      </p:sp>
+      <p:sp>
+        <p:nvSpPr>
+          <p:cNvPr id="5" name="TextBox 4"/>
+          <p:cNvSpPr txBox="1"/>
+          <p:nvPr/>
+        </p:nvSpPr>
+        <p:spPr>
+          <a:xfrm>
+            <a:off x="1188720" y="2286000"/>
+            <a:ext cx="4480560" cy="914400"/>
+          </a:xfrm>
+          <a:prstGeom prst="rect">
+            <a:avLst/>
+          </a:prstGeom>
+          <a:noFill/>
+        </p:spPr>
+        <p:txBody>
+          <a:bodyPr wrap="square">
+            <a:spAutoFit/>
+          </a:bodyPr>
+          <a:lstStyle/>
+          <a:p>
+            <a:pPr algn="l"/>
+            <a:r>
+              <a:rPr sz="1400" b="0">
+                <a:solidFill>
+                  <a:srgbClr val="F0EEE8"/>
+                </a:solidFill>
+                <a:latin typeface="Arial"/>
+                <a:ea typeface="Microsoft YaHei"/>
+              </a:rPr>
+              <a:t>SQLite → PostgreSQL 迁移
+NextAuth.js 用户认证
+语义层：指标定义 + Join 图
+审计日志 + 基础 RBAC</a:t>
+            </a:r>
+          </a:p>
+        </p:txBody>
+      </p:sp>
+      <p:sp>
+        <p:nvSpPr>
+          <p:cNvPr id="6" name="Rounded Rectangle 5"/>
           <p:cNvSpPr/>
           <p:nvPr/>
         </p:nvSpPr>
         <p:spPr>
           <a:xfrm>
-            <a:off x="914400" y="1691640"/>
-            <a:ext cx="50800" cy="4023360"/>
-          </a:xfrm>
-          <a:prstGeom prst="rect">
+            <a:off x="6217920" y="1645920"/>
+            <a:ext cx="5029200" cy="1828800"/>
+          </a:xfrm>
+          <a:prstGeom prst="roundRect">
             <a:avLst/>
           </a:prstGeom>
           <a:solidFill>
-            <a:srgbClr val="D4A853"/>
+            <a:srgbClr val="2A2F3E"/>
           </a:solidFill>
           <a:ln>
             <a:noFill/>
@@ -8742,14 +6889,14 @@
       </p:sp>
       <p:sp>
         <p:nvSpPr>
-          <p:cNvPr id="5" name="TextBox 4"/>
+          <p:cNvPr id="7" name="TextBox 6"/>
           <p:cNvSpPr txBox="1"/>
           <p:nvPr/>
         </p:nvSpPr>
         <p:spPr>
           <a:xfrm>
-            <a:off x="1188720" y="1783080"/>
-            <a:ext cx="4480560" cy="320040"/>
+            <a:off x="6492240" y="1828800"/>
+            <a:ext cx="4480560" cy="365760"/>
           </a:xfrm>
           <a:prstGeom prst="rect">
             <a:avLst/>
@@ -8771,21 +6918,21 @@
                 <a:latin typeface="Arial"/>
                 <a:ea typeface="Microsoft YaHei"/>
               </a:rPr>
-              <a:t>一个 50 人运营团队的日常</a:t>
-            </a:r>
-          </a:p>
-        </p:txBody>
-      </p:sp>
-      <p:sp>
-        <p:nvSpPr>
-          <p:cNvPr id="6" name="TextBox 5"/>
+              <a:t>Phase 2: 企业试用（1-2月）</a:t>
+            </a:r>
+          </a:p>
+        </p:txBody>
+      </p:sp>
+      <p:sp>
+        <p:nvSpPr>
+          <p:cNvPr id="8" name="TextBox 7"/>
           <p:cNvSpPr txBox="1"/>
           <p:nvPr/>
         </p:nvSpPr>
         <p:spPr>
           <a:xfrm>
-            <a:off x="1188720" y="2148840"/>
-            <a:ext cx="4480560" cy="3474720"/>
+            <a:off x="6492240" y="2286000"/>
+            <a:ext cx="4480560" cy="914400"/>
           </a:xfrm>
           <a:prstGeom prst="rect">
             <a:avLst/>
@@ -8798,153 +6945,33 @@
           </a:bodyPr>
           <a:lstStyle/>
           <a:p>
-            <a:pPr algn="l">
-              <a:spcAft>
-                <a:spcPts val="800"/>
-              </a:spcAft>
-            </a:pPr>
-            <a:r>
-              <a:rPr sz="1300" b="0">
+            <a:pPr algn="l"/>
+            <a:r>
+              <a:rPr sz="1400" b="0">
                 <a:solidFill>
                   <a:srgbClr val="F0EEE8"/>
                 </a:solidFill>
                 <a:latin typeface="Arial"/>
                 <a:ea typeface="Microsoft YaHei"/>
               </a:rPr>
-              <a:t>每天 20 个数据需求找分析师排队</a:t>
-            </a:r>
-          </a:p>
-          <a:p>
-            <a:pPr algn="l">
-              <a:spcAft>
-                <a:spcPts val="800"/>
-              </a:spcAft>
-            </a:pPr>
-            <a:r>
-              <a:rPr sz="1300" b="0">
-                <a:solidFill>
-                  <a:srgbClr val="F0EEE8"/>
-                </a:solidFill>
-                <a:latin typeface="Arial"/>
-                <a:ea typeface="Microsoft YaHei"/>
-              </a:rPr>
-              <a:t/>
-            </a:r>
-          </a:p>
-          <a:p>
-            <a:pPr algn="l">
-              <a:spcAft>
-                <a:spcPts val="800"/>
-              </a:spcAft>
-            </a:pPr>
-            <a:r>
-              <a:rPr sz="1300" b="1">
-                <a:solidFill>
-                  <a:srgbClr val="D4A853"/>
-                </a:solidFill>
-                <a:latin typeface="Arial"/>
-                <a:ea typeface="Microsoft YaHei"/>
-              </a:rPr>
-              <a:t>QueryForge 上线后：</a:t>
-            </a:r>
-          </a:p>
-          <a:p>
-            <a:pPr algn="l">
-              <a:spcAft>
-                <a:spcPts val="800"/>
-              </a:spcAft>
-            </a:pPr>
-            <a:r>
-              <a:rPr sz="1300" b="1">
-                <a:solidFill>
-                  <a:srgbClr val="4CAF50"/>
-                </a:solidFill>
-                <a:latin typeface="Arial"/>
-                <a:ea typeface="Microsoft YaHei"/>
-              </a:rPr>
-              <a:t>80% 需求业务自己解决</a:t>
-            </a:r>
-          </a:p>
-          <a:p>
-            <a:pPr algn="l">
-              <a:spcAft>
-                <a:spcPts val="800"/>
-              </a:spcAft>
-            </a:pPr>
-            <a:r>
-              <a:rPr sz="1300" b="1">
-                <a:solidFill>
-                  <a:srgbClr val="4CAF50"/>
-                </a:solidFill>
-                <a:latin typeface="Arial"/>
-                <a:ea typeface="Microsoft YaHei"/>
-              </a:rPr>
-              <a:t>分析师从每周 40 个需求降到 8 个</a:t>
-            </a:r>
-          </a:p>
-          <a:p>
-            <a:pPr algn="l">
-              <a:spcAft>
-                <a:spcPts val="800"/>
-              </a:spcAft>
-            </a:pPr>
-            <a:r>
-              <a:rPr sz="1300" b="0">
-                <a:solidFill>
-                  <a:srgbClr val="F0EEE8"/>
-                </a:solidFill>
-                <a:latin typeface="Arial"/>
-                <a:ea typeface="Microsoft YaHei"/>
-              </a:rPr>
-              <a:t/>
-            </a:r>
-          </a:p>
-          <a:p>
-            <a:pPr algn="l">
-              <a:spcAft>
-                <a:spcPts val="800"/>
-              </a:spcAft>
-            </a:pPr>
-            <a:r>
-              <a:rPr sz="1300" b="0">
-                <a:solidFill>
-                  <a:srgbClr val="F0EEE8"/>
-                </a:solidFill>
-                <a:latin typeface="Arial"/>
-                <a:ea typeface="Microsoft YaHei"/>
-              </a:rPr>
-              <a:t>分析师专注深度分析和策略支持</a:t>
-            </a:r>
-          </a:p>
-          <a:p>
-            <a:pPr algn="l">
-              <a:spcAft>
-                <a:spcPts val="800"/>
-              </a:spcAft>
-            </a:pPr>
-            <a:r>
-              <a:rPr sz="1300" b="0">
-                <a:solidFill>
-                  <a:srgbClr val="F0EEE8"/>
-                </a:solidFill>
-                <a:latin typeface="Arial"/>
-                <a:ea typeface="Microsoft YaHei"/>
-              </a:rPr>
-              <a:t>业务团队随时提问，不用排队</a:t>
-            </a:r>
-          </a:p>
-        </p:txBody>
-      </p:sp>
-      <p:sp>
-        <p:nvSpPr>
-          <p:cNvPr id="7" name="Rounded Rectangle 6"/>
+              <a:t>SSO/SAML 集成
+行级安全 + PII 脱敏
+多数据源：PostgreSQL/BigQuery
+查询成本控制 + 取消机制</a:t>
+            </a:r>
+          </a:p>
+        </p:txBody>
+      </p:sp>
+      <p:sp>
+        <p:nvSpPr>
+          <p:cNvPr id="9" name="Rounded Rectangle 8"/>
           <p:cNvSpPr/>
           <p:nvPr/>
         </p:nvSpPr>
         <p:spPr>
           <a:xfrm>
-            <a:off x="6400800" y="1645920"/>
-            <a:ext cx="4754880" cy="4114800"/>
+            <a:off x="914400" y="3749039"/>
+            <a:ext cx="5029200" cy="1828800"/>
           </a:xfrm>
           <a:prstGeom prst="roundRect">
             <a:avLst/>
@@ -8980,20 +7007,95 @@
       </p:sp>
       <p:sp>
         <p:nvSpPr>
-          <p:cNvPr id="8" name="Rectangle 7"/>
+          <p:cNvPr id="10" name="TextBox 9"/>
+          <p:cNvSpPr txBox="1"/>
+          <p:nvPr/>
+        </p:nvSpPr>
+        <p:spPr>
+          <a:xfrm>
+            <a:off x="1188720" y="3931919"/>
+            <a:ext cx="4480560" cy="365760"/>
+          </a:xfrm>
+          <a:prstGeom prst="rect">
+            <a:avLst/>
+          </a:prstGeom>
+          <a:noFill/>
+        </p:spPr>
+        <p:txBody>
+          <a:bodyPr wrap="square">
+            <a:spAutoFit/>
+          </a:bodyPr>
+          <a:lstStyle/>
+          <a:p>
+            <a:pPr algn="l"/>
+            <a:r>
+              <a:rPr sz="1600" b="1">
+                <a:solidFill>
+                  <a:srgbClr val="D4A853"/>
+                </a:solidFill>
+                <a:latin typeface="Arial"/>
+                <a:ea typeface="Microsoft YaHei"/>
+              </a:rPr>
+              <a:t>Phase 3: 规模化（3-6月）</a:t>
+            </a:r>
+          </a:p>
+        </p:txBody>
+      </p:sp>
+      <p:sp>
+        <p:nvSpPr>
+          <p:cNvPr id="11" name="TextBox 10"/>
+          <p:cNvSpPr txBox="1"/>
+          <p:nvPr/>
+        </p:nvSpPr>
+        <p:spPr>
+          <a:xfrm>
+            <a:off x="1188720" y="4389119"/>
+            <a:ext cx="4480560" cy="914400"/>
+          </a:xfrm>
+          <a:prstGeom prst="rect">
+            <a:avLst/>
+          </a:prstGeom>
+          <a:noFill/>
+        </p:spPr>
+        <p:txBody>
+          <a:bodyPr wrap="square">
+            <a:spAutoFit/>
+          </a:bodyPr>
+          <a:lstStyle/>
+          <a:p>
+            <a:pPr algn="l"/>
+            <a:r>
+              <a:rPr sz="1400" b="0">
+                <a:solidFill>
+                  <a:srgbClr val="F0EEE8"/>
+                </a:solidFill>
+                <a:latin typeface="Arial"/>
+                <a:ea typeface="Microsoft YaHei"/>
+              </a:rPr>
+              <a:t>Snowflake/Redshift/ClickHouse
+dbt 语义层集成
+指标认证 + 谱系追踪
+VPC 部署 + BYOM</a:t>
+            </a:r>
+          </a:p>
+        </p:txBody>
+      </p:sp>
+      <p:sp>
+        <p:nvSpPr>
+          <p:cNvPr id="12" name="Rounded Rectangle 11"/>
           <p:cNvSpPr/>
           <p:nvPr/>
         </p:nvSpPr>
         <p:spPr>
           <a:xfrm>
-            <a:off x="6400800" y="1691640"/>
-            <a:ext cx="50800" cy="4023360"/>
-          </a:xfrm>
-          <a:prstGeom prst="rect">
+            <a:off x="6217920" y="3749039"/>
+            <a:ext cx="5029200" cy="1828800"/>
+          </a:xfrm>
+          <a:prstGeom prst="roundRect">
             <a:avLst/>
           </a:prstGeom>
           <a:solidFill>
-            <a:srgbClr val="4CAF50"/>
+            <a:srgbClr val="2A2F3E"/>
           </a:solidFill>
           <a:ln>
             <a:noFill/>
@@ -9023,14 +7125,14 @@
       </p:sp>
       <p:sp>
         <p:nvSpPr>
-          <p:cNvPr id="9" name="TextBox 8"/>
+          <p:cNvPr id="13" name="TextBox 12"/>
           <p:cNvSpPr txBox="1"/>
           <p:nvPr/>
         </p:nvSpPr>
         <p:spPr>
           <a:xfrm>
-            <a:off x="6675120" y="1783080"/>
-            <a:ext cx="4206240" cy="320040"/>
+            <a:off x="6492240" y="3931919"/>
+            <a:ext cx="4480560" cy="365760"/>
           </a:xfrm>
           <a:prstGeom prst="rect">
             <a:avLst/>
@@ -9047,26 +7149,26 @@
             <a:r>
               <a:rPr sz="1600" b="1">
                 <a:solidFill>
-                  <a:srgbClr val="4CAF50"/>
+                  <a:srgbClr val="D4A853"/>
                 </a:solidFill>
                 <a:latin typeface="Arial"/>
                 <a:ea typeface="Microsoft YaHei"/>
               </a:rPr>
-              <a:t>典型提问示例</a:t>
-            </a:r>
-          </a:p>
-        </p:txBody>
-      </p:sp>
-      <p:sp>
-        <p:nvSpPr>
-          <p:cNvPr id="10" name="TextBox 9"/>
+              <a:t>核心指标</a:t>
+            </a:r>
+          </a:p>
+        </p:txBody>
+      </p:sp>
+      <p:sp>
+        <p:nvSpPr>
+          <p:cNvPr id="14" name="TextBox 13"/>
           <p:cNvSpPr txBox="1"/>
           <p:nvPr/>
         </p:nvSpPr>
         <p:spPr>
           <a:xfrm>
-            <a:off x="6675120" y="2148840"/>
-            <a:ext cx="4206240" cy="3474720"/>
+            <a:off x="6492240" y="4389119"/>
+            <a:ext cx="4480560" cy="914400"/>
           </a:xfrm>
           <a:prstGeom prst="rect">
             <a:avLst/>
@@ -9079,122 +7181,19 @@
           </a:bodyPr>
           <a:lstStyle/>
           <a:p>
-            <a:pPr algn="l">
-              <a:spcAft>
-                <a:spcPts val="800"/>
-              </a:spcAft>
-            </a:pPr>
-            <a:r>
-              <a:rPr sz="1300" b="0">
-                <a:solidFill>
-                  <a:srgbClr val="9A9A9A"/>
+            <a:pPr algn="l"/>
+            <a:r>
+              <a:rPr sz="1400" b="0">
+                <a:solidFill>
+                  <a:srgbClr val="F0EEE8"/>
                 </a:solidFill>
                 <a:latin typeface="Arial"/>
                 <a:ea typeface="Microsoft YaHei"/>
               </a:rPr>
-              <a:t>「上个月华东销售额最高的 Top 10 商品」</a:t>
-            </a:r>
-          </a:p>
-          <a:p>
-            <a:pPr algn="l">
-              <a:spcAft>
-                <a:spcPts val="800"/>
-              </a:spcAft>
-            </a:pPr>
-            <a:r>
-              <a:rPr sz="1300" b="0">
-                <a:solidFill>
-                  <a:srgbClr val="9A9A9A"/>
-                </a:solidFill>
-                <a:latin typeface="Arial"/>
-                <a:ea typeface="Microsoft YaHei"/>
-              </a:rPr>
-              <a:t>「对比上个月，本月客单价变化了多少？」</a:t>
-            </a:r>
-          </a:p>
-          <a:p>
-            <a:pPr algn="l">
-              <a:spcAft>
-                <a:spcPts val="800"/>
-              </a:spcAft>
-            </a:pPr>
-            <a:r>
-              <a:rPr sz="1300" b="0">
-                <a:solidFill>
-                  <a:srgbClr val="9A9A9A"/>
-                </a:solidFill>
-                <a:latin typeface="Arial"/>
-                <a:ea typeface="Microsoft YaHei"/>
-              </a:rPr>
-              <a:t>「哪个品类的退货率最高？」</a:t>
-            </a:r>
-          </a:p>
-          <a:p>
-            <a:pPr algn="l">
-              <a:spcAft>
-                <a:spcPts val="800"/>
-              </a:spcAft>
-            </a:pPr>
-            <a:r>
-              <a:rPr sz="1300" b="0">
-                <a:solidFill>
-                  <a:srgbClr val="9A9A9A"/>
-                </a:solidFill>
-                <a:latin typeface="Arial"/>
-                <a:ea typeface="Microsoft YaHei"/>
-              </a:rPr>
-              <a:t>「本月新客户的占比是多少？」</a:t>
-            </a:r>
-          </a:p>
-          <a:p>
-            <a:pPr algn="l">
-              <a:spcAft>
-                <a:spcPts val="800"/>
-              </a:spcAft>
-            </a:pPr>
-            <a:r>
-              <a:rPr sz="1300" b="0">
-                <a:solidFill>
-                  <a:srgbClr val="F0EEE8"/>
-                </a:solidFill>
-                <a:latin typeface="Arial"/>
-                <a:ea typeface="Microsoft YaHei"/>
-              </a:rPr>
-              <a:t/>
-            </a:r>
-          </a:p>
-          <a:p>
-            <a:pPr algn="l">
-              <a:spcAft>
-                <a:spcPts val="800"/>
-              </a:spcAft>
-            </a:pPr>
-            <a:r>
-              <a:rPr sz="1300" b="1">
-                <a:solidFill>
-                  <a:srgbClr val="4CAF50"/>
-                </a:solidFill>
-                <a:latin typeface="Arial"/>
-                <a:ea typeface="Microsoft YaHei"/>
-              </a:rPr>
-              <a:t>自然语言提问，不需要懂 SQL</a:t>
-            </a:r>
-          </a:p>
-          <a:p>
-            <a:pPr algn="l">
-              <a:spcAft>
-                <a:spcPts val="800"/>
-              </a:spcAft>
-            </a:pPr>
-            <a:r>
-              <a:rPr sz="1300" b="1">
-                <a:solidFill>
-                  <a:srgbClr val="4CAF50"/>
-                </a:solidFill>
-                <a:latin typeface="Arial"/>
-                <a:ea typeface="Microsoft YaHei"/>
-              </a:rPr>
-              <a:t>10 秒出结果，自动可视化</a:t>
+              <a:t>每查询成本 ~$0.003（Kimi K2.7）
+单次查询延迟 2-5 秒
+从 Demo 到 MVP：1 周
+从 MVP 到企业版：3 个月</a:t>
             </a:r>
           </a:p>
         </p:txBody>
@@ -9256,7 +7255,7 @@
                 <a:latin typeface="Arial"/>
                 <a:ea typeface="Microsoft YaHei"/>
               </a:rPr>
-              <a:t>团队与执行力</a:t>
+              <a:t>一个产品，两方受益</a:t>
             </a:r>
           </a:p>
         </p:txBody>
@@ -9270,7 +7269,7 @@
         <p:spPr>
           <a:xfrm>
             <a:off x="914400" y="1645920"/>
-            <a:ext cx="5029200" cy="2011680"/>
+            <a:ext cx="5029200" cy="3657600"/>
           </a:xfrm>
           <a:prstGeom prst="roundRect">
             <a:avLst/>
@@ -9306,20 +7305,95 @@
       </p:sp>
       <p:sp>
         <p:nvSpPr>
-          <p:cNvPr id="4" name="Rectangle 3"/>
+          <p:cNvPr id="4" name="TextBox 3"/>
+          <p:cNvSpPr txBox="1"/>
+          <p:nvPr/>
+        </p:nvSpPr>
+        <p:spPr>
+          <a:xfrm>
+            <a:off x="1188720" y="1828800"/>
+            <a:ext cx="4480560" cy="365760"/>
+          </a:xfrm>
+          <a:prstGeom prst="rect">
+            <a:avLst/>
+          </a:prstGeom>
+          <a:noFill/>
+        </p:spPr>
+        <p:txBody>
+          <a:bodyPr wrap="square">
+            <a:spAutoFit/>
+          </a:bodyPr>
+          <a:lstStyle/>
+          <a:p>
+            <a:pPr algn="l"/>
+            <a:r>
+              <a:rPr sz="1600" b="1">
+                <a:solidFill>
+                  <a:srgbClr val="D4A853"/>
+                </a:solidFill>
+                <a:latin typeface="Arial"/>
+                <a:ea typeface="Microsoft YaHei"/>
+              </a:rPr>
+              <a:t>数据分析师</a:t>
+            </a:r>
+          </a:p>
+        </p:txBody>
+      </p:sp>
+      <p:sp>
+        <p:nvSpPr>
+          <p:cNvPr id="5" name="TextBox 4"/>
+          <p:cNvSpPr txBox="1"/>
+          <p:nvPr/>
+        </p:nvSpPr>
+        <p:spPr>
+          <a:xfrm>
+            <a:off x="1188720" y="2286000"/>
+            <a:ext cx="4480560" cy="2743200"/>
+          </a:xfrm>
+          <a:prstGeom prst="rect">
+            <a:avLst/>
+          </a:prstGeom>
+          <a:noFill/>
+        </p:spPr>
+        <p:txBody>
+          <a:bodyPr wrap="square">
+            <a:spAutoFit/>
+          </a:bodyPr>
+          <a:lstStyle/>
+          <a:p>
+            <a:pPr algn="l"/>
+            <a:r>
+              <a:rPr sz="1400" b="0">
+                <a:solidFill>
+                  <a:srgbClr val="F0EEE8"/>
+                </a:solidFill>
+                <a:latin typeface="Arial"/>
+                <a:ea typeface="Microsoft YaHei"/>
+              </a:rPr>
+              <a:t>减少 80% 重复取数工作
+专注于指标定义和数据治理
+从"拉数的"变成"定标准的"
+有时间做真正有价值的深度分析</a:t>
+            </a:r>
+          </a:p>
+        </p:txBody>
+      </p:sp>
+      <p:sp>
+        <p:nvSpPr>
+          <p:cNvPr id="6" name="Rounded Rectangle 5"/>
           <p:cNvSpPr/>
           <p:nvPr/>
         </p:nvSpPr>
         <p:spPr>
           <a:xfrm>
-            <a:off x="914400" y="1691640"/>
-            <a:ext cx="50800" cy="1920240"/>
-          </a:xfrm>
-          <a:prstGeom prst="rect">
+            <a:off x="6217920" y="1645920"/>
+            <a:ext cx="5029200" cy="3657600"/>
+          </a:xfrm>
+          <a:prstGeom prst="roundRect">
             <a:avLst/>
           </a:prstGeom>
           <a:solidFill>
-            <a:srgbClr val="D4A853"/>
+            <a:srgbClr val="2A2F3E"/>
           </a:solidFill>
           <a:ln>
             <a:noFill/>
@@ -9349,14 +7423,14 @@
       </p:sp>
       <p:sp>
         <p:nvSpPr>
-          <p:cNvPr id="5" name="TextBox 4"/>
+          <p:cNvPr id="7" name="TextBox 6"/>
           <p:cNvSpPr txBox="1"/>
           <p:nvPr/>
         </p:nvSpPr>
         <p:spPr>
           <a:xfrm>
-            <a:off x="1188720" y="1783080"/>
-            <a:ext cx="4480560" cy="320040"/>
+            <a:off x="6492240" y="1828800"/>
+            <a:ext cx="4480560" cy="365760"/>
           </a:xfrm>
           <a:prstGeom prst="rect">
             <a:avLst/>
@@ -9378,21 +7452,21 @@
                 <a:latin typeface="Arial"/>
                 <a:ea typeface="Microsoft YaHei"/>
               </a:rPr>
-              <a:t>执行力亮点</a:t>
-            </a:r>
-          </a:p>
-        </p:txBody>
-      </p:sp>
-      <p:sp>
-        <p:nvSpPr>
-          <p:cNvPr id="6" name="TextBox 5"/>
+              <a:t>业务团队</a:t>
+            </a:r>
+          </a:p>
+        </p:txBody>
+      </p:sp>
+      <p:sp>
+        <p:nvSpPr>
+          <p:cNvPr id="8" name="TextBox 7"/>
           <p:cNvSpPr txBox="1"/>
           <p:nvPr/>
         </p:nvSpPr>
         <p:spPr>
           <a:xfrm>
-            <a:off x="1188720" y="2148840"/>
-            <a:ext cx="4480560" cy="1371600"/>
+            <a:off x="6492240" y="2286000"/>
+            <a:ext cx="4480560" cy="2743200"/>
           </a:xfrm>
           <a:prstGeom prst="rect">
             <a:avLst/>
@@ -9405,429 +7479,55 @@
           </a:bodyPr>
           <a:lstStyle/>
           <a:p>
-            <a:pPr algn="l">
-              <a:spcAft>
-                <a:spcPts val="800"/>
-              </a:spcAft>
-            </a:pPr>
-            <a:r>
-              <a:rPr sz="1300" b="1">
-                <a:solidFill>
-                  <a:srgbClr val="D4A853"/>
+            <a:pPr algn="l"/>
+            <a:r>
+              <a:rPr sz="1400" b="0">
+                <a:solidFill>
+                  <a:srgbClr val="F0EEE8"/>
                 </a:solidFill>
                 <a:latin typeface="Arial"/>
                 <a:ea typeface="Microsoft YaHei"/>
               </a:rPr>
-              <a:t>3 天从痛点发现到产品上线</a:t>
-            </a:r>
-          </a:p>
-          <a:p>
-            <a:pPr algn="l">
-              <a:spcAft>
-                <a:spcPts val="800"/>
-              </a:spcAft>
-            </a:pPr>
-            <a:r>
-              <a:rPr sz="1300" b="0">
-                <a:solidFill>
-                  <a:srgbClr val="F0EEE8"/>
+              <a:t>随时提问，不用排队等排期
+自己看数据，自己做决策
+从"等报表"到"看数据"
+一个需求从 3 天缩短到 10 秒</a:t>
+            </a:r>
+          </a:p>
+        </p:txBody>
+      </p:sp>
+      <p:sp>
+        <p:nvSpPr>
+          <p:cNvPr id="9" name="TextBox 8"/>
+          <p:cNvSpPr txBox="1"/>
+          <p:nvPr/>
+        </p:nvSpPr>
+        <p:spPr>
+          <a:xfrm>
+            <a:off x="914400" y="5943600"/>
+            <a:ext cx="9144000" cy="365760"/>
+          </a:xfrm>
+          <a:prstGeom prst="rect">
+            <a:avLst/>
+          </a:prstGeom>
+          <a:noFill/>
+        </p:spPr>
+        <p:txBody>
+          <a:bodyPr wrap="square">
+            <a:spAutoFit/>
+          </a:bodyPr>
+          <a:lstStyle/>
+          <a:p>
+            <a:pPr algn="l"/>
+            <a:r>
+              <a:rPr sz="1100" b="0">
+                <a:solidFill>
+                  <a:srgbClr val="9A9A9A"/>
                 </a:solidFill>
                 <a:latin typeface="Arial"/>
                 <a:ea typeface="Microsoft YaHei"/>
               </a:rPr>
-              <a:t>独创 QUINTE 五方对抗审查方法论</a:t>
-            </a:r>
-          </a:p>
-          <a:p>
-            <a:pPr algn="l">
-              <a:spcAft>
-                <a:spcPts val="800"/>
-              </a:spcAft>
-            </a:pPr>
-            <a:r>
-              <a:rPr sz="1300" b="1">
-                <a:solidFill>
-                  <a:srgbClr val="4CAF50"/>
-                </a:solidFill>
-                <a:latin typeface="Arial"/>
-                <a:ea typeface="Microsoft YaHei"/>
-              </a:rPr>
-              <a:t>5 个 AI 互相挑刺，消除盲区</a:t>
-            </a:r>
-          </a:p>
-        </p:txBody>
-      </p:sp>
-      <p:sp>
-        <p:nvSpPr>
-          <p:cNvPr id="7" name="Rounded Rectangle 6"/>
-          <p:cNvSpPr/>
-          <p:nvPr/>
-        </p:nvSpPr>
-        <p:spPr>
-          <a:xfrm>
-            <a:off x="6400800" y="1645920"/>
-            <a:ext cx="4754880" cy="2011680"/>
-          </a:xfrm>
-          <a:prstGeom prst="roundRect">
-            <a:avLst/>
-          </a:prstGeom>
-          <a:solidFill>
-            <a:srgbClr val="2A2F3E"/>
-          </a:solidFill>
-          <a:ln>
-            <a:noFill/>
-          </a:ln>
-        </p:spPr>
-        <p:style>
-          <a:lnRef idx="1">
-            <a:schemeClr val="accent1"/>
-          </a:lnRef>
-          <a:fillRef idx="3">
-            <a:schemeClr val="accent1"/>
-          </a:fillRef>
-          <a:effectRef idx="2">
-            <a:schemeClr val="accent1"/>
-          </a:effectRef>
-          <a:fontRef idx="minor">
-            <a:schemeClr val="lt1"/>
-          </a:fontRef>
-        </p:style>
-        <p:txBody>
-          <a:bodyPr rtlCol="0" anchor="ctr"/>
-          <a:lstStyle/>
-          <a:p>
-            <a:pPr algn="ctr"/>
-          </a:p>
-        </p:txBody>
-      </p:sp>
-      <p:sp>
-        <p:nvSpPr>
-          <p:cNvPr id="8" name="Rectangle 7"/>
-          <p:cNvSpPr/>
-          <p:nvPr/>
-        </p:nvSpPr>
-        <p:spPr>
-          <a:xfrm>
-            <a:off x="6400800" y="1691640"/>
-            <a:ext cx="50800" cy="1920240"/>
-          </a:xfrm>
-          <a:prstGeom prst="rect">
-            <a:avLst/>
-          </a:prstGeom>
-          <a:solidFill>
-            <a:srgbClr val="4EA8DE"/>
-          </a:solidFill>
-          <a:ln>
-            <a:noFill/>
-          </a:ln>
-        </p:spPr>
-        <p:style>
-          <a:lnRef idx="1">
-            <a:schemeClr val="accent1"/>
-          </a:lnRef>
-          <a:fillRef idx="3">
-            <a:schemeClr val="accent1"/>
-          </a:fillRef>
-          <a:effectRef idx="2">
-            <a:schemeClr val="accent1"/>
-          </a:effectRef>
-          <a:fontRef idx="minor">
-            <a:schemeClr val="lt1"/>
-          </a:fontRef>
-        </p:style>
-        <p:txBody>
-          <a:bodyPr rtlCol="0" anchor="ctr"/>
-          <a:lstStyle/>
-          <a:p>
-            <a:pPr algn="ctr"/>
-          </a:p>
-        </p:txBody>
-      </p:sp>
-      <p:sp>
-        <p:nvSpPr>
-          <p:cNvPr id="9" name="TextBox 8"/>
-          <p:cNvSpPr txBox="1"/>
-          <p:nvPr/>
-        </p:nvSpPr>
-        <p:spPr>
-          <a:xfrm>
-            <a:off x="6675120" y="1783080"/>
-            <a:ext cx="4206240" cy="320040"/>
-          </a:xfrm>
-          <a:prstGeom prst="rect">
-            <a:avLst/>
-          </a:prstGeom>
-          <a:noFill/>
-        </p:spPr>
-        <p:txBody>
-          <a:bodyPr wrap="square">
-            <a:spAutoFit/>
-          </a:bodyPr>
-          <a:lstStyle/>
-          <a:p>
-            <a:pPr algn="l"/>
-            <a:r>
-              <a:rPr sz="1600" b="1">
-                <a:solidFill>
-                  <a:srgbClr val="4EA8DE"/>
-                </a:solidFill>
-                <a:latin typeface="Arial"/>
-                <a:ea typeface="Microsoft YaHei"/>
-              </a:rPr>
-              <a:t>技术能力</a:t>
-            </a:r>
-          </a:p>
-        </p:txBody>
-      </p:sp>
-      <p:sp>
-        <p:nvSpPr>
-          <p:cNvPr id="10" name="TextBox 9"/>
-          <p:cNvSpPr txBox="1"/>
-          <p:nvPr/>
-        </p:nvSpPr>
-        <p:spPr>
-          <a:xfrm>
-            <a:off x="6675120" y="2148840"/>
-            <a:ext cx="4206240" cy="1371600"/>
-          </a:xfrm>
-          <a:prstGeom prst="rect">
-            <a:avLst/>
-          </a:prstGeom>
-          <a:noFill/>
-        </p:spPr>
-        <p:txBody>
-          <a:bodyPr wrap="square">
-            <a:spAutoFit/>
-          </a:bodyPr>
-          <a:lstStyle/>
-          <a:p>
-            <a:pPr algn="l">
-              <a:spcAft>
-                <a:spcPts val="800"/>
-              </a:spcAft>
-            </a:pPr>
-            <a:r>
-              <a:rPr sz="1300" b="0">
-                <a:solidFill>
-                  <a:srgbClr val="F0EEE8"/>
-                </a:solidFill>
-                <a:latin typeface="Arial"/>
-                <a:ea typeface="Microsoft YaHei"/>
-              </a:rPr>
-              <a:t>全栈开发：前端 + AI + 数据库</a:t>
-            </a:r>
-          </a:p>
-          <a:p>
-            <a:pPr algn="l">
-              <a:spcAft>
-                <a:spcPts val="800"/>
-              </a:spcAft>
-            </a:pPr>
-            <a:r>
-              <a:rPr sz="1300" b="0">
-                <a:solidFill>
-                  <a:srgbClr val="F0EEE8"/>
-                </a:solidFill>
-                <a:latin typeface="Arial"/>
-                <a:ea typeface="Microsoft YaHei"/>
-              </a:rPr>
-              <a:t>AI 应用落地经验</a:t>
-            </a:r>
-          </a:p>
-          <a:p>
-            <a:pPr algn="l">
-              <a:spcAft>
-                <a:spcPts val="800"/>
-              </a:spcAft>
-            </a:pPr>
-            <a:r>
-              <a:rPr sz="1300" b="1">
-                <a:solidFill>
-                  <a:srgbClr val="D4A853"/>
-                </a:solidFill>
-                <a:latin typeface="Arial"/>
-                <a:ea typeface="Microsoft YaHei"/>
-              </a:rPr>
-              <a:t>产品化思维：不是 demo，是可部署的 SaaS</a:t>
-            </a:r>
-          </a:p>
-        </p:txBody>
-      </p:sp>
-      <p:sp>
-        <p:nvSpPr>
-          <p:cNvPr id="11" name="Rounded Rectangle 10"/>
-          <p:cNvSpPr/>
-          <p:nvPr/>
-        </p:nvSpPr>
-        <p:spPr>
-          <a:xfrm>
-            <a:off x="914400" y="4023360"/>
-            <a:ext cx="10515600" cy="1645920"/>
-          </a:xfrm>
-          <a:prstGeom prst="roundRect">
-            <a:avLst/>
-          </a:prstGeom>
-          <a:solidFill>
-            <a:srgbClr val="2A2F3E"/>
-          </a:solidFill>
-          <a:ln>
-            <a:noFill/>
-          </a:ln>
-        </p:spPr>
-        <p:style>
-          <a:lnRef idx="1">
-            <a:schemeClr val="accent1"/>
-          </a:lnRef>
-          <a:fillRef idx="3">
-            <a:schemeClr val="accent1"/>
-          </a:fillRef>
-          <a:effectRef idx="2">
-            <a:schemeClr val="accent1"/>
-          </a:effectRef>
-          <a:fontRef idx="minor">
-            <a:schemeClr val="lt1"/>
-          </a:fontRef>
-        </p:style>
-        <p:txBody>
-          <a:bodyPr rtlCol="0" anchor="ctr"/>
-          <a:lstStyle/>
-          <a:p>
-            <a:pPr algn="ctr"/>
-          </a:p>
-        </p:txBody>
-      </p:sp>
-      <p:sp>
-        <p:nvSpPr>
-          <p:cNvPr id="12" name="Rectangle 11"/>
-          <p:cNvSpPr/>
-          <p:nvPr/>
-        </p:nvSpPr>
-        <p:spPr>
-          <a:xfrm>
-            <a:off x="914400" y="4069080"/>
-            <a:ext cx="50800" cy="1554480"/>
-          </a:xfrm>
-          <a:prstGeom prst="rect">
-            <a:avLst/>
-          </a:prstGeom>
-          <a:solidFill>
-            <a:srgbClr val="4CAF50"/>
-          </a:solidFill>
-          <a:ln>
-            <a:noFill/>
-          </a:ln>
-        </p:spPr>
-        <p:style>
-          <a:lnRef idx="1">
-            <a:schemeClr val="accent1"/>
-          </a:lnRef>
-          <a:fillRef idx="3">
-            <a:schemeClr val="accent1"/>
-          </a:fillRef>
-          <a:effectRef idx="2">
-            <a:schemeClr val="accent1"/>
-          </a:effectRef>
-          <a:fontRef idx="minor">
-            <a:schemeClr val="lt1"/>
-          </a:fontRef>
-        </p:style>
-        <p:txBody>
-          <a:bodyPr rtlCol="0" anchor="ctr"/>
-          <a:lstStyle/>
-          <a:p>
-            <a:pPr algn="ctr"/>
-          </a:p>
-        </p:txBody>
-      </p:sp>
-      <p:sp>
-        <p:nvSpPr>
-          <p:cNvPr id="13" name="TextBox 12"/>
-          <p:cNvSpPr txBox="1"/>
-          <p:nvPr/>
-        </p:nvSpPr>
-        <p:spPr>
-          <a:xfrm>
-            <a:off x="1188720" y="4160520"/>
-            <a:ext cx="9966960" cy="320040"/>
-          </a:xfrm>
-          <a:prstGeom prst="rect">
-            <a:avLst/>
-          </a:prstGeom>
-          <a:noFill/>
-        </p:spPr>
-        <p:txBody>
-          <a:bodyPr wrap="square">
-            <a:spAutoFit/>
-          </a:bodyPr>
-          <a:lstStyle/>
-          <a:p>
-            <a:pPr algn="l"/>
-            <a:r>
-              <a:rPr sz="1600" b="1">
-                <a:solidFill>
-                  <a:srgbClr val="4CAF50"/>
-                </a:solidFill>
-                <a:latin typeface="Arial"/>
-                <a:ea typeface="Microsoft YaHei"/>
-              </a:rPr>
-              <a:t>质量保障：QUINTE 对抗审查</a:t>
-            </a:r>
-          </a:p>
-        </p:txBody>
-      </p:sp>
-      <p:sp>
-        <p:nvSpPr>
-          <p:cNvPr id="14" name="TextBox 13"/>
-          <p:cNvSpPr txBox="1"/>
-          <p:nvPr/>
-        </p:nvSpPr>
-        <p:spPr>
-          <a:xfrm>
-            <a:off x="1188720" y="4526280"/>
-            <a:ext cx="9966960" cy="1005840"/>
-          </a:xfrm>
-          <a:prstGeom prst="rect">
-            <a:avLst/>
-          </a:prstGeom>
-          <a:noFill/>
-        </p:spPr>
-        <p:txBody>
-          <a:bodyPr wrap="square">
-            <a:spAutoFit/>
-          </a:bodyPr>
-          <a:lstStyle/>
-          <a:p>
-            <a:pPr algn="l">
-              <a:spcAft>
-                <a:spcPts val="800"/>
-              </a:spcAft>
-            </a:pPr>
-            <a:r>
-              <a:rPr sz="1300" b="0">
-                <a:solidFill>
-                  <a:srgbClr val="F0EEE8"/>
-                </a:solidFill>
-                <a:latin typeface="Arial"/>
-                <a:ea typeface="Microsoft YaHei"/>
-              </a:rPr>
-              <a:t>3 轮审查 × 5 个 AI = 15 份独立审计报告</a:t>
-            </a:r>
-          </a:p>
-          <a:p>
-            <a:pPr algn="l">
-              <a:spcAft>
-                <a:spcPts val="800"/>
-              </a:spcAft>
-            </a:pPr>
-            <a:r>
-              <a:rPr sz="1300" b="1">
-                <a:solidFill>
-                  <a:srgbClr val="4CAF50"/>
-                </a:solidFill>
-                <a:latin typeface="Arial"/>
-                <a:ea typeface="Microsoft YaHei"/>
-              </a:rPr>
-              <a:t>发现并修复了 SQL 注入防护、错误处理、边界条件等问题</a:t>
+              <a:t>分析师被解放，业务被赋能</a:t>
             </a:r>
           </a:p>
         </p:txBody>
@@ -10158,4 +7858,324 @@
   </a:objectDefaults>
   <a:extraClrSchemeLst/>
 </a:theme>
+</file>
+
+<file path=ppt/theme/theme2.xml><?xml version="1.0" encoding="utf-8"?>
+<a:theme xmlns:a="http://schemas.openxmlformats.org/drawingml/2006/main" name="Office Theme">
+  <a:themeElements>
+    <a:clrScheme name="Office">
+      <a:dk1>
+        <a:sysClr val="windowText" lastClr="000000"/>
+      </a:dk1>
+      <a:lt1>
+        <a:sysClr val="window" lastClr="FFFFFF"/>
+      </a:lt1>
+      <a:dk2>
+        <a:srgbClr val="1F497D"/>
+      </a:dk2>
+      <a:lt2>
+        <a:srgbClr val="EEECE1"/>
+      </a:lt2>
+      <a:accent1>
+        <a:srgbClr val="4F81BD"/>
+      </a:accent1>
+      <a:accent2>
+        <a:srgbClr val="C0504D"/>
+      </a:accent2>
+      <a:accent3>
+        <a:srgbClr val="9BBB59"/>
+      </a:accent3>
+      <a:accent4>
+        <a:srgbClr val="8064A2"/>
+      </a:accent4>
+      <a:accent5>
+        <a:srgbClr val="4BACC6"/>
+      </a:accent5>
+      <a:accent6>
+        <a:srgbClr val="F79646"/>
+      </a:accent6>
+      <a:hlink>
+        <a:srgbClr val="0000FF"/>
+      </a:hlink>
+      <a:folHlink>
+        <a:srgbClr val="800080"/>
+      </a:folHlink>
+    </a:clrScheme>
+    <a:fontScheme name="Office">
+      <a:majorFont>
+        <a:latin typeface="Calibri"/>
+        <a:ea typeface=""/>
+        <a:cs typeface=""/>
+        <a:font script="Jpan" typeface="ＭＳ Ｐゴシック"/>
+        <a:font script="Hang" typeface="맑은 고딕"/>
+        <a:font script="Hans" typeface="宋体"/>
+        <a:font script="Hant" typeface="新細明體"/>
+        <a:font script="Arab" typeface="Times New Roman"/>
+        <a:font script="Hebr" typeface="Times New Roman"/>
+        <a:font script="Thai" typeface="Angsana New"/>
+        <a:font script="Ethi" typeface="Nyala"/>
+        <a:font script="Beng" typeface="Vrinda"/>
+        <a:font script="Gujr" typeface="Shruti"/>
+        <a:font script="Khmr" typeface="MoolBoran"/>
+        <a:font script="Knda" typeface="Tunga"/>
+        <a:font script="Guru" typeface="Raavi"/>
+        <a:font script="Cans" typeface="Euphemia"/>
+        <a:font script="Cher" typeface="Plantagenet Cherokee"/>
+        <a:font script="Yiii" typeface="Microsoft Yi Baiti"/>
+        <a:font script="Tibt" typeface="Microsoft Himalaya"/>
+        <a:font script="Thaa" typeface="MV Boli"/>
+        <a:font script="Deva" typeface="Mangal"/>
+        <a:font script="Telu" typeface="Gautami"/>
+        <a:font script="Taml" typeface="Latha"/>
+        <a:font script="Syrc" typeface="Estrangelo Edessa"/>
+        <a:font script="Orya" typeface="Kalinga"/>
+        <a:font script="Mlym" typeface="Kartika"/>
+        <a:font script="Laoo" typeface="DokChampa"/>
+        <a:font script="Sinh" typeface="Iskoola Pota"/>
+        <a:font script="Mong" typeface="Mongolian Baiti"/>
+        <a:font script="Viet" typeface="Times New Roman"/>
+        <a:font script="Uigh" typeface="Microsoft Uighur"/>
+        <a:font script="Geor" typeface="Sylfaen"/>
+      </a:majorFont>
+      <a:minorFont>
+        <a:latin typeface="Calibri"/>
+        <a:ea typeface=""/>
+        <a:cs typeface=""/>
+        <a:font script="Jpan" typeface="ＭＳ Ｐゴシック"/>
+        <a:font script="Hang" typeface="맑은 고딕"/>
+        <a:font script="Hans" typeface="宋体"/>
+        <a:font script="Hant" typeface="新細明體"/>
+        <a:font script="Arab" typeface="Arial"/>
+        <a:font script="Hebr" typeface="Arial"/>
+        <a:font script="Thai" typeface="Cordia New"/>
+        <a:font script="Ethi" typeface="Nyala"/>
+        <a:font script="Beng" typeface="Vrinda"/>
+        <a:font script="Gujr" typeface="Shruti"/>
+        <a:font script="Khmr" typeface="DaunPenh"/>
+        <a:font script="Knda" typeface="Tunga"/>
+        <a:font script="Guru" typeface="Raavi"/>
+        <a:font script="Cans" typeface="Euphemia"/>
+        <a:font script="Cher" typeface="Plantagenet Cherokee"/>
+        <a:font script="Yiii" typeface="Microsoft Yi Baiti"/>
+        <a:font script="Tibt" typeface="Microsoft Himalaya"/>
+        <a:font script="Thaa" typeface="MV Boli"/>
+        <a:font script="Deva" typeface="Mangal"/>
+        <a:font script="Telu" typeface="Gautami"/>
+        <a:font script="Taml" typeface="Latha"/>
+        <a:font script="Syrc" typeface="Estrangelo Edessa"/>
+        <a:font script="Orya" typeface="Kalinga"/>
+        <a:font script="Mlym" typeface="Kartika"/>
+        <a:font script="Laoo" typeface="DokChampa"/>
+        <a:font script="Sinh" typeface="Iskoola Pota"/>
+        <a:font script="Mong" typeface="Mongolian Baiti"/>
+        <a:font script="Viet" typeface="Arial"/>
+        <a:font script="Uigh" typeface="Microsoft Uighur"/>
+        <a:font script="Geor" typeface="Sylfaen"/>
+      </a:minorFont>
+    </a:fontScheme>
+    <a:fmtScheme name="Office">
+      <a:fillStyleLst>
+        <a:solidFill>
+          <a:schemeClr val="phClr"/>
+        </a:solidFill>
+        <a:gradFill rotWithShape="1">
+          <a:gsLst>
+            <a:gs pos="0">
+              <a:schemeClr val="phClr">
+                <a:tint val="50000"/>
+                <a:satMod val="300000"/>
+              </a:schemeClr>
+            </a:gs>
+            <a:gs pos="35000">
+              <a:schemeClr val="phClr">
+                <a:tint val="37000"/>
+                <a:satMod val="300000"/>
+              </a:schemeClr>
+            </a:gs>
+            <a:gs pos="100000">
+              <a:schemeClr val="phClr">
+                <a:tint val="15000"/>
+                <a:satMod val="350000"/>
+              </a:schemeClr>
+            </a:gs>
+          </a:gsLst>
+          <a:lin ang="16200000" scaled="1"/>
+        </a:gradFill>
+        <a:gradFill rotWithShape="1">
+          <a:gsLst>
+            <a:gs pos="0">
+              <a:schemeClr val="phClr">
+                <a:tint val="100000"/>
+                <a:shade val="100000"/>
+                <a:satMod val="130000"/>
+              </a:schemeClr>
+            </a:gs>
+            <a:gs pos="100000">
+              <a:schemeClr val="phClr">
+                <a:tint val="50000"/>
+                <a:shade val="100000"/>
+                <a:satMod val="350000"/>
+              </a:schemeClr>
+            </a:gs>
+          </a:gsLst>
+          <a:lin ang="16200000" scaled="0"/>
+        </a:gradFill>
+      </a:fillStyleLst>
+      <a:lnStyleLst>
+        <a:ln w="9525" cap="flat" cmpd="sng" algn="ctr">
+          <a:solidFill>
+            <a:schemeClr val="phClr">
+              <a:shade val="95000"/>
+              <a:satMod val="105000"/>
+            </a:schemeClr>
+          </a:solidFill>
+          <a:prstDash val="solid"/>
+        </a:ln>
+        <a:ln w="25400" cap="flat" cmpd="sng" algn="ctr">
+          <a:solidFill>
+            <a:schemeClr val="phClr"/>
+          </a:solidFill>
+          <a:prstDash val="solid"/>
+        </a:ln>
+        <a:ln w="38100" cap="flat" cmpd="sng" algn="ctr">
+          <a:solidFill>
+            <a:schemeClr val="phClr"/>
+          </a:solidFill>
+          <a:prstDash val="solid"/>
+        </a:ln>
+      </a:lnStyleLst>
+      <a:effectStyleLst>
+        <a:effectStyle>
+          <a:effectLst>
+            <a:outerShdw blurRad="40000" dist="20000" dir="5400000" rotWithShape="0">
+              <a:srgbClr val="000000">
+                <a:alpha val="38000"/>
+              </a:srgbClr>
+            </a:outerShdw>
+          </a:effectLst>
+        </a:effectStyle>
+        <a:effectStyle>
+          <a:effectLst>
+            <a:outerShdw blurRad="40000" dist="23000" dir="5400000" rotWithShape="0">
+              <a:srgbClr val="000000">
+                <a:alpha val="35000"/>
+              </a:srgbClr>
+            </a:outerShdw>
+          </a:effectLst>
+        </a:effectStyle>
+        <a:effectStyle>
+          <a:effectLst>
+            <a:outerShdw blurRad="40000" dist="23000" dir="5400000" rotWithShape="0">
+              <a:srgbClr val="000000">
+                <a:alpha val="35000"/>
+              </a:srgbClr>
+            </a:outerShdw>
+          </a:effectLst>
+          <a:scene3d>
+            <a:camera prst="orthographicFront">
+              <a:rot lat="0" lon="0" rev="0"/>
+            </a:camera>
+            <a:lightRig rig="threePt" dir="t">
+              <a:rot lat="0" lon="0" rev="1200000"/>
+            </a:lightRig>
+          </a:scene3d>
+          <a:sp3d>
+            <a:bevelT w="63500" h="25400"/>
+          </a:sp3d>
+        </a:effectStyle>
+      </a:effectStyleLst>
+      <a:bgFillStyleLst>
+        <a:solidFill>
+          <a:schemeClr val="phClr"/>
+        </a:solidFill>
+        <a:gradFill rotWithShape="1">
+          <a:gsLst>
+            <a:gs pos="0">
+              <a:schemeClr val="phClr">
+                <a:tint val="40000"/>
+                <a:satMod val="350000"/>
+              </a:schemeClr>
+            </a:gs>
+            <a:gs pos="40000">
+              <a:schemeClr val="phClr">
+                <a:tint val="45000"/>
+                <a:shade val="99000"/>
+                <a:satMod val="350000"/>
+              </a:schemeClr>
+            </a:gs>
+            <a:gs pos="100000">
+              <a:schemeClr val="phClr">
+                <a:shade val="20000"/>
+                <a:satMod val="255000"/>
+              </a:schemeClr>
+            </a:gs>
+          </a:gsLst>
+          <a:path path="circle">
+            <a:fillToRect l="50000" t="-80000" r="50000" b="180000"/>
+          </a:path>
+        </a:gradFill>
+        <a:gradFill rotWithShape="1">
+          <a:gsLst>
+            <a:gs pos="0">
+              <a:schemeClr val="phClr">
+                <a:tint val="80000"/>
+                <a:satMod val="300000"/>
+              </a:schemeClr>
+            </a:gs>
+            <a:gs pos="100000">
+              <a:schemeClr val="phClr">
+                <a:shade val="30000"/>
+                <a:satMod val="200000"/>
+              </a:schemeClr>
+            </a:gs>
+          </a:gsLst>
+          <a:path path="circle">
+            <a:fillToRect l="50000" t="50000" r="50000" b="50000"/>
+          </a:path>
+        </a:gradFill>
+      </a:bgFillStyleLst>
+    </a:fmtScheme>
+  </a:themeElements>
+  <a:objectDefaults>
+    <a:spDef>
+      <a:spPr/>
+      <a:bodyPr/>
+      <a:lstStyle/>
+      <a:style>
+        <a:lnRef idx="1">
+          <a:schemeClr val="accent1"/>
+        </a:lnRef>
+        <a:fillRef idx="3">
+          <a:schemeClr val="accent1"/>
+        </a:fillRef>
+        <a:effectRef idx="2">
+          <a:schemeClr val="accent1"/>
+        </a:effectRef>
+        <a:fontRef idx="minor">
+          <a:schemeClr val="lt1"/>
+        </a:fontRef>
+      </a:style>
+    </a:spDef>
+    <a:lnDef>
+      <a:spPr/>
+      <a:bodyPr/>
+      <a:lstStyle/>
+      <a:style>
+        <a:lnRef idx="2">
+          <a:schemeClr val="accent1"/>
+        </a:lnRef>
+        <a:fillRef idx="0">
+          <a:schemeClr val="accent1"/>
+        </a:fillRef>
+        <a:effectRef idx="1">
+          <a:schemeClr val="accent1"/>
+        </a:effectRef>
+        <a:fontRef idx="minor">
+          <a:schemeClr val="tx1"/>
+        </a:fontRef>
+      </a:style>
+    </a:lnDef>
+  </a:objectDefaults>
+  <a:extraClrSchemeLst/>
+</a:theme>
 </file>
--- a/assets/QueryForge-Pitch.pptx
+++ b/assets/QueryForge-Pitch.pptx
@@ -114,1056 +114,6 @@
     </a:lvl9pPr>
   </p:defaultTextStyle>
 </p:presentation>
-</file>
-
-<file path=ppt/notesMasters/notesMaster1.xml><?xml version="1.0" encoding="utf-8"?>
-<p:notesMaster xmlns:a="http://schemas.openxmlformats.org/drawingml/2006/main" xmlns:p="http://schemas.openxmlformats.org/presentationml/2006/main" xmlns:r="http://schemas.openxmlformats.org/officeDocument/2006/relationships">
-  <p:cSld>
-    <p:bg>
-      <p:bgRef idx="1001">
-        <a:schemeClr val="bg1"/>
-      </p:bgRef>
-    </p:bg>
-    <p:spTree>
-      <p:nvGrpSpPr>
-        <p:cNvPr id="1" name=""/>
-        <p:cNvGrpSpPr/>
-        <p:nvPr/>
-      </p:nvGrpSpPr>
-      <p:grpSpPr>
-        <a:xfrm>
-          <a:off x="0" y="0"/>
-          <a:ext cx="0" cy="0"/>
-          <a:chOff x="0" y="0"/>
-          <a:chExt cx="0" cy="0"/>
-        </a:xfrm>
-      </p:grpSpPr>
-      <p:sp>
-        <p:nvSpPr>
-          <p:cNvPr id="2" name="Header Placeholder 1"/>
-          <p:cNvSpPr>
-            <a:spLocks noGrp="1"/>
-          </p:cNvSpPr>
-          <p:nvPr>
-            <p:ph type="hdr" sz="quarter"/>
-          </p:nvPr>
-        </p:nvSpPr>
-        <p:spPr>
-          <a:xfrm>
-            <a:off x="0" y="0"/>
-            <a:ext cx="2971800" cy="457200"/>
-          </a:xfrm>
-          <a:prstGeom prst="rect">
-            <a:avLst/>
-          </a:prstGeom>
-        </p:spPr>
-        <p:txBody>
-          <a:bodyPr vert="horz" lIns="91440" tIns="45720" rIns="91440" bIns="45720" rtlCol="0"/>
-          <a:lstStyle>
-            <a:lvl1pPr algn="l">
-              <a:defRPr sz="1200"/>
-            </a:lvl1pPr>
-          </a:lstStyle>
-          <a:p>
-            <a:endParaRPr lang="en-US"/>
-          </a:p>
-        </p:txBody>
-      </p:sp>
-      <p:sp>
-        <p:nvSpPr>
-          <p:cNvPr id="3" name="Date Placeholder 2"/>
-          <p:cNvSpPr>
-            <a:spLocks noGrp="1"/>
-          </p:cNvSpPr>
-          <p:nvPr>
-            <p:ph type="dt" idx="1"/>
-          </p:nvPr>
-        </p:nvSpPr>
-        <p:spPr>
-          <a:xfrm>
-            <a:off x="3884613" y="0"/>
-            <a:ext cx="2971800" cy="457200"/>
-          </a:xfrm>
-          <a:prstGeom prst="rect">
-            <a:avLst/>
-          </a:prstGeom>
-        </p:spPr>
-        <p:txBody>
-          <a:bodyPr vert="horz" lIns="91440" tIns="45720" rIns="91440" bIns="45720" rtlCol="0"/>
-          <a:lstStyle>
-            <a:lvl1pPr algn="r">
-              <a:defRPr sz="1200"/>
-            </a:lvl1pPr>
-          </a:lstStyle>
-          <a:p>
-            <a:fld id="{0F89C1C7-3DCD-1040-A9CF-14679D8B5DDD}" type="datetimeFigureOut">
-              <a:rPr lang="en-US" smtClean="0"/>
-              <a:t>10/17/16</a:t>
-            </a:fld>
-            <a:endParaRPr lang="en-US"/>
-          </a:p>
-        </p:txBody>
-      </p:sp>
-      <p:sp>
-        <p:nvSpPr>
-          <p:cNvPr id="4" name="Slide Image Placeholder 3"/>
-          <p:cNvSpPr>
-            <a:spLocks noGrp="1" noRot="1" noChangeAspect="1"/>
-          </p:cNvSpPr>
-          <p:nvPr>
-            <p:ph type="sldImg" idx="2"/>
-          </p:nvPr>
-        </p:nvSpPr>
-        <p:spPr>
-          <a:xfrm>
-            <a:off x="1143000" y="685800"/>
-            <a:ext cx="4572000" cy="3429000"/>
-          </a:xfrm>
-          <a:prstGeom prst="rect">
-            <a:avLst/>
-          </a:prstGeom>
-          <a:noFill/>
-          <a:ln w="12700">
-            <a:solidFill>
-              <a:prstClr val="black"/>
-            </a:solidFill>
-          </a:ln>
-        </p:spPr>
-        <p:txBody>
-          <a:bodyPr vert="horz" lIns="91440" tIns="45720" rIns="91440" bIns="45720" rtlCol="0" anchor="ctr"/>
-          <a:lstStyle/>
-          <a:p>
-            <a:endParaRPr lang="en-US"/>
-          </a:p>
-        </p:txBody>
-      </p:sp>
-      <p:sp>
-        <p:nvSpPr>
-          <p:cNvPr id="5" name="Notes Placeholder 4"/>
-          <p:cNvSpPr>
-            <a:spLocks noGrp="1"/>
-          </p:cNvSpPr>
-          <p:nvPr>
-            <p:ph type="body" sz="quarter" idx="3"/>
-          </p:nvPr>
-        </p:nvSpPr>
-        <p:spPr>
-          <a:xfrm>
-            <a:off x="685800" y="4343400"/>
-            <a:ext cx="5486400" cy="4114800"/>
-          </a:xfrm>
-          <a:prstGeom prst="rect">
-            <a:avLst/>
-          </a:prstGeom>
-        </p:spPr>
-        <p:txBody>
-          <a:bodyPr vert="horz" lIns="91440" tIns="45720" rIns="91440" bIns="45720" rtlCol="0"/>
-          <a:lstStyle/>
-          <a:p>
-            <a:pPr lvl="0"/>
-            <a:r>
-              <a:rPr lang="en-US" smtClean="0"/>
-              <a:t>Click to edit Master text styles</a:t>
-            </a:r>
-          </a:p>
-          <a:p>
-            <a:pPr lvl="1"/>
-            <a:r>
-              <a:rPr lang="en-US" smtClean="0"/>
-              <a:t>Second level</a:t>
-            </a:r>
-          </a:p>
-          <a:p>
-            <a:pPr lvl="2"/>
-            <a:r>
-              <a:rPr lang="en-US" smtClean="0"/>
-              <a:t>Third level</a:t>
-            </a:r>
-          </a:p>
-          <a:p>
-            <a:pPr lvl="3"/>
-            <a:r>
-              <a:rPr lang="en-US" smtClean="0"/>
-              <a:t>Fourth level</a:t>
-            </a:r>
-          </a:p>
-          <a:p>
-            <a:pPr lvl="4"/>
-            <a:r>
-              <a:rPr lang="en-US" smtClean="0"/>
-              <a:t>Fifth level</a:t>
-            </a:r>
-            <a:endParaRPr lang="en-US"/>
-          </a:p>
-        </p:txBody>
-      </p:sp>
-      <p:sp>
-        <p:nvSpPr>
-          <p:cNvPr id="6" name="Footer Placeholder 5"/>
-          <p:cNvSpPr>
-            <a:spLocks noGrp="1"/>
-          </p:cNvSpPr>
-          <p:nvPr>
-            <p:ph type="ftr" sz="quarter" idx="4"/>
-          </p:nvPr>
-        </p:nvSpPr>
-        <p:spPr>
-          <a:xfrm>
-            <a:off x="0" y="8685213"/>
-            <a:ext cx="2971800" cy="457200"/>
-          </a:xfrm>
-          <a:prstGeom prst="rect">
-            <a:avLst/>
-          </a:prstGeom>
-        </p:spPr>
-        <p:txBody>
-          <a:bodyPr vert="horz" lIns="91440" tIns="45720" rIns="91440" bIns="45720" rtlCol="0" anchor="b"/>
-          <a:lstStyle>
-            <a:lvl1pPr algn="l">
-              <a:defRPr sz="1200"/>
-            </a:lvl1pPr>
-          </a:lstStyle>
-          <a:p>
-            <a:endParaRPr lang="en-US"/>
-          </a:p>
-        </p:txBody>
-      </p:sp>
-      <p:sp>
-        <p:nvSpPr>
-          <p:cNvPr id="7" name="Slide Number Placeholder 6"/>
-          <p:cNvSpPr>
-            <a:spLocks noGrp="1"/>
-          </p:cNvSpPr>
-          <p:nvPr>
-            <p:ph type="sldNum" sz="quarter" idx="5"/>
-          </p:nvPr>
-        </p:nvSpPr>
-        <p:spPr>
-          <a:xfrm>
-            <a:off x="3884613" y="8685213"/>
-            <a:ext cx="2971800" cy="457200"/>
-          </a:xfrm>
-          <a:prstGeom prst="rect">
-            <a:avLst/>
-          </a:prstGeom>
-        </p:spPr>
-        <p:txBody>
-          <a:bodyPr vert="horz" lIns="91440" tIns="45720" rIns="91440" bIns="45720" rtlCol="0" anchor="b"/>
-          <a:lstStyle>
-            <a:lvl1pPr algn="r">
-              <a:defRPr sz="1200"/>
-            </a:lvl1pPr>
-          </a:lstStyle>
-          <a:p>
-            <a:fld id="{BB5E49A5-4136-284D-997B-48E1D791AD67}" type="slidenum">
-              <a:rPr lang="en-US" smtClean="0"/>
-              <a:t>‹#›</a:t>
-            </a:fld>
-            <a:endParaRPr lang="en-US"/>
-          </a:p>
-        </p:txBody>
-      </p:sp>
-    </p:spTree>
-    <p:extLst>
-      <p:ext uri="{BB962C8B-B14F-4D97-AF65-F5344CB8AC3E}">
-        <p14:creationId xmlns:p14="http://schemas.microsoft.com/office/powerpoint/2010/main" val="2623252185"/>
-      </p:ext>
-    </p:extLst>
-  </p:cSld>
-  <p:clrMap bg1="lt1" tx1="dk1" bg2="lt2" tx2="dk2" accent1="accent1" accent2="accent2" accent3="accent3" accent4="accent4" accent5="accent5" accent6="accent6" hlink="hlink" folHlink="folHlink"/>
-  <p:notesStyle>
-    <a:lvl1pPr marL="0" algn="l" defTabSz="457200" rtl="0" eaLnBrk="1" latinLnBrk="0" hangingPunct="1">
-      <a:defRPr sz="1200" kern="1200">
-        <a:solidFill>
-          <a:schemeClr val="tx1"/>
-        </a:solidFill>
-        <a:latin typeface="+mn-lt"/>
-        <a:ea typeface="+mn-ea"/>
-        <a:cs typeface="+mn-cs"/>
-      </a:defRPr>
-    </a:lvl1pPr>
-    <a:lvl2pPr marL="457200" algn="l" defTabSz="457200" rtl="0" eaLnBrk="1" latinLnBrk="0" hangingPunct="1">
-      <a:defRPr sz="1200" kern="1200">
-        <a:solidFill>
-          <a:schemeClr val="tx1"/>
-        </a:solidFill>
-        <a:latin typeface="+mn-lt"/>
-        <a:ea typeface="+mn-ea"/>
-        <a:cs typeface="+mn-cs"/>
-      </a:defRPr>
-    </a:lvl2pPr>
-    <a:lvl3pPr marL="914400" algn="l" defTabSz="457200" rtl="0" eaLnBrk="1" latinLnBrk="0" hangingPunct="1">
-      <a:defRPr sz="1200" kern="1200">
-        <a:solidFill>
-          <a:schemeClr val="tx1"/>
-        </a:solidFill>
-        <a:latin typeface="+mn-lt"/>
-        <a:ea typeface="+mn-ea"/>
-        <a:cs typeface="+mn-cs"/>
-      </a:defRPr>
-    </a:lvl3pPr>
-    <a:lvl4pPr marL="1371600" algn="l" defTabSz="457200" rtl="0" eaLnBrk="1" latinLnBrk="0" hangingPunct="1">
-      <a:defRPr sz="1200" kern="1200">
-        <a:solidFill>
-          <a:schemeClr val="tx1"/>
-        </a:solidFill>
-        <a:latin typeface="+mn-lt"/>
-        <a:ea typeface="+mn-ea"/>
-        <a:cs typeface="+mn-cs"/>
-      </a:defRPr>
-    </a:lvl4pPr>
-    <a:lvl5pPr marL="1828800" algn="l" defTabSz="457200" rtl="0" eaLnBrk="1" latinLnBrk="0" hangingPunct="1">
-      <a:defRPr sz="1200" kern="1200">
-        <a:solidFill>
-          <a:schemeClr val="tx1"/>
-        </a:solidFill>
-        <a:latin typeface="+mn-lt"/>
-        <a:ea typeface="+mn-ea"/>
-        <a:cs typeface="+mn-cs"/>
-      </a:defRPr>
-    </a:lvl5pPr>
-    <a:lvl6pPr marL="2286000" algn="l" defTabSz="457200" rtl="0" eaLnBrk="1" latinLnBrk="0" hangingPunct="1">
-      <a:defRPr sz="1200" kern="1200">
-        <a:solidFill>
-          <a:schemeClr val="tx1"/>
-        </a:solidFill>
-        <a:latin typeface="+mn-lt"/>
-        <a:ea typeface="+mn-ea"/>
-        <a:cs typeface="+mn-cs"/>
-      </a:defRPr>
-    </a:lvl6pPr>
-    <a:lvl7pPr marL="2743200" algn="l" defTabSz="457200" rtl="0" eaLnBrk="1" latinLnBrk="0" hangingPunct="1">
-      <a:defRPr sz="1200" kern="1200">
-        <a:solidFill>
-          <a:schemeClr val="tx1"/>
-        </a:solidFill>
-        <a:latin typeface="+mn-lt"/>
-        <a:ea typeface="+mn-ea"/>
-        <a:cs typeface="+mn-cs"/>
-      </a:defRPr>
-    </a:lvl7pPr>
-    <a:lvl8pPr marL="3200400" algn="l" defTabSz="457200" rtl="0" eaLnBrk="1" latinLnBrk="0" hangingPunct="1">
-      <a:defRPr sz="1200" kern="1200">
-        <a:solidFill>
-          <a:schemeClr val="tx1"/>
-        </a:solidFill>
-        <a:latin typeface="+mn-lt"/>
-        <a:ea typeface="+mn-ea"/>
-        <a:cs typeface="+mn-cs"/>
-      </a:defRPr>
-    </a:lvl8pPr>
-    <a:lvl9pPr marL="3657600" algn="l" defTabSz="457200" rtl="0" eaLnBrk="1" latinLnBrk="0" hangingPunct="1">
-      <a:defRPr sz="1200" kern="1200">
-        <a:solidFill>
-          <a:schemeClr val="tx1"/>
-        </a:solidFill>
-        <a:latin typeface="+mn-lt"/>
-        <a:ea typeface="+mn-ea"/>
-        <a:cs typeface="+mn-cs"/>
-      </a:defRPr>
-    </a:lvl9pPr>
-  </p:notesStyle>
-</p:notesMaster>
-</file>
-
-<file path=ppt/notesSlides/notesSlide1.xml><?xml version="1.0" encoding="utf-8"?>
-<p:notes xmlns:a="http://schemas.openxmlformats.org/drawingml/2006/main" xmlns:p="http://schemas.openxmlformats.org/presentationml/2006/main" xmlns:r="http://schemas.openxmlformats.org/officeDocument/2006/relationships">
-  <p:cSld>
-    <p:spTree>
-      <p:nvGrpSpPr>
-        <p:cNvPr id="1" name=""/>
-        <p:cNvGrpSpPr/>
-        <p:nvPr/>
-      </p:nvGrpSpPr>
-      <p:grpSpPr>
-        <a:xfrm>
-          <a:off x="0" y="0"/>
-          <a:ext cx="0" cy="0"/>
-          <a:chOff x="0" y="0"/>
-          <a:chExt cx="0" cy="0"/>
-        </a:xfrm>
-      </p:grpSpPr>
-      <p:sp>
-        <p:nvSpPr>
-          <p:cNvPr id="2" name="Slide Image Placeholder 1"/>
-          <p:cNvSpPr>
-            <a:spLocks noGrp="1"/>
-          </p:cNvSpPr>
-          <p:nvPr>
-            <p:ph type="sldImg" idx="2"/>
-          </p:nvPr>
-        </p:nvSpPr>
-        <p:spPr/>
-      </p:sp>
-      <p:sp>
-        <p:nvSpPr>
-          <p:cNvPr id="3" name="Notes Placeholder 2"/>
-          <p:cNvSpPr>
-            <a:spLocks noGrp="1"/>
-          </p:cNvSpPr>
-          <p:nvPr>
-            <p:ph type="body" idx="3" sz="quarter"/>
-          </p:nvPr>
-        </p:nvSpPr>
-        <p:spPr/>
-        <p:txBody>
-          <a:bodyPr/>
-          <a:lstStyle/>
-          <a:p>
-            <a:r>
-              <a:t>大家好，我是 QueryForge 的开发者。QueryForge 是一个 AI 数据分析智能体，让业务团队用自然语言直接提问。我们用 Kaggle 上 Olist 巴西电商的真实数据——99,441 笔订单——做了完整验证。不要提模型名和框架。</a:t>
-            </a:r>
-          </a:p>
-        </p:txBody>
-      </p:sp>
-      <p:sp>
-        <p:nvSpPr>
-          <p:cNvPr id="4" name="Slide Number Placeholder 3"/>
-          <p:cNvSpPr>
-            <a:spLocks noGrp="1"/>
-          </p:cNvSpPr>
-          <p:nvPr>
-            <p:ph type="sldNum" idx="5" sz="quarter"/>
-          </p:nvPr>
-        </p:nvSpPr>
-        <p:spPr/>
-      </p:sp>
-    </p:spTree>
-  </p:cSld>
-  <p:clrMapOvr>
-    <a:masterClrMapping/>
-  </p:clrMapOvr>
-</p:notes>
-</file>
-
-<file path=ppt/notesSlides/notesSlide10.xml><?xml version="1.0" encoding="utf-8"?>
-<p:notes xmlns:a="http://schemas.openxmlformats.org/drawingml/2006/main" xmlns:p="http://schemas.openxmlformats.org/presentationml/2006/main" xmlns:r="http://schemas.openxmlformats.org/officeDocument/2006/relationships">
-  <p:cSld>
-    <p:spTree>
-      <p:nvGrpSpPr>
-        <p:cNvPr id="1" name=""/>
-        <p:cNvGrpSpPr/>
-        <p:nvPr/>
-      </p:nvGrpSpPr>
-      <p:grpSpPr>
-        <a:xfrm>
-          <a:off x="0" y="0"/>
-          <a:ext cx="0" cy="0"/>
-          <a:chOff x="0" y="0"/>
-          <a:chExt cx="0" cy="0"/>
-        </a:xfrm>
-      </p:grpSpPr>
-      <p:sp>
-        <p:nvSpPr>
-          <p:cNvPr id="2" name="Slide Image Placeholder 1"/>
-          <p:cNvSpPr>
-            <a:spLocks noGrp="1"/>
-          </p:cNvSpPr>
-          <p:nvPr>
-            <p:ph type="sldImg" idx="2"/>
-          </p:nvPr>
-        </p:nvSpPr>
-        <p:spPr/>
-      </p:sp>
-      <p:sp>
-        <p:nvSpPr>
-          <p:cNvPr id="3" name="Notes Placeholder 2"/>
-          <p:cNvSpPr>
-            <a:spLocks noGrp="1"/>
-          </p:cNvSpPr>
-          <p:nvPr>
-            <p:ph type="body" idx="3" sz="quarter"/>
-          </p:nvPr>
-        </p:nvSpPr>
-        <p:spPr/>
-        <p:txBody>
-          <a:bodyPr/>
-          <a:lstStyle/>
-          <a:p>
-            <a:r>
-              <a:t>结束语：不是替代分析师，是放大10倍。扫二维码体验，GitHub开源。谢谢。指向二维码。时间允许可现场开演示。</a:t>
-            </a:r>
-          </a:p>
-        </p:txBody>
-      </p:sp>
-      <p:sp>
-        <p:nvSpPr>
-          <p:cNvPr id="4" name="Slide Number Placeholder 3"/>
-          <p:cNvSpPr>
-            <a:spLocks noGrp="1"/>
-          </p:cNvSpPr>
-          <p:nvPr>
-            <p:ph type="sldNum" idx="5" sz="quarter"/>
-          </p:nvPr>
-        </p:nvSpPr>
-        <p:spPr/>
-      </p:sp>
-    </p:spTree>
-  </p:cSld>
-  <p:clrMapOvr>
-    <a:masterClrMapping/>
-  </p:clrMapOvr>
-</p:notes>
-</file>
-
-<file path=ppt/notesSlides/notesSlide2.xml><?xml version="1.0" encoding="utf-8"?>
-<p:notes xmlns:a="http://schemas.openxmlformats.org/drawingml/2006/main" xmlns:p="http://schemas.openxmlformats.org/presentationml/2006/main" xmlns:r="http://schemas.openxmlformats.org/officeDocument/2006/relationships">
-  <p:cSld>
-    <p:spTree>
-      <p:nvGrpSpPr>
-        <p:cNvPr id="1" name=""/>
-        <p:cNvGrpSpPr/>
-        <p:nvPr/>
-      </p:nvGrpSpPr>
-      <p:grpSpPr>
-        <a:xfrm>
-          <a:off x="0" y="0"/>
-          <a:ext cx="0" cy="0"/>
-          <a:chOff x="0" y="0"/>
-          <a:chExt cx="0" cy="0"/>
-        </a:xfrm>
-      </p:grpSpPr>
-      <p:sp>
-        <p:nvSpPr>
-          <p:cNvPr id="2" name="Slide Image Placeholder 1"/>
-          <p:cNvSpPr>
-            <a:spLocks noGrp="1"/>
-          </p:cNvSpPr>
-          <p:nvPr>
-            <p:ph type="sldImg" idx="2"/>
-          </p:nvPr>
-        </p:nvSpPr>
-        <p:spPr/>
-      </p:sp>
-      <p:sp>
-        <p:nvSpPr>
-          <p:cNvPr id="3" name="Notes Placeholder 2"/>
-          <p:cNvSpPr>
-            <a:spLocks noGrp="1"/>
-          </p:cNvSpPr>
-          <p:nvPr>
-            <p:ph type="body" idx="3" sz="quarter"/>
-          </p:nvPr>
-        </p:nvSpPr>
-        <p:spPr/>
-        <p:txBody>
-          <a:bodyPr/>
-          <a:lstStyle/>
-          <a:p>
-            <a:r>
-              <a:t>痛点：分析师 80% 时间在重复拉数。运营问华东卖了多少，得排队；市场问哪个品类增长最快，得等报表。关键句：痛点不是没有数据，是数据到不了需要的人手里。</a:t>
-            </a:r>
-          </a:p>
-        </p:txBody>
-      </p:sp>
-      <p:sp>
-        <p:nvSpPr>
-          <p:cNvPr id="4" name="Slide Number Placeholder 3"/>
-          <p:cNvSpPr>
-            <a:spLocks noGrp="1"/>
-          </p:cNvSpPr>
-          <p:nvPr>
-            <p:ph type="sldNum" idx="5" sz="quarter"/>
-          </p:nvPr>
-        </p:nvSpPr>
-        <p:spPr/>
-      </p:sp>
-    </p:spTree>
-  </p:cSld>
-  <p:clrMapOvr>
-    <a:masterClrMapping/>
-  </p:clrMapOvr>
-</p:notes>
-</file>
-
-<file path=ppt/notesSlides/notesSlide3.xml><?xml version="1.0" encoding="utf-8"?>
-<p:notes xmlns:a="http://schemas.openxmlformats.org/drawingml/2006/main" xmlns:p="http://schemas.openxmlformats.org/presentationml/2006/main" xmlns:r="http://schemas.openxmlformats.org/officeDocument/2006/relationships">
-  <p:cSld>
-    <p:spTree>
-      <p:nvGrpSpPr>
-        <p:cNvPr id="1" name=""/>
-        <p:cNvGrpSpPr/>
-        <p:nvPr/>
-      </p:nvGrpSpPr>
-      <p:grpSpPr>
-        <a:xfrm>
-          <a:off x="0" y="0"/>
-          <a:ext cx="0" cy="0"/>
-          <a:chOff x="0" y="0"/>
-          <a:chExt cx="0" cy="0"/>
-        </a:xfrm>
-      </p:grpSpPr>
-      <p:sp>
-        <p:nvSpPr>
-          <p:cNvPr id="2" name="Slide Image Placeholder 1"/>
-          <p:cNvSpPr>
-            <a:spLocks noGrp="1"/>
-          </p:cNvSpPr>
-          <p:nvPr>
-            <p:ph type="sldImg" idx="2"/>
-          </p:nvPr>
-        </p:nvSpPr>
-        <p:spPr/>
-      </p:sp>
-      <p:sp>
-        <p:nvSpPr>
-          <p:cNvPr id="3" name="Notes Placeholder 2"/>
-          <p:cNvSpPr>
-            <a:spLocks noGrp="1"/>
-          </p:cNvSpPr>
-          <p:nvPr>
-            <p:ph type="body" idx="3" sz="quarter"/>
-          </p:nvPr>
-        </p:nvSpPr>
-        <p:spPr/>
-        <p:txBody>
-          <a:bodyPr/>
-          <a:lstStyle/>
-          <a:p>
-            <a:r>
-              <a:t>方案：分析师定义一次指标口径，业务团队永久使用。从提需求等三天到自己问自己看。不是每次重新理解，而是一次定义永久可用。</a:t>
-            </a:r>
-          </a:p>
-        </p:txBody>
-      </p:sp>
-      <p:sp>
-        <p:nvSpPr>
-          <p:cNvPr id="4" name="Slide Number Placeholder 3"/>
-          <p:cNvSpPr>
-            <a:spLocks noGrp="1"/>
-          </p:cNvSpPr>
-          <p:nvPr>
-            <p:ph type="sldNum" idx="5" sz="quarter"/>
-          </p:nvPr>
-        </p:nvSpPr>
-        <p:spPr/>
-      </p:sp>
-    </p:spTree>
-  </p:cSld>
-  <p:clrMapOvr>
-    <a:masterClrMapping/>
-  </p:clrMapOvr>
-</p:notes>
-</file>
-
-<file path=ppt/notesSlides/notesSlide4.xml><?xml version="1.0" encoding="utf-8"?>
-<p:notes xmlns:a="http://schemas.openxmlformats.org/drawingml/2006/main" xmlns:p="http://schemas.openxmlformats.org/presentationml/2006/main" xmlns:r="http://schemas.openxmlformats.org/officeDocument/2006/relationships">
-  <p:cSld>
-    <p:spTree>
-      <p:nvGrpSpPr>
-        <p:cNvPr id="1" name=""/>
-        <p:cNvGrpSpPr/>
-        <p:nvPr/>
-      </p:nvGrpSpPr>
-      <p:grpSpPr>
-        <a:xfrm>
-          <a:off x="0" y="0"/>
-          <a:ext cx="0" cy="0"/>
-          <a:chOff x="0" y="0"/>
-          <a:chExt cx="0" cy="0"/>
-        </a:xfrm>
-      </p:grpSpPr>
-      <p:sp>
-        <p:nvSpPr>
-          <p:cNvPr id="2" name="Slide Image Placeholder 1"/>
-          <p:cNvSpPr>
-            <a:spLocks noGrp="1"/>
-          </p:cNvSpPr>
-          <p:nvPr>
-            <p:ph type="sldImg" idx="2"/>
-          </p:nvPr>
-        </p:nvSpPr>
-        <p:spPr/>
-      </p:sp>
-      <p:sp>
-        <p:nvSpPr>
-          <p:cNvPr id="3" name="Notes Placeholder 2"/>
-          <p:cNvSpPr>
-            <a:spLocks noGrp="1"/>
-          </p:cNvSpPr>
-          <p:nvPr>
-            <p:ph type="body" idx="3" sz="quarter"/>
-          </p:nvPr>
-        </p:nvSpPr>
-        <p:spPr/>
-        <p:txBody>
-          <a:bodyPr/>
-          <a:lstStyle/>
-          <a:p>
-            <a:r>
-              <a:t>四能力快速过：取数可视化、归因建议、智能纠错、指标库。不要展开，演示环节现场展示。</a:t>
-            </a:r>
-          </a:p>
-        </p:txBody>
-      </p:sp>
-      <p:sp>
-        <p:nvSpPr>
-          <p:cNvPr id="4" name="Slide Number Placeholder 3"/>
-          <p:cNvSpPr>
-            <a:spLocks noGrp="1"/>
-          </p:cNvSpPr>
-          <p:nvPr>
-            <p:ph type="sldNum" idx="5" sz="quarter"/>
-          </p:nvPr>
-        </p:nvSpPr>
-        <p:spPr/>
-      </p:sp>
-    </p:spTree>
-  </p:cSld>
-  <p:clrMapOvr>
-    <a:masterClrMapping/>
-  </p:clrMapOvr>
-</p:notes>
-</file>
-
-<file path=ppt/notesSlides/notesSlide5.xml><?xml version="1.0" encoding="utf-8"?>
-<p:notes xmlns:a="http://schemas.openxmlformats.org/drawingml/2006/main" xmlns:p="http://schemas.openxmlformats.org/presentationml/2006/main" xmlns:r="http://schemas.openxmlformats.org/officeDocument/2006/relationships">
-  <p:cSld>
-    <p:spTree>
-      <p:nvGrpSpPr>
-        <p:cNvPr id="1" name=""/>
-        <p:cNvGrpSpPr/>
-        <p:nvPr/>
-      </p:nvGrpSpPr>
-      <p:grpSpPr>
-        <a:xfrm>
-          <a:off x="0" y="0"/>
-          <a:ext cx="0" cy="0"/>
-          <a:chOff x="0" y="0"/>
-          <a:chExt cx="0" cy="0"/>
-        </a:xfrm>
-      </p:grpSpPr>
-      <p:sp>
-        <p:nvSpPr>
-          <p:cNvPr id="2" name="Slide Image Placeholder 1"/>
-          <p:cNvSpPr>
-            <a:spLocks noGrp="1"/>
-          </p:cNvSpPr>
-          <p:nvPr>
-            <p:ph type="sldImg" idx="2"/>
-          </p:nvPr>
-        </p:nvSpPr>
-        <p:spPr/>
-      </p:sp>
-      <p:sp>
-        <p:nvSpPr>
-          <p:cNvPr id="3" name="Notes Placeholder 2"/>
-          <p:cNvSpPr>
-            <a:spLocks noGrp="1"/>
-          </p:cNvSpPr>
-          <p:nvPr>
-            <p:ph type="body" idx="3" sz="quarter"/>
-          </p:nvPr>
-        </p:nvSpPr>
-        <p:spPr/>
-        <p:txBody>
-          <a:bodyPr/>
-          <a:lstStyle/>
-          <a:p>
-            <a:r>
-              <a:t>真实数据：Olist 巴西电商 99K 订单 96K 用户 74 品类。评委可随时验证——数据集公开，查询可复现。</a:t>
-            </a:r>
-          </a:p>
-        </p:txBody>
-      </p:sp>
-      <p:sp>
-        <p:nvSpPr>
-          <p:cNvPr id="4" name="Slide Number Placeholder 3"/>
-          <p:cNvSpPr>
-            <a:spLocks noGrp="1"/>
-          </p:cNvSpPr>
-          <p:nvPr>
-            <p:ph type="sldNum" idx="5" sz="quarter"/>
-          </p:nvPr>
-        </p:nvSpPr>
-        <p:spPr/>
-      </p:sp>
-    </p:spTree>
-  </p:cSld>
-  <p:clrMapOvr>
-    <a:masterClrMapping/>
-  </p:clrMapOvr>
-</p:notes>
-</file>
-
-<file path=ppt/notesSlides/notesSlide6.xml><?xml version="1.0" encoding="utf-8"?>
-<p:notes xmlns:a="http://schemas.openxmlformats.org/drawingml/2006/main" xmlns:p="http://schemas.openxmlformats.org/presentationml/2006/main" xmlns:r="http://schemas.openxmlformats.org/officeDocument/2006/relationships">
-  <p:cSld>
-    <p:spTree>
-      <p:nvGrpSpPr>
-        <p:cNvPr id="1" name=""/>
-        <p:cNvGrpSpPr/>
-        <p:nvPr/>
-      </p:nvGrpSpPr>
-      <p:grpSpPr>
-        <a:xfrm>
-          <a:off x="0" y="0"/>
-          <a:ext cx="0" cy="0"/>
-          <a:chOff x="0" y="0"/>
-          <a:chExt cx="0" cy="0"/>
-        </a:xfrm>
-      </p:grpSpPr>
-      <p:sp>
-        <p:nvSpPr>
-          <p:cNvPr id="2" name="Slide Image Placeholder 1"/>
-          <p:cNvSpPr>
-            <a:spLocks noGrp="1"/>
-          </p:cNvSpPr>
-          <p:nvPr>
-            <p:ph type="sldImg" idx="2"/>
-          </p:nvPr>
-        </p:nvSpPr>
-        <p:spPr/>
-      </p:sp>
-      <p:sp>
-        <p:nvSpPr>
-          <p:cNvPr id="3" name="Notes Placeholder 2"/>
-          <p:cNvSpPr>
-            <a:spLocks noGrp="1"/>
-          </p:cNvSpPr>
-          <p:nvPr>
-            <p:ph type="body" idx="3" sz="quarter"/>
-          </p:nvPr>
-        </p:nvSpPr>
-        <p:spPr/>
-        <p:txBody>
-          <a:bodyPr/>
-          <a:lstStyle/>
-          <a:p>
-            <a:r>
-              <a:t>三层架构：受控语义层（不靠LLM猜表名）、验证式Agent循环（SQL→验证→执行→分析）、企业数据平面（Schema-only、只读、AST校验）。关键句：不是套壳ChatGPT，每层有安全边界。</a:t>
-            </a:r>
-          </a:p>
-        </p:txBody>
-      </p:sp>
-      <p:sp>
-        <p:nvSpPr>
-          <p:cNvPr id="4" name="Slide Number Placeholder 3"/>
-          <p:cNvSpPr>
-            <a:spLocks noGrp="1"/>
-          </p:cNvSpPr>
-          <p:nvPr>
-            <p:ph type="sldNum" idx="5" sz="quarter"/>
-          </p:nvPr>
-        </p:nvSpPr>
-        <p:spPr/>
-      </p:sp>
-    </p:spTree>
-  </p:cSld>
-  <p:clrMapOvr>
-    <a:masterClrMapping/>
-  </p:clrMapOvr>
-</p:notes>
-</file>
-
-<file path=ppt/notesSlides/notesSlide7.xml><?xml version="1.0" encoding="utf-8"?>
-<p:notes xmlns:a="http://schemas.openxmlformats.org/drawingml/2006/main" xmlns:p="http://schemas.openxmlformats.org/presentationml/2006/main" xmlns:r="http://schemas.openxmlformats.org/officeDocument/2006/relationships">
-  <p:cSld>
-    <p:spTree>
-      <p:nvGrpSpPr>
-        <p:cNvPr id="1" name=""/>
-        <p:cNvGrpSpPr/>
-        <p:nvPr/>
-      </p:nvGrpSpPr>
-      <p:grpSpPr>
-        <a:xfrm>
-          <a:off x="0" y="0"/>
-          <a:ext cx="0" cy="0"/>
-          <a:chOff x="0" y="0"/>
-          <a:chExt cx="0" cy="0"/>
-        </a:xfrm>
-      </p:grpSpPr>
-      <p:sp>
-        <p:nvSpPr>
-          <p:cNvPr id="2" name="Slide Image Placeholder 1"/>
-          <p:cNvSpPr>
-            <a:spLocks noGrp="1"/>
-          </p:cNvSpPr>
-          <p:nvPr>
-            <p:ph type="sldImg" idx="2"/>
-          </p:nvPr>
-        </p:nvSpPr>
-        <p:spPr/>
-      </p:sp>
-      <p:sp>
-        <p:nvSpPr>
-          <p:cNvPr id="3" name="Notes Placeholder 2"/>
-          <p:cNvSpPr>
-            <a:spLocks noGrp="1"/>
-          </p:cNvSpPr>
-          <p:nvPr>
-            <p:ph type="body" idx="3" sz="quarter"/>
-          </p:nvPr>
-        </p:nvSpPr>
-        <p:spPr/>
-        <p:txBody>
-          <a:bodyPr/>
-          <a:lstStyle/>
-          <a:p>
-            <a:r>
-              <a:t>数据合规：LLM只看Schema不看数据。SQL语法树解析只允许SELECT。数据库只读连接。生产路线图：RLS、PII脱敏、审计日志。同Snowflake Cortex和Databricks AI/BI。</a:t>
-            </a:r>
-          </a:p>
-        </p:txBody>
-      </p:sp>
-      <p:sp>
-        <p:nvSpPr>
-          <p:cNvPr id="4" name="Slide Number Placeholder 3"/>
-          <p:cNvSpPr>
-            <a:spLocks noGrp="1"/>
-          </p:cNvSpPr>
-          <p:nvPr>
-            <p:ph type="sldNum" idx="5" sz="quarter"/>
-          </p:nvPr>
-        </p:nvSpPr>
-        <p:spPr/>
-      </p:sp>
-    </p:spTree>
-  </p:cSld>
-  <p:clrMapOvr>
-    <a:masterClrMapping/>
-  </p:clrMapOvr>
-</p:notes>
-</file>
-
-<file path=ppt/notesSlides/notesSlide8.xml><?xml version="1.0" encoding="utf-8"?>
-<p:notes xmlns:a="http://schemas.openxmlformats.org/drawingml/2006/main" xmlns:p="http://schemas.openxmlformats.org/presentationml/2006/main" xmlns:r="http://schemas.openxmlformats.org/officeDocument/2006/relationships">
-  <p:cSld>
-    <p:spTree>
-      <p:nvGrpSpPr>
-        <p:cNvPr id="1" name=""/>
-        <p:cNvGrpSpPr/>
-        <p:nvPr/>
-      </p:nvGrpSpPr>
-      <p:grpSpPr>
-        <a:xfrm>
-          <a:off x="0" y="0"/>
-          <a:ext cx="0" cy="0"/>
-          <a:chOff x="0" y="0"/>
-          <a:chExt cx="0" cy="0"/>
-        </a:xfrm>
-      </p:grpSpPr>
-      <p:sp>
-        <p:nvSpPr>
-          <p:cNvPr id="2" name="Slide Image Placeholder 1"/>
-          <p:cNvSpPr>
-            <a:spLocks noGrp="1"/>
-          </p:cNvSpPr>
-          <p:nvPr>
-            <p:ph type="sldImg" idx="2"/>
-          </p:nvPr>
-        </p:nvSpPr>
-        <p:spPr/>
-      </p:sp>
-      <p:sp>
-        <p:nvSpPr>
-          <p:cNvPr id="3" name="Notes Placeholder 2"/>
-          <p:cNvSpPr>
-            <a:spLocks noGrp="1"/>
-          </p:cNvSpPr>
-          <p:nvPr>
-            <p:ph type="body" idx="3" sz="quarter"/>
-          </p:nvPr>
-        </p:nvSpPr>
-        <p:spPr/>
-        <p:txBody>
-          <a:bodyPr/>
-          <a:lstStyle/>
-          <a:p>
-            <a:r>
-              <a:t>生产路径快速过：Phase1 MVP 1-2周，Phase2 企业试用1-2月，Phase3 规模化3-6月。每查询$0.003。证明想过商业化就行。</a:t>
-            </a:r>
-          </a:p>
-        </p:txBody>
-      </p:sp>
-      <p:sp>
-        <p:nvSpPr>
-          <p:cNvPr id="4" name="Slide Number Placeholder 3"/>
-          <p:cNvSpPr>
-            <a:spLocks noGrp="1"/>
-          </p:cNvSpPr>
-          <p:nvPr>
-            <p:ph type="sldNum" idx="5" sz="quarter"/>
-          </p:nvPr>
-        </p:nvSpPr>
-        <p:spPr/>
-      </p:sp>
-    </p:spTree>
-  </p:cSld>
-  <p:clrMapOvr>
-    <a:masterClrMapping/>
-  </p:clrMapOvr>
-</p:notes>
-</file>
-
-<file path=ppt/notesSlides/notesSlide9.xml><?xml version="1.0" encoding="utf-8"?>
-<p:notes xmlns:a="http://schemas.openxmlformats.org/drawingml/2006/main" xmlns:p="http://schemas.openxmlformats.org/presentationml/2006/main" xmlns:r="http://schemas.openxmlformats.org/officeDocument/2006/relationships">
-  <p:cSld>
-    <p:spTree>
-      <p:nvGrpSpPr>
-        <p:cNvPr id="1" name=""/>
-        <p:cNvGrpSpPr/>
-        <p:nvPr/>
-      </p:nvGrpSpPr>
-      <p:grpSpPr>
-        <a:xfrm>
-          <a:off x="0" y="0"/>
-          <a:ext cx="0" cy="0"/>
-          <a:chOff x="0" y="0"/>
-          <a:chExt cx="0" cy="0"/>
-        </a:xfrm>
-      </p:grpSpPr>
-      <p:sp>
-        <p:nvSpPr>
-          <p:cNvPr id="2" name="Slide Image Placeholder 1"/>
-          <p:cNvSpPr>
-            <a:spLocks noGrp="1"/>
-          </p:cNvSpPr>
-          <p:nvPr>
-            <p:ph type="sldImg" idx="2"/>
-          </p:nvPr>
-        </p:nvSpPr>
-        <p:spPr/>
-      </p:sp>
-      <p:sp>
-        <p:nvSpPr>
-          <p:cNvPr id="3" name="Notes Placeholder 2"/>
-          <p:cNvSpPr>
-            <a:spLocks noGrp="1"/>
-          </p:cNvSpPr>
-          <p:nvPr>
-            <p:ph type="body" idx="3" sz="quarter"/>
-          </p:nvPr>
-        </p:nvSpPr>
-        <p:spPr/>
-        <p:txBody>
-          <a:bodyPr/>
-          <a:lstStyle/>
-          <a:p>
-            <a:r>
-              <a:t>双重价值：分析师减少80%重复工作变成定标准的，业务从等3天变成10秒。关键句：分析师被解放，业务被赋能。</a:t>
-            </a:r>
-          </a:p>
-        </p:txBody>
-      </p:sp>
-      <p:sp>
-        <p:nvSpPr>
-          <p:cNvPr id="4" name="Slide Number Placeholder 3"/>
-          <p:cNvSpPr>
-            <a:spLocks noGrp="1"/>
-          </p:cNvSpPr>
-          <p:nvPr>
-            <p:ph type="sldNum" idx="5" sz="quarter"/>
-          </p:nvPr>
-        </p:nvSpPr>
-        <p:spPr/>
-      </p:sp>
-    </p:spTree>
-  </p:cSld>
-  <p:clrMapOvr>
-    <a:masterClrMapping/>
-  </p:clrMapOvr>
-</p:notes>
 </file>
 
 <file path=ppt/slideLayouts/slideLayout1.xml><?xml version="1.0" encoding="utf-8"?>
@@ -4222,7 +3172,7 @@
                 <a:latin typeface="Arial"/>
                 <a:ea typeface="Microsoft YaHei"/>
               </a:rPr>
-              <a:t>AI 数据分析智能体 · 让业务团队自助取数</a:t>
+              <a:t>受治理的自助式商业分析层</a:t>
             </a:r>
           </a:p>
         </p:txBody>
@@ -4258,7 +3208,7 @@
                 <a:latin typeface="Arial"/>
                 <a:ea typeface="Microsoft YaHei"/>
               </a:rPr>
-              <a:t>ClawHunt Builder Camp 2026 · 72 小时构建</a:t>
+              <a:t>ClawHunt Builder Camp 2026 · Track C: Business on AI</a:t>
             </a:r>
           </a:p>
         </p:txBody>
@@ -4294,7 +3244,7 @@
                 <a:latin typeface="Arial"/>
                 <a:ea typeface="Microsoft YaHei"/>
               </a:rPr>
-              <a:t>基于 Olist 真实电商数据（99,441 笔订单）验证</a:t>
+              <a:t>通用商业分析工具 · Olist 作为本次 demo case</a:t>
             </a:r>
           </a:p>
         </p:txBody>
@@ -4406,7 +3356,7 @@
         <p:spPr>
           <a:xfrm>
             <a:off x="914400" y="3017520"/>
-            <a:ext cx="9144000" cy="731520"/>
+            <a:ext cx="7680960" cy="731520"/>
           </a:xfrm>
           <a:prstGeom prst="rect">
             <a:avLst/>
@@ -4428,8 +3378,8 @@
                 <a:latin typeface="Arial"/>
                 <a:ea typeface="Microsoft YaHei"/>
               </a:rPr>
-              <a:t>受控的对话式分析层
-不是让 AI 替代分析师，而是让分析师的能力通过 AI 放大 10 倍</a:t>
+              <a:t>受治理的自助式商业分析层
+核心口径由分析师定义，业务问题由 Agent 转成可信查询</a:t>
             </a:r>
           </a:p>
         </p:txBody>
@@ -4443,7 +3393,7 @@
         <p:spPr>
           <a:xfrm>
             <a:off x="914400" y="4389120"/>
-            <a:ext cx="9144000" cy="365760"/>
+            <a:ext cx="7498079" cy="365760"/>
           </a:xfrm>
           <a:prstGeom prst="rect">
             <a:avLst/>
@@ -4479,7 +3429,7 @@
         <p:spPr>
           <a:xfrm>
             <a:off x="914400" y="4846320"/>
-            <a:ext cx="9144000" cy="365760"/>
+            <a:ext cx="7498079" cy="365760"/>
           </a:xfrm>
           <a:prstGeom prst="rect">
             <a:avLst/>
@@ -4501,50 +3451,14 @@
                 <a:latin typeface="Arial"/>
                 <a:ea typeface="Microsoft YaHei"/>
               </a:rPr>
-              <a:t>github.com/eric-stone-plus/queryforge</a:t>
-            </a:r>
-          </a:p>
-        </p:txBody>
-      </p:sp>
-      <p:sp>
-        <p:nvSpPr>
-          <p:cNvPr id="6" name="TextBox 5"/>
-          <p:cNvSpPr txBox="1"/>
-          <p:nvPr/>
-        </p:nvSpPr>
-        <p:spPr>
-          <a:xfrm>
-            <a:off x="914400" y="5943600"/>
-            <a:ext cx="9144000" cy="365760"/>
-          </a:xfrm>
-          <a:prstGeom prst="rect">
-            <a:avLst/>
-          </a:prstGeom>
-          <a:noFill/>
-        </p:spPr>
-        <p:txBody>
-          <a:bodyPr wrap="square">
-            <a:spAutoFit/>
-          </a:bodyPr>
-          <a:lstStyle/>
-          <a:p>
-            <a:pPr algn="l"/>
-            <a:r>
-              <a:rPr sz="1100" b="0">
-                <a:solidFill>
-                  <a:srgbClr val="9A9A9A"/>
-                </a:solidFill>
-                <a:latin typeface="Arial"/>
-                <a:ea typeface="Microsoft YaHei"/>
-              </a:rPr>
-              <a:t>ClawHunt Builder Camp 2026 · Track A</a:t>
+              <a:t>github.com/eric-stone-plus/QueryForge</a:t>
             </a:r>
           </a:p>
         </p:txBody>
       </p:sp>
       <p:pic>
         <p:nvPicPr>
-          <p:cNvPr id="7" name="Picture 6" descr="qr-railway.png"/>
+          <p:cNvPr id="6" name="Picture 5" descr="qr-railway.png"/>
           <p:cNvPicPr>
             <a:picLocks noChangeAspect="1"/>
           </p:cNvPicPr>
@@ -4558,14 +3472,86 @@
         </p:blipFill>
         <p:spPr>
           <a:xfrm>
-            <a:off x="8686800" y="4114800"/>
-            <a:ext cx="1645920" cy="1645920"/>
+            <a:off x="9372600" y="3063240"/>
+            <a:ext cx="1508760" cy="1508760"/>
           </a:xfrm>
           <a:prstGeom prst="rect">
             <a:avLst/>
           </a:prstGeom>
         </p:spPr>
       </p:pic>
+      <p:sp>
+        <p:nvSpPr>
+          <p:cNvPr id="7" name="TextBox 6"/>
+          <p:cNvSpPr txBox="1"/>
+          <p:nvPr/>
+        </p:nvSpPr>
+        <p:spPr>
+          <a:xfrm>
+            <a:off x="9235440" y="4681728"/>
+            <a:ext cx="1783080" cy="320040"/>
+          </a:xfrm>
+          <a:prstGeom prst="rect">
+            <a:avLst/>
+          </a:prstGeom>
+          <a:noFill/>
+        </p:spPr>
+        <p:txBody>
+          <a:bodyPr wrap="square">
+            <a:spAutoFit/>
+          </a:bodyPr>
+          <a:lstStyle/>
+          <a:p>
+            <a:pPr algn="ctr"/>
+            <a:r>
+              <a:rPr sz="1100" b="0">
+                <a:solidFill>
+                  <a:srgbClr val="9A9A9A"/>
+                </a:solidFill>
+                <a:latin typeface="Arial"/>
+                <a:ea typeface="Microsoft YaHei"/>
+              </a:rPr>
+              <a:t>手机扫码体验</a:t>
+            </a:r>
+          </a:p>
+        </p:txBody>
+      </p:sp>
+      <p:sp>
+        <p:nvSpPr>
+          <p:cNvPr id="8" name="TextBox 7"/>
+          <p:cNvSpPr txBox="1"/>
+          <p:nvPr/>
+        </p:nvSpPr>
+        <p:spPr>
+          <a:xfrm>
+            <a:off x="914400" y="5943600"/>
+            <a:ext cx="9144000" cy="365760"/>
+          </a:xfrm>
+          <a:prstGeom prst="rect">
+            <a:avLst/>
+          </a:prstGeom>
+          <a:noFill/>
+        </p:spPr>
+        <p:txBody>
+          <a:bodyPr wrap="square">
+            <a:spAutoFit/>
+          </a:bodyPr>
+          <a:lstStyle/>
+          <a:p>
+            <a:pPr algn="l"/>
+            <a:r>
+              <a:rPr sz="1100" b="0">
+                <a:solidFill>
+                  <a:srgbClr val="9A9A9A"/>
+                </a:solidFill>
+                <a:latin typeface="Arial"/>
+                <a:ea typeface="Microsoft YaHei"/>
+              </a:rPr>
+              <a:t>ClawHunt Builder Camp 2026 · Track C: Business on AI</a:t>
+            </a:r>
+          </a:p>
+        </p:txBody>
+      </p:sp>
     </p:spTree>
   </p:cSld>
   <p:clrMapOvr>
@@ -4623,7 +3609,7 @@
                 <a:latin typeface="Arial"/>
                 <a:ea typeface="Microsoft YaHei"/>
               </a:rPr>
-              <a:t>业务要数据，总要等</a:t>
+              <a:t>业务问题越来越快，报表流程仍然很慢</a:t>
             </a:r>
           </a:p>
         </p:txBody>
@@ -4663,7 +3649,7 @@
                 <a:latin typeface="Arial"/>
                 <a:ea typeface="Microsoft YaHei"/>
               </a:rPr>
-              <a:t>  —  运营问"华东上个月卖了多少" → 找分析师排队</a:t>
+              <a:t>  —  运营问"Sudeste 的 Black Friday 峰值能否复用" → 等排期</a:t>
             </a:r>
           </a:p>
           <a:p>
@@ -4680,7 +3666,7 @@
                 <a:latin typeface="Arial"/>
                 <a:ea typeface="Microsoft YaHei"/>
               </a:rPr>
-              <a:t>  —  市场问"哪个品类增长最快" → 排期等报表</a:t>
+              <a:t>  —  市场问"哪类商品拉动新客" → 临时取数</a:t>
             </a:r>
           </a:p>
           <a:p>
@@ -4697,7 +3683,7 @@
                 <a:latin typeface="Arial"/>
                 <a:ea typeface="Microsoft YaHei"/>
               </a:rPr>
-              <a:t>  —  老板问"为什么这个月下滑" → 加急再加急</a:t>
+              <a:t>  —  老板问"本月下滑是区域、品类还是支付问题" → 加急</a:t>
             </a:r>
           </a:p>
           <a:p>
@@ -4714,7 +3700,7 @@
                 <a:latin typeface="Arial"/>
                 <a:ea typeface="Microsoft YaHei"/>
               </a:rPr>
-              <a:t>  —  同一个指标，不同部门问 10 遍，改 10 遍</a:t>
+              <a:t>  —  同一指标在不同团队反复解释，口径容易漂移</a:t>
             </a:r>
           </a:p>
         </p:txBody>
@@ -4750,7 +3736,7 @@
                 <a:latin typeface="Arial"/>
                 <a:ea typeface="Microsoft YaHei"/>
               </a:rPr>
-              <a:t>数据分析师每周 60% 时间在重复拉数，真正有价值的深度分析被挤占</a:t>
+              <a:t>现代 BI 的核心不是更多图表，而是让决策问题及时进入可信数据流程</a:t>
             </a:r>
           </a:p>
         </p:txBody>
@@ -4786,7 +3772,7 @@
                 <a:latin typeface="Arial"/>
                 <a:ea typeface="Microsoft YaHei"/>
               </a:rPr>
-              <a:t>痛点：不是没有数据，是数据到不了需要的人手里</a:t>
+              <a:t>痛点：业务侧需要速度，数据侧必须保留口径、权限和审计边界</a:t>
             </a:r>
           </a:p>
         </p:txBody>
@@ -4848,7 +3834,7 @@
                 <a:latin typeface="Arial"/>
                 <a:ea typeface="Microsoft YaHei"/>
               </a:rPr>
-              <a:t>分析师定义一次，业务自助使用</a:t>
+              <a:t>把分析师经验做成可复用语义层</a:t>
             </a:r>
           </a:p>
         </p:txBody>
@@ -4884,7 +3870,7 @@
                 <a:latin typeface="Arial"/>
                 <a:ea typeface="Microsoft YaHei"/>
               </a:rPr>
-              <a:t>核心机制：分析师把领域知识沉淀为可复用的指标资产</a:t>
+              <a:t>Managed self-service BI：核心口径受控，业务侧灵活追问</a:t>
             </a:r>
           </a:p>
         </p:txBody>
@@ -4924,7 +3910,7 @@
                 <a:latin typeface="Arial"/>
                 <a:ea typeface="Microsoft YaHei"/>
               </a:rPr>
-              <a:t>  —  分析师定义数据口径和指标（一次性工作）</a:t>
+              <a:t>  —  分析师维护指标口径、Join 关系和查询边界</a:t>
             </a:r>
           </a:p>
           <a:p>
@@ -4941,7 +3927,7 @@
                 <a:latin typeface="Arial"/>
                 <a:ea typeface="Microsoft YaHei"/>
               </a:rPr>
-              <a:t>  —  业务人员用自然语言提问，像和同事说话一样</a:t>
+              <a:t>  —  业务人员用自然语言发起问题，不需要写 SQL</a:t>
             </a:r>
           </a:p>
           <a:p>
@@ -4958,7 +3944,7 @@
                 <a:latin typeface="Arial"/>
                 <a:ea typeface="Microsoft YaHei"/>
               </a:rPr>
-              <a:t>  —  系统理解意图、匹配指标、查询数据、生成图表</a:t>
+              <a:t>  —  系统匹配语义层、执行查询、返回图表和解释</a:t>
             </a:r>
           </a:p>
           <a:p>
@@ -4975,7 +3961,7 @@
                 <a:latin typeface="Arial"/>
                 <a:ea typeface="Microsoft YaHei"/>
               </a:rPr>
-              <a:t>  —  指标可保存、可复用，口径全公司统一</a:t>
+              <a:t>  —  同一指标被复用，减少口径漂移和重复沟通</a:t>
             </a:r>
           </a:p>
         </p:txBody>
@@ -5011,7 +3997,7 @@
                 <a:latin typeface="Arial"/>
                 <a:ea typeface="Microsoft YaHei"/>
               </a:rPr>
-              <a:t>从"提需求等三天"到"自己问自己看" · 不是每次重新理解，而是一次定义永久可用</a:t>
+              <a:t>从临时报表交付，变成受治理的自助式分析</a:t>
             </a:r>
           </a:p>
         </p:txBody>
@@ -5073,7 +4059,7 @@
                 <a:latin typeface="Arial"/>
                 <a:ea typeface="Microsoft YaHei"/>
               </a:rPr>
-              <a:t>从提问到决策，一个流程走完</a:t>
+              <a:t>从静态报表到追问式分析</a:t>
             </a:r>
           </a:p>
         </p:txBody>
@@ -5152,7 +4138,7 @@
                 <a:latin typeface="Arial"/>
                 <a:ea typeface="Microsoft YaHei"/>
               </a:rPr>
-              <a:t>取数 + 可视化</a:t>
+              <a:t>描述发生了什么</a:t>
             </a:r>
           </a:p>
         </p:txBody>
@@ -5188,9 +4174,9 @@
                 <a:latin typeface="Arial"/>
                 <a:ea typeface="Microsoft YaHei"/>
               </a:rPr>
-              <a:t>"各地区本月销售额是多少"
-自动生成图表，一键切换维度
-支持柱状图、折线图、饼图、面积图</a:t>
+              <a:t>"各地区本月营收是多少"
+生成图表和明细
+按区域、品类、支付方式切换</a:t>
             </a:r>
           </a:p>
         </p:txBody>
@@ -5269,7 +4255,7 @@
                 <a:latin typeface="Arial"/>
                 <a:ea typeface="Microsoft YaHei"/>
               </a:rPr>
-              <a:t>归因 + 建议</a:t>
+              <a:t>解释为什么变化</a:t>
             </a:r>
           </a:p>
         </p:txBody>
@@ -5305,9 +4291,9 @@
                 <a:latin typeface="Arial"/>
                 <a:ea typeface="Microsoft YaHei"/>
               </a:rPr>
-              <a:t>"为什么东区下降了" → 自动找原因
-基于数据趋势给出下一步行动
-库存调整、营销策略、成本控制</a:t>
+              <a:t>"为什么 Sudeste 冲高后回落"
+比较时间、地区、品类、支付
+输出可验证的业务假设</a:t>
             </a:r>
           </a:p>
         </p:txBody>
@@ -5386,7 +4372,7 @@
                 <a:latin typeface="Arial"/>
                 <a:ea typeface="Microsoft YaHei"/>
               </a:rPr>
-              <a:t>智能纠错</a:t>
+              <a:t>验证查询可靠性</a:t>
             </a:r>
           </a:p>
         </p:txBody>
@@ -5422,9 +4408,9 @@
                 <a:latin typeface="Arial"/>
                 <a:ea typeface="Microsoft YaHei"/>
               </a:rPr>
-              <a:t>查询出错时自动诊断原因
-修正查询并重试，用户看到完整过程
-不会被错误卡住，不需要手动调试</a:t>
+              <a:t>SQL 先过 AST 安全校验
+只读执行，失败自动修正
+让错误暴露在流程里</a:t>
             </a:r>
           </a:p>
         </p:txBody>
@@ -5503,7 +4489,7 @@
                 <a:latin typeface="Arial"/>
                 <a:ea typeface="Microsoft YaHei"/>
               </a:rPr>
-              <a:t>分析师预设指标库</a:t>
+              <a:t>沉淀指标资产</a:t>
             </a:r>
           </a:p>
         </p:txBody>
@@ -5539,9 +4525,9 @@
                 <a:latin typeface="Arial"/>
                 <a:ea typeface="Microsoft YaHei"/>
               </a:rPr>
-              <a:t>分析师预先定义常用指标
-业务人员一键选择即可查询
-确保全公司使用统一的指标定义</a:t>
+              <a:t>常用问题变成指标库
+业务复用同一语义层
+形成 single version of truth</a:t>
             </a:r>
           </a:p>
         </p:txBody>
@@ -5603,7 +4589,7 @@
                 <a:latin typeface="Arial"/>
                 <a:ea typeface="Microsoft YaHei"/>
               </a:rPr>
-              <a:t>在真实数据上验证 — Olist 巴西电商平台</a:t>
+              <a:t>Demo case：Olist 巴西电商真实数据</a:t>
             </a:r>
           </a:p>
         </p:txBody>
@@ -6027,7 +5013,7 @@
                 <a:latin typeface="Arial"/>
                 <a:ea typeface="Microsoft YaHei"/>
               </a:rPr>
-              <a:t>三层架构：从 Demo 到企业级产品</a:t>
+              <a:t>Agent 的位置：把业务问题变成可治理查询</a:t>
             </a:r>
           </a:p>
         </p:txBody>
@@ -6106,7 +5092,7 @@
                 <a:latin typeface="Arial"/>
                 <a:ea typeface="Microsoft YaHei"/>
               </a:rPr>
-              <a:t>受控语义层</a:t>
+              <a:t>统一语义层</a:t>
             </a:r>
           </a:p>
         </p:txBody>
@@ -6143,9 +5129,9 @@
                 <a:ea typeface="Microsoft YaHei"/>
               </a:rPr>
               <a:t>业务语言 → 指标定义 → SQL
-不靠 LLM 猜表名
+不靠 LLM 临时猜表名
 分析师定义一次，全公司复用
-防止口径不一致</a:t>
+避免每次重新解释口径</a:t>
             </a:r>
           </a:p>
         </p:txBody>
@@ -6260,10 +5246,10 @@
                 <a:latin typeface="Arial"/>
                 <a:ea typeface="Microsoft YaHei"/>
               </a:rPr>
-              <a:t>生成 SQL → AST 验证 → 只读执行
-→ 结果分析 → 可视化
+              <a:t>理解问题 → 生成 SQL → AST 验证
+只读执行 → 读结果 → 可视化
 自纠正：出错自动修正重试
-Kimi 是推理层，不是权威</a:t>
+把取数变成可交互分析</a:t>
             </a:r>
           </a:p>
         </p:txBody>
@@ -6342,7 +5328,7 @@
                 <a:latin typeface="Arial"/>
                 <a:ea typeface="Microsoft YaHei"/>
               </a:rPr>
-              <a:t>企业数据平面</a:t>
+              <a:t>执行与治理边界</a:t>
             </a:r>
           </a:p>
         </p:txBody>
@@ -6417,7 +5403,7 @@
                 <a:latin typeface="Arial"/>
                 <a:ea typeface="Microsoft YaHei"/>
               </a:rPr>
-              <a:t>LLM 不是安全边界 · 策略引擎和执行层才是</a:t>
+              <a:t>必要性：业务问题需要解释、验证和追问；单纯 SQL 生成无法承担治理责任</a:t>
             </a:r>
           </a:p>
         </p:txBody>
@@ -6721,7 +5707,7 @@
                 <a:latin typeface="Arial"/>
                 <a:ea typeface="Microsoft YaHei"/>
               </a:rPr>
-              <a:t>从 Hackathon 到产品的路径</a:t>
+              <a:t>商业化路径：受治理的自助分析</a:t>
             </a:r>
           </a:p>
         </p:txBody>
@@ -7154,7 +6140,7 @@
                 <a:latin typeface="Arial"/>
                 <a:ea typeface="Microsoft YaHei"/>
               </a:rPr>
-              <a:t>核心指标</a:t>
+              <a:t>商业模型</a:t>
             </a:r>
           </a:p>
         </p:txBody>
@@ -7190,9 +6176,9 @@
                 <a:latin typeface="Arial"/>
                 <a:ea typeface="Microsoft YaHei"/>
               </a:rPr>
-              <a:t>每查询成本 ~$0.003（Kimi K2.7）
-单次查询延迟 2-5 秒
-从 Demo 到 MVP：1 周
+              <a:t>目标客户：数据团队、运营、市场
+付费点：席位、查询量、私有部署
+价值指标：请求周转时间、口径复用率
 从 MVP 到企业版：3 个月</a:t>
             </a:r>
           </a:p>
@@ -7255,7 +6241,7 @@
                 <a:latin typeface="Arial"/>
                 <a:ea typeface="Microsoft YaHei"/>
               </a:rPr>
-              <a:t>一个产品，两方受益</a:t>
+              <a:t>商业价值：自助速度 + 治理可信</a:t>
             </a:r>
           </a:p>
         </p:txBody>
@@ -7334,7 +6320,7 @@
                 <a:latin typeface="Arial"/>
                 <a:ea typeface="Microsoft YaHei"/>
               </a:rPr>
-              <a:t>数据分析师</a:t>
+              <a:t>数据团队</a:t>
             </a:r>
           </a:p>
         </p:txBody>
@@ -7370,10 +6356,10 @@
                 <a:latin typeface="Arial"/>
                 <a:ea typeface="Microsoft YaHei"/>
               </a:rPr>
-              <a:t>减少 80% 重复取数工作
-专注于指标定义和数据治理
-从"拉数的"变成"定标准的"
-有时间做真正有价值的深度分析</a:t>
+              <a:t>减少重复取数和口径解释
+把精力放在语义层与治理
+统一指标资产，降低审计成本
+保留权限、血缘和执行边界</a:t>
             </a:r>
           </a:p>
         </p:txBody>
@@ -7488,10 +6474,10 @@
                 <a:latin typeface="Arial"/>
                 <a:ea typeface="Microsoft YaHei"/>
               </a:rPr>
-              <a:t>随时提问，不用排队等排期
-自己看数据，自己做决策
-从"等报表"到"看数据"
-一个需求从 3 天缩短到 10 秒</a:t>
+              <a:t>不用排队等临时报表
+围绕同一数据连续追问
+在销售、投放、品类上更快试错
+从看结果转向做决策</a:t>
             </a:r>
           </a:p>
         </p:txBody>
@@ -7527,7 +6513,7 @@
                 <a:latin typeface="Arial"/>
                 <a:ea typeface="Microsoft YaHei"/>
               </a:rPr>
-              <a:t>分析师被解放，业务被赋能</a:t>
+              <a:t>不是替代分析师，而是把分析师定义的标准放进业务日常决策</a:t>
             </a:r>
           </a:p>
         </p:txBody>
@@ -7858,324 +6844,4 @@
   </a:objectDefaults>
   <a:extraClrSchemeLst/>
 </a:theme>
-</file>
-
-<file path=ppt/theme/theme2.xml><?xml version="1.0" encoding="utf-8"?>
-<a:theme xmlns:a="http://schemas.openxmlformats.org/drawingml/2006/main" name="Office Theme">
-  <a:themeElements>
-    <a:clrScheme name="Office">
-      <a:dk1>
-        <a:sysClr val="windowText" lastClr="000000"/>
-      </a:dk1>
-      <a:lt1>
-        <a:sysClr val="window" lastClr="FFFFFF"/>
-      </a:lt1>
-      <a:dk2>
-        <a:srgbClr val="1F497D"/>
-      </a:dk2>
-      <a:lt2>
-        <a:srgbClr val="EEECE1"/>
-      </a:lt2>
-      <a:accent1>
-        <a:srgbClr val="4F81BD"/>
-      </a:accent1>
-      <a:accent2>
-        <a:srgbClr val="C0504D"/>
-      </a:accent2>
-      <a:accent3>
-        <a:srgbClr val="9BBB59"/>
-      </a:accent3>
-      <a:accent4>
-        <a:srgbClr val="8064A2"/>
-      </a:accent4>
-      <a:accent5>
-        <a:srgbClr val="4BACC6"/>
-      </a:accent5>
-      <a:accent6>
-        <a:srgbClr val="F79646"/>
-      </a:accent6>
-      <a:hlink>
-        <a:srgbClr val="0000FF"/>
-      </a:hlink>
-      <a:folHlink>
-        <a:srgbClr val="800080"/>
-      </a:folHlink>
-    </a:clrScheme>
-    <a:fontScheme name="Office">
-      <a:majorFont>
-        <a:latin typeface="Calibri"/>
-        <a:ea typeface=""/>
-        <a:cs typeface=""/>
-        <a:font script="Jpan" typeface="ＭＳ Ｐゴシック"/>
-        <a:font script="Hang" typeface="맑은 고딕"/>
-        <a:font script="Hans" typeface="宋体"/>
-        <a:font script="Hant" typeface="新細明體"/>
-        <a:font script="Arab" typeface="Times New Roman"/>
-        <a:font script="Hebr" typeface="Times New Roman"/>
-        <a:font script="Thai" typeface="Angsana New"/>
-        <a:font script="Ethi" typeface="Nyala"/>
-        <a:font script="Beng" typeface="Vrinda"/>
-        <a:font script="Gujr" typeface="Shruti"/>
-        <a:font script="Khmr" typeface="MoolBoran"/>
-        <a:font script="Knda" typeface="Tunga"/>
-        <a:font script="Guru" typeface="Raavi"/>
-        <a:font script="Cans" typeface="Euphemia"/>
-        <a:font script="Cher" typeface="Plantagenet Cherokee"/>
-        <a:font script="Yiii" typeface="Microsoft Yi Baiti"/>
-        <a:font script="Tibt" typeface="Microsoft Himalaya"/>
-        <a:font script="Thaa" typeface="MV Boli"/>
-        <a:font script="Deva" typeface="Mangal"/>
-        <a:font script="Telu" typeface="Gautami"/>
-        <a:font script="Taml" typeface="Latha"/>
-        <a:font script="Syrc" typeface="Estrangelo Edessa"/>
-        <a:font script="Orya" typeface="Kalinga"/>
-        <a:font script="Mlym" typeface="Kartika"/>
-        <a:font script="Laoo" typeface="DokChampa"/>
-        <a:font script="Sinh" typeface="Iskoola Pota"/>
-        <a:font script="Mong" typeface="Mongolian Baiti"/>
-        <a:font script="Viet" typeface="Times New Roman"/>
-        <a:font script="Uigh" typeface="Microsoft Uighur"/>
-        <a:font script="Geor" typeface="Sylfaen"/>
-      </a:majorFont>
-      <a:minorFont>
-        <a:latin typeface="Calibri"/>
-        <a:ea typeface=""/>
-        <a:cs typeface=""/>
-        <a:font script="Jpan" typeface="ＭＳ Ｐゴシック"/>
-        <a:font script="Hang" typeface="맑은 고딕"/>
-        <a:font script="Hans" typeface="宋体"/>
-        <a:font script="Hant" typeface="新細明體"/>
-        <a:font script="Arab" typeface="Arial"/>
-        <a:font script="Hebr" typeface="Arial"/>
-        <a:font script="Thai" typeface="Cordia New"/>
-        <a:font script="Ethi" typeface="Nyala"/>
-        <a:font script="Beng" typeface="Vrinda"/>
-        <a:font script="Gujr" typeface="Shruti"/>
-        <a:font script="Khmr" typeface="DaunPenh"/>
-        <a:font script="Knda" typeface="Tunga"/>
-        <a:font script="Guru" typeface="Raavi"/>
-        <a:font script="Cans" typeface="Euphemia"/>
-        <a:font script="Cher" typeface="Plantagenet Cherokee"/>
-        <a:font script="Yiii" typeface="Microsoft Yi Baiti"/>
-        <a:font script="Tibt" typeface="Microsoft Himalaya"/>
-        <a:font script="Thaa" typeface="MV Boli"/>
-        <a:font script="Deva" typeface="Mangal"/>
-        <a:font script="Telu" typeface="Gautami"/>
-        <a:font script="Taml" typeface="Latha"/>
-        <a:font script="Syrc" typeface="Estrangelo Edessa"/>
-        <a:font script="Orya" typeface="Kalinga"/>
-        <a:font script="Mlym" typeface="Kartika"/>
-        <a:font script="Laoo" typeface="DokChampa"/>
-        <a:font script="Sinh" typeface="Iskoola Pota"/>
-        <a:font script="Mong" typeface="Mongolian Baiti"/>
-        <a:font script="Viet" typeface="Arial"/>
-        <a:font script="Uigh" typeface="Microsoft Uighur"/>
-        <a:font script="Geor" typeface="Sylfaen"/>
-      </a:minorFont>
-    </a:fontScheme>
-    <a:fmtScheme name="Office">
-      <a:fillStyleLst>
-        <a:solidFill>
-          <a:schemeClr val="phClr"/>
-        </a:solidFill>
-        <a:gradFill rotWithShape="1">
-          <a:gsLst>
-            <a:gs pos="0">
-              <a:schemeClr val="phClr">
-                <a:tint val="50000"/>
-                <a:satMod val="300000"/>
-              </a:schemeClr>
-            </a:gs>
-            <a:gs pos="35000">
-              <a:schemeClr val="phClr">
-                <a:tint val="37000"/>
-                <a:satMod val="300000"/>
-              </a:schemeClr>
-            </a:gs>
-            <a:gs pos="100000">
-              <a:schemeClr val="phClr">
-                <a:tint val="15000"/>
-                <a:satMod val="350000"/>
-              </a:schemeClr>
-            </a:gs>
-          </a:gsLst>
-          <a:lin ang="16200000" scaled="1"/>
-        </a:gradFill>
-        <a:gradFill rotWithShape="1">
-          <a:gsLst>
-            <a:gs pos="0">
-              <a:schemeClr val="phClr">
-                <a:tint val="100000"/>
-                <a:shade val="100000"/>
-                <a:satMod val="130000"/>
-              </a:schemeClr>
-            </a:gs>
-            <a:gs pos="100000">
-              <a:schemeClr val="phClr">
-                <a:tint val="50000"/>
-                <a:shade val="100000"/>
-                <a:satMod val="350000"/>
-              </a:schemeClr>
-            </a:gs>
-          </a:gsLst>
-          <a:lin ang="16200000" scaled="0"/>
-        </a:gradFill>
-      </a:fillStyleLst>
-      <a:lnStyleLst>
-        <a:ln w="9525" cap="flat" cmpd="sng" algn="ctr">
-          <a:solidFill>
-            <a:schemeClr val="phClr">
-              <a:shade val="95000"/>
-              <a:satMod val="105000"/>
-            </a:schemeClr>
-          </a:solidFill>
-          <a:prstDash val="solid"/>
-        </a:ln>
-        <a:ln w="25400" cap="flat" cmpd="sng" algn="ctr">
-          <a:solidFill>
-            <a:schemeClr val="phClr"/>
-          </a:solidFill>
-          <a:prstDash val="solid"/>
-        </a:ln>
-        <a:ln w="38100" cap="flat" cmpd="sng" algn="ctr">
-          <a:solidFill>
-            <a:schemeClr val="phClr"/>
-          </a:solidFill>
-          <a:prstDash val="solid"/>
-        </a:ln>
-      </a:lnStyleLst>
-      <a:effectStyleLst>
-        <a:effectStyle>
-          <a:effectLst>
-            <a:outerShdw blurRad="40000" dist="20000" dir="5400000" rotWithShape="0">
-              <a:srgbClr val="000000">
-                <a:alpha val="38000"/>
-              </a:srgbClr>
-            </a:outerShdw>
-          </a:effectLst>
-        </a:effectStyle>
-        <a:effectStyle>
-          <a:effectLst>
-            <a:outerShdw blurRad="40000" dist="23000" dir="5400000" rotWithShape="0">
-              <a:srgbClr val="000000">
-                <a:alpha val="35000"/>
-              </a:srgbClr>
-            </a:outerShdw>
-          </a:effectLst>
-        </a:effectStyle>
-        <a:effectStyle>
-          <a:effectLst>
-            <a:outerShdw blurRad="40000" dist="23000" dir="5400000" rotWithShape="0">
-              <a:srgbClr val="000000">
-                <a:alpha val="35000"/>
-              </a:srgbClr>
-            </a:outerShdw>
-          </a:effectLst>
-          <a:scene3d>
-            <a:camera prst="orthographicFront">
-              <a:rot lat="0" lon="0" rev="0"/>
-            </a:camera>
-            <a:lightRig rig="threePt" dir="t">
-              <a:rot lat="0" lon="0" rev="1200000"/>
-            </a:lightRig>
-          </a:scene3d>
-          <a:sp3d>
-            <a:bevelT w="63500" h="25400"/>
-          </a:sp3d>
-        </a:effectStyle>
-      </a:effectStyleLst>
-      <a:bgFillStyleLst>
-        <a:solidFill>
-          <a:schemeClr val="phClr"/>
-        </a:solidFill>
-        <a:gradFill rotWithShape="1">
-          <a:gsLst>
-            <a:gs pos="0">
-              <a:schemeClr val="phClr">
-                <a:tint val="40000"/>
-                <a:satMod val="350000"/>
-              </a:schemeClr>
-            </a:gs>
-            <a:gs pos="40000">
-              <a:schemeClr val="phClr">
-                <a:tint val="45000"/>
-                <a:shade val="99000"/>
-                <a:satMod val="350000"/>
-              </a:schemeClr>
-            </a:gs>
-            <a:gs pos="100000">
-              <a:schemeClr val="phClr">
-                <a:shade val="20000"/>
-                <a:satMod val="255000"/>
-              </a:schemeClr>
-            </a:gs>
-          </a:gsLst>
-          <a:path path="circle">
-            <a:fillToRect l="50000" t="-80000" r="50000" b="180000"/>
-          </a:path>
-        </a:gradFill>
-        <a:gradFill rotWithShape="1">
-          <a:gsLst>
-            <a:gs pos="0">
-              <a:schemeClr val="phClr">
-                <a:tint val="80000"/>
-                <a:satMod val="300000"/>
-              </a:schemeClr>
-            </a:gs>
-            <a:gs pos="100000">
-              <a:schemeClr val="phClr">
-                <a:shade val="30000"/>
-                <a:satMod val="200000"/>
-              </a:schemeClr>
-            </a:gs>
-          </a:gsLst>
-          <a:path path="circle">
-            <a:fillToRect l="50000" t="50000" r="50000" b="50000"/>
-          </a:path>
-        </a:gradFill>
-      </a:bgFillStyleLst>
-    </a:fmtScheme>
-  </a:themeElements>
-  <a:objectDefaults>
-    <a:spDef>
-      <a:spPr/>
-      <a:bodyPr/>
-      <a:lstStyle/>
-      <a:style>
-        <a:lnRef idx="1">
-          <a:schemeClr val="accent1"/>
-        </a:lnRef>
-        <a:fillRef idx="3">
-          <a:schemeClr val="accent1"/>
-        </a:fillRef>
-        <a:effectRef idx="2">
-          <a:schemeClr val="accent1"/>
-        </a:effectRef>
-        <a:fontRef idx="minor">
-          <a:schemeClr val="lt1"/>
-        </a:fontRef>
-      </a:style>
-    </a:spDef>
-    <a:lnDef>
-      <a:spPr/>
-      <a:bodyPr/>
-      <a:lstStyle/>
-      <a:style>
-        <a:lnRef idx="2">
-          <a:schemeClr val="accent1"/>
-        </a:lnRef>
-        <a:fillRef idx="0">
-          <a:schemeClr val="accent1"/>
-        </a:fillRef>
-        <a:effectRef idx="1">
-          <a:schemeClr val="accent1"/>
-        </a:effectRef>
-        <a:fontRef idx="minor">
-          <a:schemeClr val="tx1"/>
-        </a:fontRef>
-      </a:style>
-    </a:lnDef>
-  </a:objectDefaults>
-  <a:extraClrSchemeLst/>
-</a:theme>
 </file>
--- a/assets/QueryForge-Pitch.pptx
+++ b/assets/QueryForge-Pitch.pptx
@@ -3172,7 +3172,7 @@
                 <a:latin typeface="Arial"/>
                 <a:ea typeface="Microsoft YaHei"/>
               </a:rPr>
-              <a:t>受治理的自助式商业分析层</a:t>
+              <a:t>让电商经营者获得专业数据分析能力</a:t>
             </a:r>
           </a:p>
         </p:txBody>
@@ -3244,7 +3244,7 @@
                 <a:latin typeface="Arial"/>
                 <a:ea typeface="Microsoft YaHei"/>
               </a:rPr>
-              <a:t>通用商业分析工具 · Olist 作为本次 demo case</a:t>
+              <a:t>面向跨境电商小团队的 local-first macOS 分析工作台</a:t>
             </a:r>
           </a:p>
         </p:txBody>
@@ -3378,8 +3378,8 @@
                 <a:latin typeface="Arial"/>
                 <a:ea typeface="Microsoft YaHei"/>
               </a:rPr>
-              <a:t>受治理的自助式商业分析层
-核心口径由分析师定义，业务问题由 Agent 转成可信查询</a:t>
+              <a:t>让电商经营者获得专业数据分析能力
+把订单、品类、渠道和复购问题变成可信查询</a:t>
             </a:r>
           </a:p>
         </p:txBody>
@@ -3415,7 +3415,7 @@
                 <a:latin typeface="Arial"/>
                 <a:ea typeface="Microsoft YaHei"/>
               </a:rPr>
-              <a:t>queryforge-production-8d6f.up.railway.app</a:t>
+              <a:t>https://queryforge-production-8d6f.up.railway.app/</a:t>
             </a:r>
           </a:p>
         </p:txBody>
@@ -3511,7 +3511,7 @@
                 <a:latin typeface="Arial"/>
                 <a:ea typeface="Microsoft YaHei"/>
               </a:rPr>
-              <a:t>手机扫码体验</a:t>
+              <a:t>扫码体验 public demo</a:t>
             </a:r>
           </a:p>
         </p:txBody>
@@ -3609,7 +3609,7 @@
                 <a:latin typeface="Arial"/>
                 <a:ea typeface="Microsoft YaHei"/>
               </a:rPr>
-              <a:t>业务问题越来越快，报表流程仍然很慢</a:t>
+              <a:t>小卖家也需要专业分析，但没有数据团队</a:t>
             </a:r>
           </a:p>
         </p:txBody>
@@ -3649,7 +3649,7 @@
                 <a:latin typeface="Arial"/>
                 <a:ea typeface="Microsoft YaHei"/>
               </a:rPr>
-              <a:t>  —  运营问"Sudeste 的 Black Friday 峰值能否复用" → 等排期</a:t>
+              <a:t>  —  店主问"哪个市场、品类和支付方式在拉动增长" → 手工导表</a:t>
             </a:r>
           </a:p>
           <a:p>
@@ -3666,7 +3666,7 @@
                 <a:latin typeface="Arial"/>
                 <a:ea typeface="Microsoft YaHei"/>
               </a:rPr>
-              <a:t>  —  市场问"哪类商品拉动新客" → 临时取数</a:t>
+              <a:t>  —  运营问"哪个商品值得继续投放" → 临时筛选订单</a:t>
             </a:r>
           </a:p>
           <a:p>
@@ -3683,7 +3683,7 @@
                 <a:latin typeface="Arial"/>
                 <a:ea typeface="Microsoft YaHei"/>
               </a:rPr>
-              <a:t>  —  老板问"本月下滑是区域、品类还是支付问题" → 加急</a:t>
+              <a:t>  —  老板问"本月下滑是品类、物流还是渠道问题" → 靠经验判断</a:t>
             </a:r>
           </a:p>
           <a:p>
@@ -3700,7 +3700,7 @@
                 <a:latin typeface="Arial"/>
                 <a:ea typeface="Microsoft YaHei"/>
               </a:rPr>
-              <a:t>  —  同一指标在不同团队反复解释，口径容易漂移</a:t>
+              <a:t>  —  广交会卖家、Amazon/marketplace 卖家和外贸 SOHO 通常不会采购 BI</a:t>
             </a:r>
           </a:p>
         </p:txBody>
@@ -3736,7 +3736,7 @@
                 <a:latin typeface="Arial"/>
                 <a:ea typeface="Microsoft YaHei"/>
               </a:rPr>
-              <a:t>现代 BI 的核心不是更多图表，而是让决策问题及时进入可信数据流程</a:t>
+              <a:t>真正的痛点不是没有数据，而是经营者缺少把订单数据变成判断的工具</a:t>
             </a:r>
           </a:p>
         </p:txBody>
@@ -3772,7 +3772,7 @@
                 <a:latin typeface="Arial"/>
                 <a:ea typeface="Microsoft YaHei"/>
               </a:rPr>
-              <a:t>痛点：业务侧需要速度，数据侧必须保留口径、权限和审计边界</a:t>
+              <a:t>痛点：跨境电商小团队需要专业分析能力，但预算、时间和技术门槛都很低</a:t>
             </a:r>
           </a:p>
         </p:txBody>
@@ -3834,7 +3834,7 @@
                 <a:latin typeface="Arial"/>
                 <a:ea typeface="Microsoft YaHei"/>
               </a:rPr>
-              <a:t>把分析师经验做成可复用语义层</a:t>
+              <a:t>把电商分析流程做成本地工作台</a:t>
             </a:r>
           </a:p>
         </p:txBody>
@@ -3870,7 +3870,7 @@
                 <a:latin typeface="Arial"/>
                 <a:ea typeface="Microsoft YaHei"/>
               </a:rPr>
-              <a:t>Managed self-service BI：核心口径受控，业务侧灵活追问</a:t>
+              <a:t>自然语言提问 → 受控 SQL → 图表 → 经营建议</a:t>
             </a:r>
           </a:p>
         </p:txBody>
@@ -3910,7 +3910,7 @@
                 <a:latin typeface="Arial"/>
                 <a:ea typeface="Microsoft YaHei"/>
               </a:rPr>
-              <a:t>  —  分析师维护指标口径、Join 关系和查询边界</a:t>
+              <a:t>  —  经营者直接问订单、品类、市场、渠道和复购问题</a:t>
             </a:r>
           </a:p>
           <a:p>
@@ -3927,7 +3927,7 @@
                 <a:latin typeface="Arial"/>
                 <a:ea typeface="Microsoft YaHei"/>
               </a:rPr>
-              <a:t>  —  业务人员用自然语言发起问题，不需要写 SQL</a:t>
+              <a:t>  —  系统生成 SQL、执行只读查询，并返回图表和解释</a:t>
             </a:r>
           </a:p>
           <a:p>
@@ -3944,7 +3944,7 @@
                 <a:latin typeface="Arial"/>
                 <a:ea typeface="Microsoft YaHei"/>
               </a:rPr>
-              <a:t>  —  系统匹配语义层、执行查询、返回图表和解释</a:t>
+              <a:t>  —  常用问题沉淀为指标，不需要每次从零分析</a:t>
             </a:r>
           </a:p>
           <a:p>
@@ -3961,7 +3961,7 @@
                 <a:latin typeface="Arial"/>
                 <a:ea typeface="Microsoft YaHei"/>
               </a:rPr>
-              <a:t>  —  同一指标被复用，减少口径漂移和重复沟通</a:t>
+              <a:t>  —  桌面 macOS app 是真实产品，数据连接与 API key 留在本机</a:t>
             </a:r>
           </a:p>
         </p:txBody>
@@ -3997,7 +3997,7 @@
                 <a:latin typeface="Arial"/>
                 <a:ea typeface="Microsoft YaHei"/>
               </a:rPr>
-              <a:t>从临时报表交付，变成受治理的自助式分析</a:t>
+              <a:t>不是做大型 BI，而是把专业分析能力降到小卖家也能使用的成本</a:t>
             </a:r>
           </a:p>
         </p:txBody>
@@ -4174,9 +4174,9 @@
                 <a:latin typeface="Arial"/>
                 <a:ea typeface="Microsoft YaHei"/>
               </a:rPr>
-              <a:t>"各地区本月营收是多少"
+              <a:t>"各市场本月营收是多少"
 生成图表和明细
-按区域、品类、支付方式切换</a:t>
+按市场、品类、支付方式切换</a:t>
             </a:r>
           </a:p>
         </p:txBody>
@@ -4291,8 +4291,8 @@
                 <a:latin typeface="Arial"/>
                 <a:ea typeface="Microsoft YaHei"/>
               </a:rPr>
-              <a:t>"为什么 Sudeste 冲高后回落"
-比较时间、地区、品类、支付
+              <a:t>"为什么某个市场冲高后回落"
+比较时间、市场、品类、支付
 输出可验证的业务假设</a:t>
             </a:r>
           </a:p>
@@ -4489,7 +4489,7 @@
                 <a:latin typeface="Arial"/>
                 <a:ea typeface="Microsoft YaHei"/>
               </a:rPr>
-              <a:t>沉淀指标资产</a:t>
+              <a:t>沉淀经营指标</a:t>
             </a:r>
           </a:p>
         </p:txBody>
@@ -4526,8 +4526,8 @@
                 <a:ea typeface="Microsoft YaHei"/>
               </a:rPr>
               <a:t>常用问题变成指标库
-业务复用同一语义层
-形成 single version of truth</a:t>
+复用同一套查询口径
+形成可追问的经营记录</a:t>
             </a:r>
           </a:p>
         </p:txBody>
@@ -4589,7 +4589,7 @@
                 <a:latin typeface="Arial"/>
                 <a:ea typeface="Microsoft YaHei"/>
               </a:rPr>
-              <a:t>Demo case：Olist 巴西电商真实数据</a:t>
+              <a:t>公开 demo：Olist 巴西电商真实数据</a:t>
             </a:r>
           </a:p>
         </p:txBody>
@@ -4898,7 +4898,7 @@
                 <a:latin typeface="Arial"/>
                 <a:ea typeface="Microsoft YaHei"/>
               </a:rPr>
-              <a:t>  —  覆盖巴西5大地区，2016-2018年完整时间序列</a:t>
+              <a:t>  —  覆盖巴西公开交易样本，2016-2018年完整时间序列</a:t>
             </a:r>
           </a:p>
           <a:p>
@@ -4951,7 +4951,7 @@
                 <a:latin typeface="Arial"/>
                 <a:ea typeface="Microsoft YaHei"/>
               </a:rPr>
-              <a:t>Olist Brazilian E-Commerce Public Dataset · Kaggle 最受欢迎电商数据集之一</a:t>
+              <a:t>Railway / iPhone QR 是 polished public demo；完整产品是本地 macOS app</a:t>
             </a:r>
           </a:p>
         </p:txBody>
@@ -5013,7 +5013,7 @@
                 <a:latin typeface="Arial"/>
                 <a:ea typeface="Microsoft YaHei"/>
               </a:rPr>
-              <a:t>Agent 的位置：把业务问题变成可治理查询</a:t>
+              <a:t>桌面产品：把经营问题变成可信查询</a:t>
             </a:r>
           </a:p>
         </p:txBody>
@@ -5092,7 +5092,7 @@
                 <a:latin typeface="Arial"/>
                 <a:ea typeface="Microsoft YaHei"/>
               </a:rPr>
-              <a:t>统一语义层</a:t>
+              <a:t>电商指标层</a:t>
             </a:r>
           </a:p>
         </p:txBody>
@@ -5128,10 +5128,10 @@
                 <a:latin typeface="Arial"/>
                 <a:ea typeface="Microsoft YaHei"/>
               </a:rPr>
-              <a:t>业务语言 → 指标定义 → SQL
+              <a:t>经营语言 → 指标定义 → SQL
 不靠 LLM 临时猜表名
-分析师定义一次，全公司复用
-避免每次重新解释口径</a:t>
+订单、品类、渠道口径可复用
+避免每次重新解释数据</a:t>
             </a:r>
           </a:p>
         </p:txBody>
@@ -5328,7 +5328,7 @@
                 <a:latin typeface="Arial"/>
                 <a:ea typeface="Microsoft YaHei"/>
               </a:rPr>
-              <a:t>执行与治理边界</a:t>
+              <a:t>本地执行边界</a:t>
             </a:r>
           </a:p>
         </p:txBody>
@@ -5364,10 +5364,10 @@
                 <a:latin typeface="Arial"/>
                 <a:ea typeface="Microsoft YaHei"/>
               </a:rPr>
-              <a:t>Schema-only 模型暴露
-只读数据库连接
+              <a:t>本地 DB + 只读连接
+OpenAI-compatible endpoint/model/key
 AST 级 SQL 安全校验
-审计日志 + RBAC 路线图</a:t>
+token budget 留在本机</a:t>
             </a:r>
           </a:p>
         </p:txBody>
@@ -5403,7 +5403,7 @@
                 <a:latin typeface="Arial"/>
                 <a:ea typeface="Microsoft YaHei"/>
               </a:rPr>
-              <a:t>必要性：业务问题需要解释、验证和追问；单纯 SQL 生成无法承担治理责任</a:t>
+              <a:t>必要性：经营问题需要解释、验证和追问；单纯 SQL 生成无法承担分析责任</a:t>
             </a:r>
           </a:p>
         </p:txBody>
@@ -5465,7 +5465,7 @@
                 <a:latin typeface="Arial"/>
                 <a:ea typeface="Microsoft YaHei"/>
               </a:rPr>
-              <a:t>数据合规设计 — 企业买家最关心的问题</a:t>
+              <a:t>数据边界设计 — 本地工具也要可信</a:t>
             </a:r>
           </a:p>
         </p:txBody>
@@ -5505,7 +5505,7 @@
                 <a:latin typeface="Arial"/>
                 <a:ea typeface="Microsoft YaHei"/>
               </a:rPr>
-              <a:t>  —  Schema-only 模型暴露：LLM 只看到表名和列名，永远不接触原始数据</a:t>
+              <a:t>  —  默认暴露 schema；只把回答当前问题所需的查询结果交给模型解释</a:t>
             </a:r>
           </a:p>
           <a:p>
@@ -5573,7 +5573,7 @@
                 <a:latin typeface="Arial"/>
                 <a:ea typeface="Microsoft YaHei"/>
               </a:rPr>
-              <a:t>  —  生产路线图：行级安全（RLS）、PII 脱敏、审计日志、SSO/SAML</a:t>
+              <a:t>  —  OpenAI-compatible endpoint、model、API key、token budget 和数据连接都留在使用者本机</a:t>
             </a:r>
           </a:p>
         </p:txBody>
@@ -5609,7 +5609,7 @@
                 <a:latin typeface="Arial"/>
                 <a:ea typeface="Microsoft YaHei"/>
               </a:rPr>
-              <a:t>同样的架构模式：Snowflake Cortex、Databricks AI/BI 都采用'Schema-only + 只读执行'方案</a:t>
+              <a:t>关键不是替代模型，而是把外部模型 provider 接入受控数据、指标和执行边界</a:t>
             </a:r>
           </a:p>
         </p:txBody>
@@ -5707,7 +5707,7 @@
                 <a:latin typeface="Arial"/>
                 <a:ea typeface="Microsoft YaHei"/>
               </a:rPr>
-              <a:t>商业化路径：受治理的自助分析</a:t>
+              <a:t>商业化路径：广交会场景下的买断制工具</a:t>
             </a:r>
           </a:p>
         </p:txBody>
@@ -5786,7 +5786,7 @@
                 <a:latin typeface="Arial"/>
                 <a:ea typeface="Microsoft YaHei"/>
               </a:rPr>
-              <a:t>Phase 1: 可售 MVP（1-2周）</a:t>
+              <a:t>获客场景</a:t>
             </a:r>
           </a:p>
         </p:txBody>
@@ -5822,10 +5822,10 @@
                 <a:latin typeface="Arial"/>
                 <a:ea typeface="Microsoft YaHei"/>
               </a:rPr>
-              <a:t>SQLite → PostgreSQL 迁移
-NextAuth.js 用户认证
-语义层：指标定义 + Join 图
-审计日志 + 基础 RBAC</a:t>
+              <a:t>广交会周边地推 + 卖家社群投放
+亚马逊卖家、小工贸公司和外贸 SOHO
+现场扫码演示，几分钟看懂价值
+巴西 Olist 数据正好是海外市场样例</a:t>
             </a:r>
           </a:p>
         </p:txBody>
@@ -5904,7 +5904,7 @@
                 <a:latin typeface="Arial"/>
                 <a:ea typeface="Microsoft YaHei"/>
               </a:rPr>
-              <a:t>Phase 2: 企业试用（1-2月）</a:t>
+              <a:t>付费方式</a:t>
             </a:r>
           </a:p>
         </p:txBody>
@@ -5940,10 +5940,10 @@
                 <a:latin typeface="Arial"/>
                 <a:ea typeface="Microsoft YaHei"/>
               </a:rPr>
-              <a:t>SSO/SAML 集成
-行级安全 + PII 脱敏
-多数据源：PostgreSQL/BigQuery
-查询成本控制 + 取消机制</a:t>
+              <a:t>App Store / 官网一次买断
+建议首发价：¥128-168
+低于一次咨询或报表外包成本
+用户自带模型 API key，token 自付</a:t>
             </a:r>
           </a:p>
         </p:txBody>
@@ -6022,7 +6022,7 @@
                 <a:latin typeface="Arial"/>
                 <a:ea typeface="Microsoft YaHei"/>
               </a:rPr>
-              <a:t>Phase 3: 规模化（3-6月）</a:t>
+              <a:t>产品形态</a:t>
             </a:r>
           </a:p>
         </p:txBody>
@@ -6058,10 +6058,10 @@
                 <a:latin typeface="Arial"/>
                 <a:ea typeface="Microsoft YaHei"/>
               </a:rPr>
-              <a:t>Snowflake/Redshift/ClickHouse
-dbt 语义层集成
-指标认证 + 谱系追踪
-VPC 部署 + BYOM</a:t>
+              <a:t>个人开发者发布的 macOS 桌面工具
+员工在自己电脑里安装和运行
+Olist 是内置 demo case
+真实使用时连接本机可访问数据</a:t>
             </a:r>
           </a:p>
         </p:txBody>
@@ -6140,7 +6140,7 @@
                 <a:latin typeface="Arial"/>
                 <a:ea typeface="Microsoft YaHei"/>
               </a:rPr>
-              <a:t>商业模型</a:t>
+              <a:t>开发者机会</a:t>
             </a:r>
           </a:p>
         </p:txBody>
@@ -6176,10 +6176,10 @@
                 <a:latin typeface="Arial"/>
                 <a:ea typeface="Microsoft YaHei"/>
               </a:rPr>
-              <a:t>目标客户：数据团队、运营、市场
-付费点：席位、查询量、私有部署
-价值指标：请求周转时间、口径复用率
-从 MVP 到企业版：3 个月</a:t>
+              <a:t>卖点不是模型本身，而是电商分析流程
+无需后期云运维，边际成本低
+低决策成本，适合冲动购买
+用小额工具费换回高频时间成本</a:t>
             </a:r>
           </a:p>
         </p:txBody>
@@ -6241,7 +6241,7 @@
                 <a:latin typeface="Arial"/>
                 <a:ea typeface="Microsoft YaHei"/>
               </a:rPr>
-              <a:t>商业价值：自助速度 + 治理可信</a:t>
+              <a:t>商业价值：让小卖家也能问经营数据</a:t>
             </a:r>
           </a:p>
         </p:txBody>
@@ -6320,7 +6320,7 @@
                 <a:latin typeface="Arial"/>
                 <a:ea typeface="Microsoft YaHei"/>
               </a:rPr>
-              <a:t>数据团队</a:t>
+              <a:t>跨境电商小团队</a:t>
             </a:r>
           </a:p>
         </p:txBody>
@@ -6356,10 +6356,10 @@
                 <a:latin typeface="Arial"/>
                 <a:ea typeface="Microsoft YaHei"/>
               </a:rPr>
-              <a:t>减少重复取数和口径解释
-把精力放在语义层与治理
-统一指标资产，降低审计成本
-保留权限、血缘和执行边界</a:t>
+              <a:t>不用先搭 BI 或雇专职分析师
+围绕订单、品类、渠道连续追问
+快速判断海外市场和选品机会
+把常用问题沉淀成可复用指标</a:t>
             </a:r>
           </a:p>
         </p:txBody>
@@ -6438,7 +6438,7 @@
                 <a:latin typeface="Arial"/>
                 <a:ea typeface="Microsoft YaHei"/>
               </a:rPr>
-              <a:t>业务团队</a:t>
+              <a:t>个人开发者</a:t>
             </a:r>
           </a:p>
         </p:txBody>
@@ -6474,10 +6474,10 @@
                 <a:latin typeface="Arial"/>
                 <a:ea typeface="Microsoft YaHei"/>
               </a:rPr>
-              <a:t>不用排队等临时报表
-围绕同一数据连续追问
-在销售、投放、品类上更快试错
-从看结果转向做决策</a:t>
+              <a:t>不出售模型能力，只出售好用流程
+用户自带 provider key，成本边界清楚
+买断制降低试用门槛
+广交会等线下场景便于直接触达用户</a:t>
             </a:r>
           </a:p>
         </p:txBody>
@@ -6513,7 +6513,7 @@
                 <a:latin typeface="Arial"/>
                 <a:ea typeface="Microsoft YaHei"/>
               </a:rPr>
-              <a:t>不是替代分析师，而是把分析师定义的标准放进业务日常决策</a:t>
+              <a:t>Olist 巴西电商数据用于公开 demo；真实价值是把小卖家已有经营数据变成可追问的分析工作台</a:t>
             </a:r>
           </a:p>
         </p:txBody>

--- a/assets/QueryForge-Pitch.pptx
+++ b/assets/QueryForge-Pitch.pptx
@@ -3244,7 +3244,7 @@
                 <a:latin typeface="Arial"/>
                 <a:ea typeface="Microsoft YaHei"/>
               </a:rPr>
-              <a:t>面向跨境电商小团队的 local-first macOS 分析工作台</a:t>
+              <a:t>面向跨境电商小团队的本地优先经营工具包 · 首个工具：订单分析 workbench</a:t>
             </a:r>
           </a:p>
         </p:txBody>
@@ -3961,7 +3961,7 @@
                 <a:latin typeface="Arial"/>
                 <a:ea typeface="Microsoft YaHei"/>
               </a:rPr>
-              <a:t>  —  桌面 macOS app 是真实产品，数据连接与 API key 留在本机</a:t>
+              <a:t>  —  当前 demo 是 macOS 本地包；产品形态可扩展到 Windows/macOS 预编译软件包</a:t>
             </a:r>
           </a:p>
         </p:txBody>
@@ -4915,7 +4915,7 @@
                 <a:latin typeface="Arial"/>
                 <a:ea typeface="Microsoft YaHei"/>
               </a:rPr>
-              <a:t>  —  数据包含订单、支付、商品、评价、物流全链路</a:t>
+              <a:t>  —  数据包含订单、支付、商品、客户地区和品类结构</a:t>
             </a:r>
           </a:p>
         </p:txBody>
@@ -4951,7 +4951,7 @@
                 <a:latin typeface="Arial"/>
                 <a:ea typeface="Microsoft YaHei"/>
               </a:rPr>
-              <a:t>Railway / iPhone QR 是 polished public demo；完整产品是本地 macOS app</a:t>
+              <a:t>Railway / iPhone QR 是 polished public demo；完整产品路径是本地桌面软件包</a:t>
             </a:r>
           </a:p>
         </p:txBody>
@@ -5365,7 +5365,7 @@
                 <a:ea typeface="Microsoft YaHei"/>
               </a:rPr>
               <a:t>本地 DB + 只读连接
-OpenAI-compatible endpoint/model/key
+用户自选模型服务与 key
 AST 级 SQL 安全校验
 token budget 留在本机</a:t>
             </a:r>
@@ -5465,21 +5465,64 @@
                 <a:latin typeface="Arial"/>
                 <a:ea typeface="Microsoft YaHei"/>
               </a:rPr>
-              <a:t>数据边界设计 — 本地工具也要可信</a:t>
-            </a:r>
-          </a:p>
-        </p:txBody>
-      </p:sp>
-      <p:sp>
-        <p:nvSpPr>
-          <p:cNvPr id="3" name="TextBox 2"/>
+              <a:t>数据与模型边界 — 本地工具也要可信</a:t>
+            </a:r>
+          </a:p>
+        </p:txBody>
+      </p:sp>
+      <p:sp>
+        <p:nvSpPr>
+          <p:cNvPr id="3" name="Rounded Rectangle 2"/>
+          <p:cNvSpPr/>
+          <p:nvPr/>
+        </p:nvSpPr>
+        <p:spPr>
+          <a:xfrm>
+            <a:off x="914400" y="1600200"/>
+            <a:ext cx="5029200" cy="2011680"/>
+          </a:xfrm>
+          <a:prstGeom prst="roundRect">
+            <a:avLst/>
+          </a:prstGeom>
+          <a:solidFill>
+            <a:srgbClr val="2A2F3E"/>
+          </a:solidFill>
+          <a:ln>
+            <a:noFill/>
+          </a:ln>
+        </p:spPr>
+        <p:style>
+          <a:lnRef idx="1">
+            <a:schemeClr val="accent1"/>
+          </a:lnRef>
+          <a:fillRef idx="3">
+            <a:schemeClr val="accent1"/>
+          </a:fillRef>
+          <a:effectRef idx="2">
+            <a:schemeClr val="accent1"/>
+          </a:effectRef>
+          <a:fontRef idx="minor">
+            <a:schemeClr val="lt1"/>
+          </a:fontRef>
+        </p:style>
+        <p:txBody>
+          <a:bodyPr rtlCol="0" anchor="ctr"/>
+          <a:lstStyle/>
+          <a:p>
+            <a:pPr algn="ctr"/>
+          </a:p>
+        </p:txBody>
+      </p:sp>
+      <p:sp>
+        <p:nvSpPr>
+          <p:cNvPr id="4" name="TextBox 3"/>
           <p:cNvSpPr txBox="1"/>
           <p:nvPr/>
         </p:nvSpPr>
         <p:spPr>
           <a:xfrm>
-            <a:off x="914400" y="1828800"/>
-            <a:ext cx="9144000" cy="2514600"/>
+            <a:off x="1188720" y="1783080"/>
+            <a:ext cx="4480560" cy="365760"/>
           </a:xfrm>
           <a:prstGeom prst="rect">
             <a:avLst/>
@@ -5492,102 +5535,30 @@
           </a:bodyPr>
           <a:lstStyle/>
           <a:p>
-            <a:pPr algn="l">
-              <a:spcAft>
-                <a:spcPts val="1400"/>
-              </a:spcAft>
-            </a:pPr>
-            <a:r>
-              <a:rPr sz="1500">
-                <a:solidFill>
-                  <a:srgbClr val="F0EEE8"/>
-                </a:solidFill>
-                <a:latin typeface="Arial"/>
-                <a:ea typeface="Microsoft YaHei"/>
-              </a:rPr>
-              <a:t>  —  默认暴露 schema；只把回答当前问题所需的查询结果交给模型解释</a:t>
-            </a:r>
-          </a:p>
-          <a:p>
-            <a:pPr algn="l">
-              <a:spcAft>
-                <a:spcPts val="1400"/>
-              </a:spcAft>
-            </a:pPr>
-            <a:r>
-              <a:rPr sz="1500">
-                <a:solidFill>
-                  <a:srgbClr val="F0EEE8"/>
-                </a:solidFill>
-                <a:latin typeface="Arial"/>
-                <a:ea typeface="Microsoft YaHei"/>
-              </a:rPr>
-              <a:t>  —  AST 级 SQL 验证：用 node-sql-parser 解析 SQL 语法树，只允许 SELECT 查询</a:t>
-            </a:r>
-          </a:p>
-          <a:p>
-            <a:pPr algn="l">
-              <a:spcAft>
-                <a:spcPts val="1400"/>
-              </a:spcAft>
-            </a:pPr>
-            <a:r>
-              <a:rPr sz="1500">
-                <a:solidFill>
-                  <a:srgbClr val="F0EEE8"/>
-                </a:solidFill>
-                <a:latin typeface="Arial"/>
-                <a:ea typeface="Microsoft YaHei"/>
-              </a:rPr>
-              <a:t>  —  只读数据库连接：数据库层面配置 readonly 模式，即使代码有漏洞也无法写入</a:t>
-            </a:r>
-          </a:p>
-          <a:p>
-            <a:pPr algn="l">
-              <a:spcAft>
-                <a:spcPts val="1400"/>
-              </a:spcAft>
-            </a:pPr>
-            <a:r>
-              <a:rPr sz="1500">
-                <a:solidFill>
-                  <a:srgbClr val="F0EEE8"/>
-                </a:solidFill>
-                <a:latin typeface="Arial"/>
-                <a:ea typeface="Microsoft YaHei"/>
-              </a:rPr>
-              <a:t>  —  自动 LIMIT 注入：LLM 忘记加 LIMIT 时自动补全，防止全表扫描</a:t>
-            </a:r>
-          </a:p>
-          <a:p>
-            <a:pPr algn="l">
-              <a:spcAft>
-                <a:spcPts val="1400"/>
-              </a:spcAft>
-            </a:pPr>
-            <a:r>
-              <a:rPr sz="1500">
-                <a:solidFill>
-                  <a:srgbClr val="F0EEE8"/>
-                </a:solidFill>
-                <a:latin typeface="Arial"/>
-                <a:ea typeface="Microsoft YaHei"/>
-              </a:rPr>
-              <a:t>  —  OpenAI-compatible endpoint、model、API key、token budget 和数据连接都留在使用者本机</a:t>
-            </a:r>
-          </a:p>
-        </p:txBody>
-      </p:sp>
-      <p:sp>
-        <p:nvSpPr>
-          <p:cNvPr id="4" name="TextBox 3"/>
+            <a:pPr algn="l"/>
+            <a:r>
+              <a:rPr sz="1600" b="1">
+                <a:solidFill>
+                  <a:srgbClr val="D4A853"/>
+                </a:solidFill>
+                <a:latin typeface="Arial"/>
+                <a:ea typeface="Microsoft YaHei"/>
+              </a:rPr>
+              <a:t>数据边界</a:t>
+            </a:r>
+          </a:p>
+        </p:txBody>
+      </p:sp>
+      <p:sp>
+        <p:nvSpPr>
+          <p:cNvPr id="5" name="TextBox 4"/>
           <p:cNvSpPr txBox="1"/>
           <p:nvPr/>
         </p:nvSpPr>
         <p:spPr>
           <a:xfrm>
-            <a:off x="914400" y="4754880"/>
-            <a:ext cx="9144000" cy="457200"/>
+            <a:off x="1188720" y="2240280"/>
+            <a:ext cx="4480560" cy="1097280"/>
           </a:xfrm>
           <a:prstGeom prst="rect">
             <a:avLst/>
@@ -5602,21 +5573,376 @@
           <a:p>
             <a:pPr algn="l"/>
             <a:r>
-              <a:rPr sz="1300" b="0">
+              <a:rPr sz="1400" b="0">
+                <a:solidFill>
+                  <a:srgbClr val="F0EEE8"/>
+                </a:solidFill>
+                <a:latin typeface="Arial"/>
+                <a:ea typeface="Microsoft YaHei"/>
+              </a:rPr>
+              <a:t>默认只暴露 schema
+只把当前问题所需查询结果交给模型解释
+AST 校验只允许 SELECT
+自动 LIMIT，避免全表扫描</a:t>
+            </a:r>
+          </a:p>
+        </p:txBody>
+      </p:sp>
+      <p:sp>
+        <p:nvSpPr>
+          <p:cNvPr id="6" name="Rounded Rectangle 5"/>
+          <p:cNvSpPr/>
+          <p:nvPr/>
+        </p:nvSpPr>
+        <p:spPr>
+          <a:xfrm>
+            <a:off x="6217920" y="1600200"/>
+            <a:ext cx="5029200" cy="2011680"/>
+          </a:xfrm>
+          <a:prstGeom prst="roundRect">
+            <a:avLst/>
+          </a:prstGeom>
+          <a:solidFill>
+            <a:srgbClr val="2A2F3E"/>
+          </a:solidFill>
+          <a:ln>
+            <a:noFill/>
+          </a:ln>
+        </p:spPr>
+        <p:style>
+          <a:lnRef idx="1">
+            <a:schemeClr val="accent1"/>
+          </a:lnRef>
+          <a:fillRef idx="3">
+            <a:schemeClr val="accent1"/>
+          </a:fillRef>
+          <a:effectRef idx="2">
+            <a:schemeClr val="accent1"/>
+          </a:effectRef>
+          <a:fontRef idx="minor">
+            <a:schemeClr val="lt1"/>
+          </a:fontRef>
+        </p:style>
+        <p:txBody>
+          <a:bodyPr rtlCol="0" anchor="ctr"/>
+          <a:lstStyle/>
+          <a:p>
+            <a:pPr algn="ctr"/>
+          </a:p>
+        </p:txBody>
+      </p:sp>
+      <p:sp>
+        <p:nvSpPr>
+          <p:cNvPr id="7" name="TextBox 6"/>
+          <p:cNvSpPr txBox="1"/>
+          <p:nvPr/>
+        </p:nvSpPr>
+        <p:spPr>
+          <a:xfrm>
+            <a:off x="6492240" y="1783080"/>
+            <a:ext cx="4480560" cy="365760"/>
+          </a:xfrm>
+          <a:prstGeom prst="rect">
+            <a:avLst/>
+          </a:prstGeom>
+          <a:noFill/>
+        </p:spPr>
+        <p:txBody>
+          <a:bodyPr wrap="square">
+            <a:spAutoFit/>
+          </a:bodyPr>
+          <a:lstStyle/>
+          <a:p>
+            <a:pPr algn="l"/>
+            <a:r>
+              <a:rPr sz="1600" b="1">
                 <a:solidFill>
                   <a:srgbClr val="D4A853"/>
                 </a:solidFill>
                 <a:latin typeface="Arial"/>
                 <a:ea typeface="Microsoft YaHei"/>
               </a:rPr>
-              <a:t>关键不是替代模型，而是把外部模型 provider 接入受控数据、指标和执行边界</a:t>
-            </a:r>
-          </a:p>
-        </p:txBody>
-      </p:sp>
-      <p:sp>
-        <p:nvSpPr>
-          <p:cNvPr id="5" name="TextBox 4"/>
+              <a:t>BYOK 边界</a:t>
+            </a:r>
+          </a:p>
+        </p:txBody>
+      </p:sp>
+      <p:sp>
+        <p:nvSpPr>
+          <p:cNvPr id="8" name="TextBox 7"/>
+          <p:cNvSpPr txBox="1"/>
+          <p:nvPr/>
+        </p:nvSpPr>
+        <p:spPr>
+          <a:xfrm>
+            <a:off x="6492240" y="2240280"/>
+            <a:ext cx="4480560" cy="1097280"/>
+          </a:xfrm>
+          <a:prstGeom prst="rect">
+            <a:avLst/>
+          </a:prstGeom>
+          <a:noFill/>
+        </p:spPr>
+        <p:txBody>
+          <a:bodyPr wrap="square">
+            <a:spAutoFit/>
+          </a:bodyPr>
+          <a:lstStyle/>
+          <a:p>
+            <a:pPr algn="l"/>
+            <a:r>
+              <a:rPr sz="1400" b="0">
+                <a:solidFill>
+                  <a:srgbClr val="F0EEE8"/>
+                </a:solidFill>
+                <a:latin typeface="Arial"/>
+                <a:ea typeface="Microsoft YaHei"/>
+              </a:rPr>
+              <a:t>用户自带 provider key/token
+QueryForge 不转售模型能力
+公开 QR demo 不收集访客 key
+真实调用只在本地桌面端发生</a:t>
+            </a:r>
+          </a:p>
+        </p:txBody>
+      </p:sp>
+      <p:sp>
+        <p:nvSpPr>
+          <p:cNvPr id="9" name="Rounded Rectangle 8"/>
+          <p:cNvSpPr/>
+          <p:nvPr/>
+        </p:nvSpPr>
+        <p:spPr>
+          <a:xfrm>
+            <a:off x="914400" y="3886200"/>
+            <a:ext cx="5029200" cy="1828800"/>
+          </a:xfrm>
+          <a:prstGeom prst="roundRect">
+            <a:avLst/>
+          </a:prstGeom>
+          <a:solidFill>
+            <a:srgbClr val="2A2F3E"/>
+          </a:solidFill>
+          <a:ln>
+            <a:noFill/>
+          </a:ln>
+        </p:spPr>
+        <p:style>
+          <a:lnRef idx="1">
+            <a:schemeClr val="accent1"/>
+          </a:lnRef>
+          <a:fillRef idx="3">
+            <a:schemeClr val="accent1"/>
+          </a:fillRef>
+          <a:effectRef idx="2">
+            <a:schemeClr val="accent1"/>
+          </a:effectRef>
+          <a:fontRef idx="minor">
+            <a:schemeClr val="lt1"/>
+          </a:fontRef>
+        </p:style>
+        <p:txBody>
+          <a:bodyPr rtlCol="0" anchor="ctr"/>
+          <a:lstStyle/>
+          <a:p>
+            <a:pPr algn="ctr"/>
+          </a:p>
+        </p:txBody>
+      </p:sp>
+      <p:sp>
+        <p:nvSpPr>
+          <p:cNvPr id="10" name="TextBox 9"/>
+          <p:cNvSpPr txBox="1"/>
+          <p:nvPr/>
+        </p:nvSpPr>
+        <p:spPr>
+          <a:xfrm>
+            <a:off x="1188720" y="4069080"/>
+            <a:ext cx="4480560" cy="365760"/>
+          </a:xfrm>
+          <a:prstGeom prst="rect">
+            <a:avLst/>
+          </a:prstGeom>
+          <a:noFill/>
+        </p:spPr>
+        <p:txBody>
+          <a:bodyPr wrap="square">
+            <a:spAutoFit/>
+          </a:bodyPr>
+          <a:lstStyle/>
+          <a:p>
+            <a:pPr algn="l"/>
+            <a:r>
+              <a:rPr sz="1600" b="1">
+                <a:solidFill>
+                  <a:srgbClr val="D4A853"/>
+                </a:solidFill>
+                <a:latin typeface="Arial"/>
+                <a:ea typeface="Microsoft YaHei"/>
+              </a:rPr>
+              <a:t>商用输出依据</a:t>
+            </a:r>
+          </a:p>
+        </p:txBody>
+      </p:sp>
+      <p:sp>
+        <p:nvSpPr>
+          <p:cNvPr id="11" name="TextBox 10"/>
+          <p:cNvSpPr txBox="1"/>
+          <p:nvPr/>
+        </p:nvSpPr>
+        <p:spPr>
+          <a:xfrm>
+            <a:off x="1188720" y="4526280"/>
+            <a:ext cx="4480560" cy="914400"/>
+          </a:xfrm>
+          <a:prstGeom prst="rect">
+            <a:avLst/>
+          </a:prstGeom>
+          <a:noFill/>
+        </p:spPr>
+        <p:txBody>
+          <a:bodyPr wrap="square">
+            <a:spAutoFit/>
+          </a:bodyPr>
+          <a:lstStyle/>
+          <a:p>
+            <a:pPr algn="l"/>
+            <a:r>
+              <a:rPr sz="1400" b="0">
+                <a:solidFill>
+                  <a:srgbClr val="F0EEE8"/>
+                </a:solidFill>
+                <a:latin typeface="Arial"/>
+                <a:ea typeface="Microsoft YaHei"/>
+              </a:rPr>
+              <a:t>OpenAI：用户保留 Input 权利并拥有 Output
+Anthropic：商业条款说明客户保留输出权利
+DeepSeek / Kimi：强调用户对输入、输出和授权负责</a:t>
+            </a:r>
+          </a:p>
+        </p:txBody>
+      </p:sp>
+      <p:sp>
+        <p:nvSpPr>
+          <p:cNvPr id="12" name="Rounded Rectangle 11"/>
+          <p:cNvSpPr/>
+          <p:nvPr/>
+        </p:nvSpPr>
+        <p:spPr>
+          <a:xfrm>
+            <a:off x="6217920" y="3886200"/>
+            <a:ext cx="5029200" cy="1828800"/>
+          </a:xfrm>
+          <a:prstGeom prst="roundRect">
+            <a:avLst/>
+          </a:prstGeom>
+          <a:solidFill>
+            <a:srgbClr val="2A2F3E"/>
+          </a:solidFill>
+          <a:ln>
+            <a:noFill/>
+          </a:ln>
+        </p:spPr>
+        <p:style>
+          <a:lnRef idx="1">
+            <a:schemeClr val="accent1"/>
+          </a:lnRef>
+          <a:fillRef idx="3">
+            <a:schemeClr val="accent1"/>
+          </a:fillRef>
+          <a:effectRef idx="2">
+            <a:schemeClr val="accent1"/>
+          </a:effectRef>
+          <a:fontRef idx="minor">
+            <a:schemeClr val="lt1"/>
+          </a:fontRef>
+        </p:style>
+        <p:txBody>
+          <a:bodyPr rtlCol="0" anchor="ctr"/>
+          <a:lstStyle/>
+          <a:p>
+            <a:pPr algn="ctr"/>
+          </a:p>
+        </p:txBody>
+      </p:sp>
+      <p:sp>
+        <p:nvSpPr>
+          <p:cNvPr id="13" name="TextBox 12"/>
+          <p:cNvSpPr txBox="1"/>
+          <p:nvPr/>
+        </p:nvSpPr>
+        <p:spPr>
+          <a:xfrm>
+            <a:off x="6492240" y="4069080"/>
+            <a:ext cx="4480560" cy="365760"/>
+          </a:xfrm>
+          <a:prstGeom prst="rect">
+            <a:avLst/>
+          </a:prstGeom>
+          <a:noFill/>
+        </p:spPr>
+        <p:txBody>
+          <a:bodyPr wrap="square">
+            <a:spAutoFit/>
+          </a:bodyPr>
+          <a:lstStyle/>
+          <a:p>
+            <a:pPr algn="l"/>
+            <a:r>
+              <a:rPr sz="1600" b="1">
+                <a:solidFill>
+                  <a:srgbClr val="D4A853"/>
+                </a:solidFill>
+                <a:latin typeface="Arial"/>
+                <a:ea typeface="Microsoft YaHei"/>
+              </a:rPr>
+              <a:t>使用者责任</a:t>
+            </a:r>
+          </a:p>
+        </p:txBody>
+      </p:sp>
+      <p:sp>
+        <p:nvSpPr>
+          <p:cNvPr id="14" name="TextBox 13"/>
+          <p:cNvSpPr txBox="1"/>
+          <p:nvPr/>
+        </p:nvSpPr>
+        <p:spPr>
+          <a:xfrm>
+            <a:off x="6492240" y="4526280"/>
+            <a:ext cx="4480560" cy="914400"/>
+          </a:xfrm>
+          <a:prstGeom prst="rect">
+            <a:avLst/>
+          </a:prstGeom>
+          <a:noFill/>
+        </p:spPr>
+        <p:txBody>
+          <a:bodyPr wrap="square">
+            <a:spAutoFit/>
+          </a:bodyPr>
+          <a:lstStyle/>
+          <a:p>
+            <a:pPr algn="l"/>
+            <a:r>
+              <a:rPr sz="1400" b="0">
+                <a:solidFill>
+                  <a:srgbClr val="F0EEE8"/>
+                </a:solidFill>
+                <a:latin typeface="Arial"/>
+                <a:ea typeface="Microsoft YaHei"/>
+              </a:rPr>
+              <a:t>老板分析自己的经营数据通常边界清楚
+个人信息、平台限制字段、第三方素材和商业秘密仍需确认权利
+输出建议不是法律/财务意见</a:t>
+            </a:r>
+          </a:p>
+        </p:txBody>
+      </p:sp>
+      <p:sp>
+        <p:nvSpPr>
+          <p:cNvPr id="15" name="TextBox 14"/>
           <p:cNvSpPr txBox="1"/>
           <p:nvPr/>
         </p:nvSpPr>
@@ -5645,7 +5971,7 @@
                 <a:latin typeface="Arial"/>
                 <a:ea typeface="Microsoft YaHei"/>
               </a:rPr>
-              <a:t>QueryForge 不给 LLM 数据库权限 · AI 生成 SQL，数据库执行查询，策略引擎控制访问</a:t>
+              <a:t>合规叙述：接入用户自己的模型账户和经营数据，不替用户绕过 provider ToS、平台条款或知识产权限制</a:t>
             </a:r>
           </a:p>
         </p:txBody>
@@ -5707,7 +6033,7 @@
                 <a:latin typeface="Arial"/>
                 <a:ea typeface="Microsoft YaHei"/>
               </a:rPr>
-              <a:t>商业化路径：广交会场景下的买断制工具</a:t>
+              <a:t>商业化路径：服务小微电商的软件包</a:t>
             </a:r>
           </a:p>
         </p:txBody>
@@ -5940,7 +6266,7 @@
                 <a:latin typeface="Arial"/>
                 <a:ea typeface="Microsoft YaHei"/>
               </a:rPr>
-              <a:t>App Store / 官网一次买断
+              <a:t>官网/渠道/应用商店售卖闭源预编译包
 建议首发价：¥128-168
 低于一次咨询或报表外包成本
 用户自带模型 API key，token 自付</a:t>
@@ -6058,8 +6384,8 @@
                 <a:latin typeface="Arial"/>
                 <a:ea typeface="Microsoft YaHei"/>
               </a:rPr>
-              <a:t>个人开发者发布的 macOS 桌面工具
-员工在自己电脑里安装和运行
+              <a:t>工具包首个工具：订单经营分析
+当前 demo 为 macOS，本质不限定平台
 Olist 是内置 demo case
 真实使用时连接本机可访问数据</a:t>
             </a:r>
@@ -6513,7 +6839,7 @@
                 <a:latin typeface="Arial"/>
                 <a:ea typeface="Microsoft YaHei"/>
               </a:rPr>
-              <a:t>Olist 巴西电商数据用于公开 demo；真实价值是把小卖家已有经营数据变成可追问的分析工作台</a:t>
+              <a:t>Olist 巴西电商数据用于公开 demo；真实价值是把小卖家已有经营数据变成可追问的工具包</a:t>
             </a:r>
           </a:p>
         </p:txBody>
